--- a/docs/SmartAttendance.pptx
+++ b/docs/SmartAttendance.pptx
@@ -1,42 +1,25 @@
 
 <file path=ppt/presentation.xml><?xml version="1.0" encoding="utf-8"?>
-<p:presentation xmlns:a="http://schemas.openxmlformats.org/drawingml/2006/main" xmlns:r="http://schemas.openxmlformats.org/officeDocument/2006/relationships" xmlns:mc="http://schemas.openxmlformats.org/markup-compatibility/2006" xmlns:mv="urn:schemas-microsoft-com:mac:vml" xmlns:p="http://schemas.openxmlformats.org/presentationml/2006/main" xmlns:c="http://schemas.openxmlformats.org/drawingml/2006/chart" xmlns:dgm="http://schemas.openxmlformats.org/drawingml/2006/diagram" xmlns:o="urn:schemas-microsoft-com:office:office" xmlns:v="urn:schemas-microsoft-com:vml" xmlns:pvml="urn:schemas-microsoft-com:office:powerpoint" xmlns:com="http://schemas.openxmlformats.org/drawingml/2006/compatibility" xmlns:p14="http://schemas.microsoft.com/office/powerpoint/2010/main" xmlns:p15="http://schemas.microsoft.com/office/powerpoint/2012/main" xmlns:ahyp="http://schemas.microsoft.com/office/drawing/2018/hyperlinkcolor" autoCompressPictures="0" embedTrueTypeFonts="1" strictFirstAndLastChars="0" saveSubsetFonts="1">
+<p:presentation xmlns:a="http://schemas.openxmlformats.org/drawingml/2006/main" xmlns:r="http://schemas.openxmlformats.org/officeDocument/2006/relationships" xmlns:p="http://schemas.openxmlformats.org/presentationml/2006/main" xmlns:m="http://schemas.openxmlformats.org/officeDocument/2006/math" xmlns:w="http://schemas.openxmlformats.org/wordprocessingml/2006/main" autoCompressPictures="0" embedTrueTypeFonts="1" saveSubsetFonts="1" strictFirstAndLastChars="0">
   <p:sldMasterIdLst>
-    <p:sldMasterId id="2147483658" r:id="rId4"/>
+    <p:sldMasterId id="2147483648" r:id="rId1"/>
   </p:sldMasterIdLst>
   <p:notesMasterIdLst>
-    <p:notesMasterId r:id="rId5"/>
+    <p:notesMasterId r:id="rId11"/>
   </p:notesMasterIdLst>
   <p:sldIdLst>
-    <p:sldId id="256" r:id="rId6"/>
-    <p:sldId id="257" r:id="rId7"/>
-    <p:sldId id="258" r:id="rId8"/>
-    <p:sldId id="259" r:id="rId9"/>
-    <p:sldId id="260" r:id="rId10"/>
-    <p:sldId id="261" r:id="rId11"/>
+    <p:sldId id="256" r:id="rId4"/>
+    <p:sldId id="257" r:id="rId5"/>
+    <p:sldId id="258" r:id="rId6"/>
+    <p:sldId id="259" r:id="rId7"/>
+    <p:sldId id="260" r:id="rId8"/>
+    <p:sldId id="261" r:id="rId9"/>
+    <p:sldId id="262" r:id="rId10"/>
   </p:sldIdLst>
-  <p:sldSz cy="5143500" cx="9144000"/>
+  <p:sldSz cx="9144000" cy="5143500"/>
   <p:notesSz cx="6858000" cy="9144000"/>
-  <p:embeddedFontLst>
-    <p:embeddedFont>
-      <p:font typeface="Montserrat"/>
-      <p:regular r:id="rId12"/>
-      <p:bold r:id="rId13"/>
-      <p:italic r:id="rId14"/>
-      <p:boldItalic r:id="rId15"/>
-    </p:embeddedFont>
-    <p:embeddedFont>
-      <p:font typeface="Vidaloka"/>
-      <p:regular r:id="rId16"/>
-    </p:embeddedFont>
-    <p:embeddedFont>
-      <p:font typeface="Quattrocento Sans"/>
-      <p:bold r:id="rId17"/>
-      <p:boldItalic r:id="rId18"/>
-    </p:embeddedFont>
-  </p:embeddedFontLst>
   <p:defaultTextStyle>
-    <a:defPPr lvl="0" marR="0" rtl="0" algn="l">
+    <a:defPPr marR="0" lvl="0" algn="l" rtl="0">
       <a:lnSpc>
         <a:spcPct val="100000"/>
       </a:lnSpc>
@@ -47,7 +30,7 @@
         <a:spcPts val="0"/>
       </a:spcAft>
     </a:defPPr>
-    <a:lvl1pPr lvl="0" marR="0" rtl="0" algn="l">
+    <a:lvl1pPr marR="0" lvl="0" algn="l" rtl="0">
       <a:lnSpc>
         <a:spcPct val="100000"/>
       </a:lnSpc>
@@ -61,17 +44,16 @@
         <a:srgbClr val="000000"/>
       </a:buClr>
       <a:buFont typeface="Arial"/>
-      <a:defRPr b="0" i="0" sz="1400" u="none" cap="none" strike="noStrike">
+      <a:defRPr sz="1400" b="0" i="0" u="none" strike="noStrike" cap="none">
         <a:solidFill>
           <a:srgbClr val="000000"/>
         </a:solidFill>
         <a:latin typeface="Arial"/>
         <a:ea typeface="Arial"/>
         <a:cs typeface="Arial"/>
-        <a:sym typeface="Arial"/>
       </a:defRPr>
     </a:lvl1pPr>
-    <a:lvl2pPr lvl="1" marR="0" rtl="0" algn="l">
+    <a:lvl2pPr marR="0" lvl="1" algn="l" rtl="0">
       <a:lnSpc>
         <a:spcPct val="100000"/>
       </a:lnSpc>
@@ -85,17 +67,16 @@
         <a:srgbClr val="000000"/>
       </a:buClr>
       <a:buFont typeface="Arial"/>
-      <a:defRPr b="0" i="0" sz="1400" u="none" cap="none" strike="noStrike">
+      <a:defRPr sz="1400" b="0" i="0" u="none" strike="noStrike" cap="none">
         <a:solidFill>
           <a:srgbClr val="000000"/>
         </a:solidFill>
         <a:latin typeface="Arial"/>
         <a:ea typeface="Arial"/>
         <a:cs typeface="Arial"/>
-        <a:sym typeface="Arial"/>
       </a:defRPr>
     </a:lvl2pPr>
-    <a:lvl3pPr lvl="2" marR="0" rtl="0" algn="l">
+    <a:lvl3pPr marR="0" lvl="2" algn="l" rtl="0">
       <a:lnSpc>
         <a:spcPct val="100000"/>
       </a:lnSpc>
@@ -109,17 +90,16 @@
         <a:srgbClr val="000000"/>
       </a:buClr>
       <a:buFont typeface="Arial"/>
-      <a:defRPr b="0" i="0" sz="1400" u="none" cap="none" strike="noStrike">
+      <a:defRPr sz="1400" b="0" i="0" u="none" strike="noStrike" cap="none">
         <a:solidFill>
           <a:srgbClr val="000000"/>
         </a:solidFill>
         <a:latin typeface="Arial"/>
         <a:ea typeface="Arial"/>
         <a:cs typeface="Arial"/>
-        <a:sym typeface="Arial"/>
       </a:defRPr>
     </a:lvl3pPr>
-    <a:lvl4pPr lvl="3" marR="0" rtl="0" algn="l">
+    <a:lvl4pPr marR="0" lvl="3" algn="l" rtl="0">
       <a:lnSpc>
         <a:spcPct val="100000"/>
       </a:lnSpc>
@@ -133,17 +113,16 @@
         <a:srgbClr val="000000"/>
       </a:buClr>
       <a:buFont typeface="Arial"/>
-      <a:defRPr b="0" i="0" sz="1400" u="none" cap="none" strike="noStrike">
+      <a:defRPr sz="1400" b="0" i="0" u="none" strike="noStrike" cap="none">
         <a:solidFill>
           <a:srgbClr val="000000"/>
         </a:solidFill>
         <a:latin typeface="Arial"/>
         <a:ea typeface="Arial"/>
         <a:cs typeface="Arial"/>
-        <a:sym typeface="Arial"/>
       </a:defRPr>
     </a:lvl4pPr>
-    <a:lvl5pPr lvl="4" marR="0" rtl="0" algn="l">
+    <a:lvl5pPr marR="0" lvl="4" algn="l" rtl="0">
       <a:lnSpc>
         <a:spcPct val="100000"/>
       </a:lnSpc>
@@ -157,17 +136,16 @@
         <a:srgbClr val="000000"/>
       </a:buClr>
       <a:buFont typeface="Arial"/>
-      <a:defRPr b="0" i="0" sz="1400" u="none" cap="none" strike="noStrike">
+      <a:defRPr sz="1400" b="0" i="0" u="none" strike="noStrike" cap="none">
         <a:solidFill>
           <a:srgbClr val="000000"/>
         </a:solidFill>
         <a:latin typeface="Arial"/>
         <a:ea typeface="Arial"/>
         <a:cs typeface="Arial"/>
-        <a:sym typeface="Arial"/>
       </a:defRPr>
     </a:lvl5pPr>
-    <a:lvl6pPr lvl="5" marR="0" rtl="0" algn="l">
+    <a:lvl6pPr marR="0" lvl="5" algn="l" rtl="0">
       <a:lnSpc>
         <a:spcPct val="100000"/>
       </a:lnSpc>
@@ -181,17 +159,16 @@
         <a:srgbClr val="000000"/>
       </a:buClr>
       <a:buFont typeface="Arial"/>
-      <a:defRPr b="0" i="0" sz="1400" u="none" cap="none" strike="noStrike">
+      <a:defRPr sz="1400" b="0" i="0" u="none" strike="noStrike" cap="none">
         <a:solidFill>
           <a:srgbClr val="000000"/>
         </a:solidFill>
         <a:latin typeface="Arial"/>
         <a:ea typeface="Arial"/>
         <a:cs typeface="Arial"/>
-        <a:sym typeface="Arial"/>
       </a:defRPr>
     </a:lvl6pPr>
-    <a:lvl7pPr lvl="6" marR="0" rtl="0" algn="l">
+    <a:lvl7pPr marR="0" lvl="6" algn="l" rtl="0">
       <a:lnSpc>
         <a:spcPct val="100000"/>
       </a:lnSpc>
@@ -205,17 +182,16 @@
         <a:srgbClr val="000000"/>
       </a:buClr>
       <a:buFont typeface="Arial"/>
-      <a:defRPr b="0" i="0" sz="1400" u="none" cap="none" strike="noStrike">
+      <a:defRPr sz="1400" b="0" i="0" u="none" strike="noStrike" cap="none">
         <a:solidFill>
           <a:srgbClr val="000000"/>
         </a:solidFill>
         <a:latin typeface="Arial"/>
         <a:ea typeface="Arial"/>
         <a:cs typeface="Arial"/>
-        <a:sym typeface="Arial"/>
       </a:defRPr>
     </a:lvl7pPr>
-    <a:lvl8pPr lvl="7" marR="0" rtl="0" algn="l">
+    <a:lvl8pPr marR="0" lvl="7" algn="l" rtl="0">
       <a:lnSpc>
         <a:spcPct val="100000"/>
       </a:lnSpc>
@@ -229,17 +205,16 @@
         <a:srgbClr val="000000"/>
       </a:buClr>
       <a:buFont typeface="Arial"/>
-      <a:defRPr b="0" i="0" sz="1400" u="none" cap="none" strike="noStrike">
+      <a:defRPr sz="1400" b="0" i="0" u="none" strike="noStrike" cap="none">
         <a:solidFill>
           <a:srgbClr val="000000"/>
         </a:solidFill>
         <a:latin typeface="Arial"/>
         <a:ea typeface="Arial"/>
         <a:cs typeface="Arial"/>
-        <a:sym typeface="Arial"/>
       </a:defRPr>
     </a:lvl8pPr>
-    <a:lvl9pPr lvl="8" marR="0" rtl="0" algn="l">
+    <a:lvl9pPr marR="0" lvl="8" algn="l" rtl="0">
       <a:lnSpc>
         <a:spcPct val="100000"/>
       </a:lnSpc>
@@ -253,46 +228,29 @@
         <a:srgbClr val="000000"/>
       </a:buClr>
       <a:buFont typeface="Arial"/>
-      <a:defRPr b="0" i="0" sz="1400" u="none" cap="none" strike="noStrike">
+      <a:defRPr sz="1400" b="0" i="0" u="none" strike="noStrike" cap="none">
         <a:solidFill>
           <a:srgbClr val="000000"/>
         </a:solidFill>
         <a:latin typeface="Arial"/>
         <a:ea typeface="Arial"/>
         <a:cs typeface="Arial"/>
-        <a:sym typeface="Arial"/>
       </a:defRPr>
     </a:lvl9pPr>
   </p:defaultTextStyle>
-  <p:extLst>
-    <p:ext uri="{EFAFB233-063F-42B5-8137-9DF3F51BA10A}">
-      <p15:sldGuideLst>
-        <p15:guide id="1" pos="2880">
-          <p15:clr>
-            <a:srgbClr val="000000"/>
-          </p15:clr>
-        </p15:guide>
-        <p15:guide id="2" orient="horz" pos="1620">
-          <p15:clr>
-            <a:srgbClr val="000000"/>
-          </p15:clr>
-        </p15:guide>
-      </p15:sldGuideLst>
-    </p:ext>
-  </p:extLst>
 </p:presentation>
 </file>
 
 <file path=ppt/notesMasters/notesMaster1.xml><?xml version="1.0" encoding="utf-8"?>
-<p:notesMaster xmlns:a="http://schemas.openxmlformats.org/drawingml/2006/main" xmlns:r="http://schemas.openxmlformats.org/officeDocument/2006/relationships" xmlns:mc="http://schemas.openxmlformats.org/markup-compatibility/2006" xmlns:mv="urn:schemas-microsoft-com:mac:vml" xmlns:p="http://schemas.openxmlformats.org/presentationml/2006/main" xmlns:c="http://schemas.openxmlformats.org/drawingml/2006/chart" xmlns:dgm="http://schemas.openxmlformats.org/drawingml/2006/diagram" xmlns:o="urn:schemas-microsoft-com:office:office" xmlns:v="urn:schemas-microsoft-com:vml" xmlns:pvml="urn:schemas-microsoft-com:office:powerpoint" xmlns:com="http://schemas.openxmlformats.org/drawingml/2006/compatibility" xmlns:p14="http://schemas.microsoft.com/office/powerpoint/2010/main" xmlns:p15="http://schemas.microsoft.com/office/powerpoint/2012/main" xmlns:ahyp="http://schemas.microsoft.com/office/drawing/2018/hyperlinkcolor">
-  <p:cSld>
+<p:notesMaster xmlns:a="http://schemas.openxmlformats.org/drawingml/2006/main" xmlns:r="http://schemas.openxmlformats.org/officeDocument/2006/relationships" xmlns:p="http://schemas.openxmlformats.org/presentationml/2006/main">
+  <p:cSld name="">
     <p:spTree>
       <p:nvGrpSpPr>
-        <p:cNvPr id="2" name="Shape 2"/>
+        <p:cNvPr id="1" name=""/>
         <p:cNvGrpSpPr/>
         <p:nvPr/>
       </p:nvGrpSpPr>
-      <p:grpSpPr>
+      <p:grpSpPr bwMode="auto">
         <a:xfrm>
           <a:off x="0" y="0"/>
           <a:ext cx="0" cy="0"/>
@@ -302,21 +260,25 @@
       </p:grpSpPr>
       <p:sp>
         <p:nvSpPr>
-          <p:cNvPr id="3" name="Google Shape;3;n"/>
+          <p:cNvPr id="368803165" name="Google Shape;3;n"/>
           <p:cNvSpPr/>
           <p:nvPr>
-            <p:ph idx="2" type="sldImg"/>
+            <p:ph type="sldImg" idx="2"/>
           </p:nvPr>
         </p:nvSpPr>
-        <p:spPr>
+        <p:spPr bwMode="auto">
           <a:xfrm>
             <a:off x="381300" y="685800"/>
             <a:ext cx="6096075" cy="3429000"/>
           </a:xfrm>
           <a:custGeom>
-            <a:rect b="b" l="l" r="r" t="t"/>
+            <a:avLst/>
+            <a:gdLst/>
+            <a:ahLst/>
+            <a:cxnLst/>
+            <a:rect l="l" t="t" r="r" b="b"/>
             <a:pathLst>
-              <a:path extrusionOk="0" h="120000" w="120000">
+              <a:path w="120000" h="120000" fill="norm" stroke="1" extrusionOk="0">
                 <a:moveTo>
                   <a:pt x="0" y="0"/>
                 </a:moveTo>
@@ -334,26 +296,26 @@
             </a:pathLst>
           </a:custGeom>
           <a:noFill/>
-          <a:ln cap="flat" cmpd="sng" w="9525">
+          <a:ln w="9525" cap="flat" cmpd="sng">
             <a:solidFill>
               <a:srgbClr val="000000"/>
             </a:solidFill>
             <a:prstDash val="solid"/>
             <a:round/>
-            <a:headEnd len="sm" w="sm" type="none"/>
-            <a:tailEnd len="sm" w="sm" type="none"/>
+            <a:headEnd type="none" w="sm" len="sm"/>
+            <a:tailEnd type="none" w="sm" len="sm"/>
           </a:ln>
         </p:spPr>
       </p:sp>
       <p:sp>
         <p:nvSpPr>
-          <p:cNvPr id="4" name="Google Shape;4;n"/>
+          <p:cNvPr id="98040319" name="Google Shape;4;n"/>
           <p:cNvSpPr txBox="1"/>
           <p:nvPr>
-            <p:ph idx="1" type="body"/>
+            <p:ph type="body" idx="1"/>
           </p:nvPr>
         </p:nvSpPr>
-        <p:spPr>
+        <p:spPr bwMode="auto">
           <a:xfrm>
             <a:off x="685800" y="4343400"/>
             <a:ext cx="5486400" cy="4114800"/>
@@ -367,11 +329,11 @@
           </a:ln>
         </p:spPr>
         <p:txBody>
-          <a:bodyPr anchorCtr="0" anchor="t" bIns="91425" lIns="91425" spcFirstLastPara="1" rIns="91425" wrap="square" tIns="91425">
+          <a:bodyPr spcFirstLastPara="1" wrap="square" lIns="91425" tIns="91425" rIns="91425" bIns="91425" anchor="t" anchorCtr="0">
             <a:noAutofit/>
           </a:bodyPr>
           <a:lstStyle>
-            <a:lvl1pPr indent="-298450" lvl="0" marL="457200" marR="0" rtl="0" algn="l">
+            <a:lvl1pPr marL="457200" marR="0" lvl="0" indent="-298450" algn="l" rtl="0">
               <a:lnSpc>
                 <a:spcPct val="100000"/>
               </a:lnSpc>
@@ -387,17 +349,16 @@
               <a:buSzPts val="1100"/>
               <a:buFont typeface="Arial"/>
               <a:buChar char="●"/>
-              <a:defRPr b="0" i="0" sz="1100" u="none" cap="none" strike="noStrike">
+              <a:defRPr sz="1100" b="0" i="0" u="none" strike="noStrike" cap="none">
                 <a:solidFill>
                   <a:srgbClr val="000000"/>
                 </a:solidFill>
                 <a:latin typeface="Arial"/>
                 <a:ea typeface="Arial"/>
                 <a:cs typeface="Arial"/>
-                <a:sym typeface="Arial"/>
               </a:defRPr>
             </a:lvl1pPr>
-            <a:lvl2pPr indent="-298450" lvl="1" marL="914400" marR="0" rtl="0" algn="l">
+            <a:lvl2pPr marL="914400" marR="0" lvl="1" indent="-298450" algn="l" rtl="0">
               <a:lnSpc>
                 <a:spcPct val="100000"/>
               </a:lnSpc>
@@ -413,17 +374,16 @@
               <a:buSzPts val="1100"/>
               <a:buFont typeface="Arial"/>
               <a:buChar char="○"/>
-              <a:defRPr b="0" i="0" sz="1100" u="none" cap="none" strike="noStrike">
+              <a:defRPr sz="1100" b="0" i="0" u="none" strike="noStrike" cap="none">
                 <a:solidFill>
                   <a:srgbClr val="000000"/>
                 </a:solidFill>
                 <a:latin typeface="Arial"/>
                 <a:ea typeface="Arial"/>
                 <a:cs typeface="Arial"/>
-                <a:sym typeface="Arial"/>
               </a:defRPr>
             </a:lvl2pPr>
-            <a:lvl3pPr indent="-298450" lvl="2" marL="1371600" marR="0" rtl="0" algn="l">
+            <a:lvl3pPr marL="1371600" marR="0" lvl="2" indent="-298450" algn="l" rtl="0">
               <a:lnSpc>
                 <a:spcPct val="100000"/>
               </a:lnSpc>
@@ -439,17 +399,16 @@
               <a:buSzPts val="1100"/>
               <a:buFont typeface="Arial"/>
               <a:buChar char="■"/>
-              <a:defRPr b="0" i="0" sz="1100" u="none" cap="none" strike="noStrike">
+              <a:defRPr sz="1100" b="0" i="0" u="none" strike="noStrike" cap="none">
                 <a:solidFill>
                   <a:srgbClr val="000000"/>
                 </a:solidFill>
                 <a:latin typeface="Arial"/>
                 <a:ea typeface="Arial"/>
                 <a:cs typeface="Arial"/>
-                <a:sym typeface="Arial"/>
               </a:defRPr>
             </a:lvl3pPr>
-            <a:lvl4pPr indent="-298450" lvl="3" marL="1828800" marR="0" rtl="0" algn="l">
+            <a:lvl4pPr marL="1828800" marR="0" lvl="3" indent="-298450" algn="l" rtl="0">
               <a:lnSpc>
                 <a:spcPct val="100000"/>
               </a:lnSpc>
@@ -465,17 +424,16 @@
               <a:buSzPts val="1100"/>
               <a:buFont typeface="Arial"/>
               <a:buChar char="●"/>
-              <a:defRPr b="0" i="0" sz="1100" u="none" cap="none" strike="noStrike">
+              <a:defRPr sz="1100" b="0" i="0" u="none" strike="noStrike" cap="none">
                 <a:solidFill>
                   <a:srgbClr val="000000"/>
                 </a:solidFill>
                 <a:latin typeface="Arial"/>
                 <a:ea typeface="Arial"/>
                 <a:cs typeface="Arial"/>
-                <a:sym typeface="Arial"/>
               </a:defRPr>
             </a:lvl4pPr>
-            <a:lvl5pPr indent="-298450" lvl="4" marL="2286000" marR="0" rtl="0" algn="l">
+            <a:lvl5pPr marL="2286000" marR="0" lvl="4" indent="-298450" algn="l" rtl="0">
               <a:lnSpc>
                 <a:spcPct val="100000"/>
               </a:lnSpc>
@@ -491,17 +449,16 @@
               <a:buSzPts val="1100"/>
               <a:buFont typeface="Arial"/>
               <a:buChar char="○"/>
-              <a:defRPr b="0" i="0" sz="1100" u="none" cap="none" strike="noStrike">
+              <a:defRPr sz="1100" b="0" i="0" u="none" strike="noStrike" cap="none">
                 <a:solidFill>
                   <a:srgbClr val="000000"/>
                 </a:solidFill>
                 <a:latin typeface="Arial"/>
                 <a:ea typeface="Arial"/>
                 <a:cs typeface="Arial"/>
-                <a:sym typeface="Arial"/>
               </a:defRPr>
             </a:lvl5pPr>
-            <a:lvl6pPr indent="-298450" lvl="5" marL="2743200" marR="0" rtl="0" algn="l">
+            <a:lvl6pPr marL="2743200" marR="0" lvl="5" indent="-298450" algn="l" rtl="0">
               <a:lnSpc>
                 <a:spcPct val="100000"/>
               </a:lnSpc>
@@ -517,17 +474,16 @@
               <a:buSzPts val="1100"/>
               <a:buFont typeface="Arial"/>
               <a:buChar char="■"/>
-              <a:defRPr b="0" i="0" sz="1100" u="none" cap="none" strike="noStrike">
+              <a:defRPr sz="1100" b="0" i="0" u="none" strike="noStrike" cap="none">
                 <a:solidFill>
                   <a:srgbClr val="000000"/>
                 </a:solidFill>
                 <a:latin typeface="Arial"/>
                 <a:ea typeface="Arial"/>
                 <a:cs typeface="Arial"/>
-                <a:sym typeface="Arial"/>
               </a:defRPr>
             </a:lvl6pPr>
-            <a:lvl7pPr indent="-298450" lvl="6" marL="3200400" marR="0" rtl="0" algn="l">
+            <a:lvl7pPr marL="3200400" marR="0" lvl="6" indent="-298450" algn="l" rtl="0">
               <a:lnSpc>
                 <a:spcPct val="100000"/>
               </a:lnSpc>
@@ -543,17 +499,16 @@
               <a:buSzPts val="1100"/>
               <a:buFont typeface="Arial"/>
               <a:buChar char="●"/>
-              <a:defRPr b="0" i="0" sz="1100" u="none" cap="none" strike="noStrike">
+              <a:defRPr sz="1100" b="0" i="0" u="none" strike="noStrike" cap="none">
                 <a:solidFill>
                   <a:srgbClr val="000000"/>
                 </a:solidFill>
                 <a:latin typeface="Arial"/>
                 <a:ea typeface="Arial"/>
                 <a:cs typeface="Arial"/>
-                <a:sym typeface="Arial"/>
               </a:defRPr>
             </a:lvl7pPr>
-            <a:lvl8pPr indent="-298450" lvl="7" marL="3657600" marR="0" rtl="0" algn="l">
+            <a:lvl8pPr marL="3657600" marR="0" lvl="7" indent="-298450" algn="l" rtl="0">
               <a:lnSpc>
                 <a:spcPct val="100000"/>
               </a:lnSpc>
@@ -569,17 +524,16 @@
               <a:buSzPts val="1100"/>
               <a:buFont typeface="Arial"/>
               <a:buChar char="○"/>
-              <a:defRPr b="0" i="0" sz="1100" u="none" cap="none" strike="noStrike">
+              <a:defRPr sz="1100" b="0" i="0" u="none" strike="noStrike" cap="none">
                 <a:solidFill>
                   <a:srgbClr val="000000"/>
                 </a:solidFill>
                 <a:latin typeface="Arial"/>
                 <a:ea typeface="Arial"/>
                 <a:cs typeface="Arial"/>
-                <a:sym typeface="Arial"/>
               </a:defRPr>
             </a:lvl8pPr>
-            <a:lvl9pPr indent="-298450" lvl="8" marL="4114800" marR="0" rtl="0" algn="l">
+            <a:lvl9pPr marL="4114800" marR="0" lvl="8" indent="-298450" algn="l" rtl="0">
               <a:lnSpc>
                 <a:spcPct val="100000"/>
               </a:lnSpc>
@@ -595,25 +549,29 @@
               <a:buSzPts val="1100"/>
               <a:buFont typeface="Arial"/>
               <a:buChar char="■"/>
-              <a:defRPr b="0" i="0" sz="1100" u="none" cap="none" strike="noStrike">
+              <a:defRPr sz="1100" b="0" i="0" u="none" strike="noStrike" cap="none">
                 <a:solidFill>
                   <a:srgbClr val="000000"/>
                 </a:solidFill>
                 <a:latin typeface="Arial"/>
                 <a:ea typeface="Arial"/>
                 <a:cs typeface="Arial"/>
-                <a:sym typeface="Arial"/>
               </a:defRPr>
             </a:lvl9pPr>
           </a:lstStyle>
-          <a:p/>
+          <a:p>
+            <a:pPr>
+              <a:defRPr/>
+            </a:pPr>
+            <a:endParaRPr/>
+          </a:p>
         </p:txBody>
       </p:sp>
     </p:spTree>
   </p:cSld>
-  <p:clrMap accent1="accent1" accent2="accent2" accent3="accent3" accent4="accent4" accent5="accent5" accent6="accent6" bg1="lt1" bg2="dk2" tx1="dk1" tx2="lt2" folHlink="folHlink" hlink="hlink"/>
+  <p:clrMap bg1="lt1" tx1="dk1" bg2="dk2" tx2="lt2" accent1="accent1" accent2="accent2" accent3="accent3" accent4="accent4" accent5="accent5" accent6="accent6" hlink="hlink" folHlink="folHlink"/>
   <p:notesStyle>
-    <a:defPPr lvl="0" marR="0" rtl="0" algn="l">
+    <a:defPPr marR="0" lvl="0" algn="l" rtl="0">
       <a:lnSpc>
         <a:spcPct val="100000"/>
       </a:lnSpc>
@@ -624,7 +582,7 @@
         <a:spcPts val="0"/>
       </a:spcAft>
     </a:defPPr>
-    <a:lvl1pPr lvl="0" marR="0" rtl="0" algn="l">
+    <a:lvl1pPr marR="0" lvl="0" algn="l" rtl="0">
       <a:lnSpc>
         <a:spcPct val="100000"/>
       </a:lnSpc>
@@ -638,17 +596,16 @@
         <a:srgbClr val="000000"/>
       </a:buClr>
       <a:buFont typeface="Arial"/>
-      <a:defRPr b="0" i="0" sz="1400" u="none" cap="none" strike="noStrike">
+      <a:defRPr sz="1400" b="0" i="0" u="none" strike="noStrike" cap="none">
         <a:solidFill>
           <a:srgbClr val="000000"/>
         </a:solidFill>
         <a:latin typeface="Arial"/>
         <a:ea typeface="Arial"/>
         <a:cs typeface="Arial"/>
-        <a:sym typeface="Arial"/>
       </a:defRPr>
     </a:lvl1pPr>
-    <a:lvl2pPr lvl="1" marR="0" rtl="0" algn="l">
+    <a:lvl2pPr marR="0" lvl="1" algn="l" rtl="0">
       <a:lnSpc>
         <a:spcPct val="100000"/>
       </a:lnSpc>
@@ -662,17 +619,16 @@
         <a:srgbClr val="000000"/>
       </a:buClr>
       <a:buFont typeface="Arial"/>
-      <a:defRPr b="0" i="0" sz="1400" u="none" cap="none" strike="noStrike">
+      <a:defRPr sz="1400" b="0" i="0" u="none" strike="noStrike" cap="none">
         <a:solidFill>
           <a:srgbClr val="000000"/>
         </a:solidFill>
         <a:latin typeface="Arial"/>
         <a:ea typeface="Arial"/>
         <a:cs typeface="Arial"/>
-        <a:sym typeface="Arial"/>
       </a:defRPr>
     </a:lvl2pPr>
-    <a:lvl3pPr lvl="2" marR="0" rtl="0" algn="l">
+    <a:lvl3pPr marR="0" lvl="2" algn="l" rtl="0">
       <a:lnSpc>
         <a:spcPct val="100000"/>
       </a:lnSpc>
@@ -686,17 +642,16 @@
         <a:srgbClr val="000000"/>
       </a:buClr>
       <a:buFont typeface="Arial"/>
-      <a:defRPr b="0" i="0" sz="1400" u="none" cap="none" strike="noStrike">
+      <a:defRPr sz="1400" b="0" i="0" u="none" strike="noStrike" cap="none">
         <a:solidFill>
           <a:srgbClr val="000000"/>
         </a:solidFill>
         <a:latin typeface="Arial"/>
         <a:ea typeface="Arial"/>
         <a:cs typeface="Arial"/>
-        <a:sym typeface="Arial"/>
       </a:defRPr>
     </a:lvl3pPr>
-    <a:lvl4pPr lvl="3" marR="0" rtl="0" algn="l">
+    <a:lvl4pPr marR="0" lvl="3" algn="l" rtl="0">
       <a:lnSpc>
         <a:spcPct val="100000"/>
       </a:lnSpc>
@@ -710,17 +665,16 @@
         <a:srgbClr val="000000"/>
       </a:buClr>
       <a:buFont typeface="Arial"/>
-      <a:defRPr b="0" i="0" sz="1400" u="none" cap="none" strike="noStrike">
+      <a:defRPr sz="1400" b="0" i="0" u="none" strike="noStrike" cap="none">
         <a:solidFill>
           <a:srgbClr val="000000"/>
         </a:solidFill>
         <a:latin typeface="Arial"/>
         <a:ea typeface="Arial"/>
         <a:cs typeface="Arial"/>
-        <a:sym typeface="Arial"/>
       </a:defRPr>
     </a:lvl4pPr>
-    <a:lvl5pPr lvl="4" marR="0" rtl="0" algn="l">
+    <a:lvl5pPr marR="0" lvl="4" algn="l" rtl="0">
       <a:lnSpc>
         <a:spcPct val="100000"/>
       </a:lnSpc>
@@ -734,17 +688,16 @@
         <a:srgbClr val="000000"/>
       </a:buClr>
       <a:buFont typeface="Arial"/>
-      <a:defRPr b="0" i="0" sz="1400" u="none" cap="none" strike="noStrike">
+      <a:defRPr sz="1400" b="0" i="0" u="none" strike="noStrike" cap="none">
         <a:solidFill>
           <a:srgbClr val="000000"/>
         </a:solidFill>
         <a:latin typeface="Arial"/>
         <a:ea typeface="Arial"/>
         <a:cs typeface="Arial"/>
-        <a:sym typeface="Arial"/>
       </a:defRPr>
     </a:lvl5pPr>
-    <a:lvl6pPr lvl="5" marR="0" rtl="0" algn="l">
+    <a:lvl6pPr marR="0" lvl="5" algn="l" rtl="0">
       <a:lnSpc>
         <a:spcPct val="100000"/>
       </a:lnSpc>
@@ -758,17 +711,16 @@
         <a:srgbClr val="000000"/>
       </a:buClr>
       <a:buFont typeface="Arial"/>
-      <a:defRPr b="0" i="0" sz="1400" u="none" cap="none" strike="noStrike">
+      <a:defRPr sz="1400" b="0" i="0" u="none" strike="noStrike" cap="none">
         <a:solidFill>
           <a:srgbClr val="000000"/>
         </a:solidFill>
         <a:latin typeface="Arial"/>
         <a:ea typeface="Arial"/>
         <a:cs typeface="Arial"/>
-        <a:sym typeface="Arial"/>
       </a:defRPr>
     </a:lvl6pPr>
-    <a:lvl7pPr lvl="6" marR="0" rtl="0" algn="l">
+    <a:lvl7pPr marR="0" lvl="6" algn="l" rtl="0">
       <a:lnSpc>
         <a:spcPct val="100000"/>
       </a:lnSpc>
@@ -782,17 +734,16 @@
         <a:srgbClr val="000000"/>
       </a:buClr>
       <a:buFont typeface="Arial"/>
-      <a:defRPr b="0" i="0" sz="1400" u="none" cap="none" strike="noStrike">
+      <a:defRPr sz="1400" b="0" i="0" u="none" strike="noStrike" cap="none">
         <a:solidFill>
           <a:srgbClr val="000000"/>
         </a:solidFill>
         <a:latin typeface="Arial"/>
         <a:ea typeface="Arial"/>
         <a:cs typeface="Arial"/>
-        <a:sym typeface="Arial"/>
       </a:defRPr>
     </a:lvl7pPr>
-    <a:lvl8pPr lvl="7" marR="0" rtl="0" algn="l">
+    <a:lvl8pPr marR="0" lvl="7" algn="l" rtl="0">
       <a:lnSpc>
         <a:spcPct val="100000"/>
       </a:lnSpc>
@@ -806,17 +757,16 @@
         <a:srgbClr val="000000"/>
       </a:buClr>
       <a:buFont typeface="Arial"/>
-      <a:defRPr b="0" i="0" sz="1400" u="none" cap="none" strike="noStrike">
+      <a:defRPr sz="1400" b="0" i="0" u="none" strike="noStrike" cap="none">
         <a:solidFill>
           <a:srgbClr val="000000"/>
         </a:solidFill>
         <a:latin typeface="Arial"/>
         <a:ea typeface="Arial"/>
         <a:cs typeface="Arial"/>
-        <a:sym typeface="Arial"/>
       </a:defRPr>
     </a:lvl8pPr>
-    <a:lvl9pPr lvl="8" marR="0" rtl="0" algn="l">
+    <a:lvl9pPr marR="0" lvl="8" algn="l" rtl="0">
       <a:lnSpc>
         <a:spcPct val="100000"/>
       </a:lnSpc>
@@ -830,14 +780,13 @@
         <a:srgbClr val="000000"/>
       </a:buClr>
       <a:buFont typeface="Arial"/>
-      <a:defRPr b="0" i="0" sz="1400" u="none" cap="none" strike="noStrike">
+      <a:defRPr sz="1400" b="0" i="0" u="none" strike="noStrike" cap="none">
         <a:solidFill>
           <a:srgbClr val="000000"/>
         </a:solidFill>
         <a:latin typeface="Arial"/>
         <a:ea typeface="Arial"/>
         <a:cs typeface="Arial"/>
-        <a:sym typeface="Arial"/>
       </a:defRPr>
     </a:lvl9pPr>
   </p:notesStyle>
@@ -845,15 +794,15 @@
 </file>
 
 <file path=ppt/notesSlides/notesSlide1.xml><?xml version="1.0" encoding="utf-8"?>
-<p:notes xmlns:a="http://schemas.openxmlformats.org/drawingml/2006/main" xmlns:r="http://schemas.openxmlformats.org/officeDocument/2006/relationships" xmlns:mc="http://schemas.openxmlformats.org/markup-compatibility/2006" xmlns:mv="urn:schemas-microsoft-com:mac:vml" xmlns:p="http://schemas.openxmlformats.org/presentationml/2006/main" xmlns:c="http://schemas.openxmlformats.org/drawingml/2006/chart" xmlns:dgm="http://schemas.openxmlformats.org/drawingml/2006/diagram" xmlns:o="urn:schemas-microsoft-com:office:office" xmlns:v="urn:schemas-microsoft-com:vml" xmlns:pvml="urn:schemas-microsoft-com:office:powerpoint" xmlns:com="http://schemas.openxmlformats.org/drawingml/2006/compatibility" xmlns:p14="http://schemas.microsoft.com/office/powerpoint/2010/main" xmlns:p15="http://schemas.microsoft.com/office/powerpoint/2012/main" xmlns:ahyp="http://schemas.microsoft.com/office/drawing/2018/hyperlinkcolor" showMasterPhAnim="0" showMasterSp="0">
-  <p:cSld>
+<p:notes xmlns:a="http://schemas.openxmlformats.org/drawingml/2006/main" xmlns:r="http://schemas.openxmlformats.org/officeDocument/2006/relationships" xmlns:p="http://schemas.openxmlformats.org/presentationml/2006/main" xmlns:m="http://schemas.openxmlformats.org/officeDocument/2006/math" xmlns:w="http://schemas.openxmlformats.org/wordprocessingml/2006/main" showMasterPhAnim="0" showMasterSp="0">
+  <p:cSld name="">
     <p:spTree>
       <p:nvGrpSpPr>
-        <p:cNvPr id="59" name="Shape 59"/>
+        <p:cNvPr id="1" name=""/>
         <p:cNvGrpSpPr/>
         <p:nvPr/>
       </p:nvGrpSpPr>
-      <p:grpSpPr>
+      <p:grpSpPr bwMode="auto">
         <a:xfrm>
           <a:off x="0" y="0"/>
           <a:ext cx="0" cy="0"/>
@@ -863,21 +812,25 @@
       </p:grpSpPr>
       <p:sp>
         <p:nvSpPr>
-          <p:cNvPr id="60" name="Google Shape;60;p1:notes"/>
+          <p:cNvPr id="1398339792" name="Google Shape;60;p1:notes"/>
           <p:cNvSpPr/>
           <p:nvPr>
-            <p:ph idx="2" type="sldImg"/>
+            <p:ph type="sldImg" idx="2"/>
           </p:nvPr>
         </p:nvSpPr>
-        <p:spPr>
+        <p:spPr bwMode="auto">
           <a:xfrm>
             <a:off x="381300" y="685800"/>
             <a:ext cx="6096075" cy="3429000"/>
           </a:xfrm>
           <a:custGeom>
-            <a:rect b="b" l="l" r="r" t="t"/>
+            <a:avLst/>
+            <a:gdLst/>
+            <a:ahLst/>
+            <a:cxnLst/>
+            <a:rect l="l" t="t" r="r" b="b"/>
             <a:pathLst>
-              <a:path extrusionOk="0" h="120000" w="120000">
+              <a:path w="120000" h="120000" fill="norm" stroke="1" extrusionOk="0">
                 <a:moveTo>
                   <a:pt x="0" y="0"/>
                 </a:moveTo>
@@ -895,26 +848,26 @@
             </a:pathLst>
           </a:custGeom>
           <a:noFill/>
-          <a:ln cap="flat" cmpd="sng" w="9525">
+          <a:ln w="9525" cap="flat" cmpd="sng">
             <a:solidFill>
               <a:srgbClr val="000000"/>
             </a:solidFill>
             <a:prstDash val="solid"/>
             <a:round/>
-            <a:headEnd len="sm" w="sm" type="none"/>
-            <a:tailEnd len="sm" w="sm" type="none"/>
+            <a:headEnd type="none" w="sm" len="sm"/>
+            <a:tailEnd type="none" w="sm" len="sm"/>
           </a:ln>
         </p:spPr>
       </p:sp>
       <p:sp>
         <p:nvSpPr>
-          <p:cNvPr id="61" name="Google Shape;61;p1:notes"/>
+          <p:cNvPr id="443498133" name="Google Shape;61;p1:notes"/>
           <p:cNvSpPr txBox="1"/>
           <p:nvPr>
-            <p:ph idx="1" type="body"/>
+            <p:ph type="body" idx="1"/>
           </p:nvPr>
         </p:nvSpPr>
-        <p:spPr>
+        <p:spPr bwMode="auto">
           <a:xfrm>
             <a:off x="685800" y="4343400"/>
             <a:ext cx="5486400" cy="4114800"/>
@@ -928,12 +881,12 @@
           </a:ln>
         </p:spPr>
         <p:txBody>
-          <a:bodyPr anchorCtr="0" anchor="t" bIns="91425" lIns="91425" spcFirstLastPara="1" rIns="91425" wrap="square" tIns="91425">
+          <a:bodyPr spcFirstLastPara="1" wrap="square" lIns="91425" tIns="91425" rIns="91425" bIns="91425" anchor="t" anchorCtr="0">
             <a:noAutofit/>
           </a:bodyPr>
           <a:lstStyle/>
           <a:p>
-            <a:pPr indent="0" lvl="0" marL="0" rtl="0" algn="l">
+            <a:pPr marL="0" lvl="0" indent="0" algn="l" rtl="0">
               <a:lnSpc>
                 <a:spcPct val="100000"/>
               </a:lnSpc>
@@ -945,10 +898,8 @@
               </a:spcAft>
               <a:buSzPts val="1100"/>
               <a:buNone/>
+              <a:defRPr/>
             </a:pPr>
-            <a:r>
-              <a:t/>
-            </a:r>
             <a:endParaRPr/>
           </a:p>
         </p:txBody>
@@ -962,15 +913,15 @@
 </file>
 
 <file path=ppt/notesSlides/notesSlide2.xml><?xml version="1.0" encoding="utf-8"?>
-<p:notes xmlns:a="http://schemas.openxmlformats.org/drawingml/2006/main" xmlns:r="http://schemas.openxmlformats.org/officeDocument/2006/relationships" xmlns:mc="http://schemas.openxmlformats.org/markup-compatibility/2006" xmlns:mv="urn:schemas-microsoft-com:mac:vml" xmlns:p="http://schemas.openxmlformats.org/presentationml/2006/main" xmlns:c="http://schemas.openxmlformats.org/drawingml/2006/chart" xmlns:dgm="http://schemas.openxmlformats.org/drawingml/2006/diagram" xmlns:o="urn:schemas-microsoft-com:office:office" xmlns:v="urn:schemas-microsoft-com:vml" xmlns:pvml="urn:schemas-microsoft-com:office:powerpoint" xmlns:com="http://schemas.openxmlformats.org/drawingml/2006/compatibility" xmlns:p14="http://schemas.microsoft.com/office/powerpoint/2010/main" xmlns:p15="http://schemas.microsoft.com/office/powerpoint/2012/main" xmlns:ahyp="http://schemas.microsoft.com/office/drawing/2018/hyperlinkcolor" showMasterPhAnim="0" showMasterSp="0">
-  <p:cSld>
+<p:notes xmlns:a="http://schemas.openxmlformats.org/drawingml/2006/main" xmlns:r="http://schemas.openxmlformats.org/officeDocument/2006/relationships" xmlns:p="http://schemas.openxmlformats.org/presentationml/2006/main" xmlns:m="http://schemas.openxmlformats.org/officeDocument/2006/math" xmlns:w="http://schemas.openxmlformats.org/wordprocessingml/2006/main" showMasterPhAnim="0" showMasterSp="0">
+  <p:cSld name="">
     <p:spTree>
       <p:nvGrpSpPr>
-        <p:cNvPr id="64" name="Shape 64"/>
+        <p:cNvPr id="1" name=""/>
         <p:cNvGrpSpPr/>
         <p:nvPr/>
       </p:nvGrpSpPr>
-      <p:grpSpPr>
+      <p:grpSpPr bwMode="auto">
         <a:xfrm>
           <a:off x="0" y="0"/>
           <a:ext cx="0" cy="0"/>
@@ -980,21 +931,25 @@
       </p:grpSpPr>
       <p:sp>
         <p:nvSpPr>
-          <p:cNvPr id="65" name="Google Shape;65;p2:notes"/>
+          <p:cNvPr id="545722916" name="Google Shape;65;p2:notes"/>
           <p:cNvSpPr/>
           <p:nvPr>
-            <p:ph idx="2" type="sldImg"/>
+            <p:ph type="sldImg" idx="2"/>
           </p:nvPr>
         </p:nvSpPr>
-        <p:spPr>
+        <p:spPr bwMode="auto">
           <a:xfrm>
             <a:off x="381300" y="685800"/>
             <a:ext cx="6096000" cy="3429000"/>
           </a:xfrm>
           <a:custGeom>
-            <a:rect b="b" l="l" r="r" t="t"/>
+            <a:avLst/>
+            <a:gdLst/>
+            <a:ahLst/>
+            <a:cxnLst/>
+            <a:rect l="l" t="t" r="r" b="b"/>
             <a:pathLst>
-              <a:path extrusionOk="0" h="120000" w="120000">
+              <a:path w="120000" h="120000" fill="norm" stroke="1" extrusionOk="0">
                 <a:moveTo>
                   <a:pt x="0" y="0"/>
                 </a:moveTo>
@@ -1012,26 +967,26 @@
             </a:pathLst>
           </a:custGeom>
           <a:noFill/>
-          <a:ln cap="flat" cmpd="sng" w="9525">
+          <a:ln w="9525" cap="flat" cmpd="sng">
             <a:solidFill>
               <a:srgbClr val="000000"/>
             </a:solidFill>
             <a:prstDash val="solid"/>
             <a:round/>
-            <a:headEnd len="sm" w="sm" type="none"/>
-            <a:tailEnd len="sm" w="sm" type="none"/>
+            <a:headEnd type="none" w="sm" len="sm"/>
+            <a:tailEnd type="none" w="sm" len="sm"/>
           </a:ln>
         </p:spPr>
       </p:sp>
       <p:sp>
         <p:nvSpPr>
-          <p:cNvPr id="66" name="Google Shape;66;p2:notes"/>
+          <p:cNvPr id="1471227713" name="Google Shape;66;p2:notes"/>
           <p:cNvSpPr txBox="1"/>
           <p:nvPr>
-            <p:ph idx="1" type="body"/>
+            <p:ph type="body" idx="1"/>
           </p:nvPr>
         </p:nvSpPr>
-        <p:spPr>
+        <p:spPr bwMode="auto">
           <a:xfrm>
             <a:off x="685800" y="4343400"/>
             <a:ext cx="5486400" cy="4114800"/>
@@ -1045,12 +1000,12 @@
           </a:ln>
         </p:spPr>
         <p:txBody>
-          <a:bodyPr anchorCtr="0" anchor="t" bIns="91425" lIns="91425" spcFirstLastPara="1" rIns="91425" wrap="square" tIns="91425">
+          <a:bodyPr spcFirstLastPara="1" wrap="square" lIns="91425" tIns="91425" rIns="91425" bIns="91425" anchor="t" anchorCtr="0">
             <a:noAutofit/>
           </a:bodyPr>
           <a:lstStyle/>
           <a:p>
-            <a:pPr indent="0" lvl="0" marL="0" rtl="0" algn="l">
+            <a:pPr marL="0" lvl="0" indent="0" algn="l" rtl="0">
               <a:lnSpc>
                 <a:spcPct val="100000"/>
               </a:lnSpc>
@@ -1062,10 +1017,8 @@
               </a:spcAft>
               <a:buSzPts val="1100"/>
               <a:buNone/>
+              <a:defRPr/>
             </a:pPr>
-            <a:r>
-              <a:t/>
-            </a:r>
             <a:endParaRPr/>
           </a:p>
         </p:txBody>
@@ -1079,15 +1032,15 @@
 </file>
 
 <file path=ppt/notesSlides/notesSlide3.xml><?xml version="1.0" encoding="utf-8"?>
-<p:notes xmlns:a="http://schemas.openxmlformats.org/drawingml/2006/main" xmlns:r="http://schemas.openxmlformats.org/officeDocument/2006/relationships" xmlns:mc="http://schemas.openxmlformats.org/markup-compatibility/2006" xmlns:mv="urn:schemas-microsoft-com:mac:vml" xmlns:p="http://schemas.openxmlformats.org/presentationml/2006/main" xmlns:c="http://schemas.openxmlformats.org/drawingml/2006/chart" xmlns:dgm="http://schemas.openxmlformats.org/drawingml/2006/diagram" xmlns:o="urn:schemas-microsoft-com:office:office" xmlns:v="urn:schemas-microsoft-com:vml" xmlns:pvml="urn:schemas-microsoft-com:office:powerpoint" xmlns:com="http://schemas.openxmlformats.org/drawingml/2006/compatibility" xmlns:p14="http://schemas.microsoft.com/office/powerpoint/2010/main" xmlns:p15="http://schemas.microsoft.com/office/powerpoint/2012/main" xmlns:ahyp="http://schemas.microsoft.com/office/drawing/2018/hyperlinkcolor" showMasterPhAnim="0" showMasterSp="0">
-  <p:cSld>
+<p:notes xmlns:a="http://schemas.openxmlformats.org/drawingml/2006/main" xmlns:r="http://schemas.openxmlformats.org/officeDocument/2006/relationships" xmlns:p="http://schemas.openxmlformats.org/presentationml/2006/main" xmlns:m="http://schemas.openxmlformats.org/officeDocument/2006/math" xmlns:w="http://schemas.openxmlformats.org/wordprocessingml/2006/main" showMasterPhAnim="0" showMasterSp="0">
+  <p:cSld name="">
     <p:spTree>
       <p:nvGrpSpPr>
-        <p:cNvPr id="71" name="Shape 71"/>
+        <p:cNvPr id="1" name=""/>
         <p:cNvGrpSpPr/>
         <p:nvPr/>
       </p:nvGrpSpPr>
-      <p:grpSpPr>
+      <p:grpSpPr bwMode="auto">
         <a:xfrm>
           <a:off x="0" y="0"/>
           <a:ext cx="0" cy="0"/>
@@ -1097,21 +1050,25 @@
       </p:grpSpPr>
       <p:sp>
         <p:nvSpPr>
-          <p:cNvPr id="72" name="Google Shape;72;p3:notes"/>
+          <p:cNvPr id="373406637" name="Google Shape;72;p3:notes"/>
           <p:cNvSpPr/>
           <p:nvPr>
-            <p:ph idx="2" type="sldImg"/>
+            <p:ph type="sldImg" idx="2"/>
           </p:nvPr>
         </p:nvSpPr>
-        <p:spPr>
+        <p:spPr bwMode="auto">
           <a:xfrm>
             <a:off x="381300" y="685800"/>
             <a:ext cx="6096000" cy="3429000"/>
           </a:xfrm>
           <a:custGeom>
-            <a:rect b="b" l="l" r="r" t="t"/>
+            <a:avLst/>
+            <a:gdLst/>
+            <a:ahLst/>
+            <a:cxnLst/>
+            <a:rect l="l" t="t" r="r" b="b"/>
             <a:pathLst>
-              <a:path extrusionOk="0" h="120000" w="120000">
+              <a:path w="120000" h="120000" fill="norm" stroke="1" extrusionOk="0">
                 <a:moveTo>
                   <a:pt x="0" y="0"/>
                 </a:moveTo>
@@ -1129,26 +1086,26 @@
             </a:pathLst>
           </a:custGeom>
           <a:noFill/>
-          <a:ln cap="flat" cmpd="sng" w="9525">
+          <a:ln w="9525" cap="flat" cmpd="sng">
             <a:solidFill>
               <a:srgbClr val="000000"/>
             </a:solidFill>
             <a:prstDash val="solid"/>
             <a:round/>
-            <a:headEnd len="sm" w="sm" type="none"/>
-            <a:tailEnd len="sm" w="sm" type="none"/>
+            <a:headEnd type="none" w="sm" len="sm"/>
+            <a:tailEnd type="none" w="sm" len="sm"/>
           </a:ln>
         </p:spPr>
       </p:sp>
       <p:sp>
         <p:nvSpPr>
-          <p:cNvPr id="73" name="Google Shape;73;p3:notes"/>
+          <p:cNvPr id="1958141013" name="Google Shape;73;p3:notes"/>
           <p:cNvSpPr txBox="1"/>
           <p:nvPr>
-            <p:ph idx="1" type="body"/>
+            <p:ph type="body" idx="1"/>
           </p:nvPr>
         </p:nvSpPr>
-        <p:spPr>
+        <p:spPr bwMode="auto">
           <a:xfrm>
             <a:off x="685800" y="4343400"/>
             <a:ext cx="5486400" cy="4114800"/>
@@ -1162,12 +1119,12 @@
           </a:ln>
         </p:spPr>
         <p:txBody>
-          <a:bodyPr anchorCtr="0" anchor="t" bIns="91425" lIns="91425" spcFirstLastPara="1" rIns="91425" wrap="square" tIns="91425">
+          <a:bodyPr spcFirstLastPara="1" wrap="square" lIns="91425" tIns="91425" rIns="91425" bIns="91425" anchor="t" anchorCtr="0">
             <a:noAutofit/>
           </a:bodyPr>
           <a:lstStyle/>
           <a:p>
-            <a:pPr indent="0" lvl="0" marL="0" rtl="0" algn="l">
+            <a:pPr marL="0" lvl="0" indent="0" algn="l" rtl="0">
               <a:lnSpc>
                 <a:spcPct val="100000"/>
               </a:lnSpc>
@@ -1179,10 +1136,8 @@
               </a:spcAft>
               <a:buSzPts val="1100"/>
               <a:buNone/>
+              <a:defRPr/>
             </a:pPr>
-            <a:r>
-              <a:t/>
-            </a:r>
             <a:endParaRPr/>
           </a:p>
         </p:txBody>
@@ -1196,15 +1151,15 @@
 </file>
 
 <file path=ppt/notesSlides/notesSlide4.xml><?xml version="1.0" encoding="utf-8"?>
-<p:notes xmlns:a="http://schemas.openxmlformats.org/drawingml/2006/main" xmlns:r="http://schemas.openxmlformats.org/officeDocument/2006/relationships" xmlns:mc="http://schemas.openxmlformats.org/markup-compatibility/2006" xmlns:mv="urn:schemas-microsoft-com:mac:vml" xmlns:p="http://schemas.openxmlformats.org/presentationml/2006/main" xmlns:c="http://schemas.openxmlformats.org/drawingml/2006/chart" xmlns:dgm="http://schemas.openxmlformats.org/drawingml/2006/diagram" xmlns:o="urn:schemas-microsoft-com:office:office" xmlns:v="urn:schemas-microsoft-com:vml" xmlns:pvml="urn:schemas-microsoft-com:office:powerpoint" xmlns:com="http://schemas.openxmlformats.org/drawingml/2006/compatibility" xmlns:p14="http://schemas.microsoft.com/office/powerpoint/2010/main" xmlns:p15="http://schemas.microsoft.com/office/powerpoint/2012/main" xmlns:ahyp="http://schemas.microsoft.com/office/drawing/2018/hyperlinkcolor" showMasterPhAnim="0" showMasterSp="0">
-  <p:cSld>
+<p:notes xmlns:a="http://schemas.openxmlformats.org/drawingml/2006/main" xmlns:r="http://schemas.openxmlformats.org/officeDocument/2006/relationships" xmlns:p="http://schemas.openxmlformats.org/presentationml/2006/main" xmlns:m="http://schemas.openxmlformats.org/officeDocument/2006/math" xmlns:w="http://schemas.openxmlformats.org/wordprocessingml/2006/main" showMasterPhAnim="0" showMasterSp="0">
+  <p:cSld name="">
     <p:spTree>
       <p:nvGrpSpPr>
-        <p:cNvPr id="78" name="Shape 78"/>
+        <p:cNvPr id="1" name=""/>
         <p:cNvGrpSpPr/>
         <p:nvPr/>
       </p:nvGrpSpPr>
-      <p:grpSpPr>
+      <p:grpSpPr bwMode="auto">
         <a:xfrm>
           <a:off x="0" y="0"/>
           <a:ext cx="0" cy="0"/>
@@ -1214,21 +1169,25 @@
       </p:grpSpPr>
       <p:sp>
         <p:nvSpPr>
-          <p:cNvPr id="79" name="Google Shape;79;p4:notes"/>
+          <p:cNvPr id="1614406841" name="Google Shape;79;p4:notes"/>
           <p:cNvSpPr/>
           <p:nvPr>
-            <p:ph idx="2" type="sldImg"/>
+            <p:ph type="sldImg" idx="2"/>
           </p:nvPr>
         </p:nvSpPr>
-        <p:spPr>
+        <p:spPr bwMode="auto">
           <a:xfrm>
             <a:off x="381300" y="685800"/>
             <a:ext cx="6096000" cy="3429000"/>
           </a:xfrm>
           <a:custGeom>
-            <a:rect b="b" l="l" r="r" t="t"/>
+            <a:avLst/>
+            <a:gdLst/>
+            <a:ahLst/>
+            <a:cxnLst/>
+            <a:rect l="l" t="t" r="r" b="b"/>
             <a:pathLst>
-              <a:path extrusionOk="0" h="120000" w="120000">
+              <a:path w="120000" h="120000" fill="norm" stroke="1" extrusionOk="0">
                 <a:moveTo>
                   <a:pt x="0" y="0"/>
                 </a:moveTo>
@@ -1246,26 +1205,26 @@
             </a:pathLst>
           </a:custGeom>
           <a:noFill/>
-          <a:ln cap="flat" cmpd="sng" w="9525">
+          <a:ln w="9525" cap="flat" cmpd="sng">
             <a:solidFill>
               <a:srgbClr val="000000"/>
             </a:solidFill>
             <a:prstDash val="solid"/>
             <a:round/>
-            <a:headEnd len="sm" w="sm" type="none"/>
-            <a:tailEnd len="sm" w="sm" type="none"/>
+            <a:headEnd type="none" w="sm" len="sm"/>
+            <a:tailEnd type="none" w="sm" len="sm"/>
           </a:ln>
         </p:spPr>
       </p:sp>
       <p:sp>
         <p:nvSpPr>
-          <p:cNvPr id="80" name="Google Shape;80;p4:notes"/>
+          <p:cNvPr id="1187128325" name="Google Shape;80;p4:notes"/>
           <p:cNvSpPr txBox="1"/>
           <p:nvPr>
-            <p:ph idx="1" type="body"/>
+            <p:ph type="body" idx="1"/>
           </p:nvPr>
         </p:nvSpPr>
-        <p:spPr>
+        <p:spPr bwMode="auto">
           <a:xfrm>
             <a:off x="685800" y="4343400"/>
             <a:ext cx="5486400" cy="4114800"/>
@@ -1279,12 +1238,12 @@
           </a:ln>
         </p:spPr>
         <p:txBody>
-          <a:bodyPr anchorCtr="0" anchor="t" bIns="91425" lIns="91425" spcFirstLastPara="1" rIns="91425" wrap="square" tIns="91425">
+          <a:bodyPr spcFirstLastPara="1" wrap="square" lIns="91425" tIns="91425" rIns="91425" bIns="91425" anchor="t" anchorCtr="0">
             <a:noAutofit/>
           </a:bodyPr>
           <a:lstStyle/>
           <a:p>
-            <a:pPr indent="0" lvl="0" marL="0" rtl="0" algn="l">
+            <a:pPr marL="0" lvl="0" indent="0" algn="l" rtl="0">
               <a:lnSpc>
                 <a:spcPct val="100000"/>
               </a:lnSpc>
@@ -1296,10 +1255,8 @@
               </a:spcAft>
               <a:buSzPts val="1100"/>
               <a:buNone/>
+              <a:defRPr/>
             </a:pPr>
-            <a:r>
-              <a:t/>
-            </a:r>
             <a:endParaRPr/>
           </a:p>
         </p:txBody>
@@ -1313,15 +1270,15 @@
 </file>
 
 <file path=ppt/notesSlides/notesSlide5.xml><?xml version="1.0" encoding="utf-8"?>
-<p:notes xmlns:a="http://schemas.openxmlformats.org/drawingml/2006/main" xmlns:r="http://schemas.openxmlformats.org/officeDocument/2006/relationships" xmlns:mc="http://schemas.openxmlformats.org/markup-compatibility/2006" xmlns:mv="urn:schemas-microsoft-com:mac:vml" xmlns:p="http://schemas.openxmlformats.org/presentationml/2006/main" xmlns:c="http://schemas.openxmlformats.org/drawingml/2006/chart" xmlns:dgm="http://schemas.openxmlformats.org/drawingml/2006/diagram" xmlns:o="urn:schemas-microsoft-com:office:office" xmlns:v="urn:schemas-microsoft-com:vml" xmlns:pvml="urn:schemas-microsoft-com:office:powerpoint" xmlns:com="http://schemas.openxmlformats.org/drawingml/2006/compatibility" xmlns:p14="http://schemas.microsoft.com/office/powerpoint/2010/main" xmlns:p15="http://schemas.microsoft.com/office/powerpoint/2012/main" xmlns:ahyp="http://schemas.microsoft.com/office/drawing/2018/hyperlinkcolor" showMasterPhAnim="0" showMasterSp="0">
-  <p:cSld>
+<p:notes xmlns:a="http://schemas.openxmlformats.org/drawingml/2006/main" xmlns:r="http://schemas.openxmlformats.org/officeDocument/2006/relationships" xmlns:p="http://schemas.openxmlformats.org/presentationml/2006/main" xmlns:m="http://schemas.openxmlformats.org/officeDocument/2006/math" xmlns:w="http://schemas.openxmlformats.org/wordprocessingml/2006/main" showMasterPhAnim="0" showMasterSp="0">
+  <p:cSld name="">
     <p:spTree>
       <p:nvGrpSpPr>
-        <p:cNvPr id="85" name="Shape 85"/>
+        <p:cNvPr id="1" name=""/>
         <p:cNvGrpSpPr/>
         <p:nvPr/>
       </p:nvGrpSpPr>
-      <p:grpSpPr>
+      <p:grpSpPr bwMode="auto">
         <a:xfrm>
           <a:off x="0" y="0"/>
           <a:ext cx="0" cy="0"/>
@@ -1331,21 +1288,25 @@
       </p:grpSpPr>
       <p:sp>
         <p:nvSpPr>
-          <p:cNvPr id="86" name="Google Shape;86;p5:notes"/>
+          <p:cNvPr id="2100132275" name="Google Shape;86;p5:notes"/>
           <p:cNvSpPr/>
           <p:nvPr>
-            <p:ph idx="2" type="sldImg"/>
+            <p:ph type="sldImg" idx="2"/>
           </p:nvPr>
         </p:nvSpPr>
-        <p:spPr>
+        <p:spPr bwMode="auto">
           <a:xfrm>
             <a:off x="381300" y="685800"/>
             <a:ext cx="6096075" cy="3429000"/>
           </a:xfrm>
           <a:custGeom>
-            <a:rect b="b" l="l" r="r" t="t"/>
+            <a:avLst/>
+            <a:gdLst/>
+            <a:ahLst/>
+            <a:cxnLst/>
+            <a:rect l="l" t="t" r="r" b="b"/>
             <a:pathLst>
-              <a:path extrusionOk="0" h="120000" w="120000">
+              <a:path w="120000" h="120000" fill="norm" stroke="1" extrusionOk="0">
                 <a:moveTo>
                   <a:pt x="0" y="0"/>
                 </a:moveTo>
@@ -1363,26 +1324,26 @@
             </a:pathLst>
           </a:custGeom>
           <a:noFill/>
-          <a:ln cap="flat" cmpd="sng" w="9525">
+          <a:ln w="9525" cap="flat" cmpd="sng">
             <a:solidFill>
               <a:srgbClr val="000000"/>
             </a:solidFill>
             <a:prstDash val="solid"/>
             <a:round/>
-            <a:headEnd len="sm" w="sm" type="none"/>
-            <a:tailEnd len="sm" w="sm" type="none"/>
+            <a:headEnd type="none" w="sm" len="sm"/>
+            <a:tailEnd type="none" w="sm" len="sm"/>
           </a:ln>
         </p:spPr>
       </p:sp>
       <p:sp>
         <p:nvSpPr>
-          <p:cNvPr id="87" name="Google Shape;87;p5:notes"/>
+          <p:cNvPr id="1168040065" name="Google Shape;87;p5:notes"/>
           <p:cNvSpPr txBox="1"/>
           <p:nvPr>
-            <p:ph idx="1" type="body"/>
+            <p:ph type="body" idx="1"/>
           </p:nvPr>
         </p:nvSpPr>
-        <p:spPr>
+        <p:spPr bwMode="auto">
           <a:xfrm>
             <a:off x="685800" y="4343400"/>
             <a:ext cx="5486400" cy="4114800"/>
@@ -1396,12 +1357,12 @@
           </a:ln>
         </p:spPr>
         <p:txBody>
-          <a:bodyPr anchorCtr="0" anchor="t" bIns="91425" lIns="91425" spcFirstLastPara="1" rIns="91425" wrap="square" tIns="91425">
+          <a:bodyPr spcFirstLastPara="1" wrap="square" lIns="91425" tIns="91425" rIns="91425" bIns="91425" anchor="t" anchorCtr="0">
             <a:noAutofit/>
           </a:bodyPr>
           <a:lstStyle/>
           <a:p>
-            <a:pPr indent="-228600" lvl="0" marL="457200" rtl="0" algn="l">
+            <a:pPr marL="457200" lvl="0" indent="-228600" algn="l" rtl="0">
               <a:lnSpc>
                 <a:spcPct val="100000"/>
               </a:lnSpc>
@@ -1413,23 +1374,21 @@
               </a:spcAft>
               <a:buSzPts val="1100"/>
               <a:buNone/>
+              <a:defRPr/>
             </a:pPr>
-            <a:r>
-              <a:t/>
-            </a:r>
             <a:endParaRPr/>
           </a:p>
         </p:txBody>
       </p:sp>
       <p:sp>
         <p:nvSpPr>
-          <p:cNvPr id="88" name="Google Shape;88;p5:notes"/>
+          <p:cNvPr id="1583356688" name="Google Shape;88;p5:notes"/>
           <p:cNvSpPr txBox="1"/>
           <p:nvPr>
-            <p:ph idx="12" type="sldNum"/>
+            <p:ph type="sldNum" idx="12"/>
           </p:nvPr>
         </p:nvSpPr>
-        <p:spPr>
+        <p:spPr bwMode="auto">
           <a:xfrm>
             <a:off x="0" y="0"/>
             <a:ext cx="3000000" cy="3000000"/>
@@ -1443,43 +1402,42 @@
           </a:ln>
         </p:spPr>
         <p:txBody>
-          <a:bodyPr anchorCtr="0" anchor="t" bIns="45700" lIns="91425" spcFirstLastPara="1" rIns="91425" wrap="square" tIns="45700">
+          <a:bodyPr spcFirstLastPara="1" wrap="square" lIns="91425" tIns="45700" rIns="91425" bIns="45700" anchor="t" anchorCtr="0">
             <a:noAutofit/>
           </a:bodyPr>
           <a:lstStyle/>
           <a:p>
-            <a:pPr indent="0" lvl="0" marL="0" marR="0" rtl="0" algn="l">
-              <a:lnSpc>
-                <a:spcPct val="100000"/>
-              </a:lnSpc>
-              <a:spcBef>
-                <a:spcPts val="0"/>
-              </a:spcBef>
-              <a:spcAft>
-                <a:spcPts val="0"/>
-              </a:spcAft>
-              <a:buNone/>
+            <a:pPr marL="0" marR="0" lvl="0" indent="0" algn="l" rtl="0">
+              <a:lnSpc>
+                <a:spcPct val="100000"/>
+              </a:lnSpc>
+              <a:spcBef>
+                <a:spcPts val="0"/>
+              </a:spcBef>
+              <a:spcAft>
+                <a:spcPts val="0"/>
+              </a:spcAft>
+              <a:buNone/>
+              <a:defRPr/>
             </a:pPr>
             <a:fld id="{00000000-1234-1234-1234-123412341234}" type="slidenum">
-              <a:rPr b="0" i="0" lang="az-Latn-AZ" sz="1400" u="none" cap="none" strike="noStrike">
+              <a:rPr lang="az-Latn-AZ" sz="1400" b="0" i="0" u="none" strike="noStrike" cap="none">
                 <a:solidFill>
                   <a:srgbClr val="000000"/>
                 </a:solidFill>
                 <a:latin typeface="Arial"/>
                 <a:ea typeface="Arial"/>
                 <a:cs typeface="Arial"/>
-                <a:sym typeface="Arial"/>
               </a:rPr>
               <a:t>‹#›</a:t>
             </a:fld>
-            <a:endParaRPr b="0" i="0" sz="1400" u="none" cap="none" strike="noStrike">
+            <a:endParaRPr sz="1400" b="0" i="0" u="none" strike="noStrike" cap="none">
               <a:solidFill>
                 <a:srgbClr val="000000"/>
               </a:solidFill>
               <a:latin typeface="Arial"/>
               <a:ea typeface="Arial"/>
               <a:cs typeface="Arial"/>
-              <a:sym typeface="Arial"/>
             </a:endParaRPr>
           </a:p>
         </p:txBody>
@@ -1493,15 +1451,15 @@
 </file>
 
 <file path=ppt/notesSlides/notesSlide6.xml><?xml version="1.0" encoding="utf-8"?>
-<p:notes xmlns:a="http://schemas.openxmlformats.org/drawingml/2006/main" xmlns:r="http://schemas.openxmlformats.org/officeDocument/2006/relationships" xmlns:mc="http://schemas.openxmlformats.org/markup-compatibility/2006" xmlns:mv="urn:schemas-microsoft-com:mac:vml" xmlns:p="http://schemas.openxmlformats.org/presentationml/2006/main" xmlns:c="http://schemas.openxmlformats.org/drawingml/2006/chart" xmlns:dgm="http://schemas.openxmlformats.org/drawingml/2006/diagram" xmlns:o="urn:schemas-microsoft-com:office:office" xmlns:v="urn:schemas-microsoft-com:vml" xmlns:pvml="urn:schemas-microsoft-com:office:powerpoint" xmlns:com="http://schemas.openxmlformats.org/drawingml/2006/compatibility" xmlns:p14="http://schemas.microsoft.com/office/powerpoint/2010/main" xmlns:p15="http://schemas.microsoft.com/office/powerpoint/2012/main" xmlns:ahyp="http://schemas.microsoft.com/office/drawing/2018/hyperlinkcolor" showMasterPhAnim="0" showMasterSp="0">
-  <p:cSld>
+<p:notes xmlns:a="http://schemas.openxmlformats.org/drawingml/2006/main" xmlns:r="http://schemas.openxmlformats.org/officeDocument/2006/relationships" xmlns:p="http://schemas.openxmlformats.org/presentationml/2006/main" xmlns:m="http://schemas.openxmlformats.org/officeDocument/2006/math" xmlns:w="http://schemas.openxmlformats.org/wordprocessingml/2006/main" showMasterPhAnim="0" showMasterSp="0">
+  <p:cSld name="">
     <p:spTree>
       <p:nvGrpSpPr>
-        <p:cNvPr id="96" name="Shape 96"/>
+        <p:cNvPr id="1" name=""/>
         <p:cNvGrpSpPr/>
         <p:nvPr/>
       </p:nvGrpSpPr>
-      <p:grpSpPr>
+      <p:grpSpPr bwMode="auto">
         <a:xfrm>
           <a:off x="0" y="0"/>
           <a:ext cx="0" cy="0"/>
@@ -1511,21 +1469,25 @@
       </p:grpSpPr>
       <p:sp>
         <p:nvSpPr>
-          <p:cNvPr id="97" name="Google Shape;97;p6:notes"/>
+          <p:cNvPr id="1421829047" name="Google Shape;97;p6:notes"/>
           <p:cNvSpPr/>
           <p:nvPr>
-            <p:ph idx="2" type="sldImg"/>
+            <p:ph type="sldImg" idx="2"/>
           </p:nvPr>
         </p:nvSpPr>
-        <p:spPr>
+        <p:spPr bwMode="auto">
           <a:xfrm>
             <a:off x="381300" y="685800"/>
             <a:ext cx="6096075" cy="3429000"/>
           </a:xfrm>
           <a:custGeom>
-            <a:rect b="b" l="l" r="r" t="t"/>
+            <a:avLst/>
+            <a:gdLst/>
+            <a:ahLst/>
+            <a:cxnLst/>
+            <a:rect l="l" t="t" r="r" b="b"/>
             <a:pathLst>
-              <a:path extrusionOk="0" h="120000" w="120000">
+              <a:path w="120000" h="120000" fill="norm" stroke="1" extrusionOk="0">
                 <a:moveTo>
                   <a:pt x="0" y="0"/>
                 </a:moveTo>
@@ -1543,26 +1505,26 @@
             </a:pathLst>
           </a:custGeom>
           <a:noFill/>
-          <a:ln cap="flat" cmpd="sng" w="9525">
+          <a:ln w="9525" cap="flat" cmpd="sng">
             <a:solidFill>
               <a:srgbClr val="000000"/>
             </a:solidFill>
             <a:prstDash val="solid"/>
             <a:round/>
-            <a:headEnd len="sm" w="sm" type="none"/>
-            <a:tailEnd len="sm" w="sm" type="none"/>
+            <a:headEnd type="none" w="sm" len="sm"/>
+            <a:tailEnd type="none" w="sm" len="sm"/>
           </a:ln>
         </p:spPr>
       </p:sp>
       <p:sp>
         <p:nvSpPr>
-          <p:cNvPr id="98" name="Google Shape;98;p6:notes"/>
+          <p:cNvPr id="648378268" name="Google Shape;98;p6:notes"/>
           <p:cNvSpPr txBox="1"/>
           <p:nvPr>
-            <p:ph idx="1" type="body"/>
+            <p:ph type="body" idx="1"/>
           </p:nvPr>
         </p:nvSpPr>
-        <p:spPr>
+        <p:spPr bwMode="auto">
           <a:xfrm>
             <a:off x="685800" y="4343400"/>
             <a:ext cx="5486400" cy="4114800"/>
@@ -1576,12 +1538,12 @@
           </a:ln>
         </p:spPr>
         <p:txBody>
-          <a:bodyPr anchorCtr="0" anchor="t" bIns="91425" lIns="91425" spcFirstLastPara="1" rIns="91425" wrap="square" tIns="91425">
+          <a:bodyPr spcFirstLastPara="1" wrap="square" lIns="91425" tIns="91425" rIns="91425" bIns="91425" anchor="t" anchorCtr="0">
             <a:noAutofit/>
           </a:bodyPr>
           <a:lstStyle/>
           <a:p>
-            <a:pPr indent="-228600" lvl="0" marL="457200" rtl="0" algn="l">
+            <a:pPr marL="457200" lvl="0" indent="-228600" algn="l" rtl="0">
               <a:lnSpc>
                 <a:spcPct val="100000"/>
               </a:lnSpc>
@@ -1593,23 +1555,21 @@
               </a:spcAft>
               <a:buSzPts val="1100"/>
               <a:buNone/>
+              <a:defRPr/>
             </a:pPr>
-            <a:r>
-              <a:t/>
-            </a:r>
             <a:endParaRPr/>
           </a:p>
         </p:txBody>
       </p:sp>
       <p:sp>
         <p:nvSpPr>
-          <p:cNvPr id="99" name="Google Shape;99;p6:notes"/>
+          <p:cNvPr id="229196284" name="Google Shape;99;p6:notes"/>
           <p:cNvSpPr txBox="1"/>
           <p:nvPr>
-            <p:ph idx="12" type="sldNum"/>
+            <p:ph type="sldNum" idx="12"/>
           </p:nvPr>
         </p:nvSpPr>
-        <p:spPr>
+        <p:spPr bwMode="auto">
           <a:xfrm>
             <a:off x="0" y="0"/>
             <a:ext cx="3000000" cy="3000000"/>
@@ -1623,43 +1583,42 @@
           </a:ln>
         </p:spPr>
         <p:txBody>
-          <a:bodyPr anchorCtr="0" anchor="t" bIns="45700" lIns="91425" spcFirstLastPara="1" rIns="91425" wrap="square" tIns="45700">
+          <a:bodyPr spcFirstLastPara="1" wrap="square" lIns="91425" tIns="45700" rIns="91425" bIns="45700" anchor="t" anchorCtr="0">
             <a:noAutofit/>
           </a:bodyPr>
           <a:lstStyle/>
           <a:p>
-            <a:pPr indent="0" lvl="0" marL="0" marR="0" rtl="0" algn="l">
-              <a:lnSpc>
-                <a:spcPct val="100000"/>
-              </a:lnSpc>
-              <a:spcBef>
-                <a:spcPts val="0"/>
-              </a:spcBef>
-              <a:spcAft>
-                <a:spcPts val="0"/>
-              </a:spcAft>
-              <a:buNone/>
+            <a:pPr marL="0" marR="0" lvl="0" indent="0" algn="l" rtl="0">
+              <a:lnSpc>
+                <a:spcPct val="100000"/>
+              </a:lnSpc>
+              <a:spcBef>
+                <a:spcPts val="0"/>
+              </a:spcBef>
+              <a:spcAft>
+                <a:spcPts val="0"/>
+              </a:spcAft>
+              <a:buNone/>
+              <a:defRPr/>
             </a:pPr>
             <a:fld id="{00000000-1234-1234-1234-123412341234}" type="slidenum">
-              <a:rPr b="0" i="0" lang="az-Latn-AZ" sz="1400" u="none" cap="none" strike="noStrike">
+              <a:rPr lang="az-Latn-AZ" sz="1400" b="0" i="0" u="none" strike="noStrike" cap="none">
                 <a:solidFill>
                   <a:srgbClr val="000000"/>
                 </a:solidFill>
                 <a:latin typeface="Arial"/>
                 <a:ea typeface="Arial"/>
                 <a:cs typeface="Arial"/>
-                <a:sym typeface="Arial"/>
               </a:rPr>
               <a:t>‹#›</a:t>
             </a:fld>
-            <a:endParaRPr b="0" i="0" sz="1400" u="none" cap="none" strike="noStrike">
+            <a:endParaRPr sz="1400" b="0" i="0" u="none" strike="noStrike" cap="none">
               <a:solidFill>
                 <a:srgbClr val="000000"/>
               </a:solidFill>
               <a:latin typeface="Arial"/>
               <a:ea typeface="Arial"/>
               <a:cs typeface="Arial"/>
-              <a:sym typeface="Arial"/>
             </a:endParaRPr>
           </a:p>
         </p:txBody>
@@ -1672,16 +1631,16 @@
 </p:notes>
 </file>
 
-<file path=ppt/slideLayouts/slideLayout1.xml><?xml version="1.0" encoding="utf-8"?>
-<p:sldLayout xmlns:a="http://schemas.openxmlformats.org/drawingml/2006/main" xmlns:r="http://schemas.openxmlformats.org/officeDocument/2006/relationships" xmlns:mc="http://schemas.openxmlformats.org/markup-compatibility/2006" xmlns:mv="urn:schemas-microsoft-com:mac:vml" xmlns:p="http://schemas.openxmlformats.org/presentationml/2006/main" xmlns:c="http://schemas.openxmlformats.org/drawingml/2006/chart" xmlns:dgm="http://schemas.openxmlformats.org/drawingml/2006/diagram" xmlns:o="urn:schemas-microsoft-com:office:office" xmlns:v="urn:schemas-microsoft-com:vml" xmlns:pvml="urn:schemas-microsoft-com:office:powerpoint" xmlns:com="http://schemas.openxmlformats.org/drawingml/2006/compatibility" xmlns:p14="http://schemas.microsoft.com/office/powerpoint/2010/main" xmlns:p15="http://schemas.microsoft.com/office/powerpoint/2012/main" xmlns:ahyp="http://schemas.microsoft.com/office/drawing/2018/hyperlinkcolor" matchingName="Title slide" type="title">
-  <p:cSld name="TITLE">
+<file path=ppt/notesSlides/notesSlide7.xml><?xml version="1.0" encoding="utf-8"?>
+<p:notes xmlns:a="http://schemas.openxmlformats.org/drawingml/2006/main" xmlns:r="http://schemas.openxmlformats.org/officeDocument/2006/relationships" xmlns:p="http://schemas.openxmlformats.org/presentationml/2006/main" xmlns:m="http://schemas.openxmlformats.org/officeDocument/2006/math" xmlns:w="http://schemas.openxmlformats.org/wordprocessingml/2006/main" showMasterPhAnim="0" showMasterSp="0">
+  <p:cSld name="">
     <p:spTree>
       <p:nvGrpSpPr>
-        <p:cNvPr id="8" name="Shape 8"/>
+        <p:cNvPr id="1" name=""/>
         <p:cNvGrpSpPr/>
         <p:nvPr/>
       </p:nvGrpSpPr>
-      <p:grpSpPr>
+      <p:grpSpPr bwMode="auto">
         <a:xfrm>
           <a:off x="0" y="0"/>
           <a:ext cx="0" cy="0"/>
@@ -1691,13 +1650,132 @@
       </p:grpSpPr>
       <p:sp>
         <p:nvSpPr>
-          <p:cNvPr id="9" name="Google Shape;9;p2"/>
+          <p:cNvPr id="1895129550" name="Google Shape;60;p1:notes"/>
+          <p:cNvSpPr/>
+          <p:nvPr>
+            <p:ph type="sldImg" idx="2"/>
+          </p:nvPr>
+        </p:nvSpPr>
+        <p:spPr bwMode="auto">
+          <a:xfrm>
+            <a:off x="381299" y="685800"/>
+            <a:ext cx="6096074" cy="3429000"/>
+          </a:xfrm>
+          <a:custGeom>
+            <a:avLst/>
+            <a:gdLst/>
+            <a:ahLst/>
+            <a:cxnLst/>
+            <a:rect l="l" t="t" r="r" b="b"/>
+            <a:pathLst>
+              <a:path w="120000" h="120000" fill="norm" stroke="1" extrusionOk="0">
+                <a:moveTo>
+                  <a:pt x="0" y="0"/>
+                </a:moveTo>
+                <a:lnTo>
+                  <a:pt x="120000" y="0"/>
+                </a:lnTo>
+                <a:lnTo>
+                  <a:pt x="120000" y="120000"/>
+                </a:lnTo>
+                <a:lnTo>
+                  <a:pt x="0" y="120000"/>
+                </a:lnTo>
+                <a:close/>
+              </a:path>
+            </a:pathLst>
+          </a:custGeom>
+          <a:noFill/>
+          <a:ln w="9525" cap="flat" cmpd="sng">
+            <a:solidFill>
+              <a:srgbClr val="000000"/>
+            </a:solidFill>
+            <a:prstDash val="solid"/>
+            <a:round/>
+            <a:headEnd type="none" w="sm" len="sm"/>
+            <a:tailEnd type="none" w="sm" len="sm"/>
+          </a:ln>
+        </p:spPr>
+      </p:sp>
+      <p:sp>
+        <p:nvSpPr>
+          <p:cNvPr id="254344381" name="Google Shape;61;p1:notes"/>
+          <p:cNvSpPr txBox="1"/>
+          <p:nvPr>
+            <p:ph type="body" idx="1"/>
+          </p:nvPr>
+        </p:nvSpPr>
+        <p:spPr bwMode="auto">
+          <a:xfrm>
+            <a:off x="685800" y="4343400"/>
+            <a:ext cx="5486400" cy="4114800"/>
+          </a:xfrm>
+          <a:prstGeom prst="rect">
+            <a:avLst/>
+          </a:prstGeom>
+          <a:noFill/>
+          <a:ln>
+            <a:noFill/>
+          </a:ln>
+        </p:spPr>
+        <p:txBody>
+          <a:bodyPr spcFirstLastPara="1" wrap="square" lIns="91424" tIns="91424" rIns="91424" bIns="91424" anchor="t" anchorCtr="0">
+            <a:noAutofit/>
+          </a:bodyPr>
+          <a:lstStyle/>
+          <a:p>
+            <a:pPr marL="0" lvl="0" indent="0" algn="l" rtl="0">
+              <a:lnSpc>
+                <a:spcPct val="100000"/>
+              </a:lnSpc>
+              <a:spcBef>
+                <a:spcPts val="0"/>
+              </a:spcBef>
+              <a:spcAft>
+                <a:spcPts val="0"/>
+              </a:spcAft>
+              <a:buSzPts val="1100"/>
+              <a:buNone/>
+              <a:defRPr/>
+            </a:pPr>
+            <a:endParaRPr/>
+          </a:p>
+        </p:txBody>
+      </p:sp>
+    </p:spTree>
+  </p:cSld>
+  <p:clrMapOvr>
+    <a:masterClrMapping/>
+  </p:clrMapOvr>
+</p:notes>
+</file>
+
+<file path=ppt/slideLayouts/slideLayout1.xml><?xml version="1.0" encoding="utf-8"?>
+<p:sldLayout xmlns:a="http://schemas.openxmlformats.org/drawingml/2006/main" xmlns:r="http://schemas.openxmlformats.org/officeDocument/2006/relationships" xmlns:p="http://schemas.openxmlformats.org/presentationml/2006/main" xmlns:m="http://schemas.openxmlformats.org/officeDocument/2006/math" xmlns:w="http://schemas.openxmlformats.org/wordprocessingml/2006/main" matchingName="Title slide" preserve="0" showMasterPhAnim="0" showMasterSp="1" type="title" userDrawn="1">
+  <p:cSld name="TITLE">
+    <p:spTree>
+      <p:nvGrpSpPr>
+        <p:cNvPr id="1" name=""/>
+        <p:cNvGrpSpPr/>
+        <p:nvPr/>
+      </p:nvGrpSpPr>
+      <p:grpSpPr bwMode="auto">
+        <a:xfrm>
+          <a:off x="0" y="0"/>
+          <a:ext cx="0" cy="0"/>
+          <a:chOff x="0" y="0"/>
+          <a:chExt cx="0" cy="0"/>
+        </a:xfrm>
+      </p:grpSpPr>
+      <p:sp>
+        <p:nvSpPr>
+          <p:cNvPr id="1609726273" name="Google Shape;9;p2"/>
           <p:cNvSpPr txBox="1"/>
           <p:nvPr>
             <p:ph type="ctrTitle"/>
           </p:nvPr>
         </p:nvSpPr>
-        <p:spPr>
+        <p:spPr bwMode="auto">
           <a:xfrm>
             <a:off x="1039975" y="1324500"/>
             <a:ext cx="7064100" cy="2052600"/>
@@ -1711,7 +1789,7 @@
           </a:ln>
         </p:spPr>
         <p:txBody>
-          <a:bodyPr anchorCtr="0" anchor="b" bIns="91425" lIns="91425" spcFirstLastPara="1" rIns="91425" wrap="square" tIns="91425">
+          <a:bodyPr spcFirstLastPara="1" wrap="square" lIns="91425" tIns="91425" rIns="91425" bIns="91425" anchor="b" anchorCtr="0">
             <a:noAutofit/>
           </a:bodyPr>
           <a:lstStyle>
@@ -1842,18 +1920,23 @@
               <a:defRPr sz="5200"/>
             </a:lvl9pPr>
           </a:lstStyle>
-          <a:p/>
+          <a:p>
+            <a:pPr>
+              <a:defRPr/>
+            </a:pPr>
+            <a:endParaRPr/>
+          </a:p>
         </p:txBody>
       </p:sp>
       <p:sp>
         <p:nvSpPr>
-          <p:cNvPr id="10" name="Google Shape;10;p2"/>
+          <p:cNvPr id="1054679975" name="Google Shape;10;p2"/>
           <p:cNvSpPr txBox="1"/>
           <p:nvPr>
-            <p:ph idx="1" type="subTitle"/>
+            <p:ph type="subTitle" idx="1"/>
           </p:nvPr>
         </p:nvSpPr>
-        <p:spPr>
+        <p:spPr bwMode="auto">
           <a:xfrm>
             <a:off x="1040000" y="3377100"/>
             <a:ext cx="7064100" cy="441900"/>
@@ -1867,7 +1950,7 @@
           </a:ln>
         </p:spPr>
         <p:txBody>
-          <a:bodyPr anchorCtr="0" anchor="b" bIns="91425" lIns="91425" spcFirstLastPara="1" rIns="91425" wrap="square" tIns="91425">
+          <a:bodyPr spcFirstLastPara="1" wrap="square" lIns="91425" tIns="91425" rIns="91425" bIns="91425" anchor="b" anchorCtr="0">
             <a:noAutofit/>
           </a:bodyPr>
           <a:lstStyle>
@@ -1998,16 +2081,21 @@
               <a:defRPr sz="2800"/>
             </a:lvl9pPr>
           </a:lstStyle>
-          <a:p/>
+          <a:p>
+            <a:pPr>
+              <a:defRPr/>
+            </a:pPr>
+            <a:endParaRPr/>
+          </a:p>
         </p:txBody>
       </p:sp>
       <p:cxnSp>
         <p:nvCxnSpPr>
-          <p:cNvPr id="11" name="Google Shape;11;p2"/>
+          <p:cNvPr id="1276928792" name="Google Shape;11;p2"/>
           <p:cNvCxnSpPr/>
           <p:nvPr/>
         </p:nvCxnSpPr>
-        <p:spPr>
+        <p:spPr bwMode="auto">
           <a:xfrm>
             <a:off x="-72550" y="274100"/>
             <a:ext cx="9287400" cy="0"/>
@@ -2016,52 +2104,52 @@
             <a:avLst/>
           </a:prstGeom>
           <a:noFill/>
-          <a:ln cap="flat" cmpd="sng" w="28575">
+          <a:ln w="28575" cap="flat" cmpd="sng">
             <a:solidFill>
               <a:schemeClr val="accent1"/>
             </a:solidFill>
             <a:prstDash val="solid"/>
             <a:round/>
-            <a:headEnd len="sm" w="sm" type="none"/>
-            <a:tailEnd len="sm" w="sm" type="none"/>
+            <a:headEnd type="none" w="sm" len="sm"/>
+            <a:tailEnd type="none" w="sm" len="sm"/>
           </a:ln>
         </p:spPr>
       </p:cxnSp>
       <p:cxnSp>
         <p:nvCxnSpPr>
-          <p:cNvPr id="12" name="Google Shape;12;p2"/>
+          <p:cNvPr id="916732641" name="Google Shape;12;p2"/>
           <p:cNvCxnSpPr/>
           <p:nvPr/>
         </p:nvCxnSpPr>
-        <p:spPr>
+        <p:spPr bwMode="auto">
           <a:xfrm flipH="1">
             <a:off x="-257975" y="-72550"/>
             <a:ext cx="3047400" cy="1346400"/>
           </a:xfrm>
           <a:prstGeom prst="curvedConnector3">
             <a:avLst>
-              <a:gd fmla="val 50000" name="adj1"/>
+              <a:gd name="adj1" fmla="val 50000"/>
             </a:avLst>
           </a:prstGeom>
           <a:noFill/>
-          <a:ln cap="flat" cmpd="sng" w="28575">
+          <a:ln w="28575" cap="flat" cmpd="sng">
             <a:solidFill>
               <a:schemeClr val="accent2"/>
             </a:solidFill>
             <a:prstDash val="solid"/>
             <a:round/>
-            <a:headEnd len="sm" w="sm" type="none"/>
-            <a:tailEnd len="sm" w="sm" type="none"/>
+            <a:headEnd type="none" w="sm" len="sm"/>
+            <a:tailEnd type="none" w="sm" len="sm"/>
           </a:ln>
         </p:spPr>
       </p:cxnSp>
       <p:cxnSp>
         <p:nvCxnSpPr>
-          <p:cNvPr id="13" name="Google Shape;13;p2"/>
+          <p:cNvPr id="1301379590" name="Google Shape;13;p2"/>
           <p:cNvCxnSpPr/>
           <p:nvPr/>
         </p:nvCxnSpPr>
-        <p:spPr>
+        <p:spPr bwMode="auto">
           <a:xfrm>
             <a:off x="-72550" y="4877450"/>
             <a:ext cx="9287400" cy="0"/>
@@ -2070,42 +2158,42 @@
             <a:avLst/>
           </a:prstGeom>
           <a:noFill/>
-          <a:ln cap="flat" cmpd="sng" w="28575">
+          <a:ln w="28575" cap="flat" cmpd="sng">
             <a:solidFill>
               <a:schemeClr val="accent1"/>
             </a:solidFill>
             <a:prstDash val="solid"/>
             <a:round/>
-            <a:headEnd len="sm" w="sm" type="none"/>
-            <a:tailEnd len="sm" w="sm" type="none"/>
+            <a:headEnd type="none" w="sm" len="sm"/>
+            <a:tailEnd type="none" w="sm" len="sm"/>
           </a:ln>
         </p:spPr>
       </p:cxnSp>
       <p:cxnSp>
         <p:nvCxnSpPr>
-          <p:cNvPr id="14" name="Google Shape;14;p2"/>
+          <p:cNvPr id="360335023" name="Google Shape;14;p2"/>
           <p:cNvCxnSpPr/>
           <p:nvPr/>
         </p:nvCxnSpPr>
-        <p:spPr>
+        <p:spPr bwMode="auto">
           <a:xfrm flipH="1">
             <a:off x="6467450" y="3935375"/>
             <a:ext cx="3047400" cy="1346400"/>
           </a:xfrm>
           <a:prstGeom prst="curvedConnector3">
             <a:avLst>
-              <a:gd fmla="val 50000" name="adj1"/>
+              <a:gd name="adj1" fmla="val 50000"/>
             </a:avLst>
           </a:prstGeom>
           <a:noFill/>
-          <a:ln cap="flat" cmpd="sng" w="28575">
+          <a:ln w="28575" cap="flat" cmpd="sng">
             <a:solidFill>
               <a:schemeClr val="accent2"/>
             </a:solidFill>
             <a:prstDash val="solid"/>
             <a:round/>
-            <a:headEnd len="sm" w="sm" type="none"/>
-            <a:tailEnd len="sm" w="sm" type="none"/>
+            <a:headEnd type="none" w="sm" len="sm"/>
+            <a:tailEnd type="none" w="sm" len="sm"/>
           </a:ln>
         </p:spPr>
       </p:cxnSp>
@@ -2118,15 +2206,15 @@
 </file>
 
 <file path=ppt/slideLayouts/slideLayout10.xml><?xml version="1.0" encoding="utf-8"?>
-<p:sldLayout xmlns:a="http://schemas.openxmlformats.org/drawingml/2006/main" xmlns:r="http://schemas.openxmlformats.org/officeDocument/2006/relationships" xmlns:mc="http://schemas.openxmlformats.org/markup-compatibility/2006" xmlns:mv="urn:schemas-microsoft-com:mac:vml" xmlns:p="http://schemas.openxmlformats.org/presentationml/2006/main" xmlns:c="http://schemas.openxmlformats.org/drawingml/2006/chart" xmlns:dgm="http://schemas.openxmlformats.org/drawingml/2006/diagram" xmlns:o="urn:schemas-microsoft-com:office:office" xmlns:v="urn:schemas-microsoft-com:vml" xmlns:pvml="urn:schemas-microsoft-com:office:powerpoint" xmlns:com="http://schemas.openxmlformats.org/drawingml/2006/compatibility" xmlns:p14="http://schemas.microsoft.com/office/powerpoint/2010/main" xmlns:p15="http://schemas.microsoft.com/office/powerpoint/2012/main" xmlns:ahyp="http://schemas.microsoft.com/office/drawing/2018/hyperlinkcolor" matchingName="Background 3">
+<p:sldLayout xmlns:a="http://schemas.openxmlformats.org/drawingml/2006/main" xmlns:r="http://schemas.openxmlformats.org/officeDocument/2006/relationships" xmlns:p="http://schemas.openxmlformats.org/presentationml/2006/main" xmlns:m="http://schemas.openxmlformats.org/officeDocument/2006/math" xmlns:w="http://schemas.openxmlformats.org/wordprocessingml/2006/main" matchingName="Background 3" preserve="0" showMasterPhAnim="0" showMasterSp="1" userDrawn="1">
   <p:cSld name="CUSTOM_30">
     <p:spTree>
       <p:nvGrpSpPr>
-        <p:cNvPr id="52" name="Shape 52"/>
+        <p:cNvPr id="1" name=""/>
         <p:cNvGrpSpPr/>
         <p:nvPr/>
       </p:nvGrpSpPr>
-      <p:grpSpPr>
+      <p:grpSpPr bwMode="auto">
         <a:xfrm>
           <a:off x="0" y="0"/>
           <a:ext cx="0" cy="0"/>
@@ -2136,11 +2224,11 @@
       </p:grpSpPr>
       <p:cxnSp>
         <p:nvCxnSpPr>
-          <p:cNvPr id="53" name="Google Shape;53;p11"/>
+          <p:cNvPr id="1184266943" name="Google Shape;53;p11"/>
           <p:cNvCxnSpPr/>
           <p:nvPr/>
         </p:nvCxnSpPr>
-        <p:spPr>
+        <p:spPr bwMode="auto">
           <a:xfrm>
             <a:off x="-72550" y="274100"/>
             <a:ext cx="9287400" cy="0"/>
@@ -2149,24 +2237,24 @@
             <a:avLst/>
           </a:prstGeom>
           <a:noFill/>
-          <a:ln cap="flat" cmpd="sng" w="28575">
+          <a:ln w="28575" cap="flat" cmpd="sng">
             <a:solidFill>
               <a:schemeClr val="accent1"/>
             </a:solidFill>
             <a:prstDash val="solid"/>
             <a:round/>
-            <a:headEnd len="sm" w="sm" type="none"/>
-            <a:tailEnd len="sm" w="sm" type="none"/>
+            <a:headEnd type="none" w="sm" len="sm"/>
+            <a:tailEnd type="none" w="sm" len="sm"/>
           </a:ln>
         </p:spPr>
       </p:cxnSp>
       <p:cxnSp>
         <p:nvCxnSpPr>
-          <p:cNvPr id="54" name="Google Shape;54;p11"/>
+          <p:cNvPr id="1715784478" name="Google Shape;54;p11"/>
           <p:cNvCxnSpPr/>
           <p:nvPr/>
         </p:nvCxnSpPr>
-        <p:spPr>
+        <p:spPr bwMode="auto">
           <a:xfrm>
             <a:off x="-72550" y="4877450"/>
             <a:ext cx="9287400" cy="0"/>
@@ -2175,126 +2263,126 @@
             <a:avLst/>
           </a:prstGeom>
           <a:noFill/>
-          <a:ln cap="flat" cmpd="sng" w="28575">
+          <a:ln w="28575" cap="flat" cmpd="sng">
             <a:solidFill>
               <a:schemeClr val="accent1"/>
             </a:solidFill>
             <a:prstDash val="solid"/>
             <a:round/>
-            <a:headEnd len="sm" w="sm" type="none"/>
-            <a:tailEnd len="sm" w="sm" type="none"/>
+            <a:headEnd type="none" w="sm" len="sm"/>
+            <a:tailEnd type="none" w="sm" len="sm"/>
           </a:ln>
         </p:spPr>
       </p:cxnSp>
       <p:cxnSp>
         <p:nvCxnSpPr>
-          <p:cNvPr id="55" name="Google Shape;55;p11"/>
+          <p:cNvPr id="1855200036" name="Google Shape;55;p11"/>
           <p:cNvCxnSpPr/>
           <p:nvPr/>
         </p:nvCxnSpPr>
-        <p:spPr>
+        <p:spPr bwMode="auto">
           <a:xfrm>
             <a:off x="-250225" y="4076450"/>
             <a:ext cx="1926900" cy="1161000"/>
           </a:xfrm>
           <a:prstGeom prst="curvedConnector3">
             <a:avLst>
-              <a:gd fmla="val 50000" name="adj1"/>
+              <a:gd name="adj1" fmla="val 50000"/>
             </a:avLst>
           </a:prstGeom>
           <a:noFill/>
-          <a:ln cap="flat" cmpd="sng" w="28575">
+          <a:ln w="28575" cap="flat" cmpd="sng">
             <a:solidFill>
               <a:schemeClr val="accent2"/>
             </a:solidFill>
             <a:prstDash val="solid"/>
             <a:round/>
-            <a:headEnd len="sm" w="sm" type="none"/>
-            <a:tailEnd len="sm" w="sm" type="none"/>
+            <a:headEnd type="none" w="sm" len="sm"/>
+            <a:tailEnd type="none" w="sm" len="sm"/>
           </a:ln>
         </p:spPr>
       </p:cxnSp>
       <p:cxnSp>
         <p:nvCxnSpPr>
-          <p:cNvPr id="56" name="Google Shape;56;p11"/>
+          <p:cNvPr id="1282685239" name="Google Shape;56;p11"/>
           <p:cNvCxnSpPr/>
           <p:nvPr/>
         </p:nvCxnSpPr>
-        <p:spPr>
+        <p:spPr bwMode="auto">
           <a:xfrm>
             <a:off x="7441150" y="-48375"/>
             <a:ext cx="1926900" cy="1161000"/>
           </a:xfrm>
           <a:prstGeom prst="curvedConnector3">
             <a:avLst>
-              <a:gd fmla="val 50000" name="adj1"/>
+              <a:gd name="adj1" fmla="val 50000"/>
             </a:avLst>
           </a:prstGeom>
           <a:noFill/>
-          <a:ln cap="flat" cmpd="sng" w="28575">
+          <a:ln w="28575" cap="flat" cmpd="sng">
             <a:solidFill>
               <a:schemeClr val="accent2"/>
             </a:solidFill>
             <a:prstDash val="solid"/>
             <a:round/>
-            <a:headEnd len="sm" w="sm" type="none"/>
-            <a:tailEnd len="sm" w="sm" type="none"/>
+            <a:headEnd type="none" w="sm" len="sm"/>
+            <a:tailEnd type="none" w="sm" len="sm"/>
           </a:ln>
         </p:spPr>
       </p:cxnSp>
       <p:cxnSp>
         <p:nvCxnSpPr>
-          <p:cNvPr id="57" name="Google Shape;57;p11"/>
+          <p:cNvPr id="1067859747" name="Google Shape;57;p11"/>
           <p:cNvCxnSpPr/>
           <p:nvPr/>
         </p:nvCxnSpPr>
-        <p:spPr>
+        <p:spPr bwMode="auto">
           <a:xfrm flipH="1">
             <a:off x="7454238" y="4053663"/>
             <a:ext cx="1926900" cy="1161000"/>
           </a:xfrm>
           <a:prstGeom prst="curvedConnector3">
             <a:avLst>
-              <a:gd fmla="val 50000" name="adj1"/>
+              <a:gd name="adj1" fmla="val 50000"/>
             </a:avLst>
           </a:prstGeom>
           <a:noFill/>
-          <a:ln cap="flat" cmpd="sng" w="28575">
+          <a:ln w="28575" cap="flat" cmpd="sng">
             <a:solidFill>
               <a:schemeClr val="accent2"/>
             </a:solidFill>
             <a:prstDash val="solid"/>
             <a:round/>
-            <a:headEnd len="sm" w="sm" type="none"/>
-            <a:tailEnd len="sm" w="sm" type="none"/>
+            <a:headEnd type="none" w="sm" len="sm"/>
+            <a:tailEnd type="none" w="sm" len="sm"/>
           </a:ln>
         </p:spPr>
       </p:cxnSp>
       <p:cxnSp>
         <p:nvCxnSpPr>
-          <p:cNvPr id="58" name="Google Shape;58;p11"/>
+          <p:cNvPr id="79397460" name="Google Shape;58;p11"/>
           <p:cNvCxnSpPr/>
           <p:nvPr/>
         </p:nvCxnSpPr>
-        <p:spPr>
+        <p:spPr bwMode="auto">
           <a:xfrm flipH="1">
             <a:off x="-237137" y="-71162"/>
             <a:ext cx="1926900" cy="1161000"/>
           </a:xfrm>
           <a:prstGeom prst="curvedConnector3">
             <a:avLst>
-              <a:gd fmla="val 50000" name="adj1"/>
+              <a:gd name="adj1" fmla="val 50000"/>
             </a:avLst>
           </a:prstGeom>
           <a:noFill/>
-          <a:ln cap="flat" cmpd="sng" w="28575">
+          <a:ln w="28575" cap="flat" cmpd="sng">
             <a:solidFill>
               <a:schemeClr val="accent2"/>
             </a:solidFill>
             <a:prstDash val="solid"/>
             <a:round/>
-            <a:headEnd len="sm" w="sm" type="none"/>
-            <a:tailEnd len="sm" w="sm" type="none"/>
+            <a:headEnd type="none" w="sm" len="sm"/>
+            <a:tailEnd type="none" w="sm" len="sm"/>
           </a:ln>
         </p:spPr>
       </p:cxnSp>
@@ -2307,15 +2395,15 @@
 </file>
 
 <file path=ppt/slideLayouts/slideLayout2.xml><?xml version="1.0" encoding="utf-8"?>
-<p:sldLayout xmlns:a="http://schemas.openxmlformats.org/drawingml/2006/main" xmlns:r="http://schemas.openxmlformats.org/officeDocument/2006/relationships" xmlns:mc="http://schemas.openxmlformats.org/markup-compatibility/2006" xmlns:mv="urn:schemas-microsoft-com:mac:vml" xmlns:p="http://schemas.openxmlformats.org/presentationml/2006/main" xmlns:c="http://schemas.openxmlformats.org/drawingml/2006/chart" xmlns:dgm="http://schemas.openxmlformats.org/drawingml/2006/diagram" xmlns:o="urn:schemas-microsoft-com:office:office" xmlns:v="urn:schemas-microsoft-com:vml" xmlns:pvml="urn:schemas-microsoft-com:office:powerpoint" xmlns:com="http://schemas.openxmlformats.org/drawingml/2006/compatibility" xmlns:p14="http://schemas.microsoft.com/office/powerpoint/2010/main" xmlns:p15="http://schemas.microsoft.com/office/powerpoint/2012/main" xmlns:ahyp="http://schemas.microsoft.com/office/drawing/2018/hyperlinkcolor" matchingName="Title and text 1">
+<p:sldLayout xmlns:a="http://schemas.openxmlformats.org/drawingml/2006/main" xmlns:r="http://schemas.openxmlformats.org/officeDocument/2006/relationships" xmlns:p="http://schemas.openxmlformats.org/presentationml/2006/main" xmlns:m="http://schemas.openxmlformats.org/officeDocument/2006/math" xmlns:w="http://schemas.openxmlformats.org/wordprocessingml/2006/main" matchingName="Title and text 1" preserve="0" showMasterPhAnim="0" showMasterSp="1" userDrawn="1">
   <p:cSld name="SECTION_TITLE_AND_DESCRIPTION_1">
     <p:spTree>
       <p:nvGrpSpPr>
-        <p:cNvPr id="15" name="Shape 15"/>
+        <p:cNvPr id="1" name=""/>
         <p:cNvGrpSpPr/>
         <p:nvPr/>
       </p:nvGrpSpPr>
-      <p:grpSpPr>
+      <p:grpSpPr bwMode="auto">
         <a:xfrm>
           <a:off x="0" y="0"/>
           <a:ext cx="0" cy="0"/>
@@ -2325,13 +2413,13 @@
       </p:grpSpPr>
       <p:sp>
         <p:nvSpPr>
-          <p:cNvPr id="16" name="Google Shape;16;p3"/>
+          <p:cNvPr id="867531714" name="Google Shape;16;p3"/>
           <p:cNvSpPr txBox="1"/>
           <p:nvPr>
-            <p:ph idx="1" type="subTitle"/>
+            <p:ph type="subTitle" idx="1"/>
           </p:nvPr>
         </p:nvSpPr>
-        <p:spPr>
+        <p:spPr bwMode="auto">
           <a:xfrm>
             <a:off x="895950" y="1682000"/>
             <a:ext cx="3847199" cy="2379900"/>
@@ -2345,7 +2433,7 @@
           </a:ln>
         </p:spPr>
         <p:txBody>
-          <a:bodyPr anchorCtr="0" anchor="t" bIns="91425" lIns="91425" spcFirstLastPara="1" rIns="91425" wrap="square" tIns="91425">
+          <a:bodyPr spcFirstLastPara="1" wrap="square" lIns="91425" tIns="91425" rIns="91425" bIns="91425" anchor="t" anchorCtr="0">
             <a:noAutofit/>
           </a:bodyPr>
           <a:lstStyle>
@@ -2479,18 +2567,23 @@
               <a:defRPr/>
             </a:lvl9pPr>
           </a:lstStyle>
-          <a:p/>
+          <a:p>
+            <a:pPr>
+              <a:defRPr/>
+            </a:pPr>
+            <a:endParaRPr/>
+          </a:p>
         </p:txBody>
       </p:sp>
       <p:sp>
         <p:nvSpPr>
-          <p:cNvPr id="17" name="Google Shape;17;p3"/>
+          <p:cNvPr id="13728323" name="Google Shape;17;p3"/>
           <p:cNvSpPr txBox="1"/>
           <p:nvPr>
             <p:ph type="title"/>
           </p:nvPr>
         </p:nvSpPr>
-        <p:spPr>
+        <p:spPr bwMode="auto">
           <a:xfrm>
             <a:off x="713225" y="445025"/>
             <a:ext cx="5679900" cy="572700"/>
@@ -2504,7 +2597,7 @@
           </a:ln>
         </p:spPr>
         <p:txBody>
-          <a:bodyPr anchorCtr="0" anchor="t" bIns="91425" lIns="91425" spcFirstLastPara="1" rIns="91425" wrap="square" tIns="91425">
+          <a:bodyPr spcFirstLastPara="1" wrap="square" lIns="91425" tIns="91425" rIns="91425" bIns="91425" anchor="t" anchorCtr="0">
             <a:noAutofit/>
           </a:bodyPr>
           <a:lstStyle>
@@ -2635,16 +2728,21 @@
               <a:defRPr/>
             </a:lvl9pPr>
           </a:lstStyle>
-          <a:p/>
+          <a:p>
+            <a:pPr>
+              <a:defRPr/>
+            </a:pPr>
+            <a:endParaRPr/>
+          </a:p>
         </p:txBody>
       </p:sp>
       <p:cxnSp>
         <p:nvCxnSpPr>
-          <p:cNvPr id="18" name="Google Shape;18;p3"/>
+          <p:cNvPr id="264327882" name="Google Shape;18;p3"/>
           <p:cNvCxnSpPr/>
           <p:nvPr/>
         </p:nvCxnSpPr>
-        <p:spPr>
+        <p:spPr bwMode="auto">
           <a:xfrm>
             <a:off x="-72550" y="274100"/>
             <a:ext cx="9287400" cy="0"/>
@@ -2653,24 +2751,24 @@
             <a:avLst/>
           </a:prstGeom>
           <a:noFill/>
-          <a:ln cap="flat" cmpd="sng" w="28575">
+          <a:ln w="28575" cap="flat" cmpd="sng">
             <a:solidFill>
               <a:schemeClr val="accent1"/>
             </a:solidFill>
             <a:prstDash val="solid"/>
             <a:round/>
-            <a:headEnd len="sm" w="sm" type="none"/>
-            <a:tailEnd len="sm" w="sm" type="none"/>
+            <a:headEnd type="none" w="sm" len="sm"/>
+            <a:tailEnd type="none" w="sm" len="sm"/>
           </a:ln>
         </p:spPr>
       </p:cxnSp>
       <p:cxnSp>
         <p:nvCxnSpPr>
-          <p:cNvPr id="19" name="Google Shape;19;p3"/>
+          <p:cNvPr id="1249777892" name="Google Shape;19;p3"/>
           <p:cNvCxnSpPr/>
           <p:nvPr/>
         </p:nvCxnSpPr>
-        <p:spPr>
+        <p:spPr bwMode="auto">
           <a:xfrm>
             <a:off x="-72550" y="4877450"/>
             <a:ext cx="9287400" cy="0"/>
@@ -2679,42 +2777,42 @@
             <a:avLst/>
           </a:prstGeom>
           <a:noFill/>
-          <a:ln cap="flat" cmpd="sng" w="28575">
+          <a:ln w="28575" cap="flat" cmpd="sng">
             <a:solidFill>
               <a:schemeClr val="accent1"/>
             </a:solidFill>
             <a:prstDash val="solid"/>
             <a:round/>
-            <a:headEnd len="sm" w="sm" type="none"/>
-            <a:tailEnd len="sm" w="sm" type="none"/>
+            <a:headEnd type="none" w="sm" len="sm"/>
+            <a:tailEnd type="none" w="sm" len="sm"/>
           </a:ln>
         </p:spPr>
       </p:cxnSp>
       <p:cxnSp>
         <p:nvCxnSpPr>
-          <p:cNvPr id="20" name="Google Shape;20;p3"/>
+          <p:cNvPr id="1952518534" name="Google Shape;20;p3"/>
           <p:cNvCxnSpPr/>
           <p:nvPr/>
         </p:nvCxnSpPr>
-        <p:spPr>
+        <p:spPr bwMode="auto">
           <a:xfrm flipH="1">
             <a:off x="5925450" y="2797500"/>
             <a:ext cx="3378000" cy="2466900"/>
           </a:xfrm>
           <a:prstGeom prst="curvedConnector3">
             <a:avLst>
-              <a:gd fmla="val 50000" name="adj1"/>
+              <a:gd name="adj1" fmla="val 50000"/>
             </a:avLst>
           </a:prstGeom>
           <a:noFill/>
-          <a:ln cap="flat" cmpd="sng" w="28575">
+          <a:ln w="28575" cap="flat" cmpd="sng">
             <a:solidFill>
               <a:schemeClr val="accent2"/>
             </a:solidFill>
             <a:prstDash val="solid"/>
             <a:round/>
-            <a:headEnd len="sm" w="sm" type="none"/>
-            <a:tailEnd len="sm" w="sm" type="none"/>
+            <a:headEnd type="none" w="sm" len="sm"/>
+            <a:tailEnd type="none" w="sm" len="sm"/>
           </a:ln>
         </p:spPr>
       </p:cxnSp>
@@ -2727,15 +2825,15 @@
 </file>
 
 <file path=ppt/slideLayouts/slideLayout3.xml><?xml version="1.0" encoding="utf-8"?>
-<p:sldLayout xmlns:a="http://schemas.openxmlformats.org/drawingml/2006/main" xmlns:r="http://schemas.openxmlformats.org/officeDocument/2006/relationships" xmlns:mc="http://schemas.openxmlformats.org/markup-compatibility/2006" xmlns:mv="urn:schemas-microsoft-com:mac:vml" xmlns:p="http://schemas.openxmlformats.org/presentationml/2006/main" xmlns:c="http://schemas.openxmlformats.org/drawingml/2006/chart" xmlns:dgm="http://schemas.openxmlformats.org/drawingml/2006/diagram" xmlns:o="urn:schemas-microsoft-com:office:office" xmlns:v="urn:schemas-microsoft-com:vml" xmlns:pvml="urn:schemas-microsoft-com:office:powerpoint" xmlns:com="http://schemas.openxmlformats.org/drawingml/2006/compatibility" xmlns:p14="http://schemas.microsoft.com/office/powerpoint/2010/main" xmlns:p15="http://schemas.microsoft.com/office/powerpoint/2012/main" xmlns:ahyp="http://schemas.microsoft.com/office/drawing/2018/hyperlinkcolor" matchingName="Title and text">
+<p:sldLayout xmlns:a="http://schemas.openxmlformats.org/drawingml/2006/main" xmlns:r="http://schemas.openxmlformats.org/officeDocument/2006/relationships" xmlns:p="http://schemas.openxmlformats.org/presentationml/2006/main" xmlns:m="http://schemas.openxmlformats.org/officeDocument/2006/math" xmlns:w="http://schemas.openxmlformats.org/wordprocessingml/2006/main" matchingName="Title and text" preserve="0" showMasterPhAnim="0" showMasterSp="1" userDrawn="1">
   <p:cSld name="CUSTOM_13">
     <p:spTree>
       <p:nvGrpSpPr>
-        <p:cNvPr id="21" name="Shape 21"/>
+        <p:cNvPr id="1" name=""/>
         <p:cNvGrpSpPr/>
         <p:nvPr/>
       </p:nvGrpSpPr>
-      <p:grpSpPr>
+      <p:grpSpPr bwMode="auto">
         <a:xfrm>
           <a:off x="0" y="0"/>
           <a:ext cx="0" cy="0"/>
@@ -2745,13 +2843,13 @@
       </p:grpSpPr>
       <p:sp>
         <p:nvSpPr>
-          <p:cNvPr id="22" name="Google Shape;22;p4"/>
+          <p:cNvPr id="301537513" name="Google Shape;22;p4"/>
           <p:cNvSpPr txBox="1"/>
           <p:nvPr>
-            <p:ph idx="1" type="subTitle"/>
+            <p:ph type="subTitle" idx="1"/>
           </p:nvPr>
         </p:nvSpPr>
-        <p:spPr>
+        <p:spPr bwMode="auto">
           <a:xfrm>
             <a:off x="2648400" y="1682000"/>
             <a:ext cx="3847199" cy="2379900"/>
@@ -2765,7 +2863,7 @@
           </a:ln>
         </p:spPr>
         <p:txBody>
-          <a:bodyPr anchorCtr="0" anchor="t" bIns="91425" lIns="91425" spcFirstLastPara="1" rIns="91425" wrap="square" tIns="91425">
+          <a:bodyPr spcFirstLastPara="1" wrap="square" lIns="91425" tIns="91425" rIns="91425" bIns="91425" anchor="t" anchorCtr="0">
             <a:noAutofit/>
           </a:bodyPr>
           <a:lstStyle>
@@ -2923,18 +3021,23 @@
               <a:defRPr/>
             </a:lvl9pPr>
           </a:lstStyle>
-          <a:p/>
+          <a:p>
+            <a:pPr>
+              <a:defRPr/>
+            </a:pPr>
+            <a:endParaRPr/>
+          </a:p>
         </p:txBody>
       </p:sp>
       <p:sp>
         <p:nvSpPr>
-          <p:cNvPr id="23" name="Google Shape;23;p4"/>
+          <p:cNvPr id="950479336" name="Google Shape;23;p4"/>
           <p:cNvSpPr txBox="1"/>
           <p:nvPr>
             <p:ph type="title"/>
           </p:nvPr>
         </p:nvSpPr>
-        <p:spPr>
+        <p:spPr bwMode="auto">
           <a:xfrm>
             <a:off x="1732050" y="445025"/>
             <a:ext cx="5679900" cy="572700"/>
@@ -2948,7 +3051,7 @@
           </a:ln>
         </p:spPr>
         <p:txBody>
-          <a:bodyPr anchorCtr="0" anchor="t" bIns="91425" lIns="91425" spcFirstLastPara="1" rIns="91425" wrap="square" tIns="91425">
+          <a:bodyPr spcFirstLastPara="1" wrap="square" lIns="91425" tIns="91425" rIns="91425" bIns="91425" anchor="t" anchorCtr="0">
             <a:noAutofit/>
           </a:bodyPr>
           <a:lstStyle>
@@ -3079,16 +3182,21 @@
               <a:defRPr/>
             </a:lvl9pPr>
           </a:lstStyle>
-          <a:p/>
+          <a:p>
+            <a:pPr>
+              <a:defRPr/>
+            </a:pPr>
+            <a:endParaRPr/>
+          </a:p>
         </p:txBody>
       </p:sp>
       <p:cxnSp>
         <p:nvCxnSpPr>
-          <p:cNvPr id="24" name="Google Shape;24;p4"/>
+          <p:cNvPr id="1979171402" name="Google Shape;24;p4"/>
           <p:cNvCxnSpPr/>
           <p:nvPr/>
         </p:nvCxnSpPr>
-        <p:spPr>
+        <p:spPr bwMode="auto">
           <a:xfrm>
             <a:off x="-72550" y="274100"/>
             <a:ext cx="9287400" cy="0"/>
@@ -3097,24 +3205,24 @@
             <a:avLst/>
           </a:prstGeom>
           <a:noFill/>
-          <a:ln cap="flat" cmpd="sng" w="28575">
+          <a:ln w="28575" cap="flat" cmpd="sng">
             <a:solidFill>
               <a:schemeClr val="accent1"/>
             </a:solidFill>
             <a:prstDash val="solid"/>
             <a:round/>
-            <a:headEnd len="sm" w="sm" type="none"/>
-            <a:tailEnd len="sm" w="sm" type="none"/>
+            <a:headEnd type="none" w="sm" len="sm"/>
+            <a:tailEnd type="none" w="sm" len="sm"/>
           </a:ln>
         </p:spPr>
       </p:cxnSp>
       <p:cxnSp>
         <p:nvCxnSpPr>
-          <p:cNvPr id="25" name="Google Shape;25;p4"/>
+          <p:cNvPr id="784510822" name="Google Shape;25;p4"/>
           <p:cNvCxnSpPr/>
           <p:nvPr/>
         </p:nvCxnSpPr>
-        <p:spPr>
+        <p:spPr bwMode="auto">
           <a:xfrm>
             <a:off x="-72550" y="4877450"/>
             <a:ext cx="9287400" cy="0"/>
@@ -3123,70 +3231,70 @@
             <a:avLst/>
           </a:prstGeom>
           <a:noFill/>
-          <a:ln cap="flat" cmpd="sng" w="28575">
+          <a:ln w="28575" cap="flat" cmpd="sng">
             <a:solidFill>
               <a:schemeClr val="accent1"/>
             </a:solidFill>
             <a:prstDash val="solid"/>
             <a:round/>
-            <a:headEnd len="sm" w="sm" type="none"/>
-            <a:tailEnd len="sm" w="sm" type="none"/>
+            <a:headEnd type="none" w="sm" len="sm"/>
+            <a:tailEnd type="none" w="sm" len="sm"/>
           </a:ln>
         </p:spPr>
       </p:cxnSp>
       <p:cxnSp>
         <p:nvCxnSpPr>
-          <p:cNvPr id="26" name="Google Shape;26;p4"/>
+          <p:cNvPr id="2100194970" name="Google Shape;26;p4"/>
           <p:cNvCxnSpPr/>
           <p:nvPr/>
         </p:nvCxnSpPr>
-        <p:spPr>
+        <p:spPr bwMode="auto">
           <a:xfrm>
             <a:off x="-250225" y="4076450"/>
             <a:ext cx="1926900" cy="1161000"/>
           </a:xfrm>
           <a:prstGeom prst="curvedConnector3">
             <a:avLst>
-              <a:gd fmla="val 50000" name="adj1"/>
+              <a:gd name="adj1" fmla="val 50000"/>
             </a:avLst>
           </a:prstGeom>
           <a:noFill/>
-          <a:ln cap="flat" cmpd="sng" w="28575">
+          <a:ln w="28575" cap="flat" cmpd="sng">
             <a:solidFill>
               <a:schemeClr val="accent2"/>
             </a:solidFill>
             <a:prstDash val="solid"/>
             <a:round/>
-            <a:headEnd len="sm" w="sm" type="none"/>
-            <a:tailEnd len="sm" w="sm" type="none"/>
+            <a:headEnd type="none" w="sm" len="sm"/>
+            <a:tailEnd type="none" w="sm" len="sm"/>
           </a:ln>
         </p:spPr>
       </p:cxnSp>
       <p:cxnSp>
         <p:nvCxnSpPr>
-          <p:cNvPr id="27" name="Google Shape;27;p4"/>
+          <p:cNvPr id="264444521" name="Google Shape;27;p4"/>
           <p:cNvCxnSpPr/>
           <p:nvPr/>
         </p:nvCxnSpPr>
-        <p:spPr>
+        <p:spPr bwMode="auto">
           <a:xfrm>
             <a:off x="7441150" y="-48375"/>
             <a:ext cx="1926900" cy="1161000"/>
           </a:xfrm>
           <a:prstGeom prst="curvedConnector3">
             <a:avLst>
-              <a:gd fmla="val 50000" name="adj1"/>
+              <a:gd name="adj1" fmla="val 50000"/>
             </a:avLst>
           </a:prstGeom>
           <a:noFill/>
-          <a:ln cap="flat" cmpd="sng" w="28575">
+          <a:ln w="28575" cap="flat" cmpd="sng">
             <a:solidFill>
               <a:schemeClr val="accent2"/>
             </a:solidFill>
             <a:prstDash val="solid"/>
             <a:round/>
-            <a:headEnd len="sm" w="sm" type="none"/>
-            <a:tailEnd len="sm" w="sm" type="none"/>
+            <a:headEnd type="none" w="sm" len="sm"/>
+            <a:tailEnd type="none" w="sm" len="sm"/>
           </a:ln>
         </p:spPr>
       </p:cxnSp>
@@ -3199,15 +3307,15 @@
 </file>
 
 <file path=ppt/slideLayouts/slideLayout4.xml><?xml version="1.0" encoding="utf-8"?>
-<p:sldLayout xmlns:a="http://schemas.openxmlformats.org/drawingml/2006/main" xmlns:r="http://schemas.openxmlformats.org/officeDocument/2006/relationships" xmlns:mc="http://schemas.openxmlformats.org/markup-compatibility/2006" xmlns:mv="urn:schemas-microsoft-com:mac:vml" xmlns:p="http://schemas.openxmlformats.org/presentationml/2006/main" xmlns:c="http://schemas.openxmlformats.org/drawingml/2006/chart" xmlns:dgm="http://schemas.openxmlformats.org/drawingml/2006/diagram" xmlns:o="urn:schemas-microsoft-com:office:office" xmlns:v="urn:schemas-microsoft-com:vml" xmlns:pvml="urn:schemas-microsoft-com:office:powerpoint" xmlns:com="http://schemas.openxmlformats.org/drawingml/2006/compatibility" xmlns:p14="http://schemas.microsoft.com/office/powerpoint/2010/main" xmlns:p15="http://schemas.microsoft.com/office/powerpoint/2012/main" xmlns:ahyp="http://schemas.microsoft.com/office/drawing/2018/hyperlinkcolor" matchingName="Title and text 1">
+<p:sldLayout xmlns:a="http://schemas.openxmlformats.org/drawingml/2006/main" xmlns:r="http://schemas.openxmlformats.org/officeDocument/2006/relationships" xmlns:p="http://schemas.openxmlformats.org/presentationml/2006/main" xmlns:m="http://schemas.openxmlformats.org/officeDocument/2006/math" xmlns:w="http://schemas.openxmlformats.org/wordprocessingml/2006/main" matchingName="Title and text 1" preserve="0" showMasterPhAnim="0" showMasterSp="1" userDrawn="1">
   <p:cSld name="CUSTOM_3">
     <p:spTree>
       <p:nvGrpSpPr>
-        <p:cNvPr id="28" name="Shape 28"/>
+        <p:cNvPr id="1" name=""/>
         <p:cNvGrpSpPr/>
         <p:nvPr/>
       </p:nvGrpSpPr>
-      <p:grpSpPr>
+      <p:grpSpPr bwMode="auto">
         <a:xfrm>
           <a:off x="0" y="0"/>
           <a:ext cx="0" cy="0"/>
@@ -3217,13 +3325,13 @@
       </p:grpSpPr>
       <p:sp>
         <p:nvSpPr>
-          <p:cNvPr id="29" name="Google Shape;29;p5"/>
+          <p:cNvPr id="1609019624" name="Google Shape;29;p5"/>
           <p:cNvSpPr txBox="1"/>
           <p:nvPr>
             <p:ph type="title"/>
           </p:nvPr>
         </p:nvSpPr>
-        <p:spPr>
+        <p:spPr bwMode="auto">
           <a:xfrm>
             <a:off x="845550" y="1482825"/>
             <a:ext cx="7452900" cy="1291200"/>
@@ -3237,7 +3345,7 @@
           </a:ln>
         </p:spPr>
         <p:txBody>
-          <a:bodyPr anchorCtr="0" anchor="t" bIns="91425" lIns="91425" spcFirstLastPara="1" rIns="91425" wrap="square" tIns="91425">
+          <a:bodyPr spcFirstLastPara="1" wrap="square" lIns="91425" tIns="91425" rIns="91425" bIns="91425" anchor="t" anchorCtr="0">
             <a:noAutofit/>
           </a:bodyPr>
           <a:lstStyle>
@@ -3368,18 +3476,23 @@
               <a:defRPr sz="9000"/>
             </a:lvl9pPr>
           </a:lstStyle>
-          <a:p/>
+          <a:p>
+            <a:pPr>
+              <a:defRPr/>
+            </a:pPr>
+            <a:endParaRPr/>
+          </a:p>
         </p:txBody>
       </p:sp>
       <p:sp>
         <p:nvSpPr>
-          <p:cNvPr id="30" name="Google Shape;30;p5"/>
+          <p:cNvPr id="1096113444" name="Google Shape;30;p5"/>
           <p:cNvSpPr txBox="1"/>
           <p:nvPr>
-            <p:ph idx="1" type="subTitle"/>
+            <p:ph type="subTitle" idx="1"/>
           </p:nvPr>
         </p:nvSpPr>
-        <p:spPr>
+        <p:spPr bwMode="auto">
           <a:xfrm>
             <a:off x="2299500" y="2972150"/>
             <a:ext cx="4545000" cy="554400"/>
@@ -3393,7 +3506,7 @@
           </a:ln>
         </p:spPr>
         <p:txBody>
-          <a:bodyPr anchorCtr="0" anchor="t" bIns="91425" lIns="91425" spcFirstLastPara="1" rIns="91425" wrap="square" tIns="91425">
+          <a:bodyPr spcFirstLastPara="1" wrap="square" lIns="91425" tIns="91425" rIns="91425" bIns="91425" anchor="t" anchorCtr="0">
             <a:noAutofit/>
           </a:bodyPr>
           <a:lstStyle>
@@ -3524,16 +3637,21 @@
               <a:defRPr sz="2100"/>
             </a:lvl9pPr>
           </a:lstStyle>
-          <a:p/>
+          <a:p>
+            <a:pPr>
+              <a:defRPr/>
+            </a:pPr>
+            <a:endParaRPr/>
+          </a:p>
         </p:txBody>
       </p:sp>
       <p:cxnSp>
         <p:nvCxnSpPr>
-          <p:cNvPr id="31" name="Google Shape;31;p5"/>
+          <p:cNvPr id="1219470749" name="Google Shape;31;p5"/>
           <p:cNvCxnSpPr/>
           <p:nvPr/>
         </p:nvCxnSpPr>
-        <p:spPr>
+        <p:spPr bwMode="auto">
           <a:xfrm>
             <a:off x="-72550" y="274100"/>
             <a:ext cx="9287400" cy="0"/>
@@ -3542,24 +3660,24 @@
             <a:avLst/>
           </a:prstGeom>
           <a:noFill/>
-          <a:ln cap="flat" cmpd="sng" w="28575">
+          <a:ln w="28575" cap="flat" cmpd="sng">
             <a:solidFill>
               <a:schemeClr val="accent1"/>
             </a:solidFill>
             <a:prstDash val="solid"/>
             <a:round/>
-            <a:headEnd len="sm" w="sm" type="none"/>
-            <a:tailEnd len="sm" w="sm" type="none"/>
+            <a:headEnd type="none" w="sm" len="sm"/>
+            <a:tailEnd type="none" w="sm" len="sm"/>
           </a:ln>
         </p:spPr>
       </p:cxnSp>
       <p:cxnSp>
         <p:nvCxnSpPr>
-          <p:cNvPr id="32" name="Google Shape;32;p5"/>
+          <p:cNvPr id="1502591993" name="Google Shape;32;p5"/>
           <p:cNvCxnSpPr/>
           <p:nvPr/>
         </p:nvCxnSpPr>
-        <p:spPr>
+        <p:spPr bwMode="auto">
           <a:xfrm>
             <a:off x="-72550" y="4877450"/>
             <a:ext cx="9287400" cy="0"/>
@@ -3568,14 +3686,14 @@
             <a:avLst/>
           </a:prstGeom>
           <a:noFill/>
-          <a:ln cap="flat" cmpd="sng" w="28575">
+          <a:ln w="28575" cap="flat" cmpd="sng">
             <a:solidFill>
               <a:schemeClr val="accent1"/>
             </a:solidFill>
             <a:prstDash val="solid"/>
             <a:round/>
-            <a:headEnd len="sm" w="sm" type="none"/>
-            <a:tailEnd len="sm" w="sm" type="none"/>
+            <a:headEnd type="none" w="sm" len="sm"/>
+            <a:tailEnd type="none" w="sm" len="sm"/>
           </a:ln>
         </p:spPr>
       </p:cxnSp>
@@ -3588,15 +3706,15 @@
 </file>
 
 <file path=ppt/slideLayouts/slideLayout5.xml><?xml version="1.0" encoding="utf-8"?>
-<p:sldLayout xmlns:a="http://schemas.openxmlformats.org/drawingml/2006/main" xmlns:r="http://schemas.openxmlformats.org/officeDocument/2006/relationships" xmlns:mc="http://schemas.openxmlformats.org/markup-compatibility/2006" xmlns:mv="urn:schemas-microsoft-com:mac:vml" xmlns:p="http://schemas.openxmlformats.org/presentationml/2006/main" xmlns:c="http://schemas.openxmlformats.org/drawingml/2006/chart" xmlns:dgm="http://schemas.openxmlformats.org/drawingml/2006/diagram" xmlns:o="urn:schemas-microsoft-com:office:office" xmlns:v="urn:schemas-microsoft-com:vml" xmlns:pvml="urn:schemas-microsoft-com:office:powerpoint" xmlns:com="http://schemas.openxmlformats.org/drawingml/2006/compatibility" xmlns:p14="http://schemas.microsoft.com/office/powerpoint/2010/main" xmlns:p15="http://schemas.microsoft.com/office/powerpoint/2012/main" xmlns:ahyp="http://schemas.microsoft.com/office/drawing/2018/hyperlinkcolor" matchingName="Section title and description">
+<p:sldLayout xmlns:a="http://schemas.openxmlformats.org/drawingml/2006/main" xmlns:r="http://schemas.openxmlformats.org/officeDocument/2006/relationships" xmlns:p="http://schemas.openxmlformats.org/presentationml/2006/main" xmlns:m="http://schemas.openxmlformats.org/officeDocument/2006/math" xmlns:w="http://schemas.openxmlformats.org/wordprocessingml/2006/main" matchingName="Section title and description" preserve="0" showMasterPhAnim="0" showMasterSp="1" userDrawn="1">
   <p:cSld name="SECTION_TITLE_AND_DESCRIPTION">
     <p:spTree>
       <p:nvGrpSpPr>
-        <p:cNvPr id="33" name="Shape 33"/>
+        <p:cNvPr id="1" name=""/>
         <p:cNvGrpSpPr/>
         <p:nvPr/>
       </p:nvGrpSpPr>
-      <p:grpSpPr>
+      <p:grpSpPr bwMode="auto">
         <a:xfrm>
           <a:off x="0" y="0"/>
           <a:ext cx="0" cy="0"/>
@@ -3606,13 +3724,13 @@
       </p:grpSpPr>
       <p:sp>
         <p:nvSpPr>
-          <p:cNvPr id="34" name="Google Shape;34;p6"/>
+          <p:cNvPr id="1583455089" name="Google Shape;34;p6"/>
           <p:cNvSpPr txBox="1"/>
           <p:nvPr>
-            <p:ph idx="1" type="subTitle"/>
+            <p:ph type="subTitle" idx="1"/>
           </p:nvPr>
         </p:nvSpPr>
-        <p:spPr>
+        <p:spPr bwMode="auto">
           <a:xfrm>
             <a:off x="895950" y="1682000"/>
             <a:ext cx="3847199" cy="2379900"/>
@@ -3626,7 +3744,7 @@
           </a:ln>
         </p:spPr>
         <p:txBody>
-          <a:bodyPr anchorCtr="0" anchor="t" bIns="91425" lIns="91425" spcFirstLastPara="1" rIns="91425" wrap="square" tIns="91425">
+          <a:bodyPr spcFirstLastPara="1" wrap="square" lIns="91425" tIns="91425" rIns="91425" bIns="91425" anchor="t" anchorCtr="0">
             <a:noAutofit/>
           </a:bodyPr>
           <a:lstStyle>
@@ -3760,18 +3878,23 @@
               <a:defRPr/>
             </a:lvl9pPr>
           </a:lstStyle>
-          <a:p/>
+          <a:p>
+            <a:pPr>
+              <a:defRPr/>
+            </a:pPr>
+            <a:endParaRPr/>
+          </a:p>
         </p:txBody>
       </p:sp>
       <p:sp>
         <p:nvSpPr>
-          <p:cNvPr id="35" name="Google Shape;35;p6"/>
+          <p:cNvPr id="1750138418" name="Google Shape;35;p6"/>
           <p:cNvSpPr txBox="1"/>
           <p:nvPr>
             <p:ph type="title"/>
           </p:nvPr>
         </p:nvSpPr>
-        <p:spPr>
+        <p:spPr bwMode="auto">
           <a:xfrm>
             <a:off x="713225" y="445025"/>
             <a:ext cx="5679900" cy="572700"/>
@@ -3785,7 +3908,7 @@
           </a:ln>
         </p:spPr>
         <p:txBody>
-          <a:bodyPr anchorCtr="0" anchor="t" bIns="91425" lIns="91425" spcFirstLastPara="1" rIns="91425" wrap="square" tIns="91425">
+          <a:bodyPr spcFirstLastPara="1" wrap="square" lIns="91425" tIns="91425" rIns="91425" bIns="91425" anchor="t" anchorCtr="0">
             <a:noAutofit/>
           </a:bodyPr>
           <a:lstStyle>
@@ -3916,16 +4039,21 @@
               <a:defRPr/>
             </a:lvl9pPr>
           </a:lstStyle>
-          <a:p/>
+          <a:p>
+            <a:pPr>
+              <a:defRPr/>
+            </a:pPr>
+            <a:endParaRPr/>
+          </a:p>
         </p:txBody>
       </p:sp>
       <p:cxnSp>
         <p:nvCxnSpPr>
-          <p:cNvPr id="36" name="Google Shape;36;p6"/>
+          <p:cNvPr id="141281966" name="Google Shape;36;p6"/>
           <p:cNvCxnSpPr/>
           <p:nvPr/>
         </p:nvCxnSpPr>
-        <p:spPr>
+        <p:spPr bwMode="auto">
           <a:xfrm>
             <a:off x="-72550" y="274100"/>
             <a:ext cx="9287400" cy="0"/>
@@ -3934,24 +4062,24 @@
             <a:avLst/>
           </a:prstGeom>
           <a:noFill/>
-          <a:ln cap="flat" cmpd="sng" w="28575">
+          <a:ln w="28575" cap="flat" cmpd="sng">
             <a:solidFill>
               <a:schemeClr val="accent1"/>
             </a:solidFill>
             <a:prstDash val="solid"/>
             <a:round/>
-            <a:headEnd len="sm" w="sm" type="none"/>
-            <a:tailEnd len="sm" w="sm" type="none"/>
+            <a:headEnd type="none" w="sm" len="sm"/>
+            <a:tailEnd type="none" w="sm" len="sm"/>
           </a:ln>
         </p:spPr>
       </p:cxnSp>
       <p:cxnSp>
         <p:nvCxnSpPr>
-          <p:cNvPr id="37" name="Google Shape;37;p6"/>
+          <p:cNvPr id="1084155872" name="Google Shape;37;p6"/>
           <p:cNvCxnSpPr/>
           <p:nvPr/>
         </p:nvCxnSpPr>
-        <p:spPr>
+        <p:spPr bwMode="auto">
           <a:xfrm>
             <a:off x="-72550" y="4877450"/>
             <a:ext cx="9287400" cy="0"/>
@@ -3960,42 +4088,42 @@
             <a:avLst/>
           </a:prstGeom>
           <a:noFill/>
-          <a:ln cap="flat" cmpd="sng" w="28575">
+          <a:ln w="28575" cap="flat" cmpd="sng">
             <a:solidFill>
               <a:schemeClr val="accent1"/>
             </a:solidFill>
             <a:prstDash val="solid"/>
             <a:round/>
-            <a:headEnd len="sm" w="sm" type="none"/>
-            <a:tailEnd len="sm" w="sm" type="none"/>
+            <a:headEnd type="none" w="sm" len="sm"/>
+            <a:tailEnd type="none" w="sm" len="sm"/>
           </a:ln>
         </p:spPr>
       </p:cxnSp>
       <p:cxnSp>
         <p:nvCxnSpPr>
-          <p:cNvPr id="38" name="Google Shape;38;p6"/>
+          <p:cNvPr id="1070522619" name="Google Shape;38;p6"/>
           <p:cNvCxnSpPr/>
           <p:nvPr/>
         </p:nvCxnSpPr>
-        <p:spPr>
+        <p:spPr bwMode="auto">
           <a:xfrm flipH="1">
             <a:off x="5925450" y="2797500"/>
             <a:ext cx="3378000" cy="2466900"/>
           </a:xfrm>
           <a:prstGeom prst="curvedConnector3">
             <a:avLst>
-              <a:gd fmla="val 50000" name="adj1"/>
+              <a:gd name="adj1" fmla="val 50000"/>
             </a:avLst>
           </a:prstGeom>
           <a:noFill/>
-          <a:ln cap="flat" cmpd="sng" w="28575">
+          <a:ln w="28575" cap="flat" cmpd="sng">
             <a:solidFill>
               <a:schemeClr val="accent2"/>
             </a:solidFill>
             <a:prstDash val="solid"/>
             <a:round/>
-            <a:headEnd len="sm" w="sm" type="none"/>
-            <a:tailEnd len="sm" w="sm" type="none"/>
+            <a:headEnd type="none" w="sm" len="sm"/>
+            <a:tailEnd type="none" w="sm" len="sm"/>
           </a:ln>
         </p:spPr>
       </p:cxnSp>
@@ -4008,20 +4136,20 @@
 </file>
 
 <file path=ppt/slideLayouts/slideLayout6.xml><?xml version="1.0" encoding="utf-8"?>
-<p:sldLayout xmlns:a="http://schemas.openxmlformats.org/drawingml/2006/main" xmlns:r="http://schemas.openxmlformats.org/officeDocument/2006/relationships" xmlns:mc="http://schemas.openxmlformats.org/markup-compatibility/2006" xmlns:mv="urn:schemas-microsoft-com:mac:vml" xmlns:p="http://schemas.openxmlformats.org/presentationml/2006/main" xmlns:c="http://schemas.openxmlformats.org/drawingml/2006/chart" xmlns:dgm="http://schemas.openxmlformats.org/drawingml/2006/diagram" xmlns:o="urn:schemas-microsoft-com:office:office" xmlns:v="urn:schemas-microsoft-com:vml" xmlns:pvml="urn:schemas-microsoft-com:office:powerpoint" xmlns:com="http://schemas.openxmlformats.org/drawingml/2006/compatibility" xmlns:p14="http://schemas.microsoft.com/office/powerpoint/2010/main" xmlns:p15="http://schemas.microsoft.com/office/powerpoint/2012/main" xmlns:ahyp="http://schemas.microsoft.com/office/drawing/2018/hyperlinkcolor" matchingName="Blank" type="blank">
+<p:sldLayout xmlns:a="http://schemas.openxmlformats.org/drawingml/2006/main" xmlns:r="http://schemas.openxmlformats.org/officeDocument/2006/relationships" xmlns:p="http://schemas.openxmlformats.org/presentationml/2006/main" xmlns:m="http://schemas.openxmlformats.org/officeDocument/2006/math" xmlns:w="http://schemas.openxmlformats.org/wordprocessingml/2006/main" matchingName="Blank" preserve="0" showMasterPhAnim="0" showMasterSp="1" type="blank" userDrawn="1">
   <p:cSld name="BLANK">
     <p:bg>
-      <p:bgPr>
+      <p:bgPr shadeToTitle="0">
         <a:noFill/>
       </p:bgPr>
     </p:bg>
     <p:spTree>
       <p:nvGrpSpPr>
-        <p:cNvPr id="39" name="Shape 39"/>
+        <p:cNvPr id="1" name=""/>
         <p:cNvGrpSpPr/>
         <p:nvPr/>
       </p:nvGrpSpPr>
-      <p:grpSpPr>
+      <p:grpSpPr bwMode="auto">
         <a:xfrm>
           <a:off x="0" y="0"/>
           <a:ext cx="0" cy="0"/>
@@ -4038,15 +4166,15 @@
 </file>
 
 <file path=ppt/slideLayouts/slideLayout7.xml><?xml version="1.0" encoding="utf-8"?>
-<p:sldLayout xmlns:a="http://schemas.openxmlformats.org/drawingml/2006/main" xmlns:r="http://schemas.openxmlformats.org/officeDocument/2006/relationships" xmlns:mc="http://schemas.openxmlformats.org/markup-compatibility/2006" xmlns:mv="urn:schemas-microsoft-com:mac:vml" xmlns:p="http://schemas.openxmlformats.org/presentationml/2006/main" xmlns:c="http://schemas.openxmlformats.org/drawingml/2006/chart" xmlns:dgm="http://schemas.openxmlformats.org/drawingml/2006/diagram" xmlns:o="urn:schemas-microsoft-com:office:office" xmlns:v="urn:schemas-microsoft-com:vml" xmlns:pvml="urn:schemas-microsoft-com:office:powerpoint" xmlns:com="http://schemas.openxmlformats.org/drawingml/2006/compatibility" xmlns:p14="http://schemas.microsoft.com/office/powerpoint/2010/main" xmlns:p15="http://schemas.microsoft.com/office/powerpoint/2012/main" xmlns:ahyp="http://schemas.microsoft.com/office/drawing/2018/hyperlinkcolor" matchingName="Background">
+<p:sldLayout xmlns:a="http://schemas.openxmlformats.org/drawingml/2006/main" xmlns:r="http://schemas.openxmlformats.org/officeDocument/2006/relationships" xmlns:p="http://schemas.openxmlformats.org/presentationml/2006/main" xmlns:m="http://schemas.openxmlformats.org/officeDocument/2006/math" xmlns:w="http://schemas.openxmlformats.org/wordprocessingml/2006/main" matchingName="Background" preserve="0" showMasterPhAnim="0" showMasterSp="1" userDrawn="1">
   <p:cSld name="CUSTOM_10">
     <p:spTree>
       <p:nvGrpSpPr>
-        <p:cNvPr id="40" name="Shape 40"/>
+        <p:cNvPr id="1" name=""/>
         <p:cNvGrpSpPr/>
         <p:nvPr/>
       </p:nvGrpSpPr>
-      <p:grpSpPr>
+      <p:grpSpPr bwMode="auto">
         <a:xfrm>
           <a:off x="0" y="0"/>
           <a:ext cx="0" cy="0"/>
@@ -4056,11 +4184,11 @@
       </p:grpSpPr>
       <p:cxnSp>
         <p:nvCxnSpPr>
-          <p:cNvPr id="41" name="Google Shape;41;p8"/>
+          <p:cNvPr id="1771959875" name="Google Shape;41;p8"/>
           <p:cNvCxnSpPr/>
           <p:nvPr/>
         </p:nvCxnSpPr>
-        <p:spPr>
+        <p:spPr bwMode="auto">
           <a:xfrm>
             <a:off x="-72550" y="4877450"/>
             <a:ext cx="9287400" cy="0"/>
@@ -4069,24 +4197,24 @@
             <a:avLst/>
           </a:prstGeom>
           <a:noFill/>
-          <a:ln cap="flat" cmpd="sng" w="28575">
+          <a:ln w="28575" cap="flat" cmpd="sng">
             <a:solidFill>
               <a:schemeClr val="accent1"/>
             </a:solidFill>
             <a:prstDash val="solid"/>
             <a:round/>
-            <a:headEnd len="sm" w="sm" type="none"/>
-            <a:tailEnd len="sm" w="sm" type="none"/>
+            <a:headEnd type="none" w="sm" len="sm"/>
+            <a:tailEnd type="none" w="sm" len="sm"/>
           </a:ln>
         </p:spPr>
       </p:cxnSp>
       <p:cxnSp>
         <p:nvCxnSpPr>
-          <p:cNvPr id="42" name="Google Shape;42;p8"/>
+          <p:cNvPr id="1647705439" name="Google Shape;42;p8"/>
           <p:cNvCxnSpPr/>
           <p:nvPr/>
         </p:nvCxnSpPr>
-        <p:spPr>
+        <p:spPr bwMode="auto">
           <a:xfrm>
             <a:off x="-72550" y="274100"/>
             <a:ext cx="9287400" cy="0"/>
@@ -4095,14 +4223,14 @@
             <a:avLst/>
           </a:prstGeom>
           <a:noFill/>
-          <a:ln cap="flat" cmpd="sng" w="28575">
+          <a:ln w="28575" cap="flat" cmpd="sng">
             <a:solidFill>
               <a:schemeClr val="accent1"/>
             </a:solidFill>
             <a:prstDash val="solid"/>
             <a:round/>
-            <a:headEnd len="sm" w="sm" type="none"/>
-            <a:tailEnd len="sm" w="sm" type="none"/>
+            <a:headEnd type="none" w="sm" len="sm"/>
+            <a:tailEnd type="none" w="sm" len="sm"/>
           </a:ln>
         </p:spPr>
       </p:cxnSp>
@@ -4115,15 +4243,15 @@
 </file>
 
 <file path=ppt/slideLayouts/slideLayout8.xml><?xml version="1.0" encoding="utf-8"?>
-<p:sldLayout xmlns:a="http://schemas.openxmlformats.org/drawingml/2006/main" xmlns:r="http://schemas.openxmlformats.org/officeDocument/2006/relationships" xmlns:mc="http://schemas.openxmlformats.org/markup-compatibility/2006" xmlns:mv="urn:schemas-microsoft-com:mac:vml" xmlns:p="http://schemas.openxmlformats.org/presentationml/2006/main" xmlns:c="http://schemas.openxmlformats.org/drawingml/2006/chart" xmlns:dgm="http://schemas.openxmlformats.org/drawingml/2006/diagram" xmlns:o="urn:schemas-microsoft-com:office:office" xmlns:v="urn:schemas-microsoft-com:vml" xmlns:pvml="urn:schemas-microsoft-com:office:powerpoint" xmlns:com="http://schemas.openxmlformats.org/drawingml/2006/compatibility" xmlns:p14="http://schemas.microsoft.com/office/powerpoint/2010/main" xmlns:p15="http://schemas.microsoft.com/office/powerpoint/2012/main" xmlns:ahyp="http://schemas.microsoft.com/office/drawing/2018/hyperlinkcolor" matchingName="Background 1">
+<p:sldLayout xmlns:a="http://schemas.openxmlformats.org/drawingml/2006/main" xmlns:r="http://schemas.openxmlformats.org/officeDocument/2006/relationships" xmlns:p="http://schemas.openxmlformats.org/presentationml/2006/main" xmlns:m="http://schemas.openxmlformats.org/officeDocument/2006/math" xmlns:w="http://schemas.openxmlformats.org/wordprocessingml/2006/main" matchingName="Background 1" preserve="0" showMasterPhAnim="0" showMasterSp="1" userDrawn="1">
   <p:cSld name="CUSTOM_10_1">
     <p:spTree>
       <p:nvGrpSpPr>
-        <p:cNvPr id="43" name="Shape 43"/>
+        <p:cNvPr id="1" name=""/>
         <p:cNvGrpSpPr/>
         <p:nvPr/>
       </p:nvGrpSpPr>
-      <p:grpSpPr>
+      <p:grpSpPr bwMode="auto">
         <a:xfrm>
           <a:off x="0" y="0"/>
           <a:ext cx="0" cy="0"/>
@@ -4133,11 +4261,11 @@
       </p:grpSpPr>
       <p:cxnSp>
         <p:nvCxnSpPr>
-          <p:cNvPr id="44" name="Google Shape;44;p9"/>
+          <p:cNvPr id="1815930289" name="Google Shape;44;p9"/>
           <p:cNvCxnSpPr/>
           <p:nvPr/>
         </p:nvCxnSpPr>
-        <p:spPr>
+        <p:spPr bwMode="auto">
           <a:xfrm>
             <a:off x="-72550" y="4877450"/>
             <a:ext cx="9287400" cy="0"/>
@@ -4146,24 +4274,24 @@
             <a:avLst/>
           </a:prstGeom>
           <a:noFill/>
-          <a:ln cap="flat" cmpd="sng" w="28575">
+          <a:ln w="28575" cap="flat" cmpd="sng">
             <a:solidFill>
               <a:schemeClr val="accent1"/>
             </a:solidFill>
             <a:prstDash val="solid"/>
             <a:round/>
-            <a:headEnd len="sm" w="sm" type="none"/>
-            <a:tailEnd len="sm" w="sm" type="none"/>
+            <a:headEnd type="none" w="sm" len="sm"/>
+            <a:tailEnd type="none" w="sm" len="sm"/>
           </a:ln>
         </p:spPr>
       </p:cxnSp>
       <p:cxnSp>
         <p:nvCxnSpPr>
-          <p:cNvPr id="45" name="Google Shape;45;p9"/>
+          <p:cNvPr id="1355532976" name="Google Shape;45;p9"/>
           <p:cNvCxnSpPr/>
           <p:nvPr/>
         </p:nvCxnSpPr>
-        <p:spPr>
+        <p:spPr bwMode="auto">
           <a:xfrm>
             <a:off x="-72550" y="274100"/>
             <a:ext cx="9287400" cy="0"/>
@@ -4172,70 +4300,70 @@
             <a:avLst/>
           </a:prstGeom>
           <a:noFill/>
-          <a:ln cap="flat" cmpd="sng" w="28575">
+          <a:ln w="28575" cap="flat" cmpd="sng">
             <a:solidFill>
               <a:schemeClr val="accent1"/>
             </a:solidFill>
             <a:prstDash val="solid"/>
             <a:round/>
-            <a:headEnd len="sm" w="sm" type="none"/>
-            <a:tailEnd len="sm" w="sm" type="none"/>
+            <a:headEnd type="none" w="sm" len="sm"/>
+            <a:tailEnd type="none" w="sm" len="sm"/>
           </a:ln>
         </p:spPr>
       </p:cxnSp>
       <p:cxnSp>
         <p:nvCxnSpPr>
-          <p:cNvPr id="46" name="Google Shape;46;p9"/>
+          <p:cNvPr id="2057378147" name="Google Shape;46;p9"/>
           <p:cNvCxnSpPr/>
           <p:nvPr/>
         </p:nvCxnSpPr>
-        <p:spPr>
+        <p:spPr bwMode="auto">
           <a:xfrm>
             <a:off x="7434174" y="-125600"/>
             <a:ext cx="1993200" cy="1330200"/>
           </a:xfrm>
           <a:prstGeom prst="curvedConnector3">
             <a:avLst>
-              <a:gd fmla="val 50000" name="adj1"/>
+              <a:gd name="adj1" fmla="val 50000"/>
             </a:avLst>
           </a:prstGeom>
           <a:noFill/>
-          <a:ln cap="flat" cmpd="sng" w="28575">
+          <a:ln w="28575" cap="flat" cmpd="sng">
             <a:solidFill>
               <a:schemeClr val="accent2"/>
             </a:solidFill>
             <a:prstDash val="solid"/>
             <a:round/>
-            <a:headEnd len="sm" w="sm" type="none"/>
-            <a:tailEnd len="sm" w="sm" type="none"/>
+            <a:headEnd type="none" w="sm" len="sm"/>
+            <a:tailEnd type="none" w="sm" len="sm"/>
           </a:ln>
         </p:spPr>
       </p:cxnSp>
       <p:cxnSp>
         <p:nvCxnSpPr>
-          <p:cNvPr id="47" name="Google Shape;47;p9"/>
+          <p:cNvPr id="1054202764" name="Google Shape;47;p9"/>
           <p:cNvCxnSpPr/>
           <p:nvPr/>
         </p:nvCxnSpPr>
-        <p:spPr>
+        <p:spPr bwMode="auto">
           <a:xfrm>
             <a:off x="-147274" y="3943475"/>
             <a:ext cx="1993200" cy="1330200"/>
           </a:xfrm>
           <a:prstGeom prst="curvedConnector3">
             <a:avLst>
-              <a:gd fmla="val 50000" name="adj1"/>
+              <a:gd name="adj1" fmla="val 50000"/>
             </a:avLst>
           </a:prstGeom>
           <a:noFill/>
-          <a:ln cap="flat" cmpd="sng" w="28575">
+          <a:ln w="28575" cap="flat" cmpd="sng">
             <a:solidFill>
               <a:schemeClr val="accent2"/>
             </a:solidFill>
             <a:prstDash val="solid"/>
             <a:round/>
-            <a:headEnd len="sm" w="sm" type="none"/>
-            <a:tailEnd len="sm" w="sm" type="none"/>
+            <a:headEnd type="none" w="sm" len="sm"/>
+            <a:tailEnd type="none" w="sm" len="sm"/>
           </a:ln>
         </p:spPr>
       </p:cxnSp>
@@ -4248,15 +4376,15 @@
 </file>
 
 <file path=ppt/slideLayouts/slideLayout9.xml><?xml version="1.0" encoding="utf-8"?>
-<p:sldLayout xmlns:a="http://schemas.openxmlformats.org/drawingml/2006/main" xmlns:r="http://schemas.openxmlformats.org/officeDocument/2006/relationships" xmlns:mc="http://schemas.openxmlformats.org/markup-compatibility/2006" xmlns:mv="urn:schemas-microsoft-com:mac:vml" xmlns:p="http://schemas.openxmlformats.org/presentationml/2006/main" xmlns:c="http://schemas.openxmlformats.org/drawingml/2006/chart" xmlns:dgm="http://schemas.openxmlformats.org/drawingml/2006/diagram" xmlns:o="urn:schemas-microsoft-com:office:office" xmlns:v="urn:schemas-microsoft-com:vml" xmlns:pvml="urn:schemas-microsoft-com:office:powerpoint" xmlns:com="http://schemas.openxmlformats.org/drawingml/2006/compatibility" xmlns:p14="http://schemas.microsoft.com/office/powerpoint/2010/main" xmlns:p15="http://schemas.microsoft.com/office/powerpoint/2012/main" xmlns:ahyp="http://schemas.microsoft.com/office/drawing/2018/hyperlinkcolor" matchingName="Background 2">
+<p:sldLayout xmlns:a="http://schemas.openxmlformats.org/drawingml/2006/main" xmlns:r="http://schemas.openxmlformats.org/officeDocument/2006/relationships" xmlns:p="http://schemas.openxmlformats.org/presentationml/2006/main" xmlns:m="http://schemas.openxmlformats.org/officeDocument/2006/math" xmlns:w="http://schemas.openxmlformats.org/wordprocessingml/2006/main" matchingName="Background 2" preserve="0" showMasterPhAnim="0" showMasterSp="1" userDrawn="1">
   <p:cSld name="CUSTOM_10_1_1">
     <p:spTree>
       <p:nvGrpSpPr>
-        <p:cNvPr id="48" name="Shape 48"/>
+        <p:cNvPr id="1" name=""/>
         <p:cNvGrpSpPr/>
         <p:nvPr/>
       </p:nvGrpSpPr>
-      <p:grpSpPr>
+      <p:grpSpPr bwMode="auto">
         <a:xfrm>
           <a:off x="0" y="0"/>
           <a:ext cx="0" cy="0"/>
@@ -4266,11 +4394,11 @@
       </p:grpSpPr>
       <p:cxnSp>
         <p:nvCxnSpPr>
-          <p:cNvPr id="49" name="Google Shape;49;p10"/>
+          <p:cNvPr id="1769059305" name="Google Shape;49;p10"/>
           <p:cNvCxnSpPr/>
           <p:nvPr/>
         </p:nvCxnSpPr>
-        <p:spPr>
+        <p:spPr bwMode="auto">
           <a:xfrm>
             <a:off x="-72550" y="4877450"/>
             <a:ext cx="9287400" cy="0"/>
@@ -4279,24 +4407,24 @@
             <a:avLst/>
           </a:prstGeom>
           <a:noFill/>
-          <a:ln cap="flat" cmpd="sng" w="28575">
+          <a:ln w="28575" cap="flat" cmpd="sng">
             <a:solidFill>
               <a:schemeClr val="accent1"/>
             </a:solidFill>
             <a:prstDash val="solid"/>
             <a:round/>
-            <a:headEnd len="sm" w="sm" type="none"/>
-            <a:tailEnd len="sm" w="sm" type="none"/>
+            <a:headEnd type="none" w="sm" len="sm"/>
+            <a:tailEnd type="none" w="sm" len="sm"/>
           </a:ln>
         </p:spPr>
       </p:cxnSp>
       <p:cxnSp>
         <p:nvCxnSpPr>
-          <p:cNvPr id="50" name="Google Shape;50;p10"/>
+          <p:cNvPr id="241261044" name="Google Shape;50;p10"/>
           <p:cNvCxnSpPr/>
           <p:nvPr/>
         </p:nvCxnSpPr>
-        <p:spPr>
+        <p:spPr bwMode="auto">
           <a:xfrm>
             <a:off x="-72550" y="274100"/>
             <a:ext cx="9287400" cy="0"/>
@@ -4305,42 +4433,42 @@
             <a:avLst/>
           </a:prstGeom>
           <a:noFill/>
-          <a:ln cap="flat" cmpd="sng" w="28575">
+          <a:ln w="28575" cap="flat" cmpd="sng">
             <a:solidFill>
               <a:schemeClr val="accent1"/>
             </a:solidFill>
             <a:prstDash val="solid"/>
             <a:round/>
-            <a:headEnd len="sm" w="sm" type="none"/>
-            <a:tailEnd len="sm" w="sm" type="none"/>
+            <a:headEnd type="none" w="sm" len="sm"/>
+            <a:tailEnd type="none" w="sm" len="sm"/>
           </a:ln>
         </p:spPr>
       </p:cxnSp>
       <p:cxnSp>
         <p:nvCxnSpPr>
-          <p:cNvPr id="51" name="Google Shape;51;p10"/>
+          <p:cNvPr id="584291096" name="Google Shape;51;p10"/>
           <p:cNvCxnSpPr/>
           <p:nvPr/>
         </p:nvCxnSpPr>
-        <p:spPr>
+        <p:spPr bwMode="auto">
           <a:xfrm flipH="1">
             <a:off x="6772150" y="3663450"/>
             <a:ext cx="2823300" cy="1633200"/>
           </a:xfrm>
           <a:prstGeom prst="curvedConnector3">
             <a:avLst>
-              <a:gd fmla="val 50000" name="adj1"/>
+              <a:gd name="adj1" fmla="val 50000"/>
             </a:avLst>
           </a:prstGeom>
           <a:noFill/>
-          <a:ln cap="flat" cmpd="sng" w="28575">
+          <a:ln w="28575" cap="flat" cmpd="sng">
             <a:solidFill>
               <a:schemeClr val="accent2"/>
             </a:solidFill>
             <a:prstDash val="solid"/>
             <a:round/>
-            <a:headEnd len="sm" w="sm" type="none"/>
-            <a:tailEnd len="sm" w="sm" type="none"/>
+            <a:headEnd type="none" w="sm" len="sm"/>
+            <a:tailEnd type="none" w="sm" len="sm"/>
           </a:ln>
         </p:spPr>
       </p:cxnSp>
@@ -4353,10 +4481,10 @@
 </file>
 
 <file path=ppt/slideMasters/slideMaster1.xml><?xml version="1.0" encoding="utf-8"?>
-<p:sldMaster xmlns:a="http://schemas.openxmlformats.org/drawingml/2006/main" xmlns:r="http://schemas.openxmlformats.org/officeDocument/2006/relationships" xmlns:mc="http://schemas.openxmlformats.org/markup-compatibility/2006" xmlns:mv="urn:schemas-microsoft-com:mac:vml" xmlns:p="http://schemas.openxmlformats.org/presentationml/2006/main" xmlns:c="http://schemas.openxmlformats.org/drawingml/2006/chart" xmlns:dgm="http://schemas.openxmlformats.org/drawingml/2006/diagram" xmlns:o="urn:schemas-microsoft-com:office:office" xmlns:v="urn:schemas-microsoft-com:vml" xmlns:pvml="urn:schemas-microsoft-com:office:powerpoint" xmlns:com="http://schemas.openxmlformats.org/drawingml/2006/compatibility" xmlns:p14="http://schemas.microsoft.com/office/powerpoint/2010/main" xmlns:p15="http://schemas.microsoft.com/office/powerpoint/2012/main" xmlns:ahyp="http://schemas.microsoft.com/office/drawing/2018/hyperlinkcolor">
+<p:sldMaster xmlns:a="http://schemas.openxmlformats.org/drawingml/2006/main" xmlns:r="http://schemas.openxmlformats.org/officeDocument/2006/relationships" xmlns:p="http://schemas.openxmlformats.org/presentationml/2006/main" xmlns:m="http://schemas.openxmlformats.org/officeDocument/2006/math" xmlns:w="http://schemas.openxmlformats.org/wordprocessingml/2006/main" preserve="0">
   <p:cSld name="simple-light-2">
     <p:bg>
-      <p:bgPr>
+      <p:bgPr shadeToTitle="0">
         <a:solidFill>
           <a:schemeClr val="lt1"/>
         </a:solidFill>
@@ -4364,11 +4492,11 @@
     </p:bg>
     <p:spTree>
       <p:nvGrpSpPr>
-        <p:cNvPr id="5" name="Shape 5"/>
+        <p:cNvPr id="1" name=""/>
         <p:cNvGrpSpPr/>
         <p:nvPr/>
       </p:nvGrpSpPr>
-      <p:grpSpPr>
+      <p:grpSpPr bwMode="auto">
         <a:xfrm>
           <a:off x="0" y="0"/>
           <a:ext cx="0" cy="0"/>
@@ -4378,13 +4506,13 @@
       </p:grpSpPr>
       <p:sp>
         <p:nvSpPr>
-          <p:cNvPr id="6" name="Google Shape;6;p1"/>
+          <p:cNvPr id="2042244978" name="Google Shape;6;p1"/>
           <p:cNvSpPr txBox="1"/>
           <p:nvPr>
             <p:ph type="title"/>
           </p:nvPr>
         </p:nvSpPr>
-        <p:spPr>
+        <p:spPr bwMode="auto">
           <a:xfrm>
             <a:off x="713225" y="445025"/>
             <a:ext cx="7717500" cy="572700"/>
@@ -4398,11 +4526,11 @@
           </a:ln>
         </p:spPr>
         <p:txBody>
-          <a:bodyPr anchorCtr="0" anchor="t" bIns="91425" lIns="91425" spcFirstLastPara="1" rIns="91425" wrap="square" tIns="91425">
+          <a:bodyPr spcFirstLastPara="1" wrap="square" lIns="91425" tIns="91425" rIns="91425" bIns="91425" anchor="t" anchorCtr="0">
             <a:noAutofit/>
           </a:bodyPr>
           <a:lstStyle>
-            <a:lvl1pPr lvl="0" marR="0" rtl="0" algn="l">
+            <a:lvl1pPr marR="0" lvl="0" algn="l" rtl="0">
               <a:lnSpc>
                 <a:spcPct val="100000"/>
               </a:lnSpc>
@@ -4418,17 +4546,16 @@
               <a:buSzPts val="3000"/>
               <a:buFont typeface="Vidaloka"/>
               <a:buNone/>
-              <a:defRPr b="0" i="0" sz="3000" u="none" cap="none" strike="noStrike">
+              <a:defRPr sz="3000" b="0" i="0" u="none" strike="noStrike" cap="none">
                 <a:solidFill>
                   <a:schemeClr val="dk1"/>
                 </a:solidFill>
                 <a:latin typeface="Vidaloka"/>
                 <a:ea typeface="Vidaloka"/>
                 <a:cs typeface="Vidaloka"/>
-                <a:sym typeface="Vidaloka"/>
               </a:defRPr>
             </a:lvl1pPr>
-            <a:lvl2pPr lvl="1" marR="0" rtl="0" algn="l">
+            <a:lvl2pPr marR="0" lvl="1" algn="l" rtl="0">
               <a:lnSpc>
                 <a:spcPct val="100000"/>
               </a:lnSpc>
@@ -4444,17 +4571,16 @@
               <a:buSzPts val="3000"/>
               <a:buFont typeface="Arial"/>
               <a:buNone/>
-              <a:defRPr b="0" i="1" sz="3000" u="none" cap="none" strike="noStrike">
+              <a:defRPr sz="3000" b="0" i="1" u="none" strike="noStrike" cap="none">
                 <a:solidFill>
                   <a:schemeClr val="dk1"/>
                 </a:solidFill>
                 <a:latin typeface="Arial"/>
                 <a:ea typeface="Arial"/>
                 <a:cs typeface="Arial"/>
-                <a:sym typeface="Arial"/>
               </a:defRPr>
             </a:lvl2pPr>
-            <a:lvl3pPr lvl="2" marR="0" rtl="0" algn="l">
+            <a:lvl3pPr marR="0" lvl="2" algn="l" rtl="0">
               <a:lnSpc>
                 <a:spcPct val="100000"/>
               </a:lnSpc>
@@ -4470,17 +4596,16 @@
               <a:buSzPts val="3000"/>
               <a:buFont typeface="Arial"/>
               <a:buNone/>
-              <a:defRPr b="0" i="1" sz="3000" u="none" cap="none" strike="noStrike">
+              <a:defRPr sz="3000" b="0" i="1" u="none" strike="noStrike" cap="none">
                 <a:solidFill>
                   <a:schemeClr val="dk1"/>
                 </a:solidFill>
                 <a:latin typeface="Arial"/>
                 <a:ea typeface="Arial"/>
                 <a:cs typeface="Arial"/>
-                <a:sym typeface="Arial"/>
               </a:defRPr>
             </a:lvl3pPr>
-            <a:lvl4pPr lvl="3" marR="0" rtl="0" algn="l">
+            <a:lvl4pPr marR="0" lvl="3" algn="l" rtl="0">
               <a:lnSpc>
                 <a:spcPct val="100000"/>
               </a:lnSpc>
@@ -4496,17 +4621,16 @@
               <a:buSzPts val="3000"/>
               <a:buFont typeface="Arial"/>
               <a:buNone/>
-              <a:defRPr b="0" i="1" sz="3000" u="none" cap="none" strike="noStrike">
+              <a:defRPr sz="3000" b="0" i="1" u="none" strike="noStrike" cap="none">
                 <a:solidFill>
                   <a:schemeClr val="dk1"/>
                 </a:solidFill>
                 <a:latin typeface="Arial"/>
                 <a:ea typeface="Arial"/>
                 <a:cs typeface="Arial"/>
-                <a:sym typeface="Arial"/>
               </a:defRPr>
             </a:lvl4pPr>
-            <a:lvl5pPr lvl="4" marR="0" rtl="0" algn="l">
+            <a:lvl5pPr marR="0" lvl="4" algn="l" rtl="0">
               <a:lnSpc>
                 <a:spcPct val="100000"/>
               </a:lnSpc>
@@ -4522,17 +4646,16 @@
               <a:buSzPts val="3000"/>
               <a:buFont typeface="Arial"/>
               <a:buNone/>
-              <a:defRPr b="0" i="1" sz="3000" u="none" cap="none" strike="noStrike">
+              <a:defRPr sz="3000" b="0" i="1" u="none" strike="noStrike" cap="none">
                 <a:solidFill>
                   <a:schemeClr val="dk1"/>
                 </a:solidFill>
                 <a:latin typeface="Arial"/>
                 <a:ea typeface="Arial"/>
                 <a:cs typeface="Arial"/>
-                <a:sym typeface="Arial"/>
               </a:defRPr>
             </a:lvl5pPr>
-            <a:lvl6pPr lvl="5" marR="0" rtl="0" algn="l">
+            <a:lvl6pPr marR="0" lvl="5" algn="l" rtl="0">
               <a:lnSpc>
                 <a:spcPct val="100000"/>
               </a:lnSpc>
@@ -4548,17 +4671,16 @@
               <a:buSzPts val="3000"/>
               <a:buFont typeface="Arial"/>
               <a:buNone/>
-              <a:defRPr b="0" i="1" sz="3000" u="none" cap="none" strike="noStrike">
+              <a:defRPr sz="3000" b="0" i="1" u="none" strike="noStrike" cap="none">
                 <a:solidFill>
                   <a:schemeClr val="dk1"/>
                 </a:solidFill>
                 <a:latin typeface="Arial"/>
                 <a:ea typeface="Arial"/>
                 <a:cs typeface="Arial"/>
-                <a:sym typeface="Arial"/>
               </a:defRPr>
             </a:lvl6pPr>
-            <a:lvl7pPr lvl="6" marR="0" rtl="0" algn="l">
+            <a:lvl7pPr marR="0" lvl="6" algn="l" rtl="0">
               <a:lnSpc>
                 <a:spcPct val="100000"/>
               </a:lnSpc>
@@ -4574,17 +4696,16 @@
               <a:buSzPts val="3000"/>
               <a:buFont typeface="Arial"/>
               <a:buNone/>
-              <a:defRPr b="0" i="1" sz="3000" u="none" cap="none" strike="noStrike">
+              <a:defRPr sz="3000" b="0" i="1" u="none" strike="noStrike" cap="none">
                 <a:solidFill>
                   <a:schemeClr val="dk1"/>
                 </a:solidFill>
                 <a:latin typeface="Arial"/>
                 <a:ea typeface="Arial"/>
                 <a:cs typeface="Arial"/>
-                <a:sym typeface="Arial"/>
               </a:defRPr>
             </a:lvl7pPr>
-            <a:lvl8pPr lvl="7" marR="0" rtl="0" algn="l">
+            <a:lvl8pPr marR="0" lvl="7" algn="l" rtl="0">
               <a:lnSpc>
                 <a:spcPct val="100000"/>
               </a:lnSpc>
@@ -4600,17 +4721,16 @@
               <a:buSzPts val="3000"/>
               <a:buFont typeface="Arial"/>
               <a:buNone/>
-              <a:defRPr b="0" i="1" sz="3000" u="none" cap="none" strike="noStrike">
+              <a:defRPr sz="3000" b="0" i="1" u="none" strike="noStrike" cap="none">
                 <a:solidFill>
                   <a:schemeClr val="dk1"/>
                 </a:solidFill>
                 <a:latin typeface="Arial"/>
                 <a:ea typeface="Arial"/>
                 <a:cs typeface="Arial"/>
-                <a:sym typeface="Arial"/>
               </a:defRPr>
             </a:lvl8pPr>
-            <a:lvl9pPr lvl="8" marR="0" rtl="0" algn="l">
+            <a:lvl9pPr marR="0" lvl="8" algn="l" rtl="0">
               <a:lnSpc>
                 <a:spcPct val="100000"/>
               </a:lnSpc>
@@ -4626,29 +4746,33 @@
               <a:buSzPts val="3000"/>
               <a:buFont typeface="Arial"/>
               <a:buNone/>
-              <a:defRPr b="0" i="1" sz="3000" u="none" cap="none" strike="noStrike">
+              <a:defRPr sz="3000" b="0" i="1" u="none" strike="noStrike" cap="none">
                 <a:solidFill>
                   <a:schemeClr val="dk1"/>
                 </a:solidFill>
                 <a:latin typeface="Arial"/>
                 <a:ea typeface="Arial"/>
                 <a:cs typeface="Arial"/>
-                <a:sym typeface="Arial"/>
               </a:defRPr>
             </a:lvl9pPr>
           </a:lstStyle>
-          <a:p/>
+          <a:p>
+            <a:pPr>
+              <a:defRPr/>
+            </a:pPr>
+            <a:endParaRPr/>
+          </a:p>
         </p:txBody>
       </p:sp>
       <p:sp>
         <p:nvSpPr>
-          <p:cNvPr id="7" name="Google Shape;7;p1"/>
+          <p:cNvPr id="589818708" name="Google Shape;7;p1"/>
           <p:cNvSpPr txBox="1"/>
           <p:nvPr>
-            <p:ph idx="1" type="body"/>
+            <p:ph type="body" idx="1"/>
           </p:nvPr>
         </p:nvSpPr>
-        <p:spPr>
+        <p:spPr bwMode="auto">
           <a:xfrm>
             <a:off x="713250" y="1152475"/>
             <a:ext cx="7717500" cy="3416400"/>
@@ -4662,11 +4786,11 @@
           </a:ln>
         </p:spPr>
         <p:txBody>
-          <a:bodyPr anchorCtr="0" anchor="t" bIns="91425" lIns="91425" spcFirstLastPara="1" rIns="91425" wrap="square" tIns="91425">
+          <a:bodyPr spcFirstLastPara="1" wrap="square" lIns="91425" tIns="91425" rIns="91425" bIns="91425" anchor="t" anchorCtr="0">
             <a:noAutofit/>
           </a:bodyPr>
           <a:lstStyle>
-            <a:lvl1pPr indent="-342900" lvl="0" marL="457200" marR="0" rtl="0" algn="l">
+            <a:lvl1pPr marL="457200" marR="0" lvl="0" indent="-342900" algn="l" rtl="0">
               <a:lnSpc>
                 <a:spcPct val="114999"/>
               </a:lnSpc>
@@ -4682,17 +4806,16 @@
               <a:buSzPts val="1800"/>
               <a:buFont typeface="Montserrat"/>
               <a:buChar char="●"/>
-              <a:defRPr b="0" i="0" sz="1800" u="none" cap="none" strike="noStrike">
+              <a:defRPr sz="1800" b="0" i="0" u="none" strike="noStrike" cap="none">
                 <a:solidFill>
                   <a:schemeClr val="dk2"/>
                 </a:solidFill>
                 <a:latin typeface="Montserrat"/>
                 <a:ea typeface="Montserrat"/>
                 <a:cs typeface="Montserrat"/>
-                <a:sym typeface="Montserrat"/>
               </a:defRPr>
             </a:lvl1pPr>
-            <a:lvl2pPr indent="-317500" lvl="1" marL="914400" marR="0" rtl="0" algn="l">
+            <a:lvl2pPr marL="914400" marR="0" lvl="1" indent="-317500" algn="l" rtl="0">
               <a:lnSpc>
                 <a:spcPct val="114999"/>
               </a:lnSpc>
@@ -4708,17 +4831,16 @@
               <a:buSzPts val="1400"/>
               <a:buFont typeface="Montserrat"/>
               <a:buChar char="○"/>
-              <a:defRPr b="0" i="0" sz="1400" u="none" cap="none" strike="noStrike">
+              <a:defRPr sz="1400" b="0" i="0" u="none" strike="noStrike" cap="none">
                 <a:solidFill>
                   <a:schemeClr val="dk2"/>
                 </a:solidFill>
                 <a:latin typeface="Montserrat"/>
                 <a:ea typeface="Montserrat"/>
                 <a:cs typeface="Montserrat"/>
-                <a:sym typeface="Montserrat"/>
               </a:defRPr>
             </a:lvl2pPr>
-            <a:lvl3pPr indent="-317500" lvl="2" marL="1371600" marR="0" rtl="0" algn="l">
+            <a:lvl3pPr marL="1371600" marR="0" lvl="2" indent="-317500" algn="l" rtl="0">
               <a:lnSpc>
                 <a:spcPct val="114999"/>
               </a:lnSpc>
@@ -4734,17 +4856,16 @@
               <a:buSzPts val="1400"/>
               <a:buFont typeface="Montserrat"/>
               <a:buChar char="■"/>
-              <a:defRPr b="0" i="0" sz="1400" u="none" cap="none" strike="noStrike">
+              <a:defRPr sz="1400" b="0" i="0" u="none" strike="noStrike" cap="none">
                 <a:solidFill>
                   <a:schemeClr val="dk2"/>
                 </a:solidFill>
                 <a:latin typeface="Montserrat"/>
                 <a:ea typeface="Montserrat"/>
                 <a:cs typeface="Montserrat"/>
-                <a:sym typeface="Montserrat"/>
               </a:defRPr>
             </a:lvl3pPr>
-            <a:lvl4pPr indent="-317500" lvl="3" marL="1828800" marR="0" rtl="0" algn="l">
+            <a:lvl4pPr marL="1828800" marR="0" lvl="3" indent="-317500" algn="l" rtl="0">
               <a:lnSpc>
                 <a:spcPct val="114999"/>
               </a:lnSpc>
@@ -4760,17 +4881,16 @@
               <a:buSzPts val="1400"/>
               <a:buFont typeface="Montserrat"/>
               <a:buChar char="●"/>
-              <a:defRPr b="0" i="0" sz="1400" u="none" cap="none" strike="noStrike">
+              <a:defRPr sz="1400" b="0" i="0" u="none" strike="noStrike" cap="none">
                 <a:solidFill>
                   <a:schemeClr val="dk2"/>
                 </a:solidFill>
                 <a:latin typeface="Montserrat"/>
                 <a:ea typeface="Montserrat"/>
                 <a:cs typeface="Montserrat"/>
-                <a:sym typeface="Montserrat"/>
               </a:defRPr>
             </a:lvl4pPr>
-            <a:lvl5pPr indent="-317500" lvl="4" marL="2286000" marR="0" rtl="0" algn="l">
+            <a:lvl5pPr marL="2286000" marR="0" lvl="4" indent="-317500" algn="l" rtl="0">
               <a:lnSpc>
                 <a:spcPct val="114999"/>
               </a:lnSpc>
@@ -4786,17 +4906,16 @@
               <a:buSzPts val="1400"/>
               <a:buFont typeface="Montserrat"/>
               <a:buChar char="○"/>
-              <a:defRPr b="0" i="0" sz="1400" u="none" cap="none" strike="noStrike">
+              <a:defRPr sz="1400" b="0" i="0" u="none" strike="noStrike" cap="none">
                 <a:solidFill>
                   <a:schemeClr val="dk2"/>
                 </a:solidFill>
                 <a:latin typeface="Montserrat"/>
                 <a:ea typeface="Montserrat"/>
                 <a:cs typeface="Montserrat"/>
-                <a:sym typeface="Montserrat"/>
               </a:defRPr>
             </a:lvl5pPr>
-            <a:lvl6pPr indent="-317500" lvl="5" marL="2743200" marR="0" rtl="0" algn="l">
+            <a:lvl6pPr marL="2743200" marR="0" lvl="5" indent="-317500" algn="l" rtl="0">
               <a:lnSpc>
                 <a:spcPct val="114999"/>
               </a:lnSpc>
@@ -4812,17 +4931,16 @@
               <a:buSzPts val="1400"/>
               <a:buFont typeface="Montserrat"/>
               <a:buChar char="■"/>
-              <a:defRPr b="0" i="0" sz="1400" u="none" cap="none" strike="noStrike">
+              <a:defRPr sz="1400" b="0" i="0" u="none" strike="noStrike" cap="none">
                 <a:solidFill>
                   <a:schemeClr val="dk2"/>
                 </a:solidFill>
                 <a:latin typeface="Montserrat"/>
                 <a:ea typeface="Montserrat"/>
                 <a:cs typeface="Montserrat"/>
-                <a:sym typeface="Montserrat"/>
               </a:defRPr>
             </a:lvl6pPr>
-            <a:lvl7pPr indent="-317500" lvl="6" marL="3200400" marR="0" rtl="0" algn="l">
+            <a:lvl7pPr marL="3200400" marR="0" lvl="6" indent="-317500" algn="l" rtl="0">
               <a:lnSpc>
                 <a:spcPct val="114999"/>
               </a:lnSpc>
@@ -4838,17 +4956,16 @@
               <a:buSzPts val="1400"/>
               <a:buFont typeface="Montserrat"/>
               <a:buChar char="●"/>
-              <a:defRPr b="0" i="0" sz="1400" u="none" cap="none" strike="noStrike">
+              <a:defRPr sz="1400" b="0" i="0" u="none" strike="noStrike" cap="none">
                 <a:solidFill>
                   <a:schemeClr val="dk2"/>
                 </a:solidFill>
                 <a:latin typeface="Montserrat"/>
                 <a:ea typeface="Montserrat"/>
                 <a:cs typeface="Montserrat"/>
-                <a:sym typeface="Montserrat"/>
               </a:defRPr>
             </a:lvl7pPr>
-            <a:lvl8pPr indent="-317500" lvl="7" marL="3657600" marR="0" rtl="0" algn="l">
+            <a:lvl8pPr marL="3657600" marR="0" lvl="7" indent="-317500" algn="l" rtl="0">
               <a:lnSpc>
                 <a:spcPct val="114999"/>
               </a:lnSpc>
@@ -4864,17 +4981,16 @@
               <a:buSzPts val="1400"/>
               <a:buFont typeface="Montserrat"/>
               <a:buChar char="○"/>
-              <a:defRPr b="0" i="0" sz="1400" u="none" cap="none" strike="noStrike">
+              <a:defRPr sz="1400" b="0" i="0" u="none" strike="noStrike" cap="none">
                 <a:solidFill>
                   <a:schemeClr val="dk2"/>
                 </a:solidFill>
                 <a:latin typeface="Montserrat"/>
                 <a:ea typeface="Montserrat"/>
                 <a:cs typeface="Montserrat"/>
-                <a:sym typeface="Montserrat"/>
               </a:defRPr>
             </a:lvl8pPr>
-            <a:lvl9pPr indent="-317500" lvl="8" marL="4114800" marR="0" rtl="0" algn="l">
+            <a:lvl9pPr marL="4114800" marR="0" lvl="8" indent="-317500" algn="l" rtl="0">
               <a:lnSpc>
                 <a:spcPct val="114999"/>
               </a:lnSpc>
@@ -4890,39 +5006,43 @@
               <a:buSzPts val="1400"/>
               <a:buFont typeface="Montserrat"/>
               <a:buChar char="■"/>
-              <a:defRPr b="0" i="0" sz="1400" u="none" cap="none" strike="noStrike">
+              <a:defRPr sz="1400" b="0" i="0" u="none" strike="noStrike" cap="none">
                 <a:solidFill>
                   <a:schemeClr val="dk2"/>
                 </a:solidFill>
                 <a:latin typeface="Montserrat"/>
                 <a:ea typeface="Montserrat"/>
                 <a:cs typeface="Montserrat"/>
-                <a:sym typeface="Montserrat"/>
               </a:defRPr>
             </a:lvl9pPr>
           </a:lstStyle>
-          <a:p/>
+          <a:p>
+            <a:pPr>
+              <a:defRPr/>
+            </a:pPr>
+            <a:endParaRPr/>
+          </a:p>
         </p:txBody>
       </p:sp>
     </p:spTree>
   </p:cSld>
-  <p:clrMap accent1="accent1" accent2="accent2" accent3="accent3" accent4="accent4" accent5="accent5" accent6="accent6" bg1="lt1" bg2="dk2" tx1="dk1" tx2="lt2" folHlink="folHlink" hlink="hlink"/>
+  <p:clrMap bg1="lt1" tx1="dk1" bg2="dk2" tx2="lt2" accent1="accent1" accent2="accent2" accent3="accent3" accent4="accent4" accent5="accent5" accent6="accent6" hlink="hlink" folHlink="folHlink"/>
   <p:sldLayoutIdLst>
-    <p:sldLayoutId id="2147483648" r:id="rId1"/>
-    <p:sldLayoutId id="2147483649" r:id="rId2"/>
-    <p:sldLayoutId id="2147483650" r:id="rId3"/>
-    <p:sldLayoutId id="2147483651" r:id="rId4"/>
-    <p:sldLayoutId id="2147483652" r:id="rId5"/>
-    <p:sldLayoutId id="2147483653" r:id="rId6"/>
-    <p:sldLayoutId id="2147483654" r:id="rId7"/>
-    <p:sldLayoutId id="2147483655" r:id="rId8"/>
-    <p:sldLayoutId id="2147483656" r:id="rId9"/>
-    <p:sldLayoutId id="2147483657" r:id="rId10"/>
+    <p:sldLayoutId id="2147483649" r:id="rId1"/>
+    <p:sldLayoutId id="2147483650" r:id="rId2"/>
+    <p:sldLayoutId id="2147483651" r:id="rId3"/>
+    <p:sldLayoutId id="2147483652" r:id="rId4"/>
+    <p:sldLayoutId id="2147483653" r:id="rId5"/>
+    <p:sldLayoutId id="2147483654" r:id="rId6"/>
+    <p:sldLayoutId id="2147483655" r:id="rId7"/>
+    <p:sldLayoutId id="2147483656" r:id="rId8"/>
+    <p:sldLayoutId id="2147483657" r:id="rId9"/>
+    <p:sldLayoutId id="2147483658" r:id="rId10"/>
   </p:sldLayoutIdLst>
   <p:hf dt="0" ftr="0" hdr="0" sldNum="0"/>
   <p:txStyles>
     <p:titleStyle>
-      <a:defPPr lvl="0" marR="0" rtl="0" algn="l">
+      <a:defPPr marR="0" lvl="0" algn="l" rtl="0">
         <a:lnSpc>
           <a:spcPct val="100000"/>
         </a:lnSpc>
@@ -4933,7 +5053,7 @@
           <a:spcPts val="0"/>
         </a:spcAft>
       </a:defPPr>
-      <a:lvl1pPr lvl="0" marR="0" rtl="0" algn="l">
+      <a:lvl1pPr marR="0" lvl="0" algn="l" rtl="0">
         <a:lnSpc>
           <a:spcPct val="100000"/>
         </a:lnSpc>
@@ -4947,17 +5067,16 @@
           <a:srgbClr val="000000"/>
         </a:buClr>
         <a:buFont typeface="Arial"/>
-        <a:defRPr b="0" i="0" sz="1400" u="none" cap="none" strike="noStrike">
+        <a:defRPr sz="1400" b="0" i="0" u="none" strike="noStrike" cap="none">
           <a:solidFill>
             <a:srgbClr val="000000"/>
           </a:solidFill>
           <a:latin typeface="Arial"/>
           <a:ea typeface="Arial"/>
           <a:cs typeface="Arial"/>
-          <a:sym typeface="Arial"/>
         </a:defRPr>
       </a:lvl1pPr>
-      <a:lvl2pPr lvl="1" marR="0" rtl="0" algn="l">
+      <a:lvl2pPr marR="0" lvl="1" algn="l" rtl="0">
         <a:lnSpc>
           <a:spcPct val="100000"/>
         </a:lnSpc>
@@ -4971,17 +5090,16 @@
           <a:srgbClr val="000000"/>
         </a:buClr>
         <a:buFont typeface="Arial"/>
-        <a:defRPr b="0" i="0" sz="1400" u="none" cap="none" strike="noStrike">
+        <a:defRPr sz="1400" b="0" i="0" u="none" strike="noStrike" cap="none">
           <a:solidFill>
             <a:srgbClr val="000000"/>
           </a:solidFill>
           <a:latin typeface="Arial"/>
           <a:ea typeface="Arial"/>
           <a:cs typeface="Arial"/>
-          <a:sym typeface="Arial"/>
         </a:defRPr>
       </a:lvl2pPr>
-      <a:lvl3pPr lvl="2" marR="0" rtl="0" algn="l">
+      <a:lvl3pPr marR="0" lvl="2" algn="l" rtl="0">
         <a:lnSpc>
           <a:spcPct val="100000"/>
         </a:lnSpc>
@@ -4995,17 +5113,16 @@
           <a:srgbClr val="000000"/>
         </a:buClr>
         <a:buFont typeface="Arial"/>
-        <a:defRPr b="0" i="0" sz="1400" u="none" cap="none" strike="noStrike">
+        <a:defRPr sz="1400" b="0" i="0" u="none" strike="noStrike" cap="none">
           <a:solidFill>
             <a:srgbClr val="000000"/>
           </a:solidFill>
           <a:latin typeface="Arial"/>
           <a:ea typeface="Arial"/>
           <a:cs typeface="Arial"/>
-          <a:sym typeface="Arial"/>
         </a:defRPr>
       </a:lvl3pPr>
-      <a:lvl4pPr lvl="3" marR="0" rtl="0" algn="l">
+      <a:lvl4pPr marR="0" lvl="3" algn="l" rtl="0">
         <a:lnSpc>
           <a:spcPct val="100000"/>
         </a:lnSpc>
@@ -5019,17 +5136,16 @@
           <a:srgbClr val="000000"/>
         </a:buClr>
         <a:buFont typeface="Arial"/>
-        <a:defRPr b="0" i="0" sz="1400" u="none" cap="none" strike="noStrike">
+        <a:defRPr sz="1400" b="0" i="0" u="none" strike="noStrike" cap="none">
           <a:solidFill>
             <a:srgbClr val="000000"/>
           </a:solidFill>
           <a:latin typeface="Arial"/>
           <a:ea typeface="Arial"/>
           <a:cs typeface="Arial"/>
-          <a:sym typeface="Arial"/>
         </a:defRPr>
       </a:lvl4pPr>
-      <a:lvl5pPr lvl="4" marR="0" rtl="0" algn="l">
+      <a:lvl5pPr marR="0" lvl="4" algn="l" rtl="0">
         <a:lnSpc>
           <a:spcPct val="100000"/>
         </a:lnSpc>
@@ -5043,17 +5159,16 @@
           <a:srgbClr val="000000"/>
         </a:buClr>
         <a:buFont typeface="Arial"/>
-        <a:defRPr b="0" i="0" sz="1400" u="none" cap="none" strike="noStrike">
+        <a:defRPr sz="1400" b="0" i="0" u="none" strike="noStrike" cap="none">
           <a:solidFill>
             <a:srgbClr val="000000"/>
           </a:solidFill>
           <a:latin typeface="Arial"/>
           <a:ea typeface="Arial"/>
           <a:cs typeface="Arial"/>
-          <a:sym typeface="Arial"/>
         </a:defRPr>
       </a:lvl5pPr>
-      <a:lvl6pPr lvl="5" marR="0" rtl="0" algn="l">
+      <a:lvl6pPr marR="0" lvl="5" algn="l" rtl="0">
         <a:lnSpc>
           <a:spcPct val="100000"/>
         </a:lnSpc>
@@ -5067,17 +5182,16 @@
           <a:srgbClr val="000000"/>
         </a:buClr>
         <a:buFont typeface="Arial"/>
-        <a:defRPr b="0" i="0" sz="1400" u="none" cap="none" strike="noStrike">
+        <a:defRPr sz="1400" b="0" i="0" u="none" strike="noStrike" cap="none">
           <a:solidFill>
             <a:srgbClr val="000000"/>
           </a:solidFill>
           <a:latin typeface="Arial"/>
           <a:ea typeface="Arial"/>
           <a:cs typeface="Arial"/>
-          <a:sym typeface="Arial"/>
         </a:defRPr>
       </a:lvl6pPr>
-      <a:lvl7pPr lvl="6" marR="0" rtl="0" algn="l">
+      <a:lvl7pPr marR="0" lvl="6" algn="l" rtl="0">
         <a:lnSpc>
           <a:spcPct val="100000"/>
         </a:lnSpc>
@@ -5091,17 +5205,16 @@
           <a:srgbClr val="000000"/>
         </a:buClr>
         <a:buFont typeface="Arial"/>
-        <a:defRPr b="0" i="0" sz="1400" u="none" cap="none" strike="noStrike">
+        <a:defRPr sz="1400" b="0" i="0" u="none" strike="noStrike" cap="none">
           <a:solidFill>
             <a:srgbClr val="000000"/>
           </a:solidFill>
           <a:latin typeface="Arial"/>
           <a:ea typeface="Arial"/>
           <a:cs typeface="Arial"/>
-          <a:sym typeface="Arial"/>
         </a:defRPr>
       </a:lvl7pPr>
-      <a:lvl8pPr lvl="7" marR="0" rtl="0" algn="l">
+      <a:lvl8pPr marR="0" lvl="7" algn="l" rtl="0">
         <a:lnSpc>
           <a:spcPct val="100000"/>
         </a:lnSpc>
@@ -5115,17 +5228,16 @@
           <a:srgbClr val="000000"/>
         </a:buClr>
         <a:buFont typeface="Arial"/>
-        <a:defRPr b="0" i="0" sz="1400" u="none" cap="none" strike="noStrike">
+        <a:defRPr sz="1400" b="0" i="0" u="none" strike="noStrike" cap="none">
           <a:solidFill>
             <a:srgbClr val="000000"/>
           </a:solidFill>
           <a:latin typeface="Arial"/>
           <a:ea typeface="Arial"/>
           <a:cs typeface="Arial"/>
-          <a:sym typeface="Arial"/>
         </a:defRPr>
       </a:lvl8pPr>
-      <a:lvl9pPr lvl="8" marR="0" rtl="0" algn="l">
+      <a:lvl9pPr marR="0" lvl="8" algn="l" rtl="0">
         <a:lnSpc>
           <a:spcPct val="100000"/>
         </a:lnSpc>
@@ -5139,19 +5251,18 @@
           <a:srgbClr val="000000"/>
         </a:buClr>
         <a:buFont typeface="Arial"/>
-        <a:defRPr b="0" i="0" sz="1400" u="none" cap="none" strike="noStrike">
+        <a:defRPr sz="1400" b="0" i="0" u="none" strike="noStrike" cap="none">
           <a:solidFill>
             <a:srgbClr val="000000"/>
           </a:solidFill>
           <a:latin typeface="Arial"/>
           <a:ea typeface="Arial"/>
           <a:cs typeface="Arial"/>
-          <a:sym typeface="Arial"/>
         </a:defRPr>
       </a:lvl9pPr>
     </p:titleStyle>
     <p:bodyStyle>
-      <a:defPPr lvl="0" marR="0" rtl="0" algn="l">
+      <a:defPPr marR="0" lvl="0" algn="l" rtl="0">
         <a:lnSpc>
           <a:spcPct val="100000"/>
         </a:lnSpc>
@@ -5162,7 +5273,7 @@
           <a:spcPts val="0"/>
         </a:spcAft>
       </a:defPPr>
-      <a:lvl1pPr lvl="0" marR="0" rtl="0" algn="l">
+      <a:lvl1pPr marR="0" lvl="0" algn="l" rtl="0">
         <a:lnSpc>
           <a:spcPct val="100000"/>
         </a:lnSpc>
@@ -5176,17 +5287,16 @@
           <a:srgbClr val="000000"/>
         </a:buClr>
         <a:buFont typeface="Arial"/>
-        <a:defRPr b="0" i="0" sz="1400" u="none" cap="none" strike="noStrike">
+        <a:defRPr sz="1400" b="0" i="0" u="none" strike="noStrike" cap="none">
           <a:solidFill>
             <a:srgbClr val="000000"/>
           </a:solidFill>
           <a:latin typeface="Arial"/>
           <a:ea typeface="Arial"/>
           <a:cs typeface="Arial"/>
-          <a:sym typeface="Arial"/>
         </a:defRPr>
       </a:lvl1pPr>
-      <a:lvl2pPr lvl="1" marR="0" rtl="0" algn="l">
+      <a:lvl2pPr marR="0" lvl="1" algn="l" rtl="0">
         <a:lnSpc>
           <a:spcPct val="100000"/>
         </a:lnSpc>
@@ -5200,17 +5310,16 @@
           <a:srgbClr val="000000"/>
         </a:buClr>
         <a:buFont typeface="Arial"/>
-        <a:defRPr b="0" i="0" sz="1400" u="none" cap="none" strike="noStrike">
+        <a:defRPr sz="1400" b="0" i="0" u="none" strike="noStrike" cap="none">
           <a:solidFill>
             <a:srgbClr val="000000"/>
           </a:solidFill>
           <a:latin typeface="Arial"/>
           <a:ea typeface="Arial"/>
           <a:cs typeface="Arial"/>
-          <a:sym typeface="Arial"/>
         </a:defRPr>
       </a:lvl2pPr>
-      <a:lvl3pPr lvl="2" marR="0" rtl="0" algn="l">
+      <a:lvl3pPr marR="0" lvl="2" algn="l" rtl="0">
         <a:lnSpc>
           <a:spcPct val="100000"/>
         </a:lnSpc>
@@ -5224,17 +5333,16 @@
           <a:srgbClr val="000000"/>
         </a:buClr>
         <a:buFont typeface="Arial"/>
-        <a:defRPr b="0" i="0" sz="1400" u="none" cap="none" strike="noStrike">
+        <a:defRPr sz="1400" b="0" i="0" u="none" strike="noStrike" cap="none">
           <a:solidFill>
             <a:srgbClr val="000000"/>
           </a:solidFill>
           <a:latin typeface="Arial"/>
           <a:ea typeface="Arial"/>
           <a:cs typeface="Arial"/>
-          <a:sym typeface="Arial"/>
         </a:defRPr>
       </a:lvl3pPr>
-      <a:lvl4pPr lvl="3" marR="0" rtl="0" algn="l">
+      <a:lvl4pPr marR="0" lvl="3" algn="l" rtl="0">
         <a:lnSpc>
           <a:spcPct val="100000"/>
         </a:lnSpc>
@@ -5248,17 +5356,16 @@
           <a:srgbClr val="000000"/>
         </a:buClr>
         <a:buFont typeface="Arial"/>
-        <a:defRPr b="0" i="0" sz="1400" u="none" cap="none" strike="noStrike">
+        <a:defRPr sz="1400" b="0" i="0" u="none" strike="noStrike" cap="none">
           <a:solidFill>
             <a:srgbClr val="000000"/>
           </a:solidFill>
           <a:latin typeface="Arial"/>
           <a:ea typeface="Arial"/>
           <a:cs typeface="Arial"/>
-          <a:sym typeface="Arial"/>
         </a:defRPr>
       </a:lvl4pPr>
-      <a:lvl5pPr lvl="4" marR="0" rtl="0" algn="l">
+      <a:lvl5pPr marR="0" lvl="4" algn="l" rtl="0">
         <a:lnSpc>
           <a:spcPct val="100000"/>
         </a:lnSpc>
@@ -5272,17 +5379,16 @@
           <a:srgbClr val="000000"/>
         </a:buClr>
         <a:buFont typeface="Arial"/>
-        <a:defRPr b="0" i="0" sz="1400" u="none" cap="none" strike="noStrike">
+        <a:defRPr sz="1400" b="0" i="0" u="none" strike="noStrike" cap="none">
           <a:solidFill>
             <a:srgbClr val="000000"/>
           </a:solidFill>
           <a:latin typeface="Arial"/>
           <a:ea typeface="Arial"/>
           <a:cs typeface="Arial"/>
-          <a:sym typeface="Arial"/>
         </a:defRPr>
       </a:lvl5pPr>
-      <a:lvl6pPr lvl="5" marR="0" rtl="0" algn="l">
+      <a:lvl6pPr marR="0" lvl="5" algn="l" rtl="0">
         <a:lnSpc>
           <a:spcPct val="100000"/>
         </a:lnSpc>
@@ -5296,17 +5402,16 @@
           <a:srgbClr val="000000"/>
         </a:buClr>
         <a:buFont typeface="Arial"/>
-        <a:defRPr b="0" i="0" sz="1400" u="none" cap="none" strike="noStrike">
+        <a:defRPr sz="1400" b="0" i="0" u="none" strike="noStrike" cap="none">
           <a:solidFill>
             <a:srgbClr val="000000"/>
           </a:solidFill>
           <a:latin typeface="Arial"/>
           <a:ea typeface="Arial"/>
           <a:cs typeface="Arial"/>
-          <a:sym typeface="Arial"/>
         </a:defRPr>
       </a:lvl6pPr>
-      <a:lvl7pPr lvl="6" marR="0" rtl="0" algn="l">
+      <a:lvl7pPr marR="0" lvl="6" algn="l" rtl="0">
         <a:lnSpc>
           <a:spcPct val="100000"/>
         </a:lnSpc>
@@ -5320,17 +5425,16 @@
           <a:srgbClr val="000000"/>
         </a:buClr>
         <a:buFont typeface="Arial"/>
-        <a:defRPr b="0" i="0" sz="1400" u="none" cap="none" strike="noStrike">
+        <a:defRPr sz="1400" b="0" i="0" u="none" strike="noStrike" cap="none">
           <a:solidFill>
             <a:srgbClr val="000000"/>
           </a:solidFill>
           <a:latin typeface="Arial"/>
           <a:ea typeface="Arial"/>
           <a:cs typeface="Arial"/>
-          <a:sym typeface="Arial"/>
         </a:defRPr>
       </a:lvl7pPr>
-      <a:lvl8pPr lvl="7" marR="0" rtl="0" algn="l">
+      <a:lvl8pPr marR="0" lvl="7" algn="l" rtl="0">
         <a:lnSpc>
           <a:spcPct val="100000"/>
         </a:lnSpc>
@@ -5344,17 +5448,16 @@
           <a:srgbClr val="000000"/>
         </a:buClr>
         <a:buFont typeface="Arial"/>
-        <a:defRPr b="0" i="0" sz="1400" u="none" cap="none" strike="noStrike">
+        <a:defRPr sz="1400" b="0" i="0" u="none" strike="noStrike" cap="none">
           <a:solidFill>
             <a:srgbClr val="000000"/>
           </a:solidFill>
           <a:latin typeface="Arial"/>
           <a:ea typeface="Arial"/>
           <a:cs typeface="Arial"/>
-          <a:sym typeface="Arial"/>
         </a:defRPr>
       </a:lvl8pPr>
-      <a:lvl9pPr lvl="8" marR="0" rtl="0" algn="l">
+      <a:lvl9pPr marR="0" lvl="8" algn="l" rtl="0">
         <a:lnSpc>
           <a:spcPct val="100000"/>
         </a:lnSpc>
@@ -5368,19 +5471,18 @@
           <a:srgbClr val="000000"/>
         </a:buClr>
         <a:buFont typeface="Arial"/>
-        <a:defRPr b="0" i="0" sz="1400" u="none" cap="none" strike="noStrike">
+        <a:defRPr sz="1400" b="0" i="0" u="none" strike="noStrike" cap="none">
           <a:solidFill>
             <a:srgbClr val="000000"/>
           </a:solidFill>
           <a:latin typeface="Arial"/>
           <a:ea typeface="Arial"/>
           <a:cs typeface="Arial"/>
-          <a:sym typeface="Arial"/>
         </a:defRPr>
       </a:lvl9pPr>
     </p:bodyStyle>
     <p:otherStyle>
-      <a:defPPr lvl="0" marR="0" rtl="0" algn="l">
+      <a:defPPr marR="0" lvl="0" algn="l" rtl="0">
         <a:lnSpc>
           <a:spcPct val="100000"/>
         </a:lnSpc>
@@ -5391,7 +5493,7 @@
           <a:spcPts val="0"/>
         </a:spcAft>
       </a:defPPr>
-      <a:lvl1pPr lvl="0" marR="0" rtl="0" algn="l">
+      <a:lvl1pPr marR="0" lvl="0" algn="l" rtl="0">
         <a:lnSpc>
           <a:spcPct val="100000"/>
         </a:lnSpc>
@@ -5405,17 +5507,16 @@
           <a:srgbClr val="000000"/>
         </a:buClr>
         <a:buFont typeface="Arial"/>
-        <a:defRPr b="0" i="0" sz="1400" u="none" cap="none" strike="noStrike">
+        <a:defRPr sz="1400" b="0" i="0" u="none" strike="noStrike" cap="none">
           <a:solidFill>
             <a:srgbClr val="000000"/>
           </a:solidFill>
           <a:latin typeface="Arial"/>
           <a:ea typeface="Arial"/>
           <a:cs typeface="Arial"/>
-          <a:sym typeface="Arial"/>
         </a:defRPr>
       </a:lvl1pPr>
-      <a:lvl2pPr lvl="1" marR="0" rtl="0" algn="l">
+      <a:lvl2pPr marR="0" lvl="1" algn="l" rtl="0">
         <a:lnSpc>
           <a:spcPct val="100000"/>
         </a:lnSpc>
@@ -5429,17 +5530,16 @@
           <a:srgbClr val="000000"/>
         </a:buClr>
         <a:buFont typeface="Arial"/>
-        <a:defRPr b="0" i="0" sz="1400" u="none" cap="none" strike="noStrike">
+        <a:defRPr sz="1400" b="0" i="0" u="none" strike="noStrike" cap="none">
           <a:solidFill>
             <a:srgbClr val="000000"/>
           </a:solidFill>
           <a:latin typeface="Arial"/>
           <a:ea typeface="Arial"/>
           <a:cs typeface="Arial"/>
-          <a:sym typeface="Arial"/>
         </a:defRPr>
       </a:lvl2pPr>
-      <a:lvl3pPr lvl="2" marR="0" rtl="0" algn="l">
+      <a:lvl3pPr marR="0" lvl="2" algn="l" rtl="0">
         <a:lnSpc>
           <a:spcPct val="100000"/>
         </a:lnSpc>
@@ -5453,17 +5553,16 @@
           <a:srgbClr val="000000"/>
         </a:buClr>
         <a:buFont typeface="Arial"/>
-        <a:defRPr b="0" i="0" sz="1400" u="none" cap="none" strike="noStrike">
+        <a:defRPr sz="1400" b="0" i="0" u="none" strike="noStrike" cap="none">
           <a:solidFill>
             <a:srgbClr val="000000"/>
           </a:solidFill>
           <a:latin typeface="Arial"/>
           <a:ea typeface="Arial"/>
           <a:cs typeface="Arial"/>
-          <a:sym typeface="Arial"/>
         </a:defRPr>
       </a:lvl3pPr>
-      <a:lvl4pPr lvl="3" marR="0" rtl="0" algn="l">
+      <a:lvl4pPr marR="0" lvl="3" algn="l" rtl="0">
         <a:lnSpc>
           <a:spcPct val="100000"/>
         </a:lnSpc>
@@ -5477,17 +5576,16 @@
           <a:srgbClr val="000000"/>
         </a:buClr>
         <a:buFont typeface="Arial"/>
-        <a:defRPr b="0" i="0" sz="1400" u="none" cap="none" strike="noStrike">
+        <a:defRPr sz="1400" b="0" i="0" u="none" strike="noStrike" cap="none">
           <a:solidFill>
             <a:srgbClr val="000000"/>
           </a:solidFill>
           <a:latin typeface="Arial"/>
           <a:ea typeface="Arial"/>
           <a:cs typeface="Arial"/>
-          <a:sym typeface="Arial"/>
         </a:defRPr>
       </a:lvl4pPr>
-      <a:lvl5pPr lvl="4" marR="0" rtl="0" algn="l">
+      <a:lvl5pPr marR="0" lvl="4" algn="l" rtl="0">
         <a:lnSpc>
           <a:spcPct val="100000"/>
         </a:lnSpc>
@@ -5501,17 +5599,16 @@
           <a:srgbClr val="000000"/>
         </a:buClr>
         <a:buFont typeface="Arial"/>
-        <a:defRPr b="0" i="0" sz="1400" u="none" cap="none" strike="noStrike">
+        <a:defRPr sz="1400" b="0" i="0" u="none" strike="noStrike" cap="none">
           <a:solidFill>
             <a:srgbClr val="000000"/>
           </a:solidFill>
           <a:latin typeface="Arial"/>
           <a:ea typeface="Arial"/>
           <a:cs typeface="Arial"/>
-          <a:sym typeface="Arial"/>
         </a:defRPr>
       </a:lvl5pPr>
-      <a:lvl6pPr lvl="5" marR="0" rtl="0" algn="l">
+      <a:lvl6pPr marR="0" lvl="5" algn="l" rtl="0">
         <a:lnSpc>
           <a:spcPct val="100000"/>
         </a:lnSpc>
@@ -5525,17 +5622,16 @@
           <a:srgbClr val="000000"/>
         </a:buClr>
         <a:buFont typeface="Arial"/>
-        <a:defRPr b="0" i="0" sz="1400" u="none" cap="none" strike="noStrike">
+        <a:defRPr sz="1400" b="0" i="0" u="none" strike="noStrike" cap="none">
           <a:solidFill>
             <a:srgbClr val="000000"/>
           </a:solidFill>
           <a:latin typeface="Arial"/>
           <a:ea typeface="Arial"/>
           <a:cs typeface="Arial"/>
-          <a:sym typeface="Arial"/>
         </a:defRPr>
       </a:lvl6pPr>
-      <a:lvl7pPr lvl="6" marR="0" rtl="0" algn="l">
+      <a:lvl7pPr marR="0" lvl="6" algn="l" rtl="0">
         <a:lnSpc>
           <a:spcPct val="100000"/>
         </a:lnSpc>
@@ -5549,17 +5645,16 @@
           <a:srgbClr val="000000"/>
         </a:buClr>
         <a:buFont typeface="Arial"/>
-        <a:defRPr b="0" i="0" sz="1400" u="none" cap="none" strike="noStrike">
+        <a:defRPr sz="1400" b="0" i="0" u="none" strike="noStrike" cap="none">
           <a:solidFill>
             <a:srgbClr val="000000"/>
           </a:solidFill>
           <a:latin typeface="Arial"/>
           <a:ea typeface="Arial"/>
           <a:cs typeface="Arial"/>
-          <a:sym typeface="Arial"/>
         </a:defRPr>
       </a:lvl7pPr>
-      <a:lvl8pPr lvl="7" marR="0" rtl="0" algn="l">
+      <a:lvl8pPr marR="0" lvl="7" algn="l" rtl="0">
         <a:lnSpc>
           <a:spcPct val="100000"/>
         </a:lnSpc>
@@ -5573,17 +5668,16 @@
           <a:srgbClr val="000000"/>
         </a:buClr>
         <a:buFont typeface="Arial"/>
-        <a:defRPr b="0" i="0" sz="1400" u="none" cap="none" strike="noStrike">
+        <a:defRPr sz="1400" b="0" i="0" u="none" strike="noStrike" cap="none">
           <a:solidFill>
             <a:srgbClr val="000000"/>
           </a:solidFill>
           <a:latin typeface="Arial"/>
           <a:ea typeface="Arial"/>
           <a:cs typeface="Arial"/>
-          <a:sym typeface="Arial"/>
         </a:defRPr>
       </a:lvl8pPr>
-      <a:lvl9pPr lvl="8" marR="0" rtl="0" algn="l">
+      <a:lvl9pPr marR="0" lvl="8" algn="l" rtl="0">
         <a:lnSpc>
           <a:spcPct val="100000"/>
         </a:lnSpc>
@@ -5597,14 +5691,13 @@
           <a:srgbClr val="000000"/>
         </a:buClr>
         <a:buFont typeface="Arial"/>
-        <a:defRPr b="0" i="0" sz="1400" u="none" cap="none" strike="noStrike">
+        <a:defRPr sz="1400" b="0" i="0" u="none" strike="noStrike" cap="none">
           <a:solidFill>
             <a:srgbClr val="000000"/>
           </a:solidFill>
           <a:latin typeface="Arial"/>
           <a:ea typeface="Arial"/>
           <a:cs typeface="Arial"/>
-          <a:sym typeface="Arial"/>
         </a:defRPr>
       </a:lvl9pPr>
     </p:otherStyle>
@@ -5613,15 +5706,15 @@
 </file>
 
 <file path=ppt/slides/slide1.xml><?xml version="1.0" encoding="utf-8"?>
-<p:sld xmlns:a="http://schemas.openxmlformats.org/drawingml/2006/main" xmlns:r="http://schemas.openxmlformats.org/officeDocument/2006/relationships" xmlns:mc="http://schemas.openxmlformats.org/markup-compatibility/2006" xmlns:mv="urn:schemas-microsoft-com:mac:vml" xmlns:p="http://schemas.openxmlformats.org/presentationml/2006/main" xmlns:c="http://schemas.openxmlformats.org/drawingml/2006/chart" xmlns:dgm="http://schemas.openxmlformats.org/drawingml/2006/diagram" xmlns:o="urn:schemas-microsoft-com:office:office" xmlns:v="urn:schemas-microsoft-com:vml" xmlns:pvml="urn:schemas-microsoft-com:office:powerpoint" xmlns:com="http://schemas.openxmlformats.org/drawingml/2006/compatibility" xmlns:p14="http://schemas.microsoft.com/office/powerpoint/2010/main" xmlns:p15="http://schemas.microsoft.com/office/powerpoint/2012/main" xmlns:ahyp="http://schemas.microsoft.com/office/drawing/2018/hyperlinkcolor">
-  <p:cSld>
+<p:sld xmlns:a="http://schemas.openxmlformats.org/drawingml/2006/main" xmlns:r="http://schemas.openxmlformats.org/officeDocument/2006/relationships" xmlns:p="http://schemas.openxmlformats.org/presentationml/2006/main" xmlns:m="http://schemas.openxmlformats.org/officeDocument/2006/math" xmlns:w="http://schemas.openxmlformats.org/wordprocessingml/2006/main" xmlns:mc="http://schemas.openxmlformats.org/markup-compatibility/2006" showMasterPhAnim="0" showMasterSp="1" show="1">
+  <p:cSld name="">
     <p:spTree>
       <p:nvGrpSpPr>
-        <p:cNvPr id="62" name="Shape 62"/>
+        <p:cNvPr id="1" name=""/>
         <p:cNvGrpSpPr/>
         <p:nvPr/>
       </p:nvGrpSpPr>
-      <p:grpSpPr>
+      <p:grpSpPr bwMode="auto">
         <a:xfrm>
           <a:off x="0" y="0"/>
           <a:ext cx="0" cy="0"/>
@@ -5631,13 +5724,13 @@
       </p:grpSpPr>
       <p:sp>
         <p:nvSpPr>
-          <p:cNvPr id="63" name="Google Shape;63;p12"/>
+          <p:cNvPr id="218874723" name="Google Shape;63;p12"/>
           <p:cNvSpPr txBox="1"/>
           <p:nvPr>
             <p:ph type="ctrTitle"/>
           </p:nvPr>
         </p:nvSpPr>
-        <p:spPr>
+        <p:spPr bwMode="auto">
           <a:xfrm>
             <a:off x="1039974" y="2350800"/>
             <a:ext cx="7064100" cy="2052600"/>
@@ -5651,12 +5744,12 @@
           </a:ln>
         </p:spPr>
         <p:txBody>
-          <a:bodyPr anchorCtr="0" anchor="b" bIns="91425" lIns="91425" spcFirstLastPara="1" rIns="91425" wrap="square" tIns="91425">
+          <a:bodyPr spcFirstLastPara="1" wrap="square" lIns="91425" tIns="91425" rIns="91425" bIns="91425" anchor="b" anchorCtr="0">
             <a:noAutofit/>
           </a:bodyPr>
           <a:lstStyle/>
           <a:p>
-            <a:pPr indent="0" lvl="0" marL="0" marR="0" rtl="0" algn="ctr">
+            <a:pPr marL="0" marR="0" lvl="0" indent="0" algn="ctr" rtl="0">
               <a:lnSpc>
                 <a:spcPct val="100000"/>
               </a:lnSpc>
@@ -5672,31 +5765,30 @@
               <a:buSzPts val="5200"/>
               <a:buFont typeface="Vidaloka"/>
               <a:buNone/>
+              <a:defRPr/>
             </a:pPr>
             <a:r>
-              <a:rPr b="0" i="0" lang="az-Latn-AZ" sz="6500" u="none" cap="none" strike="noStrike">
+              <a:rPr lang="az-Latn-AZ" sz="6500" b="0" i="0" u="none" strike="noStrike" cap="none">
                 <a:solidFill>
                   <a:schemeClr val="dk1"/>
                 </a:solidFill>
                 <a:latin typeface="Vidaloka"/>
                 <a:ea typeface="Vidaloka"/>
                 <a:cs typeface="Vidaloka"/>
-                <a:sym typeface="Vidaloka"/>
               </a:rPr>
               <a:t>Ağıllı davamiyyət sistemi</a:t>
             </a:r>
-            <a:endParaRPr b="0" i="0" sz="6500" u="none" cap="none" strike="noStrike">
+            <a:endParaRPr sz="6500" b="0" i="0" u="none" strike="noStrike" cap="none">
               <a:solidFill>
                 <a:schemeClr val="dk1"/>
               </a:solidFill>
               <a:latin typeface="Vidaloka"/>
               <a:ea typeface="Vidaloka"/>
               <a:cs typeface="Vidaloka"/>
-              <a:sym typeface="Vidaloka"/>
             </a:endParaRPr>
           </a:p>
           <a:p>
-            <a:pPr indent="0" lvl="0" marL="0" rtl="0" algn="ctr">
+            <a:pPr marL="0" lvl="0" indent="0" algn="ctr" rtl="0">
               <a:lnSpc>
                 <a:spcPct val="100000"/>
               </a:lnSpc>
@@ -5708,10 +5800,8 @@
               </a:spcAft>
               <a:buSzPts val="5200"/>
               <a:buNone/>
+              <a:defRPr/>
             </a:pPr>
-            <a:r>
-              <a:t/>
-            </a:r>
             <a:endParaRPr/>
           </a:p>
         </p:txBody>
@@ -5721,117 +5811,28 @@
   <p:clrMapOvr>
     <a:masterClrMapping/>
   </p:clrMapOvr>
-  <p:timing>
-    <p:tnLst>
-      <p:par>
-        <p:cTn dur="indefinite" nodeType="tmRoot" restart="never">
-          <p:childTnLst>
-            <p:seq concurrent="1" nextAc="seek">
-              <p:cTn dur="indefinite" id="2" nodeType="mainSeq">
-                <p:childTnLst>
-                  <p:par>
-                    <p:cTn fill="hold">
-                      <p:stCondLst>
-                        <p:cond delay="indefinite"/>
-                      </p:stCondLst>
-                      <p:childTnLst>
-                        <p:par>
-                          <p:cTn fill="hold">
-                            <p:stCondLst>
-                              <p:cond delay="0"/>
-                            </p:stCondLst>
-                            <p:childTnLst>
-                              <p:par>
-                                <p:cTn fill="hold" nodeType="clickEffect" presetClass="entr" presetID="2" presetSubtype="8">
-                                  <p:stCondLst>
-                                    <p:cond delay="0"/>
-                                  </p:stCondLst>
-                                  <p:childTnLst>
-                                    <p:set>
-                                      <p:cBhvr>
-                                        <p:cTn dur="1" fill="hold">
-                                          <p:stCondLst>
-                                            <p:cond delay="0"/>
-                                          </p:stCondLst>
-                                        </p:cTn>
-                                        <p:tgtEl>
-                                          <p:spTgt spid="63"/>
-                                        </p:tgtEl>
-                                        <p:attrNameLst>
-                                          <p:attrName>style.visibility</p:attrName>
-                                        </p:attrNameLst>
-                                      </p:cBhvr>
-                                      <p:to>
-                                        <p:strVal val="visible"/>
-                                      </p:to>
-                                    </p:set>
-                                    <p:anim calcmode="lin" valueType="num">
-                                      <p:cBhvr additive="base">
-                                        <p:cTn dur="1000"/>
-                                        <p:tgtEl>
-                                          <p:spTgt spid="63"/>
-                                        </p:tgtEl>
-                                        <p:attrNameLst>
-                                          <p:attrName>ppt_x</p:attrName>
-                                        </p:attrNameLst>
-                                      </p:cBhvr>
-                                      <p:tavLst>
-                                        <p:tav fmla="" tm="0">
-                                          <p:val>
-                                            <p:strVal val="#ppt_x-1"/>
-                                          </p:val>
-                                        </p:tav>
-                                        <p:tav fmla="" tm="100000">
-                                          <p:val>
-                                            <p:strVal val="#ppt_x"/>
-                                          </p:val>
-                                        </p:tav>
-                                      </p:tavLst>
-                                    </p:anim>
-                                  </p:childTnLst>
-                                </p:cTn>
-                              </p:par>
-                            </p:childTnLst>
-                          </p:cTn>
-                        </p:par>
-                      </p:childTnLst>
-                    </p:cTn>
-                  </p:par>
-                </p:childTnLst>
-              </p:cTn>
-              <p:prevCondLst>
-                <p:cond evt="onPrev">
-                  <p:tgtEl>
-                    <p:sldTgt/>
-                  </p:tgtEl>
-                </p:cond>
-              </p:prevCondLst>
-              <p:nextCondLst>
-                <p:cond evt="onNext">
-                  <p:tgtEl>
-                    <p:sldTgt/>
-                  </p:tgtEl>
-                </p:cond>
-              </p:nextCondLst>
-            </p:seq>
-          </p:childTnLst>
-        </p:cTn>
-      </p:par>
-    </p:tnLst>
-  </p:timing>
+  <mc:AlternateContent xmlns:mc="http://schemas.openxmlformats.org/markup-compatibility/2006">
+    <mc:Choice xmlns:p159="http://schemas.microsoft.com/office/powerpoint/2015/09/main" xmlns:p14="http://schemas.microsoft.com/office/powerpoint/2010/main" Requires="p159">
+      <p:transition p14:dur="2000" advClick="1"/>
+    </mc:Choice>
+    <mc:Fallback>
+      <p:transition advClick="1"/>
+    </mc:Fallback>
+  </mc:AlternateContent>
+  <p:timing/>
 </p:sld>
 </file>
 
 <file path=ppt/slides/slide2.xml><?xml version="1.0" encoding="utf-8"?>
-<p:sld xmlns:a="http://schemas.openxmlformats.org/drawingml/2006/main" xmlns:r="http://schemas.openxmlformats.org/officeDocument/2006/relationships" xmlns:mc="http://schemas.openxmlformats.org/markup-compatibility/2006" xmlns:mv="urn:schemas-microsoft-com:mac:vml" xmlns:p="http://schemas.openxmlformats.org/presentationml/2006/main" xmlns:c="http://schemas.openxmlformats.org/drawingml/2006/chart" xmlns:dgm="http://schemas.openxmlformats.org/drawingml/2006/diagram" xmlns:o="urn:schemas-microsoft-com:office:office" xmlns:v="urn:schemas-microsoft-com:vml" xmlns:pvml="urn:schemas-microsoft-com:office:powerpoint" xmlns:com="http://schemas.openxmlformats.org/drawingml/2006/compatibility" xmlns:p14="http://schemas.microsoft.com/office/powerpoint/2010/main" xmlns:p15="http://schemas.microsoft.com/office/powerpoint/2012/main" xmlns:ahyp="http://schemas.microsoft.com/office/drawing/2018/hyperlinkcolor">
-  <p:cSld>
+<p:sld xmlns:a="http://schemas.openxmlformats.org/drawingml/2006/main" xmlns:r="http://schemas.openxmlformats.org/officeDocument/2006/relationships" xmlns:p="http://schemas.openxmlformats.org/presentationml/2006/main" xmlns:m="http://schemas.openxmlformats.org/officeDocument/2006/math" xmlns:w="http://schemas.openxmlformats.org/wordprocessingml/2006/main" xmlns:mc="http://schemas.openxmlformats.org/markup-compatibility/2006" showMasterPhAnim="0" showMasterSp="1" show="1">
+  <p:cSld name="">
     <p:spTree>
       <p:nvGrpSpPr>
-        <p:cNvPr id="67" name="Shape 67"/>
+        <p:cNvPr id="1" name=""/>
         <p:cNvGrpSpPr/>
         <p:nvPr/>
       </p:nvGrpSpPr>
-      <p:grpSpPr>
+      <p:grpSpPr bwMode="auto">
         <a:xfrm>
           <a:off x="0" y="0"/>
           <a:ext cx="0" cy="0"/>
@@ -5841,16 +5842,16 @@
       </p:grpSpPr>
       <p:sp>
         <p:nvSpPr>
-          <p:cNvPr id="68" name="Google Shape;68;p13"/>
+          <p:cNvPr id="1634884912" name="Google Shape;68;p13"/>
           <p:cNvSpPr txBox="1"/>
           <p:nvPr>
-            <p:ph idx="1" type="subTitle"/>
+            <p:ph type="subTitle" idx="1"/>
           </p:nvPr>
         </p:nvSpPr>
-        <p:spPr>
-          <a:xfrm>
-            <a:off x="0" y="960000"/>
-            <a:ext cx="4465800" cy="2122200"/>
+        <p:spPr bwMode="auto">
+          <a:xfrm flipH="0" flipV="0">
+            <a:off x="0" y="959999"/>
+            <a:ext cx="4465800" cy="3874841"/>
           </a:xfrm>
           <a:prstGeom prst="rect">
             <a:avLst/>
@@ -5861,12 +5862,12 @@
           </a:ln>
         </p:spPr>
         <p:txBody>
-          <a:bodyPr anchorCtr="0" anchor="t" bIns="91400" lIns="91400" spcFirstLastPara="1" rIns="91400" wrap="square" tIns="91400">
+          <a:bodyPr spcFirstLastPara="1" wrap="square" lIns="91399" tIns="91399" rIns="91399" bIns="91399" anchor="t" anchorCtr="0">
             <a:noAutofit/>
           </a:bodyPr>
           <a:lstStyle/>
           <a:p>
-            <a:pPr indent="-342900" lvl="0" marL="457200" rtl="0" algn="l">
+            <a:pPr marL="457200" lvl="0" indent="-342900" algn="l" rtl="0">
               <a:lnSpc>
                 <a:spcPct val="114999"/>
               </a:lnSpc>
@@ -5882,43 +5883,41 @@
               <a:buSzPts val="1400"/>
               <a:buFont typeface="Arial"/>
               <a:buChar char="•"/>
+              <a:defRPr/>
             </a:pPr>
             <a:r>
-              <a:rPr b="0" i="0" lang="az-Latn-AZ" sz="1200" u="none">
+              <a:rPr lang="az-Latn-AZ" sz="1800" b="0" i="0" u="none">
                 <a:solidFill>
                   <a:srgbClr val="000000"/>
                 </a:solidFill>
                 <a:latin typeface="Times New Roman"/>
                 <a:ea typeface="Times New Roman"/>
                 <a:cs typeface="Times New Roman"/>
-                <a:sym typeface="Times New Roman"/>
               </a:rPr>
               <a:t> </a:t>
             </a:r>
             <a:r>
-              <a:rPr b="0" i="0" lang="az-Latn-AZ" sz="1600" u="none" cap="none" strike="noStrike">
+              <a:rPr lang="az-Latn-AZ" sz="2200" b="0" i="0" u="none" strike="noStrike" cap="none">
                 <a:solidFill>
                   <a:schemeClr val="dk1"/>
                 </a:solidFill>
                 <a:latin typeface="Vidaloka"/>
                 <a:ea typeface="Vidaloka"/>
                 <a:cs typeface="Vidaloka"/>
-                <a:sym typeface="Vidaloka"/>
               </a:rPr>
               <a:t>Bu, müasir üz tanıma texnologiyasına əsaslanan proqram təminatıdır. Sistem, yüksək dəqiqlikli kameralar vasitəsilə insan simalarını skan edərək biometrik məlumatları emal edir və saniyələr ərzində şəxsin kimliyini müəyyənləşdirməyə imkan verir.</a:t>
             </a:r>
-            <a:endParaRPr b="0" i="0" sz="1600" u="none" cap="none" strike="noStrike">
+            <a:endParaRPr sz="2200" b="0" i="0" u="none" strike="noStrike" cap="none">
               <a:solidFill>
                 <a:schemeClr val="dk1"/>
               </a:solidFill>
               <a:latin typeface="Vidaloka"/>
               <a:ea typeface="Vidaloka"/>
               <a:cs typeface="Vidaloka"/>
-              <a:sym typeface="Vidaloka"/>
             </a:endParaRPr>
           </a:p>
           <a:p>
-            <a:pPr indent="-254000" lvl="0" marL="457200" rtl="0" algn="l">
+            <a:pPr marL="457200" lvl="0" indent="-254000" algn="l" rtl="0">
               <a:lnSpc>
                 <a:spcPct val="100000"/>
               </a:lnSpc>
@@ -5934,28 +5933,25 @@
               <a:buSzPts val="1400"/>
               <a:buFont typeface="Arial"/>
               <a:buNone/>
+              <a:defRPr/>
             </a:pPr>
-            <a:r>
-              <a:t/>
-            </a:r>
             <a:endParaRPr sz="1100">
               <a:latin typeface="Quattrocento Sans"/>
               <a:ea typeface="Quattrocento Sans"/>
               <a:cs typeface="Quattrocento Sans"/>
-              <a:sym typeface="Quattrocento Sans"/>
             </a:endParaRPr>
           </a:p>
         </p:txBody>
       </p:sp>
       <p:sp>
         <p:nvSpPr>
-          <p:cNvPr id="69" name="Google Shape;69;p13"/>
+          <p:cNvPr id="168437646" name="Google Shape;69;p13"/>
           <p:cNvSpPr txBox="1"/>
           <p:nvPr>
             <p:ph type="title"/>
           </p:nvPr>
         </p:nvSpPr>
-        <p:spPr>
+        <p:spPr bwMode="auto">
           <a:xfrm>
             <a:off x="0" y="273250"/>
             <a:ext cx="9144000" cy="1098300"/>
@@ -5969,12 +5965,12 @@
           </a:ln>
         </p:spPr>
         <p:txBody>
-          <a:bodyPr anchorCtr="0" anchor="t" bIns="91400" lIns="91400" spcFirstLastPara="1" rIns="91400" wrap="square" tIns="91400">
+          <a:bodyPr spcFirstLastPara="1" wrap="square" lIns="91400" tIns="91400" rIns="91400" bIns="91400" anchor="t" anchorCtr="0">
             <a:noAutofit/>
           </a:bodyPr>
           <a:lstStyle/>
           <a:p>
-            <a:pPr indent="0" lvl="0" marL="0" rtl="0" algn="ctr">
+            <a:pPr marL="0" lvl="0" indent="0" algn="ctr" rtl="0">
               <a:lnSpc>
                 <a:spcPct val="100000"/>
               </a:lnSpc>
@@ -5986,6 +5982,7 @@
               </a:spcAft>
               <a:buSzPts val="3000"/>
               <a:buNone/>
+              <a:defRPr/>
             </a:pPr>
             <a:r>
               <a:rPr lang="az-Latn-AZ"/>
@@ -5997,13 +5994,13 @@
       </p:sp>
       <p:sp>
         <p:nvSpPr>
-          <p:cNvPr id="70" name="Google Shape;70;p13"/>
+          <p:cNvPr id="1128867472" name="Google Shape;70;p13"/>
           <p:cNvSpPr txBox="1"/>
           <p:nvPr/>
         </p:nvSpPr>
-        <p:spPr>
+        <p:spPr bwMode="auto">
           <a:xfrm>
-            <a:off x="4465800" y="960000"/>
+            <a:off x="4321116" y="1022052"/>
             <a:ext cx="3880500" cy="461700"/>
           </a:xfrm>
           <a:prstGeom prst="rect">
@@ -6015,23 +6012,21 @@
           </a:ln>
         </p:spPr>
         <p:txBody>
-          <a:bodyPr anchorCtr="0" anchor="t" bIns="91425" lIns="91425" spcFirstLastPara="1" rIns="91425" wrap="square" tIns="91425">
+          <a:bodyPr spcFirstLastPara="1" wrap="square" lIns="91425" tIns="91425" rIns="91425" bIns="91425" anchor="t" anchorCtr="0">
             <a:spAutoFit/>
           </a:bodyPr>
           <a:lstStyle/>
           <a:p>
-            <a:pPr indent="0" lvl="0" marL="0" rtl="0" algn="l">
-              <a:spcBef>
-                <a:spcPts val="0"/>
-              </a:spcBef>
-              <a:spcAft>
-                <a:spcPts val="0"/>
-              </a:spcAft>
-              <a:buNone/>
+            <a:pPr marL="0" lvl="0" indent="0" algn="l" rtl="0">
+              <a:spcBef>
+                <a:spcPts val="0"/>
+              </a:spcBef>
+              <a:spcAft>
+                <a:spcPts val="0"/>
+              </a:spcAft>
+              <a:buNone/>
+              <a:defRPr/>
             </a:pPr>
-            <a:r>
-              <a:t/>
-            </a:r>
             <a:endParaRPr sz="1800">
               <a:solidFill>
                 <a:schemeClr val="dk2"/>
@@ -6039,29 +6034,95 @@
               <a:latin typeface="Montserrat"/>
               <a:ea typeface="Montserrat"/>
               <a:cs typeface="Montserrat"/>
-              <a:sym typeface="Montserrat"/>
             </a:endParaRPr>
           </a:p>
         </p:txBody>
       </p:sp>
+      <p:sp>
+        <p:nvSpPr>
+          <p:cNvPr id="980580819" name=""/>
+          <p:cNvSpPr txBox="1"/>
+          <p:nvPr/>
+        </p:nvSpPr>
+        <p:spPr bwMode="auto">
+          <a:xfrm rot="0" flipH="0" flipV="0">
+            <a:off x="242961" y="3219208"/>
+            <a:ext cx="3497250" cy="335639"/>
+          </a:xfrm>
+          <a:prstGeom prst="rect">
+            <a:avLst/>
+          </a:prstGeom>
+          <a:noFill/>
+        </p:spPr>
+        <p:txBody>
+          <a:bodyPr vertOverflow="overflow" horzOverflow="overflow" vert="horz" wrap="square" lIns="91440" tIns="45720" rIns="91440" bIns="45720" numCol="1" spcCol="0" rtlCol="0" fromWordArt="0" anchor="t" anchorCtr="0" forceAA="0" upright="0" compatLnSpc="0">
+            <a:spAutoFit/>
+          </a:bodyPr>
+          <a:p>
+            <a:pPr algn="l">
+              <a:lnSpc>
+                <a:spcPct val="100000"/>
+              </a:lnSpc>
+              <a:spcBef>
+                <a:spcPts val="0"/>
+              </a:spcBef>
+              <a:spcAft>
+                <a:spcPts val="0"/>
+              </a:spcAft>
+              <a:defRPr/>
+            </a:pPr>
+            <a:endParaRPr sz="1600"/>
+          </a:p>
+        </p:txBody>
+      </p:sp>
+      <p:pic>
+        <p:nvPicPr>
+          <p:cNvPr id="2145502794" name=""/>
+          <p:cNvPicPr>
+            <a:picLocks noChangeAspect="1"/>
+          </p:cNvPicPr>
+          <p:nvPr/>
+        </p:nvPicPr>
+        <p:blipFill rotWithShape="1">
+          <a:blip r:embed="rId3"/>
+          <a:stretch/>
+        </p:blipFill>
+        <p:spPr bwMode="auto">
+          <a:xfrm flipH="0" flipV="0">
+            <a:off x="4572000" y="1084104"/>
+            <a:ext cx="3073348" cy="3073348"/>
+          </a:xfrm>
+          <a:prstGeom prst="rect">
+            <a:avLst/>
+          </a:prstGeom>
+        </p:spPr>
+      </p:pic>
     </p:spTree>
   </p:cSld>
   <p:clrMapOvr>
     <a:masterClrMapping/>
   </p:clrMapOvr>
+  <mc:AlternateContent xmlns:mc="http://schemas.openxmlformats.org/markup-compatibility/2006">
+    <mc:Choice xmlns:p159="http://schemas.microsoft.com/office/powerpoint/2015/09/main" xmlns:p14="http://schemas.microsoft.com/office/powerpoint/2010/main" Requires="p159">
+      <p:transition p14:dur="2000" advClick="1"/>
+    </mc:Choice>
+    <mc:Fallback>
+      <p:transition advClick="1"/>
+    </mc:Fallback>
+  </mc:AlternateContent>
 </p:sld>
 </file>
 
 <file path=ppt/slides/slide3.xml><?xml version="1.0" encoding="utf-8"?>
-<p:sld xmlns:a="http://schemas.openxmlformats.org/drawingml/2006/main" xmlns:r="http://schemas.openxmlformats.org/officeDocument/2006/relationships" xmlns:mc="http://schemas.openxmlformats.org/markup-compatibility/2006" xmlns:mv="urn:schemas-microsoft-com:mac:vml" xmlns:p="http://schemas.openxmlformats.org/presentationml/2006/main" xmlns:c="http://schemas.openxmlformats.org/drawingml/2006/chart" xmlns:dgm="http://schemas.openxmlformats.org/drawingml/2006/diagram" xmlns:o="urn:schemas-microsoft-com:office:office" xmlns:v="urn:schemas-microsoft-com:vml" xmlns:pvml="urn:schemas-microsoft-com:office:powerpoint" xmlns:com="http://schemas.openxmlformats.org/drawingml/2006/compatibility" xmlns:p14="http://schemas.microsoft.com/office/powerpoint/2010/main" xmlns:p15="http://schemas.microsoft.com/office/powerpoint/2012/main" xmlns:ahyp="http://schemas.microsoft.com/office/drawing/2018/hyperlinkcolor">
-  <p:cSld>
+<p:sld xmlns:a="http://schemas.openxmlformats.org/drawingml/2006/main" xmlns:r="http://schemas.openxmlformats.org/officeDocument/2006/relationships" xmlns:p="http://schemas.openxmlformats.org/presentationml/2006/main" xmlns:m="http://schemas.openxmlformats.org/officeDocument/2006/math" xmlns:w="http://schemas.openxmlformats.org/wordprocessingml/2006/main" xmlns:mc="http://schemas.openxmlformats.org/markup-compatibility/2006" showMasterPhAnim="0" showMasterSp="1" show="1">
+  <p:cSld name="">
     <p:spTree>
       <p:nvGrpSpPr>
-        <p:cNvPr id="74" name="Shape 74"/>
+        <p:cNvPr id="1" name=""/>
         <p:cNvGrpSpPr/>
         <p:nvPr/>
       </p:nvGrpSpPr>
-      <p:grpSpPr>
+      <p:grpSpPr bwMode="auto">
         <a:xfrm>
           <a:off x="0" y="0"/>
           <a:ext cx="0" cy="0"/>
@@ -6071,13 +6132,13 @@
       </p:grpSpPr>
       <p:sp>
         <p:nvSpPr>
-          <p:cNvPr id="75" name="Google Shape;75;p14"/>
+          <p:cNvPr id="66396946" name="Google Shape;75;p14"/>
           <p:cNvSpPr txBox="1"/>
           <p:nvPr>
-            <p:ph idx="1" type="subTitle"/>
+            <p:ph type="subTitle" idx="1"/>
           </p:nvPr>
         </p:nvSpPr>
-        <p:spPr>
+        <p:spPr bwMode="auto">
           <a:xfrm>
             <a:off x="-12" y="845919"/>
             <a:ext cx="5033100" cy="2379900"/>
@@ -6091,12 +6152,12 @@
           </a:ln>
         </p:spPr>
         <p:txBody>
-          <a:bodyPr anchorCtr="0" anchor="t" bIns="91400" lIns="91400" spcFirstLastPara="1" rIns="91400" wrap="square" tIns="91400">
+          <a:bodyPr spcFirstLastPara="1" wrap="square" lIns="91400" tIns="91400" rIns="91400" bIns="91400" anchor="t" anchorCtr="0">
             <a:noAutofit/>
           </a:bodyPr>
           <a:lstStyle/>
           <a:p>
-            <a:pPr indent="-342900" lvl="0" marL="457200" rtl="0" algn="l">
+            <a:pPr marL="457200" lvl="0" indent="-342900" algn="l" rtl="0">
               <a:lnSpc>
                 <a:spcPct val="100000"/>
               </a:lnSpc>
@@ -6112,40 +6173,38 @@
               <a:buSzPts val="3000"/>
               <a:buFont typeface="Arial"/>
               <a:buChar char="•"/>
+              <a:defRPr/>
             </a:pPr>
             <a:r>
-              <a:rPr b="0" i="0" lang="az-Latn-AZ" sz="700" u="none">
+              <a:rPr lang="az-Latn-AZ" sz="700" b="0" i="0" u="none">
                 <a:solidFill>
                   <a:srgbClr val="000000"/>
                 </a:solidFill>
                 <a:latin typeface="Times New Roman"/>
                 <a:ea typeface="Times New Roman"/>
                 <a:cs typeface="Times New Roman"/>
-                <a:sym typeface="Times New Roman"/>
               </a:rPr>
               <a:t> </a:t>
             </a:r>
             <a:r>
-              <a:rPr b="0" i="0" lang="az-Latn-AZ" sz="2000" u="none" cap="none" strike="noStrike">
+              <a:rPr lang="az-Latn-AZ" sz="2000" b="0" i="0" u="none" strike="noStrike" cap="none">
                 <a:solidFill>
                   <a:schemeClr val="dk1"/>
                 </a:solidFill>
                 <a:latin typeface="Vidaloka"/>
                 <a:ea typeface="Vidaloka"/>
                 <a:cs typeface="Vidaloka"/>
-                <a:sym typeface="Vidaloka"/>
               </a:rPr>
               <a:t>Biz bu sistemi tətbiq etməkdə əsas məqsədimiz, şagirdlərin dərsə iştirakının qeydiyyat prosesini tamamilə avtomatlaşdırmaq və bununla da məktəb heyətinin inzibati yükünü əhəmiyyətli dərəcədə azaltmaqdır</a:t>
             </a:r>
             <a:r>
-              <a:rPr b="0" i="0" lang="az-Latn-AZ" sz="700" u="none">
+              <a:rPr lang="az-Latn-AZ" sz="700" b="0" i="0" u="none">
                 <a:solidFill>
                   <a:srgbClr val="000000"/>
                 </a:solidFill>
                 <a:latin typeface="Times New Roman"/>
                 <a:ea typeface="Times New Roman"/>
                 <a:cs typeface="Times New Roman"/>
-                <a:sym typeface="Times New Roman"/>
               </a:rPr>
               <a:t>.</a:t>
             </a:r>
@@ -6155,13 +6214,13 @@
       </p:sp>
       <p:sp>
         <p:nvSpPr>
-          <p:cNvPr id="76" name="Google Shape;76;p14"/>
+          <p:cNvPr id="1080835111" name="Google Shape;76;p14"/>
           <p:cNvSpPr txBox="1"/>
           <p:nvPr>
             <p:ph type="title"/>
           </p:nvPr>
         </p:nvSpPr>
-        <p:spPr>
+        <p:spPr bwMode="auto">
           <a:xfrm>
             <a:off x="0" y="273225"/>
             <a:ext cx="9144000" cy="572700"/>
@@ -6175,12 +6234,12 @@
           </a:ln>
         </p:spPr>
         <p:txBody>
-          <a:bodyPr anchorCtr="0" anchor="t" bIns="91425" lIns="91425" spcFirstLastPara="1" rIns="91425" wrap="square" tIns="91425">
+          <a:bodyPr spcFirstLastPara="1" wrap="square" lIns="91425" tIns="91425" rIns="91425" bIns="91425" anchor="t" anchorCtr="0">
             <a:noAutofit/>
           </a:bodyPr>
           <a:lstStyle/>
           <a:p>
-            <a:pPr indent="0" lvl="0" marL="0" rtl="0" algn="ctr">
+            <a:pPr marL="0" lvl="0" indent="0" algn="ctr" rtl="0">
               <a:lnSpc>
                 <a:spcPct val="100000"/>
               </a:lnSpc>
@@ -6192,6 +6251,7 @@
               </a:spcAft>
               <a:buSzPts val="3000"/>
               <a:buNone/>
+              <a:defRPr/>
             </a:pPr>
             <a:r>
               <a:rPr lang="az-Latn-AZ"/>
@@ -6203,11 +6263,11 @@
       </p:sp>
       <p:sp>
         <p:nvSpPr>
-          <p:cNvPr id="77" name="Google Shape;77;p14"/>
+          <p:cNvPr id="716474519" name="Google Shape;77;p14"/>
           <p:cNvSpPr txBox="1"/>
           <p:nvPr/>
         </p:nvSpPr>
-        <p:spPr>
+        <p:spPr bwMode="auto">
           <a:xfrm>
             <a:off x="5618450" y="1212625"/>
             <a:ext cx="3546900" cy="461700"/>
@@ -6221,23 +6281,21 @@
           </a:ln>
         </p:spPr>
         <p:txBody>
-          <a:bodyPr anchorCtr="0" anchor="t" bIns="91425" lIns="91425" spcFirstLastPara="1" rIns="91425" wrap="square" tIns="91425">
+          <a:bodyPr spcFirstLastPara="1" wrap="square" lIns="91425" tIns="91425" rIns="91425" bIns="91425" anchor="t" anchorCtr="0">
             <a:spAutoFit/>
           </a:bodyPr>
           <a:lstStyle/>
           <a:p>
-            <a:pPr indent="0" lvl="0" marL="0" rtl="0" algn="l">
-              <a:spcBef>
-                <a:spcPts val="0"/>
-              </a:spcBef>
-              <a:spcAft>
-                <a:spcPts val="0"/>
-              </a:spcAft>
-              <a:buNone/>
+            <a:pPr marL="0" lvl="0" indent="0" algn="l" rtl="0">
+              <a:spcBef>
+                <a:spcPts val="0"/>
+              </a:spcBef>
+              <a:spcAft>
+                <a:spcPts val="0"/>
+              </a:spcAft>
+              <a:buNone/>
+              <a:defRPr/>
             </a:pPr>
-            <a:r>
-              <a:t/>
-            </a:r>
             <a:endParaRPr sz="1800">
               <a:solidFill>
                 <a:schemeClr val="dk2"/>
@@ -6245,8 +6303,103 @@
               <a:latin typeface="Montserrat"/>
               <a:ea typeface="Montserrat"/>
               <a:cs typeface="Montserrat"/>
-              <a:sym typeface="Montserrat"/>
             </a:endParaRPr>
+          </a:p>
+        </p:txBody>
+      </p:sp>
+      <p:sp>
+        <p:nvSpPr>
+          <p:cNvPr id="1127523446" name=""/>
+          <p:cNvSpPr txBox="1"/>
+          <p:nvPr/>
+        </p:nvSpPr>
+        <p:spPr bwMode="auto">
+          <a:xfrm rot="0" flipH="0" flipV="0">
+            <a:off x="4707549" y="939458"/>
+            <a:ext cx="3638514" cy="2286359"/>
+          </a:xfrm>
+          <a:prstGeom prst="rect">
+            <a:avLst/>
+          </a:prstGeom>
+          <a:noFill/>
+        </p:spPr>
+        <p:txBody>
+          <a:bodyPr vertOverflow="overflow" horzOverflow="overflow" vert="horz" wrap="square" lIns="91440" tIns="45720" rIns="91440" bIns="45720" numCol="1" spcCol="0" rtlCol="0" fromWordArt="0" anchor="t" anchorCtr="0" forceAA="0" upright="0" compatLnSpc="0">
+            <a:spAutoFit/>
+          </a:bodyPr>
+          <a:p>
+            <a:pPr marL="457200" marR="0" indent="-342900" algn="l">
+              <a:lnSpc>
+                <a:spcPct val="100000"/>
+              </a:lnSpc>
+              <a:spcBef>
+                <a:spcPts val="0"/>
+              </a:spcBef>
+              <a:spcAft>
+                <a:spcPts val="0"/>
+              </a:spcAft>
+              <a:buClr>
+                <a:schemeClr val="dk1"/>
+              </a:buClr>
+              <a:buSzPts val="3000"/>
+              <a:buFont typeface="Arial"/>
+              <a:buChar char="•"/>
+              <a:defRPr/>
+            </a:pPr>
+            <a:r>
+              <a:rPr lang="az-Latn-AZ" sz="1800" b="0" i="0" u="none" strike="noStrike" cap="none" spc="0">
+                <a:solidFill/>
+                <a:latin typeface="undefined"/>
+                <a:ea typeface="undefined"/>
+                <a:cs typeface="undefined"/>
+              </a:rPr>
+              <a:t>Bu ağıllı proqram təminatı ilə məktəbiniz daha təhlükəsiz, müəllimlər isə daha az yüklənmiş olacaq!</a:t>
+            </a:r>
+            <a:br>
+              <a:rPr lang="az-Latn-AZ" sz="1800" b="0" i="0" u="none" strike="noStrike" cap="none" spc="0">
+                <a:solidFill/>
+                <a:latin typeface="undefined"/>
+                <a:ea typeface="undefined"/>
+                <a:cs typeface="undefined"/>
+              </a:rPr>
+            </a:br>
+            <a:r>
+              <a:rPr lang="az-Latn-AZ" sz="1800" b="0" i="0" u="none" strike="noStrike" cap="none" spc="0">
+                <a:solidFill/>
+                <a:latin typeface="undefined"/>
+                <a:ea typeface="undefined"/>
+                <a:cs typeface="undefined"/>
+              </a:rPr>
+              <a:t> Artıq kənar şəxslərin girişi avtomatik məhdudlaşdırı</a:t>
+            </a:r>
+            <a:r>
+              <a:rPr lang="az-Latn-AZ" sz="1800" b="0" i="0" u="none" strike="noStrike" cap="none" spc="0">
+                <a:solidFill/>
+                <a:latin typeface="undefined"/>
+                <a:ea typeface="undefined"/>
+                <a:cs typeface="undefined"/>
+              </a:rPr>
+              <a:t>l</a:t>
+            </a:r>
+            <a:r>
+              <a:rPr lang="az-Latn-AZ" sz="1800" b="0" i="0" u="none" strike="noStrike" cap="none" spc="0">
+                <a:solidFill/>
+                <a:latin typeface="undefined"/>
+                <a:ea typeface="undefined"/>
+                <a:cs typeface="undefined"/>
+              </a:rPr>
+              <a:t>ır, jurnal yazmaq üçün sərf olunan vaxt isə xeyli qısalır.</a:t>
+            </a:r>
+            <a:r>
+              <a:rPr lang="az-Latn-AZ" sz="1800" b="0" i="0" u="none" strike="noStrike" cap="none" spc="0">
+                <a:solidFill/>
+                <a:latin typeface="undefined"/>
+                <a:ea typeface="undefined"/>
+                <a:cs typeface="undefined"/>
+              </a:rPr>
+              <a:t> </a:t>
+            </a:r>
+            <a:endParaRPr sz="1800"/>
           </a:p>
         </p:txBody>
       </p:sp>
@@ -6255,167 +6408,28 @@
   <p:clrMapOvr>
     <a:masterClrMapping/>
   </p:clrMapOvr>
-  <p:timing>
-    <p:tnLst>
-      <p:par>
-        <p:cTn dur="indefinite" nodeType="tmRoot" restart="never">
-          <p:childTnLst>
-            <p:seq concurrent="1" nextAc="seek">
-              <p:cTn dur="indefinite" id="2" nodeType="mainSeq">
-                <p:childTnLst>
-                  <p:par>
-                    <p:cTn fill="hold">
-                      <p:stCondLst>
-                        <p:cond delay="indefinite"/>
-                      </p:stCondLst>
-                      <p:childTnLst>
-                        <p:par>
-                          <p:cTn fill="hold">
-                            <p:stCondLst>
-                              <p:cond delay="0"/>
-                            </p:stCondLst>
-                            <p:childTnLst>
-                              <p:par>
-                                <p:cTn fill="hold" nodeType="clickEffect" presetClass="entr" presetID="2" presetSubtype="1">
-                                  <p:stCondLst>
-                                    <p:cond delay="0"/>
-                                  </p:stCondLst>
-                                  <p:childTnLst>
-                                    <p:set>
-                                      <p:cBhvr>
-                                        <p:cTn dur="1" fill="hold">
-                                          <p:stCondLst>
-                                            <p:cond delay="0"/>
-                                          </p:stCondLst>
-                                        </p:cTn>
-                                        <p:tgtEl>
-                                          <p:spTgt spid="75"/>
-                                        </p:tgtEl>
-                                        <p:attrNameLst>
-                                          <p:attrName>style.visibility</p:attrName>
-                                        </p:attrNameLst>
-                                      </p:cBhvr>
-                                      <p:to>
-                                        <p:strVal val="visible"/>
-                                      </p:to>
-                                    </p:set>
-                                    <p:anim calcmode="lin" valueType="num">
-                                      <p:cBhvr additive="base">
-                                        <p:cTn dur="1000"/>
-                                        <p:tgtEl>
-                                          <p:spTgt spid="75"/>
-                                        </p:tgtEl>
-                                        <p:attrNameLst>
-                                          <p:attrName>ppt_y</p:attrName>
-                                        </p:attrNameLst>
-                                      </p:cBhvr>
-                                      <p:tavLst>
-                                        <p:tav fmla="" tm="0">
-                                          <p:val>
-                                            <p:strVal val="#ppt_y-1"/>
-                                          </p:val>
-                                        </p:tav>
-                                        <p:tav fmla="" tm="100000">
-                                          <p:val>
-                                            <p:strVal val="#ppt_y"/>
-                                          </p:val>
-                                        </p:tav>
-                                      </p:tavLst>
-                                    </p:anim>
-                                  </p:childTnLst>
-                                </p:cTn>
-                              </p:par>
-                              <p:par>
-                                <p:cTn fill="hold" nodeType="withEffect" presetClass="entr" presetID="2" presetSubtype="1">
-                                  <p:stCondLst>
-                                    <p:cond delay="0"/>
-                                  </p:stCondLst>
-                                  <p:childTnLst>
-                                    <p:set>
-                                      <p:cBhvr>
-                                        <p:cTn dur="1" fill="hold">
-                                          <p:stCondLst>
-                                            <p:cond delay="0"/>
-                                          </p:stCondLst>
-                                        </p:cTn>
-                                        <p:tgtEl>
-                                          <p:spTgt spid="76"/>
-                                        </p:tgtEl>
-                                        <p:attrNameLst>
-                                          <p:attrName>style.visibility</p:attrName>
-                                        </p:attrNameLst>
-                                      </p:cBhvr>
-                                      <p:to>
-                                        <p:strVal val="visible"/>
-                                      </p:to>
-                                    </p:set>
-                                    <p:anim calcmode="lin" valueType="num">
-                                      <p:cBhvr additive="base">
-                                        <p:cTn dur="1000"/>
-                                        <p:tgtEl>
-                                          <p:spTgt spid="76"/>
-                                        </p:tgtEl>
-                                        <p:attrNameLst>
-                                          <p:attrName>ppt_y</p:attrName>
-                                        </p:attrNameLst>
-                                      </p:cBhvr>
-                                      <p:tavLst>
-                                        <p:tav fmla="" tm="0">
-                                          <p:val>
-                                            <p:strVal val="#ppt_y-1"/>
-                                          </p:val>
-                                        </p:tav>
-                                        <p:tav fmla="" tm="100000">
-                                          <p:val>
-                                            <p:strVal val="#ppt_y"/>
-                                          </p:val>
-                                        </p:tav>
-                                      </p:tavLst>
-                                    </p:anim>
-                                  </p:childTnLst>
-                                </p:cTn>
-                              </p:par>
-                            </p:childTnLst>
-                          </p:cTn>
-                        </p:par>
-                      </p:childTnLst>
-                    </p:cTn>
-                  </p:par>
-                </p:childTnLst>
-              </p:cTn>
-              <p:prevCondLst>
-                <p:cond evt="onPrev">
-                  <p:tgtEl>
-                    <p:sldTgt/>
-                  </p:tgtEl>
-                </p:cond>
-              </p:prevCondLst>
-              <p:nextCondLst>
-                <p:cond evt="onNext">
-                  <p:tgtEl>
-                    <p:sldTgt/>
-                  </p:tgtEl>
-                </p:cond>
-              </p:nextCondLst>
-            </p:seq>
-          </p:childTnLst>
-        </p:cTn>
-      </p:par>
-    </p:tnLst>
-  </p:timing>
+  <mc:AlternateContent xmlns:mc="http://schemas.openxmlformats.org/markup-compatibility/2006">
+    <mc:Choice xmlns:p159="http://schemas.microsoft.com/office/powerpoint/2015/09/main" xmlns:p14="http://schemas.microsoft.com/office/powerpoint/2010/main" Requires="p159">
+      <p:transition p14:dur="2000" advClick="1"/>
+    </mc:Choice>
+    <mc:Fallback>
+      <p:transition advClick="1"/>
+    </mc:Fallback>
+  </mc:AlternateContent>
+  <p:timing/>
 </p:sld>
 </file>
 
 <file path=ppt/slides/slide4.xml><?xml version="1.0" encoding="utf-8"?>
-<p:sld xmlns:a="http://schemas.openxmlformats.org/drawingml/2006/main" xmlns:r="http://schemas.openxmlformats.org/officeDocument/2006/relationships" xmlns:mc="http://schemas.openxmlformats.org/markup-compatibility/2006" xmlns:mv="urn:schemas-microsoft-com:mac:vml" xmlns:p="http://schemas.openxmlformats.org/presentationml/2006/main" xmlns:c="http://schemas.openxmlformats.org/drawingml/2006/chart" xmlns:dgm="http://schemas.openxmlformats.org/drawingml/2006/diagram" xmlns:o="urn:schemas-microsoft-com:office:office" xmlns:v="urn:schemas-microsoft-com:vml" xmlns:pvml="urn:schemas-microsoft-com:office:powerpoint" xmlns:com="http://schemas.openxmlformats.org/drawingml/2006/compatibility" xmlns:p14="http://schemas.microsoft.com/office/powerpoint/2010/main" xmlns:p15="http://schemas.microsoft.com/office/powerpoint/2012/main" xmlns:ahyp="http://schemas.microsoft.com/office/drawing/2018/hyperlinkcolor">
-  <p:cSld>
+<p:sld xmlns:a="http://schemas.openxmlformats.org/drawingml/2006/main" xmlns:r="http://schemas.openxmlformats.org/officeDocument/2006/relationships" xmlns:p="http://schemas.openxmlformats.org/presentationml/2006/main" xmlns:m="http://schemas.openxmlformats.org/officeDocument/2006/math" xmlns:w="http://schemas.openxmlformats.org/wordprocessingml/2006/main" xmlns:mc="http://schemas.openxmlformats.org/markup-compatibility/2006" showMasterPhAnim="0" showMasterSp="1" show="1">
+  <p:cSld name="">
     <p:spTree>
       <p:nvGrpSpPr>
-        <p:cNvPr id="81" name="Shape 81"/>
+        <p:cNvPr id="1" name=""/>
         <p:cNvGrpSpPr/>
         <p:nvPr/>
       </p:nvGrpSpPr>
-      <p:grpSpPr>
+      <p:grpSpPr bwMode="auto">
         <a:xfrm>
           <a:off x="0" y="0"/>
           <a:ext cx="0" cy="0"/>
@@ -6425,15 +6439,15 @@
       </p:grpSpPr>
       <p:sp>
         <p:nvSpPr>
-          <p:cNvPr id="82" name="Google Shape;82;p15"/>
+          <p:cNvPr id="643662480" name="Google Shape;82;p15"/>
           <p:cNvSpPr txBox="1"/>
           <p:nvPr>
             <p:ph type="title"/>
           </p:nvPr>
         </p:nvSpPr>
-        <p:spPr>
+        <p:spPr bwMode="auto">
           <a:xfrm>
-            <a:off x="0" y="295850"/>
+            <a:off x="-241139" y="295849"/>
             <a:ext cx="4270500" cy="1291200"/>
           </a:xfrm>
           <a:prstGeom prst="rect">
@@ -6445,12 +6459,12 @@
           </a:ln>
         </p:spPr>
         <p:txBody>
-          <a:bodyPr anchorCtr="0" anchor="t" bIns="91425" lIns="91425" spcFirstLastPara="1" rIns="91425" wrap="square" tIns="91425">
+          <a:bodyPr spcFirstLastPara="1" wrap="square" lIns="91425" tIns="91425" rIns="91425" bIns="91425" anchor="t" anchorCtr="0">
             <a:noAutofit/>
           </a:bodyPr>
           <a:lstStyle/>
           <a:p>
-            <a:pPr indent="0" lvl="0" marL="0" rtl="0" algn="ctr">
+            <a:pPr marL="0" lvl="0" indent="0" algn="ctr" rtl="0">
               <a:lnSpc>
                 <a:spcPct val="100000"/>
               </a:lnSpc>
@@ -6462,6 +6476,7 @@
               </a:spcAft>
               <a:buSzPts val="9000"/>
               <a:buNone/>
+              <a:defRPr/>
             </a:pPr>
             <a:r>
               <a:rPr lang="az-Latn-AZ"/>
@@ -6473,15 +6488,15 @@
       </p:sp>
       <p:sp>
         <p:nvSpPr>
-          <p:cNvPr id="83" name="Google Shape;83;p15"/>
+          <p:cNvPr id="1938663351" name="Google Shape;83;p15"/>
           <p:cNvSpPr txBox="1"/>
           <p:nvPr>
-            <p:ph idx="1" type="subTitle"/>
+            <p:ph type="subTitle" idx="1"/>
           </p:nvPr>
         </p:nvSpPr>
-        <p:spPr>
+        <p:spPr bwMode="auto">
           <a:xfrm>
-            <a:off x="0" y="1455150"/>
+            <a:off x="-68447" y="1455149"/>
             <a:ext cx="4391100" cy="1965000"/>
           </a:xfrm>
           <a:prstGeom prst="rect">
@@ -6493,12 +6508,12 @@
           </a:ln>
         </p:spPr>
         <p:txBody>
-          <a:bodyPr anchorCtr="0" anchor="t" bIns="91400" lIns="91400" spcFirstLastPara="1" rIns="91400" wrap="square" tIns="91400">
+          <a:bodyPr spcFirstLastPara="1" wrap="square" lIns="91400" tIns="91400" rIns="91400" bIns="91400" anchor="t" anchorCtr="0">
             <a:noAutofit/>
           </a:bodyPr>
           <a:lstStyle/>
           <a:p>
-            <a:pPr indent="-217793" lvl="0" marL="217793" marR="0" rtl="0" algn="ctr">
+            <a:pPr marL="217793" marR="0" lvl="0" indent="-217793" algn="ctr" rtl="0">
               <a:lnSpc>
                 <a:spcPct val="100000"/>
               </a:lnSpc>
@@ -6514,43 +6529,43 @@
               <a:buSzPts val="1800"/>
               <a:buFont typeface="Arial"/>
               <a:buChar char="•"/>
+              <a:defRPr/>
             </a:pPr>
             <a:r>
-              <a:rPr lang="az-Latn-AZ" sz="1200"/>
+              <a:rPr lang="az-Latn-AZ" sz="1600"/>
               <a:t>Bu, intuitiv interfeysə malik olub, istifadəçi dostu şəkildə dizayn edilmiş Qrafik İstifadəçi İnterfeysidir (GUI). Bu sistemin istifadəsi minimum təlimlə, hətta texniki bilikləri olmayanlar üçün də son dərəcə asandır</a:t>
             </a:r>
             <a:r>
-              <a:rPr lang="az-Latn-AZ" sz="1100">
+              <a:rPr lang="az-Latn-AZ" sz="1400">
                 <a:solidFill>
                   <a:srgbClr val="000000"/>
                 </a:solidFill>
                 <a:latin typeface="Times New Roman"/>
                 <a:ea typeface="Times New Roman"/>
                 <a:cs typeface="Times New Roman"/>
-                <a:sym typeface="Times New Roman"/>
               </a:rPr>
               <a:t>.</a:t>
             </a:r>
-            <a:endParaRPr sz="1200"/>
+            <a:endParaRPr sz="1600"/>
           </a:p>
         </p:txBody>
       </p:sp>
       <p:pic>
         <p:nvPicPr>
-          <p:cNvPr id="84" name="Google Shape;84;p15"/>
-          <p:cNvPicPr preferRelativeResize="0"/>
+          <p:cNvPr id="966138434" name="Google Shape;84;p15"/>
+          <p:cNvPicPr/>
           <p:nvPr/>
         </p:nvPicPr>
         <p:blipFill rotWithShape="1">
           <a:blip r:embed="rId3">
             <a:alphaModFix/>
           </a:blip>
-          <a:srcRect b="3605" l="3605" r="0" t="0"/>
+          <a:srcRect l="3605" t="0" r="0" b="3605"/>
           <a:stretch/>
         </p:blipFill>
-        <p:spPr>
+        <p:spPr bwMode="auto">
           <a:xfrm>
-            <a:off x="4391100" y="295850"/>
+            <a:off x="4322651" y="819607"/>
             <a:ext cx="4752900" cy="3124200"/>
           </a:xfrm>
           <a:prstGeom prst="rect">
@@ -6560,6 +6575,98 @@
           <a:ln>
             <a:noFill/>
           </a:ln>
+        </p:spPr>
+      </p:pic>
+      <p:sp>
+        <p:nvSpPr>
+          <p:cNvPr id="1359744987" name=""/>
+          <p:cNvSpPr txBox="1"/>
+          <p:nvPr/>
+        </p:nvSpPr>
+        <p:spPr bwMode="auto">
+          <a:xfrm rot="0" flipH="0" flipV="0">
+            <a:off x="180" y="3166387"/>
+            <a:ext cx="4253843" cy="1554840"/>
+          </a:xfrm>
+          <a:prstGeom prst="rect">
+            <a:avLst/>
+          </a:prstGeom>
+          <a:noFill/>
+        </p:spPr>
+        <p:txBody>
+          <a:bodyPr vertOverflow="overflow" horzOverflow="overflow" vert="horz" wrap="square" lIns="91440" tIns="45720" rIns="91440" bIns="45720" numCol="1" spcCol="0" rtlCol="0" fromWordArt="0" anchor="t" anchorCtr="0" forceAA="0" upright="0" compatLnSpc="0">
+            <a:spAutoFit/>
+          </a:bodyPr>
+          <a:p>
+            <a:pPr marL="217792" marR="0" indent="-217792" algn="ctr">
+              <a:lnSpc>
+                <a:spcPct val="100000"/>
+              </a:lnSpc>
+              <a:spcBef>
+                <a:spcPts val="0"/>
+              </a:spcBef>
+              <a:spcAft>
+                <a:spcPts val="0"/>
+              </a:spcAft>
+              <a:buClr>
+                <a:schemeClr val="dk2"/>
+              </a:buClr>
+              <a:buSzPts val="1800"/>
+              <a:buFont typeface="Arial"/>
+              <a:buChar char="•"/>
+              <a:defRPr/>
+            </a:pPr>
+            <a:r>
+              <a:rPr lang="az-Latn-AZ" sz="1600" b="0" i="0" u="none" strike="noStrike" cap="none" spc="0">
+                <a:solidFill/>
+                <a:latin typeface="undefined"/>
+                <a:ea typeface="undefined"/>
+                <a:cs typeface="undefined"/>
+              </a:rPr>
+              <a:t>İ</a:t>
+            </a:r>
+            <a:r>
+              <a:rPr lang="az-Latn-AZ" sz="1600" b="0" i="0" u="none" strike="noStrike" cap="none" spc="0">
+                <a:solidFill/>
+                <a:latin typeface="undefined"/>
+                <a:ea typeface="undefined"/>
+                <a:cs typeface="undefined"/>
+              </a:rPr>
+              <a:t>stifadə rahatlığı sayəsində sistem hər yaşda və hər texnoloji səviyyədə olan müəllimlər üçün əlçatan olur. Sadə interfeys dərs prosesini sürətləndirir və mü</a:t>
+            </a:r>
+            <a:r>
+              <a:rPr lang="az-Latn-AZ" sz="1600" b="0" i="0" u="none" strike="noStrike" cap="none" spc="0">
+                <a:solidFill/>
+                <a:latin typeface="undefined"/>
+                <a:ea typeface="undefined"/>
+                <a:cs typeface="undefined"/>
+              </a:rPr>
+              <a:t>əllimlərə daha çox vaxtı tədrisə ayırmaq imkanı yaradır.</a:t>
+            </a:r>
+            <a:endParaRPr sz="1600"/>
+          </a:p>
+        </p:txBody>
+      </p:sp>
+      <p:pic>
+        <p:nvPicPr>
+          <p:cNvPr id="643904182" name=""/>
+          <p:cNvPicPr>
+            <a:picLocks noChangeAspect="1"/>
+          </p:cNvPicPr>
+          <p:nvPr/>
+        </p:nvPicPr>
+        <p:blipFill rotWithShape="1">
+          <a:blip r:embed="rId4"/>
+          <a:stretch/>
+        </p:blipFill>
+        <p:spPr bwMode="auto">
+          <a:xfrm flipH="0" flipV="0">
+            <a:off x="3455727" y="349651"/>
+            <a:ext cx="658031" cy="658031"/>
+          </a:xfrm>
+          <a:prstGeom prst="rect">
+            <a:avLst/>
+          </a:prstGeom>
         </p:spPr>
       </p:pic>
     </p:spTree>
@@ -6567,19 +6674,27 @@
   <p:clrMapOvr>
     <a:masterClrMapping/>
   </p:clrMapOvr>
+  <mc:AlternateContent xmlns:mc="http://schemas.openxmlformats.org/markup-compatibility/2006">
+    <mc:Choice xmlns:p159="http://schemas.microsoft.com/office/powerpoint/2015/09/main" xmlns:p14="http://schemas.microsoft.com/office/powerpoint/2010/main" Requires="p159">
+      <p:transition p14:dur="2000" advClick="1"/>
+    </mc:Choice>
+    <mc:Fallback>
+      <p:transition advClick="1"/>
+    </mc:Fallback>
+  </mc:AlternateContent>
 </p:sld>
 </file>
 
 <file path=ppt/slides/slide5.xml><?xml version="1.0" encoding="utf-8"?>
-<p:sld xmlns:a="http://schemas.openxmlformats.org/drawingml/2006/main" xmlns:r="http://schemas.openxmlformats.org/officeDocument/2006/relationships" xmlns:mc="http://schemas.openxmlformats.org/markup-compatibility/2006" xmlns:mv="urn:schemas-microsoft-com:mac:vml" xmlns:p="http://schemas.openxmlformats.org/presentationml/2006/main" xmlns:c="http://schemas.openxmlformats.org/drawingml/2006/chart" xmlns:dgm="http://schemas.openxmlformats.org/drawingml/2006/diagram" xmlns:o="urn:schemas-microsoft-com:office:office" xmlns:v="urn:schemas-microsoft-com:vml" xmlns:pvml="urn:schemas-microsoft-com:office:powerpoint" xmlns:com="http://schemas.openxmlformats.org/drawingml/2006/compatibility" xmlns:p14="http://schemas.microsoft.com/office/powerpoint/2010/main" xmlns:p15="http://schemas.microsoft.com/office/powerpoint/2012/main" xmlns:ahyp="http://schemas.microsoft.com/office/drawing/2018/hyperlinkcolor">
-  <p:cSld>
+<p:sld xmlns:a="http://schemas.openxmlformats.org/drawingml/2006/main" xmlns:r="http://schemas.openxmlformats.org/officeDocument/2006/relationships" xmlns:p="http://schemas.openxmlformats.org/presentationml/2006/main" xmlns:m="http://schemas.openxmlformats.org/officeDocument/2006/math" xmlns:w="http://schemas.openxmlformats.org/wordprocessingml/2006/main" xmlns:mc="http://schemas.openxmlformats.org/markup-compatibility/2006" showMasterPhAnim="0" showMasterSp="1" show="1">
+  <p:cSld name="">
     <p:spTree>
       <p:nvGrpSpPr>
-        <p:cNvPr id="89" name="Shape 89"/>
+        <p:cNvPr id="1" name=""/>
         <p:cNvGrpSpPr/>
         <p:nvPr/>
       </p:nvGrpSpPr>
-      <p:grpSpPr>
+      <p:grpSpPr bwMode="auto">
         <a:xfrm>
           <a:off x="0" y="0"/>
           <a:ext cx="0" cy="0"/>
@@ -6589,13 +6704,13 @@
       </p:grpSpPr>
       <p:sp>
         <p:nvSpPr>
-          <p:cNvPr id="90" name="Google Shape;90;p16"/>
+          <p:cNvPr id="871699005" name="Google Shape;90;p16"/>
           <p:cNvSpPr txBox="1"/>
           <p:nvPr>
             <p:ph type="title"/>
           </p:nvPr>
         </p:nvSpPr>
-        <p:spPr>
+        <p:spPr bwMode="auto">
           <a:xfrm>
             <a:off x="4647000" y="271950"/>
             <a:ext cx="4512900" cy="1291200"/>
@@ -6609,12 +6724,12 @@
           </a:ln>
         </p:spPr>
         <p:txBody>
-          <a:bodyPr anchorCtr="0" anchor="t" bIns="91400" lIns="91400" spcFirstLastPara="1" rIns="91400" wrap="square" tIns="91400">
+          <a:bodyPr spcFirstLastPara="1" wrap="square" lIns="91400" tIns="91400" rIns="91400" bIns="91400" anchor="t" anchorCtr="0">
             <a:noAutofit/>
           </a:bodyPr>
           <a:lstStyle/>
           <a:p>
-            <a:pPr indent="0" lvl="0" marL="0" rtl="0" algn="ctr">
+            <a:pPr marL="0" lvl="0" indent="0" algn="ctr" rtl="0">
               <a:lnSpc>
                 <a:spcPct val="100000"/>
               </a:lnSpc>
@@ -6626,6 +6741,7 @@
               </a:spcAft>
               <a:buSzPts val="9000"/>
               <a:buNone/>
+              <a:defRPr/>
             </a:pPr>
             <a:r>
               <a:rPr lang="az-Latn-AZ"/>
@@ -6637,13 +6753,13 @@
       </p:sp>
       <p:sp>
         <p:nvSpPr>
-          <p:cNvPr id="91" name="Google Shape;91;p16"/>
+          <p:cNvPr id="1234394305" name="Google Shape;91;p16"/>
           <p:cNvSpPr txBox="1"/>
           <p:nvPr>
-            <p:ph idx="1" type="subTitle"/>
+            <p:ph type="subTitle" idx="1"/>
           </p:nvPr>
         </p:nvSpPr>
-        <p:spPr>
+        <p:spPr bwMode="auto">
           <a:xfrm>
             <a:off x="4630962" y="1430413"/>
             <a:ext cx="4545000" cy="927600"/>
@@ -6657,12 +6773,12 @@
           </a:ln>
         </p:spPr>
         <p:txBody>
-          <a:bodyPr anchorCtr="0" anchor="t" bIns="91400" lIns="91400" spcFirstLastPara="1" rIns="91400" wrap="square" tIns="91400">
+          <a:bodyPr spcFirstLastPara="1" wrap="square" lIns="91400" tIns="91400" rIns="91400" bIns="91400" anchor="t" anchorCtr="0">
             <a:noAutofit/>
           </a:bodyPr>
           <a:lstStyle/>
           <a:p>
-            <a:pPr indent="-342900" lvl="0" marL="457200" marR="0" rtl="0" algn="ctr">
+            <a:pPr marL="457200" marR="0" lvl="0" indent="-342900" algn="ctr" rtl="0">
               <a:lnSpc>
                 <a:spcPct val="100000"/>
               </a:lnSpc>
@@ -6678,16 +6794,16 @@
               <a:buSzPts val="1800"/>
               <a:buFont typeface="Montserrat"/>
               <a:buNone/>
+              <a:defRPr/>
             </a:pPr>
             <a:r>
-              <a:rPr b="0" i="0" lang="az-Latn-AZ" sz="1200" u="none" cap="none" strike="noStrike">
+              <a:rPr lang="az-Latn-AZ" sz="1200" b="0" i="0" u="none" strike="noStrike" cap="none">
                 <a:solidFill>
                   <a:schemeClr val="dk2"/>
                 </a:solidFill>
                 <a:latin typeface="Montserrat"/>
                 <a:ea typeface="Montserrat"/>
                 <a:cs typeface="Montserrat"/>
-                <a:sym typeface="Montserrat"/>
               </a:rPr>
               <a:t>Artıq jurnal yerinə elektron sistemdən istifadə olunur, ona görə də bütün məlumatlar birbaşa m</a:t>
             </a:r>
@@ -6696,14 +6812,13 @@
               <a:t>əktəb </a:t>
             </a:r>
             <a:r>
-              <a:rPr b="0" i="0" lang="az-Latn-AZ" sz="1200" u="none" cap="none" strike="noStrike">
+              <a:rPr lang="az-Latn-AZ" sz="1200" b="0" i="0" u="none" strike="noStrike" cap="none">
                 <a:solidFill>
                   <a:schemeClr val="dk2"/>
                 </a:solidFill>
                 <a:latin typeface="Montserrat"/>
                 <a:ea typeface="Montserrat"/>
                 <a:cs typeface="Montserrat"/>
-                <a:sym typeface="Montserrat"/>
               </a:rPr>
               <a:t>direktorun kompüterinə gedəcək.</a:t>
             </a:r>
@@ -6713,21 +6828,21 @@
       </p:sp>
       <p:pic>
         <p:nvPicPr>
-          <p:cNvPr id="92" name="Google Shape;92;p16"/>
-          <p:cNvPicPr preferRelativeResize="0"/>
+          <p:cNvPr id="1166180612" name="Google Shape;92;p16"/>
+          <p:cNvPicPr/>
           <p:nvPr/>
         </p:nvPicPr>
         <p:blipFill rotWithShape="1">
           <a:blip r:embed="rId3">
             <a:alphaModFix/>
           </a:blip>
-          <a:srcRect b="0" l="0" r="0" t="0"/>
+          <a:srcRect l="0" t="0" r="0" b="0"/>
           <a:stretch/>
         </p:blipFill>
-        <p:spPr>
-          <a:xfrm>
-            <a:off x="0" y="271950"/>
-            <a:ext cx="4647000" cy="4581001"/>
+        <p:spPr bwMode="auto">
+          <a:xfrm flipH="0" flipV="0">
+            <a:off x="157974" y="431331"/>
+            <a:ext cx="4233170" cy="4280835"/>
           </a:xfrm>
           <a:prstGeom prst="rect">
             <a:avLst/>
@@ -6740,11 +6855,11 @@
       </p:pic>
       <p:sp>
         <p:nvSpPr>
-          <p:cNvPr id="93" name="Google Shape;93;p16"/>
+          <p:cNvPr id="1347526471" name="Google Shape;93;p16"/>
           <p:cNvSpPr txBox="1"/>
           <p:nvPr/>
         </p:nvSpPr>
-        <p:spPr>
+        <p:spPr bwMode="auto">
           <a:xfrm>
             <a:off x="5226000" y="2028475"/>
             <a:ext cx="3354900" cy="954300"/>
@@ -6758,19 +6873,20 @@
           </a:ln>
         </p:spPr>
         <p:txBody>
-          <a:bodyPr anchorCtr="0" anchor="t" bIns="91425" lIns="91425" spcFirstLastPara="1" rIns="91425" wrap="square" tIns="91425">
+          <a:bodyPr spcFirstLastPara="1" wrap="square" lIns="91425" tIns="91425" rIns="91425" bIns="91425" anchor="t" anchorCtr="0">
             <a:spAutoFit/>
           </a:bodyPr>
           <a:lstStyle/>
           <a:p>
-            <a:pPr indent="0" lvl="0" marL="0" rtl="0" algn="ctr">
-              <a:spcBef>
-                <a:spcPts val="0"/>
-              </a:spcBef>
-              <a:spcAft>
-                <a:spcPts val="0"/>
-              </a:spcAft>
-              <a:buNone/>
+            <a:pPr marL="0" lvl="0" indent="0" algn="ctr" rtl="0">
+              <a:spcBef>
+                <a:spcPts val="0"/>
+              </a:spcBef>
+              <a:spcAft>
+                <a:spcPts val="0"/>
+              </a:spcAft>
+              <a:buNone/>
+              <a:defRPr/>
             </a:pPr>
             <a:r>
               <a:rPr lang="az-Latn-AZ" sz="5000">
@@ -6780,7 +6896,6 @@
                 <a:latin typeface="Vidaloka"/>
                 <a:ea typeface="Vidaloka"/>
                 <a:cs typeface="Vidaloka"/>
-                <a:sym typeface="Vidaloka"/>
               </a:rPr>
               <a:t>TechStack</a:t>
             </a:r>
@@ -6791,18 +6906,17 @@
               <a:latin typeface="Montserrat"/>
               <a:ea typeface="Montserrat"/>
               <a:cs typeface="Montserrat"/>
-              <a:sym typeface="Montserrat"/>
             </a:endParaRPr>
           </a:p>
         </p:txBody>
       </p:sp>
       <p:sp>
         <p:nvSpPr>
-          <p:cNvPr id="94" name="Google Shape;94;p16"/>
+          <p:cNvPr id="1092724974" name="Google Shape;94;p16"/>
           <p:cNvSpPr txBox="1"/>
           <p:nvPr/>
         </p:nvSpPr>
-        <p:spPr>
+        <p:spPr bwMode="auto">
           <a:xfrm>
             <a:off x="4647000" y="2982775"/>
             <a:ext cx="4314900" cy="338700"/>
@@ -6816,51 +6930,50 @@
           </a:ln>
         </p:spPr>
         <p:txBody>
-          <a:bodyPr anchorCtr="0" anchor="t" bIns="91425" lIns="91425" spcFirstLastPara="1" rIns="91425" wrap="square" tIns="91425">
+          <a:bodyPr spcFirstLastPara="1" wrap="square" lIns="91425" tIns="91425" rIns="91425" bIns="91425" anchor="t" anchorCtr="0">
             <a:spAutoFit/>
           </a:bodyPr>
           <a:lstStyle/>
           <a:p>
-            <a:pPr indent="0" lvl="0" marL="0" rtl="0" algn="l">
-              <a:spcBef>
-                <a:spcPts val="0"/>
-              </a:spcBef>
-              <a:spcAft>
-                <a:spcPts val="0"/>
-              </a:spcAft>
-              <a:buNone/>
+            <a:pPr marL="0" lvl="0" indent="0" algn="l" rtl="0">
+              <a:spcBef>
+                <a:spcPts val="0"/>
+              </a:spcBef>
+              <a:spcAft>
+                <a:spcPts val="0"/>
+              </a:spcAft>
+              <a:buNone/>
+              <a:defRPr/>
             </a:pPr>
             <a:r>
-              <a:rPr b="1" lang="az-Latn-AZ" sz="1000">
+              <a:rPr lang="az-Latn-AZ" sz="1000" b="1">
                 <a:solidFill>
                   <a:schemeClr val="dk2"/>
                 </a:solidFill>
                 <a:latin typeface="Montserrat"/>
                 <a:ea typeface="Montserrat"/>
                 <a:cs typeface="Montserrat"/>
-                <a:sym typeface="Montserrat"/>
               </a:rPr>
               <a:t>Proqram üçün əsasən Python dilindən istifadə olunub.</a:t>
             </a:r>
-            <a:endParaRPr b="1" sz="1000">
+            <a:endParaRPr sz="1000" b="1">
               <a:solidFill>
                 <a:schemeClr val="dk2"/>
               </a:solidFill>
               <a:latin typeface="Montserrat"/>
               <a:ea typeface="Montserrat"/>
               <a:cs typeface="Montserrat"/>
-              <a:sym typeface="Montserrat"/>
             </a:endParaRPr>
           </a:p>
         </p:txBody>
       </p:sp>
       <p:sp>
         <p:nvSpPr>
-          <p:cNvPr id="95" name="Google Shape;95;p16"/>
+          <p:cNvPr id="859818316" name="Google Shape;95;p16"/>
           <p:cNvSpPr txBox="1"/>
           <p:nvPr/>
         </p:nvSpPr>
-        <p:spPr>
+        <p:spPr bwMode="auto">
           <a:xfrm>
             <a:off x="4647000" y="3169925"/>
             <a:ext cx="4215000" cy="1539000"/>
@@ -6874,12 +6987,12 @@
           </a:ln>
         </p:spPr>
         <p:txBody>
-          <a:bodyPr anchorCtr="0" anchor="t" bIns="91425" lIns="91425" spcFirstLastPara="1" rIns="91425" wrap="square" tIns="91425">
+          <a:bodyPr spcFirstLastPara="1" wrap="square" lIns="91425" tIns="91425" rIns="91425" bIns="91425" anchor="t" anchorCtr="0">
             <a:noAutofit/>
           </a:bodyPr>
           <a:lstStyle/>
           <a:p>
-            <a:pPr indent="-292100" lvl="0" marL="457200" rtl="0" algn="l">
+            <a:pPr marL="457200" lvl="0" indent="-292100" algn="l" rtl="0">
               <a:spcBef>
                 <a:spcPts val="0"/>
               </a:spcBef>
@@ -6892,43 +7005,41 @@
               <a:buSzPts val="1000"/>
               <a:buFont typeface="Montserrat"/>
               <a:buChar char="●"/>
+              <a:defRPr/>
             </a:pPr>
             <a:r>
-              <a:rPr b="1" lang="az-Latn-AZ" sz="1000">
+              <a:rPr lang="az-Latn-AZ" sz="1000" b="1">
                 <a:solidFill>
                   <a:schemeClr val="dk2"/>
                 </a:solidFill>
                 <a:latin typeface="Montserrat"/>
                 <a:ea typeface="Montserrat"/>
                 <a:cs typeface="Montserrat"/>
-                <a:sym typeface="Montserrat"/>
               </a:rPr>
               <a:t>OpenCV-Python: Kamera və görüntü emalı üçün</a:t>
             </a:r>
             <a:r>
-              <a:rPr b="1" lang="az-Latn-AZ" sz="1000">
+              <a:rPr lang="az-Latn-AZ" sz="1000" b="1">
                 <a:solidFill>
                   <a:schemeClr val="dk2"/>
                 </a:solidFill>
                 <a:latin typeface="Montserrat"/>
                 <a:ea typeface="Montserrat"/>
                 <a:cs typeface="Montserrat"/>
-                <a:sym typeface="Montserrat"/>
               </a:rPr>
               <a:t>.</a:t>
             </a:r>
-            <a:endParaRPr b="1" sz="1000">
+            <a:endParaRPr sz="1000" b="1">
               <a:solidFill>
                 <a:schemeClr val="dk2"/>
               </a:solidFill>
               <a:latin typeface="Montserrat"/>
               <a:ea typeface="Montserrat"/>
               <a:cs typeface="Montserrat"/>
-              <a:sym typeface="Montserrat"/>
             </a:endParaRPr>
           </a:p>
           <a:p>
-            <a:pPr indent="-292100" lvl="0" marL="457200" rtl="0" algn="l">
+            <a:pPr marL="457200" lvl="0" indent="-292100" algn="l" rtl="0">
               <a:spcBef>
                 <a:spcPts val="0"/>
               </a:spcBef>
@@ -6941,31 +7052,30 @@
               <a:buSzPts val="1000"/>
               <a:buFont typeface="Montserrat"/>
               <a:buChar char="●"/>
+              <a:defRPr/>
             </a:pPr>
             <a:r>
-              <a:rPr b="1" lang="az-Latn-AZ" sz="1000">
+              <a:rPr lang="az-Latn-AZ" sz="1000" b="1">
                 <a:solidFill>
                   <a:schemeClr val="dk2"/>
                 </a:solidFill>
                 <a:latin typeface="Montserrat"/>
                 <a:ea typeface="Montserrat"/>
                 <a:cs typeface="Montserrat"/>
-                <a:sym typeface="Montserrat"/>
               </a:rPr>
               <a:t>NumPy: Tanıma prosesi və hesablama əməliyyatları üçün.</a:t>
             </a:r>
-            <a:endParaRPr b="1" sz="1000">
+            <a:endParaRPr sz="1000" b="1">
               <a:solidFill>
                 <a:schemeClr val="dk2"/>
               </a:solidFill>
               <a:latin typeface="Montserrat"/>
               <a:ea typeface="Montserrat"/>
               <a:cs typeface="Montserrat"/>
-              <a:sym typeface="Montserrat"/>
             </a:endParaRPr>
           </a:p>
           <a:p>
-            <a:pPr indent="-292100" lvl="0" marL="457200" rtl="0" algn="l">
+            <a:pPr marL="457200" lvl="0" indent="-292100" algn="l" rtl="0">
               <a:spcBef>
                 <a:spcPts val="0"/>
               </a:spcBef>
@@ -6978,31 +7088,30 @@
               <a:buSzPts val="1000"/>
               <a:buFont typeface="Montserrat"/>
               <a:buChar char="●"/>
+              <a:defRPr/>
             </a:pPr>
             <a:r>
-              <a:rPr b="1" lang="az-Latn-AZ" sz="1000">
+              <a:rPr lang="az-Latn-AZ" sz="1000" b="1">
                 <a:solidFill>
                   <a:schemeClr val="dk2"/>
                 </a:solidFill>
                 <a:latin typeface="Montserrat"/>
                 <a:ea typeface="Montserrat"/>
                 <a:cs typeface="Montserrat"/>
-                <a:sym typeface="Montserrat"/>
               </a:rPr>
               <a:t>DeepFace: Süni intellekt əsaslı üz tanıma və analiz üçün.</a:t>
             </a:r>
-            <a:endParaRPr b="1" sz="1000">
+            <a:endParaRPr sz="1000" b="1">
               <a:solidFill>
                 <a:schemeClr val="dk2"/>
               </a:solidFill>
               <a:latin typeface="Montserrat"/>
               <a:ea typeface="Montserrat"/>
               <a:cs typeface="Montserrat"/>
-              <a:sym typeface="Montserrat"/>
             </a:endParaRPr>
           </a:p>
           <a:p>
-            <a:pPr indent="-292100" lvl="0" marL="457200" rtl="0" algn="l">
+            <a:pPr marL="457200" lvl="0" indent="-292100" algn="l" rtl="0">
               <a:spcBef>
                 <a:spcPts val="0"/>
               </a:spcBef>
@@ -7015,31 +7124,30 @@
               <a:buSzPts val="1000"/>
               <a:buFont typeface="Montserrat"/>
               <a:buChar char="●"/>
+              <a:defRPr/>
             </a:pPr>
             <a:r>
-              <a:rPr b="1" lang="az-Latn-AZ" sz="1000">
+              <a:rPr lang="az-Latn-AZ" sz="1000" b="1">
                 <a:solidFill>
                   <a:schemeClr val="dk2"/>
                 </a:solidFill>
                 <a:latin typeface="Montserrat"/>
                 <a:ea typeface="Montserrat"/>
                 <a:cs typeface="Montserrat"/>
-                <a:sym typeface="Montserrat"/>
               </a:rPr>
               <a:t>TensorFlow &amp; Keras: GPU istifadə edərək sürətli dərin öyrənmə əməliyyatları üçün.</a:t>
             </a:r>
-            <a:endParaRPr b="1" sz="1000">
+            <a:endParaRPr sz="1000" b="1">
               <a:solidFill>
                 <a:schemeClr val="dk2"/>
               </a:solidFill>
               <a:latin typeface="Montserrat"/>
               <a:ea typeface="Montserrat"/>
               <a:cs typeface="Montserrat"/>
-              <a:sym typeface="Montserrat"/>
             </a:endParaRPr>
           </a:p>
           <a:p>
-            <a:pPr indent="-292100" lvl="0" marL="457200" rtl="0" algn="l">
+            <a:pPr marL="457200" lvl="0" indent="-292100" algn="l" rtl="0">
               <a:spcBef>
                 <a:spcPts val="0"/>
               </a:spcBef>
@@ -7052,31 +7160,30 @@
               <a:buSzPts val="1000"/>
               <a:buFont typeface="Montserrat"/>
               <a:buChar char="●"/>
+              <a:defRPr/>
             </a:pPr>
             <a:r>
-              <a:rPr b="1" lang="az-Latn-AZ" sz="1000">
+              <a:rPr lang="az-Latn-AZ" sz="1000" b="1">
                 <a:solidFill>
                   <a:schemeClr val="dk2"/>
                 </a:solidFill>
                 <a:latin typeface="Montserrat"/>
                 <a:ea typeface="Montserrat"/>
                 <a:cs typeface="Montserrat"/>
-                <a:sym typeface="Montserrat"/>
               </a:rPr>
               <a:t>Playsound: Səs fayllarını oxutmaq üçün.</a:t>
             </a:r>
-            <a:endParaRPr b="1" sz="1000">
+            <a:endParaRPr sz="1000" b="1">
               <a:solidFill>
                 <a:schemeClr val="dk2"/>
               </a:solidFill>
               <a:latin typeface="Montserrat"/>
               <a:ea typeface="Montserrat"/>
               <a:cs typeface="Montserrat"/>
-              <a:sym typeface="Montserrat"/>
             </a:endParaRPr>
           </a:p>
           <a:p>
-            <a:pPr indent="-292100" lvl="0" marL="457200" rtl="0" algn="l">
+            <a:pPr marL="457200" lvl="0" indent="-292100" algn="l" rtl="0">
               <a:spcBef>
                 <a:spcPts val="0"/>
               </a:spcBef>
@@ -7089,49 +7196,78 @@
               <a:buSzPts val="1000"/>
               <a:buFont typeface="Montserrat"/>
               <a:buChar char="●"/>
+              <a:defRPr/>
             </a:pPr>
             <a:r>
-              <a:rPr b="1" lang="az-Latn-AZ" sz="1000">
+              <a:rPr lang="az-Latn-AZ" sz="1000" b="1">
                 <a:solidFill>
                   <a:schemeClr val="dk2"/>
                 </a:solidFill>
                 <a:latin typeface="Montserrat"/>
                 <a:ea typeface="Montserrat"/>
                 <a:cs typeface="Montserrat"/>
-                <a:sym typeface="Montserrat"/>
               </a:rPr>
               <a:t>CustomTkinter: Modern və istifadəsi rahat istifadəçi interfeysi üçün.</a:t>
             </a:r>
-            <a:endParaRPr b="1" sz="1000">
+            <a:endParaRPr sz="1000" b="1">
               <a:solidFill>
                 <a:schemeClr val="dk2"/>
               </a:solidFill>
               <a:latin typeface="Montserrat"/>
               <a:ea typeface="Montserrat"/>
               <a:cs typeface="Montserrat"/>
-              <a:sym typeface="Montserrat"/>
             </a:endParaRPr>
           </a:p>
         </p:txBody>
       </p:sp>
+      <p:pic>
+        <p:nvPicPr>
+          <p:cNvPr id="2109673187" name=""/>
+          <p:cNvPicPr>
+            <a:picLocks noChangeAspect="1"/>
+          </p:cNvPicPr>
+          <p:nvPr/>
+        </p:nvPicPr>
+        <p:blipFill rotWithShape="1">
+          <a:blip r:embed="rId4"/>
+          <a:stretch/>
+        </p:blipFill>
+        <p:spPr bwMode="auto">
+          <a:xfrm flipH="0" flipV="0">
+            <a:off x="8102986" y="390188"/>
+            <a:ext cx="477912" cy="477912"/>
+          </a:xfrm>
+          <a:prstGeom prst="rect">
+            <a:avLst/>
+          </a:prstGeom>
+        </p:spPr>
+      </p:pic>
     </p:spTree>
   </p:cSld>
   <p:clrMapOvr>
     <a:masterClrMapping/>
   </p:clrMapOvr>
+  <mc:AlternateContent xmlns:mc="http://schemas.openxmlformats.org/markup-compatibility/2006">
+    <mc:Choice xmlns:p159="http://schemas.microsoft.com/office/powerpoint/2015/09/main" xmlns:p14="http://schemas.microsoft.com/office/powerpoint/2010/main" Requires="p159">
+      <p:transition p14:dur="2000" advClick="1"/>
+    </mc:Choice>
+    <mc:Fallback>
+      <p:transition advClick="1"/>
+    </mc:Fallback>
+  </mc:AlternateContent>
 </p:sld>
 </file>
 
 <file path=ppt/slides/slide6.xml><?xml version="1.0" encoding="utf-8"?>
-<p:sld xmlns:a="http://schemas.openxmlformats.org/drawingml/2006/main" xmlns:r="http://schemas.openxmlformats.org/officeDocument/2006/relationships" xmlns:mc="http://schemas.openxmlformats.org/markup-compatibility/2006" xmlns:mv="urn:schemas-microsoft-com:mac:vml" xmlns:p="http://schemas.openxmlformats.org/presentationml/2006/main" xmlns:c="http://schemas.openxmlformats.org/drawingml/2006/chart" xmlns:dgm="http://schemas.openxmlformats.org/drawingml/2006/diagram" xmlns:o="urn:schemas-microsoft-com:office:office" xmlns:v="urn:schemas-microsoft-com:vml" xmlns:pvml="urn:schemas-microsoft-com:office:powerpoint" xmlns:com="http://schemas.openxmlformats.org/drawingml/2006/compatibility" xmlns:p14="http://schemas.microsoft.com/office/powerpoint/2010/main" xmlns:p15="http://schemas.microsoft.com/office/powerpoint/2012/main" xmlns:ahyp="http://schemas.microsoft.com/office/drawing/2018/hyperlinkcolor">
-  <p:cSld>
+<p:sld xmlns:a="http://schemas.openxmlformats.org/drawingml/2006/main" xmlns:r="http://schemas.openxmlformats.org/officeDocument/2006/relationships" xmlns:p="http://schemas.openxmlformats.org/presentationml/2006/main" xmlns:m="http://schemas.openxmlformats.org/officeDocument/2006/math" xmlns:w="http://schemas.openxmlformats.org/wordprocessingml/2006/main" xmlns:mc="http://schemas.openxmlformats.org/markup-compatibility/2006" showMasterPhAnim="0" showMasterSp="1" show="1">
+  <p:cSld name="">
     <p:spTree>
       <p:nvGrpSpPr>
-        <p:cNvPr id="100" name="Shape 100"/>
+        <p:cNvPr id="1" name=""/>
         <p:cNvGrpSpPr/>
         <p:nvPr/>
       </p:nvGrpSpPr>
-      <p:grpSpPr>
+      <p:grpSpPr bwMode="auto">
         <a:xfrm>
           <a:off x="0" y="0"/>
           <a:ext cx="0" cy="0"/>
@@ -7141,16 +7277,16 @@
       </p:grpSpPr>
       <p:sp>
         <p:nvSpPr>
-          <p:cNvPr id="101" name="Google Shape;101;p17"/>
+          <p:cNvPr id="454506279" name="Google Shape;101;p17"/>
           <p:cNvSpPr txBox="1"/>
           <p:nvPr>
             <p:ph type="title"/>
           </p:nvPr>
         </p:nvSpPr>
-        <p:spPr>
+        <p:spPr bwMode="auto">
           <a:xfrm>
-            <a:off x="0" y="295925"/>
-            <a:ext cx="5835900" cy="1291200"/>
+            <a:off x="-180854" y="295928"/>
+            <a:ext cx="5835899" cy="1291200"/>
           </a:xfrm>
           <a:prstGeom prst="rect">
             <a:avLst/>
@@ -7161,12 +7297,12 @@
           </a:ln>
         </p:spPr>
         <p:txBody>
-          <a:bodyPr anchorCtr="0" anchor="t" bIns="91425" lIns="91425" spcFirstLastPara="1" rIns="91425" wrap="square" tIns="91425">
+          <a:bodyPr spcFirstLastPara="1" wrap="square" lIns="91425" tIns="91425" rIns="91425" bIns="91425" anchor="t" anchorCtr="0">
             <a:noAutofit/>
           </a:bodyPr>
           <a:lstStyle/>
           <a:p>
-            <a:pPr indent="0" lvl="0" marL="0" marR="0" rtl="0" algn="ctr">
+            <a:pPr marL="0" marR="0" lvl="0" indent="0" algn="ctr" rtl="0">
               <a:lnSpc>
                 <a:spcPct val="100000"/>
               </a:lnSpc>
@@ -7182,42 +7318,41 @@
               <a:buSzPts val="9000"/>
               <a:buFont typeface="Vidaloka"/>
               <a:buNone/>
+              <a:defRPr/>
             </a:pPr>
             <a:r>
-              <a:rPr b="0" i="0" lang="az-Latn-AZ" sz="7000" u="none" cap="none" strike="noStrike">
+              <a:rPr lang="az-Latn-AZ" sz="7000" b="0" i="0" u="none" strike="noStrike" cap="none">
                 <a:solidFill>
                   <a:schemeClr val="dk1"/>
                 </a:solidFill>
                 <a:latin typeface="Vidaloka"/>
                 <a:ea typeface="Vidaloka"/>
                 <a:cs typeface="Vidaloka"/>
-                <a:sym typeface="Vidaloka"/>
               </a:rPr>
               <a:t>Təhlükəsizlik!</a:t>
             </a:r>
-            <a:endParaRPr b="0" i="0" sz="7000" u="none" cap="none" strike="noStrike">
+            <a:endParaRPr sz="7000" b="0" i="0" u="none" strike="noStrike" cap="none">
               <a:solidFill>
                 <a:schemeClr val="dk1"/>
               </a:solidFill>
               <a:latin typeface="Vidaloka"/>
               <a:ea typeface="Vidaloka"/>
               <a:cs typeface="Vidaloka"/>
-              <a:sym typeface="Vidaloka"/>
             </a:endParaRPr>
           </a:p>
         </p:txBody>
       </p:sp>
       <p:sp>
         <p:nvSpPr>
-          <p:cNvPr id="102" name="Google Shape;102;p17"/>
+          <p:cNvPr id="1063723458" name="Google Shape;102;p17"/>
           <p:cNvSpPr txBox="1"/>
           <p:nvPr>
-            <p:ph idx="1" type="subTitle"/>
+            <p:ph type="subTitle" idx="1"/>
           </p:nvPr>
         </p:nvSpPr>
-        <p:spPr>
+        <p:spPr bwMode="auto">
           <a:xfrm>
-            <a:off x="-2" y="1537225"/>
+            <a:off x="-1" y="1742193"/>
             <a:ext cx="5911200" cy="949500"/>
           </a:xfrm>
           <a:prstGeom prst="rect">
@@ -7229,12 +7364,12 @@
           </a:ln>
         </p:spPr>
         <p:txBody>
-          <a:bodyPr anchorCtr="0" anchor="t" bIns="91425" lIns="91425" spcFirstLastPara="1" rIns="91425" wrap="square" tIns="91425">
+          <a:bodyPr spcFirstLastPara="1" wrap="square" lIns="91425" tIns="91425" rIns="91425" bIns="91425" anchor="t" anchorCtr="0">
             <a:noAutofit/>
           </a:bodyPr>
           <a:lstStyle/>
           <a:p>
-            <a:pPr indent="-342900" lvl="0" marL="457200" marR="0" rtl="0" algn="ctr">
+            <a:pPr marL="354121" marR="0" lvl="0" indent="-239821" algn="l" rtl="0">
               <a:lnSpc>
                 <a:spcPct val="100000"/>
               </a:lnSpc>
@@ -7248,54 +7383,53 @@
                 <a:schemeClr val="dk2"/>
               </a:buClr>
               <a:buSzPts val="1800"/>
-              <a:buFont typeface="Montserrat"/>
-              <a:buNone/>
+              <a:buFont typeface="Arial"/>
+              <a:buChar char="•"/>
+              <a:defRPr/>
             </a:pPr>
             <a:r>
-              <a:rPr b="0" i="0" lang="az-Latn-AZ" sz="1400" u="none" cap="none" strike="noStrike">
+              <a:rPr lang="az-Latn-AZ" sz="1800" b="0" i="0" u="none" strike="noStrike" cap="none">
                 <a:solidFill>
                   <a:schemeClr val="dk2"/>
                 </a:solidFill>
                 <a:latin typeface="Montserrat"/>
                 <a:ea typeface="Montserrat"/>
                 <a:cs typeface="Montserrat"/>
-                <a:sym typeface="Montserrat"/>
               </a:rPr>
               <a:t>Sistem yalnız qeydiyyatda olanları içəri buraxacaq, qeydiyyatda olmayan və məktəblə əlaqəsi olmayan şəxslə</a:t>
             </a:r>
             <a:r>
-              <a:rPr lang="az-Latn-AZ"/>
+              <a:rPr lang="az-Latn-AZ" sz="1800"/>
               <a:t>rin kim olduğunu bilməyi asanlaşdıracaq</a:t>
             </a:r>
-            <a:endParaRPr b="0" i="0" sz="1400" u="none" cap="none" strike="noStrike">
+            <a:endParaRPr sz="1800" b="0" i="0" u="none" strike="noStrike" cap="none">
               <a:solidFill>
                 <a:schemeClr val="dk2"/>
               </a:solidFill>
               <a:latin typeface="Montserrat"/>
               <a:ea typeface="Montserrat"/>
               <a:cs typeface="Montserrat"/>
-              <a:sym typeface="Montserrat"/>
             </a:endParaRPr>
           </a:p>
         </p:txBody>
       </p:sp>
       <p:pic>
         <p:nvPicPr>
-          <p:cNvPr id="103" name="Google Shape;103;p17"/>
-          <p:cNvPicPr preferRelativeResize="0"/>
+          <p:cNvPr id="867872662" name="Google Shape;103;p17"/>
+          <p:cNvPicPr/>
           <p:nvPr/>
         </p:nvPicPr>
         <p:blipFill rotWithShape="1">
           <a:blip r:embed="rId3">
             <a:alphaModFix/>
           </a:blip>
-          <a:srcRect b="0" l="0" r="0" t="0"/>
+          <a:srcRect l="0" t="0" r="0" b="0"/>
           <a:stretch/>
         </p:blipFill>
-        <p:spPr>
-          <a:xfrm>
-            <a:off x="5911293" y="295929"/>
-            <a:ext cx="3232711" cy="2190843"/>
+        <p:spPr bwMode="auto">
+          <a:xfrm flipH="0" flipV="0">
+            <a:off x="5728290" y="805068"/>
+            <a:ext cx="3400063" cy="2353854"/>
           </a:xfrm>
           <a:prstGeom prst="rect">
             <a:avLst/>
@@ -7304,6 +7438,104 @@
           <a:ln>
             <a:noFill/>
           </a:ln>
+        </p:spPr>
+      </p:pic>
+      <p:sp>
+        <p:nvSpPr>
+          <p:cNvPr id="797903995" name=""/>
+          <p:cNvSpPr txBox="1"/>
+          <p:nvPr/>
+        </p:nvSpPr>
+        <p:spPr bwMode="auto">
+          <a:xfrm rot="0" flipH="0" flipV="0">
+            <a:off x="-1" y="3158924"/>
+            <a:ext cx="6652404" cy="1463400"/>
+          </a:xfrm>
+          <a:prstGeom prst="rect">
+            <a:avLst/>
+          </a:prstGeom>
+          <a:noFill/>
+        </p:spPr>
+        <p:txBody>
+          <a:bodyPr vertOverflow="overflow" horzOverflow="overflow" vert="horz" wrap="square" lIns="91440" tIns="45720" rIns="91440" bIns="45720" numCol="1" spcCol="0" rtlCol="0" fromWordArt="0" anchor="t" anchorCtr="0" forceAA="0" upright="0" compatLnSpc="0">
+            <a:spAutoFit/>
+          </a:bodyPr>
+          <a:p>
+            <a:pPr marL="354121" marR="0" indent="-239821" algn="l">
+              <a:lnSpc>
+                <a:spcPct val="100000"/>
+              </a:lnSpc>
+              <a:spcBef>
+                <a:spcPts val="0"/>
+              </a:spcBef>
+              <a:spcAft>
+                <a:spcPts val="0"/>
+              </a:spcAft>
+              <a:buClr>
+                <a:schemeClr val="dk2"/>
+              </a:buClr>
+              <a:buSzPts val="1800"/>
+              <a:buFont typeface="Arial"/>
+              <a:buChar char="•"/>
+              <a:defRPr/>
+            </a:pPr>
+            <a:r>
+              <a:rPr lang="az-Latn-AZ" sz="1800" b="0" i="0" u="none" strike="noStrike" cap="none" spc="0">
+                <a:solidFill>
+                  <a:schemeClr val="dk2"/>
+                </a:solidFill>
+                <a:latin typeface="Montserrat"/>
+                <a:ea typeface="Montserrat"/>
+                <a:cs typeface="Montserrat"/>
+              </a:rPr>
+              <a:t>Sistem məktəbin təhlükəsizlik kameralarına inteqrasiya olunduqda, hər hansı hadisə baş verən anda orada iştirak edən bütün </a:t>
+            </a:r>
+            <a:r>
+              <a:rPr lang="az-Latn-AZ" sz="1800" b="0" i="0" u="none" strike="noStrike" cap="none" spc="0">
+                <a:solidFill>
+                  <a:schemeClr val="dk2"/>
+                </a:solidFill>
+                <a:latin typeface="Montserrat"/>
+                <a:ea typeface="Montserrat"/>
+                <a:cs typeface="Montserrat"/>
+              </a:rPr>
+              <a:t>şəxslərin </a:t>
+            </a:r>
+            <a:r>
+              <a:rPr lang="az-Latn-AZ" sz="1800" b="0" i="0" u="none" strike="noStrike" cap="none" spc="0">
+                <a:solidFill>
+                  <a:schemeClr val="dk2"/>
+                </a:solidFill>
+                <a:latin typeface="Montserrat"/>
+                <a:ea typeface="Montserrat"/>
+                <a:cs typeface="Montserrat"/>
+              </a:rPr>
+              <a:t>adları ekranda görünür. Bu isə hadisənin gedişatını anlamağı və araşdırmanı xeyli sadələşdirir</a:t>
+            </a:r>
+            <a:endParaRPr/>
+          </a:p>
+        </p:txBody>
+      </p:sp>
+      <p:pic>
+        <p:nvPicPr>
+          <p:cNvPr id="709488074" name=""/>
+          <p:cNvPicPr>
+            <a:picLocks noChangeAspect="1"/>
+          </p:cNvPicPr>
+          <p:nvPr/>
+        </p:nvPicPr>
+        <p:blipFill rotWithShape="1">
+          <a:blip r:embed="rId4"/>
+          <a:stretch/>
+        </p:blipFill>
+        <p:spPr bwMode="auto">
+          <a:xfrm flipH="0" flipV="0">
+            <a:off x="5350110" y="352399"/>
+            <a:ext cx="452669" cy="452669"/>
+          </a:xfrm>
+          <a:prstGeom prst="rect">
+            <a:avLst/>
+          </a:prstGeom>
         </p:spPr>
       </p:pic>
     </p:spTree>
@@ -7311,120 +7543,186 @@
   <p:clrMapOvr>
     <a:masterClrMapping/>
   </p:clrMapOvr>
+  <mc:AlternateContent xmlns:mc="http://schemas.openxmlformats.org/markup-compatibility/2006">
+    <mc:Choice xmlns:p159="http://schemas.microsoft.com/office/powerpoint/2015/09/main" xmlns:p14="http://schemas.microsoft.com/office/powerpoint/2010/main" Requires="p159">
+      <p:transition p14:dur="2000" advClick="1"/>
+    </mc:Choice>
+    <mc:Fallback>
+      <p:transition advClick="1"/>
+    </mc:Fallback>
+  </mc:AlternateContent>
+</p:sld>
+</file>
+
+<file path=ppt/slides/slide7.xml><?xml version="1.0" encoding="utf-8"?>
+<p:sld xmlns:a="http://schemas.openxmlformats.org/drawingml/2006/main" xmlns:r="http://schemas.openxmlformats.org/officeDocument/2006/relationships" xmlns:p="http://schemas.openxmlformats.org/presentationml/2006/main" xmlns:m="http://schemas.openxmlformats.org/officeDocument/2006/math" xmlns:w="http://schemas.openxmlformats.org/wordprocessingml/2006/main" xmlns:mc="http://schemas.openxmlformats.org/markup-compatibility/2006" showMasterPhAnim="0" showMasterSp="1" show="1">
+  <p:cSld name="">
+    <p:spTree>
+      <p:nvGrpSpPr>
+        <p:cNvPr id="1" name=""/>
+        <p:cNvGrpSpPr/>
+        <p:nvPr/>
+      </p:nvGrpSpPr>
+      <p:grpSpPr bwMode="auto">
+        <a:xfrm>
+          <a:off x="0" y="0"/>
+          <a:ext cx="0" cy="0"/>
+          <a:chOff x="0" y="0"/>
+          <a:chExt cx="0" cy="0"/>
+        </a:xfrm>
+      </p:grpSpPr>
+      <p:sp>
+        <p:nvSpPr>
+          <p:cNvPr id="1986004514" name="Google Shape;63;p12"/>
+          <p:cNvSpPr txBox="1"/>
+          <p:nvPr>
+            <p:ph type="ctrTitle"/>
+          </p:nvPr>
+        </p:nvSpPr>
+        <p:spPr bwMode="auto">
+          <a:xfrm>
+            <a:off x="1039973" y="1818835"/>
+            <a:ext cx="7064100" cy="2052599"/>
+          </a:xfrm>
+          <a:prstGeom prst="rect">
+            <a:avLst/>
+          </a:prstGeom>
+          <a:noFill/>
+          <a:ln>
+            <a:noFill/>
+          </a:ln>
+        </p:spPr>
+        <p:txBody>
+          <a:bodyPr spcFirstLastPara="1" wrap="square" lIns="91424" tIns="91424" rIns="91424" bIns="91424" anchor="b" anchorCtr="0">
+            <a:noAutofit/>
+          </a:bodyPr>
+          <a:lstStyle/>
+          <a:p>
+            <a:pPr marL="0" marR="0" lvl="0" indent="0" algn="ctr" rtl="0">
+              <a:lnSpc>
+                <a:spcPct val="100000"/>
+              </a:lnSpc>
+              <a:spcBef>
+                <a:spcPts val="0"/>
+              </a:spcBef>
+              <a:spcAft>
+                <a:spcPts val="0"/>
+              </a:spcAft>
+              <a:buClr>
+                <a:schemeClr val="dk1"/>
+              </a:buClr>
+              <a:buSzPts val="5200"/>
+              <a:buFont typeface="Vidaloka"/>
+              <a:buNone/>
+              <a:defRPr/>
+            </a:pPr>
+            <a:r>
+              <a:rPr lang="az-Latn-AZ" sz="6500" b="0" i="0" u="none" strike="noStrike" cap="none">
+                <a:solidFill>
+                  <a:schemeClr val="dk1"/>
+                </a:solidFill>
+                <a:latin typeface="Vidaloka"/>
+                <a:ea typeface="Vidaloka"/>
+                <a:cs typeface="Vidaloka"/>
+              </a:rPr>
+              <a:t>Slaydın sonu</a:t>
+            </a:r>
+            <a:endParaRPr sz="6500" b="0" i="0" u="none" strike="noStrike" cap="none">
+              <a:solidFill>
+                <a:schemeClr val="dk1"/>
+              </a:solidFill>
+              <a:latin typeface="Vidaloka"/>
+              <a:ea typeface="Vidaloka"/>
+              <a:cs typeface="Vidaloka"/>
+            </a:endParaRPr>
+          </a:p>
+          <a:p>
+            <a:pPr marL="0" lvl="0" indent="0" algn="ctr" rtl="0">
+              <a:lnSpc>
+                <a:spcPct val="100000"/>
+              </a:lnSpc>
+              <a:spcBef>
+                <a:spcPts val="0"/>
+              </a:spcBef>
+              <a:spcAft>
+                <a:spcPts val="0"/>
+              </a:spcAft>
+              <a:buSzPts val="5200"/>
+              <a:buNone/>
+              <a:defRPr/>
+            </a:pPr>
+            <a:endParaRPr/>
+          </a:p>
+        </p:txBody>
+      </p:sp>
+    </p:spTree>
+  </p:cSld>
+  <p:clrMapOvr>
+    <a:masterClrMapping/>
+  </p:clrMapOvr>
+  <mc:AlternateContent xmlns:mc="http://schemas.openxmlformats.org/markup-compatibility/2006">
+    <mc:Choice xmlns:p159="http://schemas.microsoft.com/office/powerpoint/2015/09/main" xmlns:p14="http://schemas.microsoft.com/office/powerpoint/2010/main" Requires="p159">
+      <p:transition p14:dur="2000" advClick="1"/>
+    </mc:Choice>
+    <mc:Fallback>
+      <p:transition advClick="1"/>
+    </mc:Fallback>
+  </mc:AlternateContent>
+  <p:timing/>
 </p:sld>
 </file>
 
 <file path=ppt/theme/theme1.xml><?xml version="1.0" encoding="utf-8"?>
-<a:theme xmlns:a="http://schemas.openxmlformats.org/drawingml/2006/main" xmlns:r="http://schemas.openxmlformats.org/officeDocument/2006/relationships">
+<a:theme xmlns:a="http://schemas.openxmlformats.org/drawingml/2006/main" xmlns:r="http://schemas.openxmlformats.org/officeDocument/2006/relationships" xmlns:p="http://schemas.openxmlformats.org/presentationml/2006/main" name="Minimalist Business Slides XL by Slidesgo">
   <a:themeElements>
-    <a:clrScheme name="Default">
+    <a:clrScheme name="Simple Light">
       <a:dk1>
         <a:srgbClr val="000000"/>
       </a:dk1>
       <a:lt1>
-        <a:srgbClr val="FFFFFF"/>
+        <a:srgbClr val="F5F2EE"/>
       </a:lt1>
       <a:dk2>
-        <a:srgbClr val="158158"/>
+        <a:srgbClr val="000000"/>
       </a:dk2>
       <a:lt2>
-        <a:srgbClr val="F3F3F3"/>
+        <a:srgbClr val="EEEEEE"/>
       </a:lt2>
       <a:accent1>
-        <a:srgbClr val="058DC7"/>
+        <a:srgbClr val="3F3533"/>
       </a:accent1>
       <a:accent2>
-        <a:srgbClr val="50B432"/>
+        <a:srgbClr val="3F3533"/>
       </a:accent2>
       <a:accent3>
-        <a:srgbClr val="ED561B"/>
+        <a:srgbClr val="3F3533"/>
       </a:accent3>
       <a:accent4>
-        <a:srgbClr val="EDEF00"/>
+        <a:srgbClr val="3F3533"/>
       </a:accent4>
       <a:accent5>
-        <a:srgbClr val="24CBE5"/>
+        <a:srgbClr val="3F3533"/>
       </a:accent5>
       <a:accent6>
-        <a:srgbClr val="64E572"/>
+        <a:srgbClr val="3F3533"/>
       </a:accent6>
       <a:hlink>
-        <a:srgbClr val="2200CC"/>
+        <a:srgbClr val="000000"/>
       </a:hlink>
       <a:folHlink>
-        <a:srgbClr val="551A8B"/>
+        <a:srgbClr val="0097A7"/>
       </a:folHlink>
     </a:clrScheme>
     <a:fontScheme name="Office">
       <a:majorFont>
         <a:latin typeface="Arial"/>
-        <a:ea typeface=""/>
-        <a:cs typeface=""/>
-        <a:font script="Jpan" typeface="ＭＳ Ｐゴシック"/>
-        <a:font script="Hang" typeface="맑은 고딕"/>
-        <a:font script="Hans" typeface="宋体"/>
-        <a:font script="Hant" typeface="新細明體"/>
-        <a:font script="Arab" typeface="Times New Roman"/>
-        <a:font script="Hebr" typeface="Times New Roman"/>
-        <a:font script="Thai" typeface="Angsana New"/>
-        <a:font script="Ethi" typeface="Nyala"/>
-        <a:font script="Beng" typeface="Vrinda"/>
-        <a:font script="Gujr" typeface="Shruti"/>
-        <a:font script="Khmr" typeface="MoolBoran"/>
-        <a:font script="Knda" typeface="Tunga"/>
-        <a:font script="Guru" typeface="Raavi"/>
-        <a:font script="Cans" typeface="Euphemia"/>
-        <a:font script="Cher" typeface="Plantagenet Cherokee"/>
-        <a:font script="Yiii" typeface="Microsoft Yi Baiti"/>
-        <a:font script="Tibt" typeface="Microsoft Himalaya"/>
-        <a:font script="Thaa" typeface="MV Boli"/>
-        <a:font script="Deva" typeface="Mangal"/>
-        <a:font script="Telu" typeface="Gautami"/>
-        <a:font script="Taml" typeface="Latha"/>
-        <a:font script="Syrc" typeface="Estrangelo Edessa"/>
-        <a:font script="Orya" typeface="Kalinga"/>
-        <a:font script="Mlym" typeface="Kartika"/>
-        <a:font script="Laoo" typeface="DokChampa"/>
-        <a:font script="Sinh" typeface="Iskoola Pota"/>
-        <a:font script="Mong" typeface="Mongolian Baiti"/>
-        <a:font script="Viet" typeface="Times New Roman"/>
-        <a:font script="Uigh" typeface="Microsoft Uighur"/>
-        <a:font script="Geor" typeface="Sylfaen"/>
+        <a:ea typeface="Arial"/>
+        <a:cs typeface="Arial"/>
       </a:majorFont>
       <a:minorFont>
         <a:latin typeface="Arial"/>
-        <a:ea typeface=""/>
-        <a:cs typeface=""/>
-        <a:font script="Jpan" typeface="ＭＳ Ｐゴシック"/>
-        <a:font script="Hang" typeface="맑은 고딕"/>
-        <a:font script="Hans" typeface="宋体"/>
-        <a:font script="Hant" typeface="新細明體"/>
-        <a:font script="Arab" typeface="Arial"/>
-        <a:font script="Hebr" typeface="Arial"/>
-        <a:font script="Thai" typeface="Cordia New"/>
-        <a:font script="Ethi" typeface="Nyala"/>
-        <a:font script="Beng" typeface="Vrinda"/>
-        <a:font script="Gujr" typeface="Shruti"/>
-        <a:font script="Khmr" typeface="DaunPenh"/>
-        <a:font script="Knda" typeface="Tunga"/>
-        <a:font script="Guru" typeface="Raavi"/>
-        <a:font script="Cans" typeface="Euphemia"/>
-        <a:font script="Cher" typeface="Plantagenet Cherokee"/>
-        <a:font script="Yiii" typeface="Microsoft Yi Baiti"/>
-        <a:font script="Tibt" typeface="Microsoft Himalaya"/>
-        <a:font script="Thaa" typeface="MV Boli"/>
-        <a:font script="Deva" typeface="Mangal"/>
-        <a:font script="Telu" typeface="Gautami"/>
-        <a:font script="Taml" typeface="Latha"/>
-        <a:font script="Syrc" typeface="Estrangelo Edessa"/>
-        <a:font script="Orya" typeface="Kalinga"/>
-        <a:font script="Mlym" typeface="Kartika"/>
-        <a:font script="Laoo" typeface="DokChampa"/>
-        <a:font script="Sinh" typeface="Iskoola Pota"/>
-        <a:font script="Mong" typeface="Mongolian Baiti"/>
-        <a:font script="Viet" typeface="Arial"/>
-        <a:font script="Uigh" typeface="Microsoft Uighur"/>
-        <a:font script="Geor" typeface="Sylfaen"/>
+        <a:ea typeface="Arial"/>
+        <a:cs typeface="Arial"/>
       </a:minorFont>
     </a:fontScheme>
     <a:fmtScheme name="Office">
@@ -7432,7 +7730,7 @@
         <a:solidFill>
           <a:schemeClr val="phClr"/>
         </a:solidFill>
-        <a:gradFill rotWithShape="1">
+        <a:gradFill>
           <a:gsLst>
             <a:gs pos="0">
               <a:schemeClr val="phClr">
@@ -7455,7 +7753,7 @@
           </a:gsLst>
           <a:lin ang="16200000" scaled="1"/>
         </a:gradFill>
-        <a:gradFill rotWithShape="1">
+        <a:gradFill>
           <a:gsLst>
             <a:gs pos="0">
               <a:schemeClr val="phClr">
@@ -7542,7 +7840,7 @@
         <a:solidFill>
           <a:schemeClr val="phClr"/>
         </a:solidFill>
-        <a:gradFill rotWithShape="1">
+        <a:gradFill>
           <a:gsLst>
             <a:gs pos="0">
               <a:schemeClr val="phClr">
@@ -7564,11 +7862,9 @@
               </a:schemeClr>
             </a:gs>
           </a:gsLst>
-          <a:path path="circle">
-            <a:fillToRect l="50000" t="-80000" r="50000" b="180000"/>
-          </a:path>
+          <a:path path="circle"/>
         </a:gradFill>
-        <a:gradFill rotWithShape="1">
+        <a:gradFill>
           <a:gsLst>
             <a:gs pos="0">
               <a:schemeClr val="phClr">
@@ -7583,127 +7879,66 @@
               </a:schemeClr>
             </a:gs>
           </a:gsLst>
-          <a:path path="circle">
-            <a:fillToRect l="50000" t="50000" r="50000" b="50000"/>
-          </a:path>
+          <a:path path="circle"/>
         </a:gradFill>
       </a:bgFillStyleLst>
     </a:fmtScheme>
   </a:themeElements>
+  <a:objectDefaults/>
 </a:theme>
 </file>
 
 <file path=ppt/theme/theme2.xml><?xml version="1.0" encoding="utf-8"?>
-<a:theme xmlns:a="http://schemas.openxmlformats.org/drawingml/2006/main" xmlns:r="http://schemas.openxmlformats.org/officeDocument/2006/relationships" name="Minimalist Business Slides XL by Slidesgo">
+<a:theme xmlns:a="http://schemas.openxmlformats.org/drawingml/2006/main" xmlns:r="http://schemas.openxmlformats.org/officeDocument/2006/relationships" xmlns:p="http://schemas.openxmlformats.org/presentationml/2006/main" name="">
   <a:themeElements>
-    <a:clrScheme name="Simple Light">
+    <a:clrScheme name="Default">
       <a:dk1>
         <a:srgbClr val="000000"/>
       </a:dk1>
       <a:lt1>
-        <a:srgbClr val="F5F2EE"/>
+        <a:srgbClr val="FFFFFF"/>
       </a:lt1>
       <a:dk2>
-        <a:srgbClr val="000000"/>
+        <a:srgbClr val="158158"/>
       </a:dk2>
       <a:lt2>
-        <a:srgbClr val="EEEEEE"/>
+        <a:srgbClr val="F3F3F3"/>
       </a:lt2>
       <a:accent1>
-        <a:srgbClr val="3F3533"/>
+        <a:srgbClr val="058DC7"/>
       </a:accent1>
       <a:accent2>
-        <a:srgbClr val="3F3533"/>
+        <a:srgbClr val="50B432"/>
       </a:accent2>
       <a:accent3>
-        <a:srgbClr val="3F3533"/>
+        <a:srgbClr val="ED561B"/>
       </a:accent3>
       <a:accent4>
-        <a:srgbClr val="3F3533"/>
+        <a:srgbClr val="EDEF00"/>
       </a:accent4>
       <a:accent5>
-        <a:srgbClr val="3F3533"/>
+        <a:srgbClr val="24CBE5"/>
       </a:accent5>
       <a:accent6>
-        <a:srgbClr val="3F3533"/>
+        <a:srgbClr val="64E572"/>
       </a:accent6>
       <a:hlink>
-        <a:srgbClr val="000000"/>
+        <a:srgbClr val="2200CC"/>
       </a:hlink>
       <a:folHlink>
-        <a:srgbClr val="0097A7"/>
+        <a:srgbClr val="551A8B"/>
       </a:folHlink>
     </a:clrScheme>
     <a:fontScheme name="Office">
       <a:majorFont>
         <a:latin typeface="Arial"/>
-        <a:ea typeface=""/>
-        <a:cs typeface=""/>
-        <a:font script="Jpan" typeface="ＭＳ Ｐゴシック"/>
-        <a:font script="Hang" typeface="맑은 고딕"/>
-        <a:font script="Hans" typeface="宋体"/>
-        <a:font script="Hant" typeface="新細明體"/>
-        <a:font script="Arab" typeface="Times New Roman"/>
-        <a:font script="Hebr" typeface="Times New Roman"/>
-        <a:font script="Thai" typeface="Angsana New"/>
-        <a:font script="Ethi" typeface="Nyala"/>
-        <a:font script="Beng" typeface="Vrinda"/>
-        <a:font script="Gujr" typeface="Shruti"/>
-        <a:font script="Khmr" typeface="MoolBoran"/>
-        <a:font script="Knda" typeface="Tunga"/>
-        <a:font script="Guru" typeface="Raavi"/>
-        <a:font script="Cans" typeface="Euphemia"/>
-        <a:font script="Cher" typeface="Plantagenet Cherokee"/>
-        <a:font script="Yiii" typeface="Microsoft Yi Baiti"/>
-        <a:font script="Tibt" typeface="Microsoft Himalaya"/>
-        <a:font script="Thaa" typeface="MV Boli"/>
-        <a:font script="Deva" typeface="Mangal"/>
-        <a:font script="Telu" typeface="Gautami"/>
-        <a:font script="Taml" typeface="Latha"/>
-        <a:font script="Syrc" typeface="Estrangelo Edessa"/>
-        <a:font script="Orya" typeface="Kalinga"/>
-        <a:font script="Mlym" typeface="Kartika"/>
-        <a:font script="Laoo" typeface="DokChampa"/>
-        <a:font script="Sinh" typeface="Iskoola Pota"/>
-        <a:font script="Mong" typeface="Mongolian Baiti"/>
-        <a:font script="Viet" typeface="Times New Roman"/>
-        <a:font script="Uigh" typeface="Microsoft Uighur"/>
-        <a:font script="Geor" typeface="Sylfaen"/>
+        <a:ea typeface="Arial"/>
+        <a:cs typeface="Arial"/>
       </a:majorFont>
       <a:minorFont>
         <a:latin typeface="Arial"/>
-        <a:ea typeface=""/>
-        <a:cs typeface=""/>
-        <a:font script="Jpan" typeface="ＭＳ Ｐゴシック"/>
-        <a:font script="Hang" typeface="맑은 고딕"/>
-        <a:font script="Hans" typeface="宋体"/>
-        <a:font script="Hant" typeface="新細明體"/>
-        <a:font script="Arab" typeface="Arial"/>
-        <a:font script="Hebr" typeface="Arial"/>
-        <a:font script="Thai" typeface="Cordia New"/>
-        <a:font script="Ethi" typeface="Nyala"/>
-        <a:font script="Beng" typeface="Vrinda"/>
-        <a:font script="Gujr" typeface="Shruti"/>
-        <a:font script="Khmr" typeface="DaunPenh"/>
-        <a:font script="Knda" typeface="Tunga"/>
-        <a:font script="Guru" typeface="Raavi"/>
-        <a:font script="Cans" typeface="Euphemia"/>
-        <a:font script="Cher" typeface="Plantagenet Cherokee"/>
-        <a:font script="Yiii" typeface="Microsoft Yi Baiti"/>
-        <a:font script="Tibt" typeface="Microsoft Himalaya"/>
-        <a:font script="Thaa" typeface="MV Boli"/>
-        <a:font script="Deva" typeface="Mangal"/>
-        <a:font script="Telu" typeface="Gautami"/>
-        <a:font script="Taml" typeface="Latha"/>
-        <a:font script="Syrc" typeface="Estrangelo Edessa"/>
-        <a:font script="Orya" typeface="Kalinga"/>
-        <a:font script="Mlym" typeface="Kartika"/>
-        <a:font script="Laoo" typeface="DokChampa"/>
-        <a:font script="Sinh" typeface="Iskoola Pota"/>
-        <a:font script="Mong" typeface="Mongolian Baiti"/>
-        <a:font script="Viet" typeface="Arial"/>
-        <a:font script="Uigh" typeface="Microsoft Uighur"/>
-        <a:font script="Geor" typeface="Sylfaen"/>
+        <a:ea typeface="Arial"/>
+        <a:cs typeface="Arial"/>
       </a:minorFont>
     </a:fontScheme>
     <a:fmtScheme name="Office">
@@ -7711,7 +7946,7 @@
         <a:solidFill>
           <a:schemeClr val="phClr"/>
         </a:solidFill>
-        <a:gradFill rotWithShape="1">
+        <a:gradFill>
           <a:gsLst>
             <a:gs pos="0">
               <a:schemeClr val="phClr">
@@ -7734,7 +7969,7 @@
           </a:gsLst>
           <a:lin ang="16200000" scaled="1"/>
         </a:gradFill>
-        <a:gradFill rotWithShape="1">
+        <a:gradFill>
           <a:gsLst>
             <a:gs pos="0">
               <a:schemeClr val="phClr">
@@ -7821,7 +8056,7 @@
         <a:solidFill>
           <a:schemeClr val="phClr"/>
         </a:solidFill>
-        <a:gradFill rotWithShape="1">
+        <a:gradFill>
           <a:gsLst>
             <a:gs pos="0">
               <a:schemeClr val="phClr">
@@ -7843,11 +8078,9 @@
               </a:schemeClr>
             </a:gs>
           </a:gsLst>
-          <a:path path="circle">
-            <a:fillToRect l="50000" t="-80000" r="50000" b="180000"/>
-          </a:path>
+          <a:path path="circle"/>
         </a:gradFill>
-        <a:gradFill rotWithShape="1">
+        <a:gradFill>
           <a:gsLst>
             <a:gs pos="0">
               <a:schemeClr val="phClr">
@@ -7862,12 +8095,11 @@
               </a:schemeClr>
             </a:gs>
           </a:gsLst>
-          <a:path path="circle">
-            <a:fillToRect l="50000" t="50000" r="50000" b="50000"/>
-          </a:path>
+          <a:path path="circle"/>
         </a:gradFill>
       </a:bgFillStyleLst>
     </a:fmtScheme>
   </a:themeElements>
+  <a:objectDefaults/>
 </a:theme>
 </file>
--- a/docs/SmartAttendance.pptx
+++ b/docs/SmartAttendance.pptx
@@ -1,25 +1,45 @@
 
 <file path=ppt/presentation.xml><?xml version="1.0" encoding="utf-8"?>
-<p:presentation xmlns:a="http://schemas.openxmlformats.org/drawingml/2006/main" xmlns:r="http://schemas.openxmlformats.org/officeDocument/2006/relationships" xmlns:p="http://schemas.openxmlformats.org/presentationml/2006/main" xmlns:m="http://schemas.openxmlformats.org/officeDocument/2006/math" xmlns:w="http://schemas.openxmlformats.org/wordprocessingml/2006/main" autoCompressPictures="0" embedTrueTypeFonts="1" saveSubsetFonts="1" strictFirstAndLastChars="0">
+<p:presentation xmlns:a="http://schemas.openxmlformats.org/drawingml/2006/main" xmlns:r="http://schemas.openxmlformats.org/officeDocument/2006/relationships" xmlns:mc="http://schemas.openxmlformats.org/markup-compatibility/2006" xmlns:mv="urn:schemas-microsoft-com:mac:vml" xmlns:p="http://schemas.openxmlformats.org/presentationml/2006/main" xmlns:c="http://schemas.openxmlformats.org/drawingml/2006/chart" xmlns:dgm="http://schemas.openxmlformats.org/drawingml/2006/diagram" xmlns:o="urn:schemas-microsoft-com:office:office" xmlns:v="urn:schemas-microsoft-com:vml" xmlns:pvml="urn:schemas-microsoft-com:office:powerpoint" xmlns:com="http://schemas.openxmlformats.org/drawingml/2006/compatibility" xmlns:p14="http://schemas.microsoft.com/office/powerpoint/2010/main" xmlns:p15="http://schemas.microsoft.com/office/powerpoint/2012/main" xmlns:ahyp="http://schemas.microsoft.com/office/drawing/2018/hyperlinkcolor" autoCompressPictures="0" embedTrueTypeFonts="1" strictFirstAndLastChars="0" saveSubsetFonts="1">
   <p:sldMasterIdLst>
-    <p:sldMasterId id="2147483648" r:id="rId1"/>
+    <p:sldMasterId id="2147483658" r:id="rId4"/>
   </p:sldMasterIdLst>
   <p:notesMasterIdLst>
-    <p:notesMasterId r:id="rId11"/>
+    <p:notesMasterId r:id="rId5"/>
   </p:notesMasterIdLst>
   <p:sldIdLst>
-    <p:sldId id="256" r:id="rId4"/>
-    <p:sldId id="257" r:id="rId5"/>
-    <p:sldId id="258" r:id="rId6"/>
-    <p:sldId id="259" r:id="rId7"/>
-    <p:sldId id="260" r:id="rId8"/>
-    <p:sldId id="261" r:id="rId9"/>
-    <p:sldId id="262" r:id="rId10"/>
+    <p:sldId id="256" r:id="rId6"/>
+    <p:sldId id="257" r:id="rId7"/>
+    <p:sldId id="258" r:id="rId8"/>
+    <p:sldId id="259" r:id="rId9"/>
+    <p:sldId id="260" r:id="rId10"/>
+    <p:sldId id="261" r:id="rId11"/>
+    <p:sldId id="262" r:id="rId12"/>
   </p:sldIdLst>
-  <p:sldSz cx="9144000" cy="5143500"/>
+  <p:sldSz cy="5143500" cx="9144000"/>
   <p:notesSz cx="6858000" cy="9144000"/>
+  <p:embeddedFontLst>
+    <p:embeddedFont>
+      <p:font typeface="Montserrat"/>
+      <p:regular r:id="rId13"/>
+      <p:bold r:id="rId14"/>
+      <p:italic r:id="rId15"/>
+      <p:boldItalic r:id="rId16"/>
+    </p:embeddedFont>
+    <p:embeddedFont>
+      <p:font typeface="Vidaloka"/>
+      <p:regular r:id="rId17"/>
+    </p:embeddedFont>
+    <p:embeddedFont>
+      <p:font typeface="Quattrocento Sans"/>
+      <p:regular r:id="rId18"/>
+      <p:bold r:id="rId19"/>
+      <p:italic r:id="rId20"/>
+      <p:boldItalic r:id="rId21"/>
+    </p:embeddedFont>
+  </p:embeddedFontLst>
   <p:defaultTextStyle>
-    <a:defPPr marR="0" lvl="0" algn="l" rtl="0">
+    <a:defPPr lvl="0" marR="0" rtl="0" algn="l">
       <a:lnSpc>
         <a:spcPct val="100000"/>
       </a:lnSpc>
@@ -30,7 +50,7 @@
         <a:spcPts val="0"/>
       </a:spcAft>
     </a:defPPr>
-    <a:lvl1pPr marR="0" lvl="0" algn="l" rtl="0">
+    <a:lvl1pPr lvl="0" marR="0" rtl="0" algn="l">
       <a:lnSpc>
         <a:spcPct val="100000"/>
       </a:lnSpc>
@@ -44,16 +64,17 @@
         <a:srgbClr val="000000"/>
       </a:buClr>
       <a:buFont typeface="Arial"/>
-      <a:defRPr sz="1400" b="0" i="0" u="none" strike="noStrike" cap="none">
+      <a:defRPr b="0" i="0" sz="1400" u="none" cap="none" strike="noStrike">
         <a:solidFill>
           <a:srgbClr val="000000"/>
         </a:solidFill>
         <a:latin typeface="Arial"/>
         <a:ea typeface="Arial"/>
         <a:cs typeface="Arial"/>
+        <a:sym typeface="Arial"/>
       </a:defRPr>
     </a:lvl1pPr>
-    <a:lvl2pPr marR="0" lvl="1" algn="l" rtl="0">
+    <a:lvl2pPr lvl="1" marR="0" rtl="0" algn="l">
       <a:lnSpc>
         <a:spcPct val="100000"/>
       </a:lnSpc>
@@ -67,16 +88,17 @@
         <a:srgbClr val="000000"/>
       </a:buClr>
       <a:buFont typeface="Arial"/>
-      <a:defRPr sz="1400" b="0" i="0" u="none" strike="noStrike" cap="none">
+      <a:defRPr b="0" i="0" sz="1400" u="none" cap="none" strike="noStrike">
         <a:solidFill>
           <a:srgbClr val="000000"/>
         </a:solidFill>
         <a:latin typeface="Arial"/>
         <a:ea typeface="Arial"/>
         <a:cs typeface="Arial"/>
+        <a:sym typeface="Arial"/>
       </a:defRPr>
     </a:lvl2pPr>
-    <a:lvl3pPr marR="0" lvl="2" algn="l" rtl="0">
+    <a:lvl3pPr lvl="2" marR="0" rtl="0" algn="l">
       <a:lnSpc>
         <a:spcPct val="100000"/>
       </a:lnSpc>
@@ -90,16 +112,17 @@
         <a:srgbClr val="000000"/>
       </a:buClr>
       <a:buFont typeface="Arial"/>
-      <a:defRPr sz="1400" b="0" i="0" u="none" strike="noStrike" cap="none">
+      <a:defRPr b="0" i="0" sz="1400" u="none" cap="none" strike="noStrike">
         <a:solidFill>
           <a:srgbClr val="000000"/>
         </a:solidFill>
         <a:latin typeface="Arial"/>
         <a:ea typeface="Arial"/>
         <a:cs typeface="Arial"/>
+        <a:sym typeface="Arial"/>
       </a:defRPr>
     </a:lvl3pPr>
-    <a:lvl4pPr marR="0" lvl="3" algn="l" rtl="0">
+    <a:lvl4pPr lvl="3" marR="0" rtl="0" algn="l">
       <a:lnSpc>
         <a:spcPct val="100000"/>
       </a:lnSpc>
@@ -113,16 +136,17 @@
         <a:srgbClr val="000000"/>
       </a:buClr>
       <a:buFont typeface="Arial"/>
-      <a:defRPr sz="1400" b="0" i="0" u="none" strike="noStrike" cap="none">
+      <a:defRPr b="0" i="0" sz="1400" u="none" cap="none" strike="noStrike">
         <a:solidFill>
           <a:srgbClr val="000000"/>
         </a:solidFill>
         <a:latin typeface="Arial"/>
         <a:ea typeface="Arial"/>
         <a:cs typeface="Arial"/>
+        <a:sym typeface="Arial"/>
       </a:defRPr>
     </a:lvl4pPr>
-    <a:lvl5pPr marR="0" lvl="4" algn="l" rtl="0">
+    <a:lvl5pPr lvl="4" marR="0" rtl="0" algn="l">
       <a:lnSpc>
         <a:spcPct val="100000"/>
       </a:lnSpc>
@@ -136,16 +160,17 @@
         <a:srgbClr val="000000"/>
       </a:buClr>
       <a:buFont typeface="Arial"/>
-      <a:defRPr sz="1400" b="0" i="0" u="none" strike="noStrike" cap="none">
+      <a:defRPr b="0" i="0" sz="1400" u="none" cap="none" strike="noStrike">
         <a:solidFill>
           <a:srgbClr val="000000"/>
         </a:solidFill>
         <a:latin typeface="Arial"/>
         <a:ea typeface="Arial"/>
         <a:cs typeface="Arial"/>
+        <a:sym typeface="Arial"/>
       </a:defRPr>
     </a:lvl5pPr>
-    <a:lvl6pPr marR="0" lvl="5" algn="l" rtl="0">
+    <a:lvl6pPr lvl="5" marR="0" rtl="0" algn="l">
       <a:lnSpc>
         <a:spcPct val="100000"/>
       </a:lnSpc>
@@ -159,16 +184,17 @@
         <a:srgbClr val="000000"/>
       </a:buClr>
       <a:buFont typeface="Arial"/>
-      <a:defRPr sz="1400" b="0" i="0" u="none" strike="noStrike" cap="none">
+      <a:defRPr b="0" i="0" sz="1400" u="none" cap="none" strike="noStrike">
         <a:solidFill>
           <a:srgbClr val="000000"/>
         </a:solidFill>
         <a:latin typeface="Arial"/>
         <a:ea typeface="Arial"/>
         <a:cs typeface="Arial"/>
+        <a:sym typeface="Arial"/>
       </a:defRPr>
     </a:lvl6pPr>
-    <a:lvl7pPr marR="0" lvl="6" algn="l" rtl="0">
+    <a:lvl7pPr lvl="6" marR="0" rtl="0" algn="l">
       <a:lnSpc>
         <a:spcPct val="100000"/>
       </a:lnSpc>
@@ -182,16 +208,17 @@
         <a:srgbClr val="000000"/>
       </a:buClr>
       <a:buFont typeface="Arial"/>
-      <a:defRPr sz="1400" b="0" i="0" u="none" strike="noStrike" cap="none">
+      <a:defRPr b="0" i="0" sz="1400" u="none" cap="none" strike="noStrike">
         <a:solidFill>
           <a:srgbClr val="000000"/>
         </a:solidFill>
         <a:latin typeface="Arial"/>
         <a:ea typeface="Arial"/>
         <a:cs typeface="Arial"/>
+        <a:sym typeface="Arial"/>
       </a:defRPr>
     </a:lvl7pPr>
-    <a:lvl8pPr marR="0" lvl="7" algn="l" rtl="0">
+    <a:lvl8pPr lvl="7" marR="0" rtl="0" algn="l">
       <a:lnSpc>
         <a:spcPct val="100000"/>
       </a:lnSpc>
@@ -205,16 +232,17 @@
         <a:srgbClr val="000000"/>
       </a:buClr>
       <a:buFont typeface="Arial"/>
-      <a:defRPr sz="1400" b="0" i="0" u="none" strike="noStrike" cap="none">
+      <a:defRPr b="0" i="0" sz="1400" u="none" cap="none" strike="noStrike">
         <a:solidFill>
           <a:srgbClr val="000000"/>
         </a:solidFill>
         <a:latin typeface="Arial"/>
         <a:ea typeface="Arial"/>
         <a:cs typeface="Arial"/>
+        <a:sym typeface="Arial"/>
       </a:defRPr>
     </a:lvl8pPr>
-    <a:lvl9pPr marR="0" lvl="8" algn="l" rtl="0">
+    <a:lvl9pPr lvl="8" marR="0" rtl="0" algn="l">
       <a:lnSpc>
         <a:spcPct val="100000"/>
       </a:lnSpc>
@@ -228,29 +256,46 @@
         <a:srgbClr val="000000"/>
       </a:buClr>
       <a:buFont typeface="Arial"/>
-      <a:defRPr sz="1400" b="0" i="0" u="none" strike="noStrike" cap="none">
+      <a:defRPr b="0" i="0" sz="1400" u="none" cap="none" strike="noStrike">
         <a:solidFill>
           <a:srgbClr val="000000"/>
         </a:solidFill>
         <a:latin typeface="Arial"/>
         <a:ea typeface="Arial"/>
         <a:cs typeface="Arial"/>
+        <a:sym typeface="Arial"/>
       </a:defRPr>
     </a:lvl9pPr>
   </p:defaultTextStyle>
+  <p:extLst>
+    <p:ext uri="{EFAFB233-063F-42B5-8137-9DF3F51BA10A}">
+      <p15:sldGuideLst>
+        <p15:guide id="1" pos="2880">
+          <p15:clr>
+            <a:srgbClr val="000000"/>
+          </p15:clr>
+        </p15:guide>
+        <p15:guide id="2" orient="horz" pos="1620">
+          <p15:clr>
+            <a:srgbClr val="000000"/>
+          </p15:clr>
+        </p15:guide>
+      </p15:sldGuideLst>
+    </p:ext>
+  </p:extLst>
 </p:presentation>
 </file>
 
 <file path=ppt/notesMasters/notesMaster1.xml><?xml version="1.0" encoding="utf-8"?>
-<p:notesMaster xmlns:a="http://schemas.openxmlformats.org/drawingml/2006/main" xmlns:r="http://schemas.openxmlformats.org/officeDocument/2006/relationships" xmlns:p="http://schemas.openxmlformats.org/presentationml/2006/main">
-  <p:cSld name="">
+<p:notesMaster xmlns:a="http://schemas.openxmlformats.org/drawingml/2006/main" xmlns:r="http://schemas.openxmlformats.org/officeDocument/2006/relationships" xmlns:mc="http://schemas.openxmlformats.org/markup-compatibility/2006" xmlns:mv="urn:schemas-microsoft-com:mac:vml" xmlns:p="http://schemas.openxmlformats.org/presentationml/2006/main" xmlns:c="http://schemas.openxmlformats.org/drawingml/2006/chart" xmlns:dgm="http://schemas.openxmlformats.org/drawingml/2006/diagram" xmlns:o="urn:schemas-microsoft-com:office:office" xmlns:v="urn:schemas-microsoft-com:vml" xmlns:pvml="urn:schemas-microsoft-com:office:powerpoint" xmlns:com="http://schemas.openxmlformats.org/drawingml/2006/compatibility" xmlns:p14="http://schemas.microsoft.com/office/powerpoint/2010/main" xmlns:p15="http://schemas.microsoft.com/office/powerpoint/2012/main" xmlns:ahyp="http://schemas.microsoft.com/office/drawing/2018/hyperlinkcolor">
+  <p:cSld>
     <p:spTree>
       <p:nvGrpSpPr>
-        <p:cNvPr id="1" name=""/>
+        <p:cNvPr id="2" name="Shape 2"/>
         <p:cNvGrpSpPr/>
         <p:nvPr/>
       </p:nvGrpSpPr>
-      <p:grpSpPr bwMode="auto">
+      <p:grpSpPr>
         <a:xfrm>
           <a:off x="0" y="0"/>
           <a:ext cx="0" cy="0"/>
@@ -260,25 +305,21 @@
       </p:grpSpPr>
       <p:sp>
         <p:nvSpPr>
-          <p:cNvPr id="368803165" name="Google Shape;3;n"/>
+          <p:cNvPr id="3" name="Google Shape;3;n"/>
           <p:cNvSpPr/>
           <p:nvPr>
-            <p:ph type="sldImg" idx="2"/>
+            <p:ph idx="2" type="sldImg"/>
           </p:nvPr>
         </p:nvSpPr>
-        <p:spPr bwMode="auto">
+        <p:spPr>
           <a:xfrm>
             <a:off x="381300" y="685800"/>
             <a:ext cx="6096075" cy="3429000"/>
           </a:xfrm>
           <a:custGeom>
-            <a:avLst/>
-            <a:gdLst/>
-            <a:ahLst/>
-            <a:cxnLst/>
-            <a:rect l="l" t="t" r="r" b="b"/>
+            <a:rect b="b" l="l" r="r" t="t"/>
             <a:pathLst>
-              <a:path w="120000" h="120000" fill="norm" stroke="1" extrusionOk="0">
+              <a:path extrusionOk="0" h="120000" w="120000">
                 <a:moveTo>
                   <a:pt x="0" y="0"/>
                 </a:moveTo>
@@ -296,26 +337,26 @@
             </a:pathLst>
           </a:custGeom>
           <a:noFill/>
-          <a:ln w="9525" cap="flat" cmpd="sng">
+          <a:ln cap="flat" cmpd="sng" w="9525">
             <a:solidFill>
               <a:srgbClr val="000000"/>
             </a:solidFill>
             <a:prstDash val="solid"/>
             <a:round/>
-            <a:headEnd type="none" w="sm" len="sm"/>
-            <a:tailEnd type="none" w="sm" len="sm"/>
+            <a:headEnd len="sm" w="sm" type="none"/>
+            <a:tailEnd len="sm" w="sm" type="none"/>
           </a:ln>
         </p:spPr>
       </p:sp>
       <p:sp>
         <p:nvSpPr>
-          <p:cNvPr id="98040319" name="Google Shape;4;n"/>
+          <p:cNvPr id="4" name="Google Shape;4;n"/>
           <p:cNvSpPr txBox="1"/>
           <p:nvPr>
-            <p:ph type="body" idx="1"/>
+            <p:ph idx="1" type="body"/>
           </p:nvPr>
         </p:nvSpPr>
-        <p:spPr bwMode="auto">
+        <p:spPr>
           <a:xfrm>
             <a:off x="685800" y="4343400"/>
             <a:ext cx="5486400" cy="4114800"/>
@@ -329,11 +370,11 @@
           </a:ln>
         </p:spPr>
         <p:txBody>
-          <a:bodyPr spcFirstLastPara="1" wrap="square" lIns="91425" tIns="91425" rIns="91425" bIns="91425" anchor="t" anchorCtr="0">
+          <a:bodyPr anchorCtr="0" anchor="t" bIns="91425" lIns="91425" spcFirstLastPara="1" rIns="91425" wrap="square" tIns="91425">
             <a:noAutofit/>
           </a:bodyPr>
           <a:lstStyle>
-            <a:lvl1pPr marL="457200" marR="0" lvl="0" indent="-298450" algn="l" rtl="0">
+            <a:lvl1pPr indent="-298450" lvl="0" marL="457200" marR="0" rtl="0" algn="l">
               <a:lnSpc>
                 <a:spcPct val="100000"/>
               </a:lnSpc>
@@ -349,16 +390,17 @@
               <a:buSzPts val="1100"/>
               <a:buFont typeface="Arial"/>
               <a:buChar char="●"/>
-              <a:defRPr sz="1100" b="0" i="0" u="none" strike="noStrike" cap="none">
+              <a:defRPr b="0" i="0" sz="1100" u="none" cap="none" strike="noStrike">
                 <a:solidFill>
                   <a:srgbClr val="000000"/>
                 </a:solidFill>
                 <a:latin typeface="Arial"/>
                 <a:ea typeface="Arial"/>
                 <a:cs typeface="Arial"/>
+                <a:sym typeface="Arial"/>
               </a:defRPr>
             </a:lvl1pPr>
-            <a:lvl2pPr marL="914400" marR="0" lvl="1" indent="-298450" algn="l" rtl="0">
+            <a:lvl2pPr indent="-298450" lvl="1" marL="914400" marR="0" rtl="0" algn="l">
               <a:lnSpc>
                 <a:spcPct val="100000"/>
               </a:lnSpc>
@@ -374,16 +416,17 @@
               <a:buSzPts val="1100"/>
               <a:buFont typeface="Arial"/>
               <a:buChar char="○"/>
-              <a:defRPr sz="1100" b="0" i="0" u="none" strike="noStrike" cap="none">
+              <a:defRPr b="0" i="0" sz="1100" u="none" cap="none" strike="noStrike">
                 <a:solidFill>
                   <a:srgbClr val="000000"/>
                 </a:solidFill>
                 <a:latin typeface="Arial"/>
                 <a:ea typeface="Arial"/>
                 <a:cs typeface="Arial"/>
+                <a:sym typeface="Arial"/>
               </a:defRPr>
             </a:lvl2pPr>
-            <a:lvl3pPr marL="1371600" marR="0" lvl="2" indent="-298450" algn="l" rtl="0">
+            <a:lvl3pPr indent="-298450" lvl="2" marL="1371600" marR="0" rtl="0" algn="l">
               <a:lnSpc>
                 <a:spcPct val="100000"/>
               </a:lnSpc>
@@ -399,16 +442,17 @@
               <a:buSzPts val="1100"/>
               <a:buFont typeface="Arial"/>
               <a:buChar char="■"/>
-              <a:defRPr sz="1100" b="0" i="0" u="none" strike="noStrike" cap="none">
+              <a:defRPr b="0" i="0" sz="1100" u="none" cap="none" strike="noStrike">
                 <a:solidFill>
                   <a:srgbClr val="000000"/>
                 </a:solidFill>
                 <a:latin typeface="Arial"/>
                 <a:ea typeface="Arial"/>
                 <a:cs typeface="Arial"/>
+                <a:sym typeface="Arial"/>
               </a:defRPr>
             </a:lvl3pPr>
-            <a:lvl4pPr marL="1828800" marR="0" lvl="3" indent="-298450" algn="l" rtl="0">
+            <a:lvl4pPr indent="-298450" lvl="3" marL="1828800" marR="0" rtl="0" algn="l">
               <a:lnSpc>
                 <a:spcPct val="100000"/>
               </a:lnSpc>
@@ -424,16 +468,17 @@
               <a:buSzPts val="1100"/>
               <a:buFont typeface="Arial"/>
               <a:buChar char="●"/>
-              <a:defRPr sz="1100" b="0" i="0" u="none" strike="noStrike" cap="none">
+              <a:defRPr b="0" i="0" sz="1100" u="none" cap="none" strike="noStrike">
                 <a:solidFill>
                   <a:srgbClr val="000000"/>
                 </a:solidFill>
                 <a:latin typeface="Arial"/>
                 <a:ea typeface="Arial"/>
                 <a:cs typeface="Arial"/>
+                <a:sym typeface="Arial"/>
               </a:defRPr>
             </a:lvl4pPr>
-            <a:lvl5pPr marL="2286000" marR="0" lvl="4" indent="-298450" algn="l" rtl="0">
+            <a:lvl5pPr indent="-298450" lvl="4" marL="2286000" marR="0" rtl="0" algn="l">
               <a:lnSpc>
                 <a:spcPct val="100000"/>
               </a:lnSpc>
@@ -449,16 +494,17 @@
               <a:buSzPts val="1100"/>
               <a:buFont typeface="Arial"/>
               <a:buChar char="○"/>
-              <a:defRPr sz="1100" b="0" i="0" u="none" strike="noStrike" cap="none">
+              <a:defRPr b="0" i="0" sz="1100" u="none" cap="none" strike="noStrike">
                 <a:solidFill>
                   <a:srgbClr val="000000"/>
                 </a:solidFill>
                 <a:latin typeface="Arial"/>
                 <a:ea typeface="Arial"/>
                 <a:cs typeface="Arial"/>
+                <a:sym typeface="Arial"/>
               </a:defRPr>
             </a:lvl5pPr>
-            <a:lvl6pPr marL="2743200" marR="0" lvl="5" indent="-298450" algn="l" rtl="0">
+            <a:lvl6pPr indent="-298450" lvl="5" marL="2743200" marR="0" rtl="0" algn="l">
               <a:lnSpc>
                 <a:spcPct val="100000"/>
               </a:lnSpc>
@@ -474,16 +520,17 @@
               <a:buSzPts val="1100"/>
               <a:buFont typeface="Arial"/>
               <a:buChar char="■"/>
-              <a:defRPr sz="1100" b="0" i="0" u="none" strike="noStrike" cap="none">
+              <a:defRPr b="0" i="0" sz="1100" u="none" cap="none" strike="noStrike">
                 <a:solidFill>
                   <a:srgbClr val="000000"/>
                 </a:solidFill>
                 <a:latin typeface="Arial"/>
                 <a:ea typeface="Arial"/>
                 <a:cs typeface="Arial"/>
+                <a:sym typeface="Arial"/>
               </a:defRPr>
             </a:lvl6pPr>
-            <a:lvl7pPr marL="3200400" marR="0" lvl="6" indent="-298450" algn="l" rtl="0">
+            <a:lvl7pPr indent="-298450" lvl="6" marL="3200400" marR="0" rtl="0" algn="l">
               <a:lnSpc>
                 <a:spcPct val="100000"/>
               </a:lnSpc>
@@ -499,16 +546,17 @@
               <a:buSzPts val="1100"/>
               <a:buFont typeface="Arial"/>
               <a:buChar char="●"/>
-              <a:defRPr sz="1100" b="0" i="0" u="none" strike="noStrike" cap="none">
+              <a:defRPr b="0" i="0" sz="1100" u="none" cap="none" strike="noStrike">
                 <a:solidFill>
                   <a:srgbClr val="000000"/>
                 </a:solidFill>
                 <a:latin typeface="Arial"/>
                 <a:ea typeface="Arial"/>
                 <a:cs typeface="Arial"/>
+                <a:sym typeface="Arial"/>
               </a:defRPr>
             </a:lvl7pPr>
-            <a:lvl8pPr marL="3657600" marR="0" lvl="7" indent="-298450" algn="l" rtl="0">
+            <a:lvl8pPr indent="-298450" lvl="7" marL="3657600" marR="0" rtl="0" algn="l">
               <a:lnSpc>
                 <a:spcPct val="100000"/>
               </a:lnSpc>
@@ -524,16 +572,17 @@
               <a:buSzPts val="1100"/>
               <a:buFont typeface="Arial"/>
               <a:buChar char="○"/>
-              <a:defRPr sz="1100" b="0" i="0" u="none" strike="noStrike" cap="none">
+              <a:defRPr b="0" i="0" sz="1100" u="none" cap="none" strike="noStrike">
                 <a:solidFill>
                   <a:srgbClr val="000000"/>
                 </a:solidFill>
                 <a:latin typeface="Arial"/>
                 <a:ea typeface="Arial"/>
                 <a:cs typeface="Arial"/>
+                <a:sym typeface="Arial"/>
               </a:defRPr>
             </a:lvl8pPr>
-            <a:lvl9pPr marL="4114800" marR="0" lvl="8" indent="-298450" algn="l" rtl="0">
+            <a:lvl9pPr indent="-298450" lvl="8" marL="4114800" marR="0" rtl="0" algn="l">
               <a:lnSpc>
                 <a:spcPct val="100000"/>
               </a:lnSpc>
@@ -549,29 +598,25 @@
               <a:buSzPts val="1100"/>
               <a:buFont typeface="Arial"/>
               <a:buChar char="■"/>
-              <a:defRPr sz="1100" b="0" i="0" u="none" strike="noStrike" cap="none">
+              <a:defRPr b="0" i="0" sz="1100" u="none" cap="none" strike="noStrike">
                 <a:solidFill>
                   <a:srgbClr val="000000"/>
                 </a:solidFill>
                 <a:latin typeface="Arial"/>
                 <a:ea typeface="Arial"/>
                 <a:cs typeface="Arial"/>
+                <a:sym typeface="Arial"/>
               </a:defRPr>
             </a:lvl9pPr>
           </a:lstStyle>
-          <a:p>
-            <a:pPr>
-              <a:defRPr/>
-            </a:pPr>
-            <a:endParaRPr/>
-          </a:p>
+          <a:p/>
         </p:txBody>
       </p:sp>
     </p:spTree>
   </p:cSld>
-  <p:clrMap bg1="lt1" tx1="dk1" bg2="dk2" tx2="lt2" accent1="accent1" accent2="accent2" accent3="accent3" accent4="accent4" accent5="accent5" accent6="accent6" hlink="hlink" folHlink="folHlink"/>
+  <p:clrMap accent1="accent1" accent2="accent2" accent3="accent3" accent4="accent4" accent5="accent5" accent6="accent6" bg1="lt1" bg2="dk2" tx1="dk1" tx2="lt2" folHlink="folHlink" hlink="hlink"/>
   <p:notesStyle>
-    <a:defPPr marR="0" lvl="0" algn="l" rtl="0">
+    <a:defPPr lvl="0" marR="0" rtl="0" algn="l">
       <a:lnSpc>
         <a:spcPct val="100000"/>
       </a:lnSpc>
@@ -582,7 +627,7 @@
         <a:spcPts val="0"/>
       </a:spcAft>
     </a:defPPr>
-    <a:lvl1pPr marR="0" lvl="0" algn="l" rtl="0">
+    <a:lvl1pPr lvl="0" marR="0" rtl="0" algn="l">
       <a:lnSpc>
         <a:spcPct val="100000"/>
       </a:lnSpc>
@@ -596,16 +641,17 @@
         <a:srgbClr val="000000"/>
       </a:buClr>
       <a:buFont typeface="Arial"/>
-      <a:defRPr sz="1400" b="0" i="0" u="none" strike="noStrike" cap="none">
+      <a:defRPr b="0" i="0" sz="1400" u="none" cap="none" strike="noStrike">
         <a:solidFill>
           <a:srgbClr val="000000"/>
         </a:solidFill>
         <a:latin typeface="Arial"/>
         <a:ea typeface="Arial"/>
         <a:cs typeface="Arial"/>
+        <a:sym typeface="Arial"/>
       </a:defRPr>
     </a:lvl1pPr>
-    <a:lvl2pPr marR="0" lvl="1" algn="l" rtl="0">
+    <a:lvl2pPr lvl="1" marR="0" rtl="0" algn="l">
       <a:lnSpc>
         <a:spcPct val="100000"/>
       </a:lnSpc>
@@ -619,16 +665,17 @@
         <a:srgbClr val="000000"/>
       </a:buClr>
       <a:buFont typeface="Arial"/>
-      <a:defRPr sz="1400" b="0" i="0" u="none" strike="noStrike" cap="none">
+      <a:defRPr b="0" i="0" sz="1400" u="none" cap="none" strike="noStrike">
         <a:solidFill>
           <a:srgbClr val="000000"/>
         </a:solidFill>
         <a:latin typeface="Arial"/>
         <a:ea typeface="Arial"/>
         <a:cs typeface="Arial"/>
+        <a:sym typeface="Arial"/>
       </a:defRPr>
     </a:lvl2pPr>
-    <a:lvl3pPr marR="0" lvl="2" algn="l" rtl="0">
+    <a:lvl3pPr lvl="2" marR="0" rtl="0" algn="l">
       <a:lnSpc>
         <a:spcPct val="100000"/>
       </a:lnSpc>
@@ -642,16 +689,17 @@
         <a:srgbClr val="000000"/>
       </a:buClr>
       <a:buFont typeface="Arial"/>
-      <a:defRPr sz="1400" b="0" i="0" u="none" strike="noStrike" cap="none">
+      <a:defRPr b="0" i="0" sz="1400" u="none" cap="none" strike="noStrike">
         <a:solidFill>
           <a:srgbClr val="000000"/>
         </a:solidFill>
         <a:latin typeface="Arial"/>
         <a:ea typeface="Arial"/>
         <a:cs typeface="Arial"/>
+        <a:sym typeface="Arial"/>
       </a:defRPr>
     </a:lvl3pPr>
-    <a:lvl4pPr marR="0" lvl="3" algn="l" rtl="0">
+    <a:lvl4pPr lvl="3" marR="0" rtl="0" algn="l">
       <a:lnSpc>
         <a:spcPct val="100000"/>
       </a:lnSpc>
@@ -665,16 +713,17 @@
         <a:srgbClr val="000000"/>
       </a:buClr>
       <a:buFont typeface="Arial"/>
-      <a:defRPr sz="1400" b="0" i="0" u="none" strike="noStrike" cap="none">
+      <a:defRPr b="0" i="0" sz="1400" u="none" cap="none" strike="noStrike">
         <a:solidFill>
           <a:srgbClr val="000000"/>
         </a:solidFill>
         <a:latin typeface="Arial"/>
         <a:ea typeface="Arial"/>
         <a:cs typeface="Arial"/>
+        <a:sym typeface="Arial"/>
       </a:defRPr>
     </a:lvl4pPr>
-    <a:lvl5pPr marR="0" lvl="4" algn="l" rtl="0">
+    <a:lvl5pPr lvl="4" marR="0" rtl="0" algn="l">
       <a:lnSpc>
         <a:spcPct val="100000"/>
       </a:lnSpc>
@@ -688,16 +737,17 @@
         <a:srgbClr val="000000"/>
       </a:buClr>
       <a:buFont typeface="Arial"/>
-      <a:defRPr sz="1400" b="0" i="0" u="none" strike="noStrike" cap="none">
+      <a:defRPr b="0" i="0" sz="1400" u="none" cap="none" strike="noStrike">
         <a:solidFill>
           <a:srgbClr val="000000"/>
         </a:solidFill>
         <a:latin typeface="Arial"/>
         <a:ea typeface="Arial"/>
         <a:cs typeface="Arial"/>
+        <a:sym typeface="Arial"/>
       </a:defRPr>
     </a:lvl5pPr>
-    <a:lvl6pPr marR="0" lvl="5" algn="l" rtl="0">
+    <a:lvl6pPr lvl="5" marR="0" rtl="0" algn="l">
       <a:lnSpc>
         <a:spcPct val="100000"/>
       </a:lnSpc>
@@ -711,16 +761,17 @@
         <a:srgbClr val="000000"/>
       </a:buClr>
       <a:buFont typeface="Arial"/>
-      <a:defRPr sz="1400" b="0" i="0" u="none" strike="noStrike" cap="none">
+      <a:defRPr b="0" i="0" sz="1400" u="none" cap="none" strike="noStrike">
         <a:solidFill>
           <a:srgbClr val="000000"/>
         </a:solidFill>
         <a:latin typeface="Arial"/>
         <a:ea typeface="Arial"/>
         <a:cs typeface="Arial"/>
+        <a:sym typeface="Arial"/>
       </a:defRPr>
     </a:lvl6pPr>
-    <a:lvl7pPr marR="0" lvl="6" algn="l" rtl="0">
+    <a:lvl7pPr lvl="6" marR="0" rtl="0" algn="l">
       <a:lnSpc>
         <a:spcPct val="100000"/>
       </a:lnSpc>
@@ -734,16 +785,17 @@
         <a:srgbClr val="000000"/>
       </a:buClr>
       <a:buFont typeface="Arial"/>
-      <a:defRPr sz="1400" b="0" i="0" u="none" strike="noStrike" cap="none">
+      <a:defRPr b="0" i="0" sz="1400" u="none" cap="none" strike="noStrike">
         <a:solidFill>
           <a:srgbClr val="000000"/>
         </a:solidFill>
         <a:latin typeface="Arial"/>
         <a:ea typeface="Arial"/>
         <a:cs typeface="Arial"/>
+        <a:sym typeface="Arial"/>
       </a:defRPr>
     </a:lvl7pPr>
-    <a:lvl8pPr marR="0" lvl="7" algn="l" rtl="0">
+    <a:lvl8pPr lvl="7" marR="0" rtl="0" algn="l">
       <a:lnSpc>
         <a:spcPct val="100000"/>
       </a:lnSpc>
@@ -757,16 +809,17 @@
         <a:srgbClr val="000000"/>
       </a:buClr>
       <a:buFont typeface="Arial"/>
-      <a:defRPr sz="1400" b="0" i="0" u="none" strike="noStrike" cap="none">
+      <a:defRPr b="0" i="0" sz="1400" u="none" cap="none" strike="noStrike">
         <a:solidFill>
           <a:srgbClr val="000000"/>
         </a:solidFill>
         <a:latin typeface="Arial"/>
         <a:ea typeface="Arial"/>
         <a:cs typeface="Arial"/>
+        <a:sym typeface="Arial"/>
       </a:defRPr>
     </a:lvl8pPr>
-    <a:lvl9pPr marR="0" lvl="8" algn="l" rtl="0">
+    <a:lvl9pPr lvl="8" marR="0" rtl="0" algn="l">
       <a:lnSpc>
         <a:spcPct val="100000"/>
       </a:lnSpc>
@@ -780,13 +833,14 @@
         <a:srgbClr val="000000"/>
       </a:buClr>
       <a:buFont typeface="Arial"/>
-      <a:defRPr sz="1400" b="0" i="0" u="none" strike="noStrike" cap="none">
+      <a:defRPr b="0" i="0" sz="1400" u="none" cap="none" strike="noStrike">
         <a:solidFill>
           <a:srgbClr val="000000"/>
         </a:solidFill>
         <a:latin typeface="Arial"/>
         <a:ea typeface="Arial"/>
         <a:cs typeface="Arial"/>
+        <a:sym typeface="Arial"/>
       </a:defRPr>
     </a:lvl9pPr>
   </p:notesStyle>
@@ -794,15 +848,15 @@
 </file>
 
 <file path=ppt/notesSlides/notesSlide1.xml><?xml version="1.0" encoding="utf-8"?>
-<p:notes xmlns:a="http://schemas.openxmlformats.org/drawingml/2006/main" xmlns:r="http://schemas.openxmlformats.org/officeDocument/2006/relationships" xmlns:p="http://schemas.openxmlformats.org/presentationml/2006/main" xmlns:m="http://schemas.openxmlformats.org/officeDocument/2006/math" xmlns:w="http://schemas.openxmlformats.org/wordprocessingml/2006/main" showMasterPhAnim="0" showMasterSp="0">
-  <p:cSld name="">
+<p:notes xmlns:a="http://schemas.openxmlformats.org/drawingml/2006/main" xmlns:r="http://schemas.openxmlformats.org/officeDocument/2006/relationships" xmlns:mc="http://schemas.openxmlformats.org/markup-compatibility/2006" xmlns:mv="urn:schemas-microsoft-com:mac:vml" xmlns:p="http://schemas.openxmlformats.org/presentationml/2006/main" xmlns:c="http://schemas.openxmlformats.org/drawingml/2006/chart" xmlns:dgm="http://schemas.openxmlformats.org/drawingml/2006/diagram" xmlns:o="urn:schemas-microsoft-com:office:office" xmlns:v="urn:schemas-microsoft-com:vml" xmlns:pvml="urn:schemas-microsoft-com:office:powerpoint" xmlns:com="http://schemas.openxmlformats.org/drawingml/2006/compatibility" xmlns:p14="http://schemas.microsoft.com/office/powerpoint/2010/main" xmlns:p15="http://schemas.microsoft.com/office/powerpoint/2012/main" xmlns:ahyp="http://schemas.microsoft.com/office/drawing/2018/hyperlinkcolor" showMasterPhAnim="0" showMasterSp="0">
+  <p:cSld>
     <p:spTree>
       <p:nvGrpSpPr>
-        <p:cNvPr id="1" name=""/>
+        <p:cNvPr id="59" name="Shape 59"/>
         <p:cNvGrpSpPr/>
         <p:nvPr/>
       </p:nvGrpSpPr>
-      <p:grpSpPr bwMode="auto">
+      <p:grpSpPr>
         <a:xfrm>
           <a:off x="0" y="0"/>
           <a:ext cx="0" cy="0"/>
@@ -812,25 +866,21 @@
       </p:grpSpPr>
       <p:sp>
         <p:nvSpPr>
-          <p:cNvPr id="1398339792" name="Google Shape;60;p1:notes"/>
+          <p:cNvPr id="60" name="Google Shape;60;p1:notes"/>
           <p:cNvSpPr/>
           <p:nvPr>
-            <p:ph type="sldImg" idx="2"/>
+            <p:ph idx="2" type="sldImg"/>
           </p:nvPr>
         </p:nvSpPr>
-        <p:spPr bwMode="auto">
+        <p:spPr>
           <a:xfrm>
             <a:off x="381300" y="685800"/>
             <a:ext cx="6096075" cy="3429000"/>
           </a:xfrm>
           <a:custGeom>
-            <a:avLst/>
-            <a:gdLst/>
-            <a:ahLst/>
-            <a:cxnLst/>
-            <a:rect l="l" t="t" r="r" b="b"/>
+            <a:rect b="b" l="l" r="r" t="t"/>
             <a:pathLst>
-              <a:path w="120000" h="120000" fill="norm" stroke="1" extrusionOk="0">
+              <a:path extrusionOk="0" h="120000" w="120000">
                 <a:moveTo>
                   <a:pt x="0" y="0"/>
                 </a:moveTo>
@@ -848,26 +898,26 @@
             </a:pathLst>
           </a:custGeom>
           <a:noFill/>
-          <a:ln w="9525" cap="flat" cmpd="sng">
+          <a:ln cap="flat" cmpd="sng" w="9525">
             <a:solidFill>
               <a:srgbClr val="000000"/>
             </a:solidFill>
             <a:prstDash val="solid"/>
             <a:round/>
-            <a:headEnd type="none" w="sm" len="sm"/>
-            <a:tailEnd type="none" w="sm" len="sm"/>
+            <a:headEnd len="sm" w="sm" type="none"/>
+            <a:tailEnd len="sm" w="sm" type="none"/>
           </a:ln>
         </p:spPr>
       </p:sp>
       <p:sp>
         <p:nvSpPr>
-          <p:cNvPr id="443498133" name="Google Shape;61;p1:notes"/>
+          <p:cNvPr id="61" name="Google Shape;61;p1:notes"/>
           <p:cNvSpPr txBox="1"/>
           <p:nvPr>
-            <p:ph type="body" idx="1"/>
+            <p:ph idx="1" type="body"/>
           </p:nvPr>
         </p:nvSpPr>
-        <p:spPr bwMode="auto">
+        <p:spPr>
           <a:xfrm>
             <a:off x="685800" y="4343400"/>
             <a:ext cx="5486400" cy="4114800"/>
@@ -881,12 +931,12 @@
           </a:ln>
         </p:spPr>
         <p:txBody>
-          <a:bodyPr spcFirstLastPara="1" wrap="square" lIns="91425" tIns="91425" rIns="91425" bIns="91425" anchor="t" anchorCtr="0">
+          <a:bodyPr anchorCtr="0" anchor="t" bIns="91425" lIns="91425" spcFirstLastPara="1" rIns="91425" wrap="square" tIns="91425">
             <a:noAutofit/>
           </a:bodyPr>
           <a:lstStyle/>
           <a:p>
-            <a:pPr marL="0" lvl="0" indent="0" algn="l" rtl="0">
+            <a:pPr indent="0" lvl="0" marL="0" rtl="0" algn="l">
               <a:lnSpc>
                 <a:spcPct val="100000"/>
               </a:lnSpc>
@@ -898,8 +948,10 @@
               </a:spcAft>
               <a:buSzPts val="1100"/>
               <a:buNone/>
-              <a:defRPr/>
             </a:pPr>
+            <a:r>
+              <a:t/>
+            </a:r>
             <a:endParaRPr/>
           </a:p>
         </p:txBody>
@@ -913,15 +965,15 @@
 </file>
 
 <file path=ppt/notesSlides/notesSlide2.xml><?xml version="1.0" encoding="utf-8"?>
-<p:notes xmlns:a="http://schemas.openxmlformats.org/drawingml/2006/main" xmlns:r="http://schemas.openxmlformats.org/officeDocument/2006/relationships" xmlns:p="http://schemas.openxmlformats.org/presentationml/2006/main" xmlns:m="http://schemas.openxmlformats.org/officeDocument/2006/math" xmlns:w="http://schemas.openxmlformats.org/wordprocessingml/2006/main" showMasterPhAnim="0" showMasterSp="0">
-  <p:cSld name="">
+<p:notes xmlns:a="http://schemas.openxmlformats.org/drawingml/2006/main" xmlns:r="http://schemas.openxmlformats.org/officeDocument/2006/relationships" xmlns:mc="http://schemas.openxmlformats.org/markup-compatibility/2006" xmlns:mv="urn:schemas-microsoft-com:mac:vml" xmlns:p="http://schemas.openxmlformats.org/presentationml/2006/main" xmlns:c="http://schemas.openxmlformats.org/drawingml/2006/chart" xmlns:dgm="http://schemas.openxmlformats.org/drawingml/2006/diagram" xmlns:o="urn:schemas-microsoft-com:office:office" xmlns:v="urn:schemas-microsoft-com:vml" xmlns:pvml="urn:schemas-microsoft-com:office:powerpoint" xmlns:com="http://schemas.openxmlformats.org/drawingml/2006/compatibility" xmlns:p14="http://schemas.microsoft.com/office/powerpoint/2010/main" xmlns:p15="http://schemas.microsoft.com/office/powerpoint/2012/main" xmlns:ahyp="http://schemas.microsoft.com/office/drawing/2018/hyperlinkcolor" showMasterPhAnim="0" showMasterSp="0">
+  <p:cSld>
     <p:spTree>
       <p:nvGrpSpPr>
-        <p:cNvPr id="1" name=""/>
+        <p:cNvPr id="64" name="Shape 64"/>
         <p:cNvGrpSpPr/>
         <p:nvPr/>
       </p:nvGrpSpPr>
-      <p:grpSpPr bwMode="auto">
+      <p:grpSpPr>
         <a:xfrm>
           <a:off x="0" y="0"/>
           <a:ext cx="0" cy="0"/>
@@ -931,25 +983,21 @@
       </p:grpSpPr>
       <p:sp>
         <p:nvSpPr>
-          <p:cNvPr id="545722916" name="Google Shape;65;p2:notes"/>
+          <p:cNvPr id="65" name="Google Shape;65;p2:notes"/>
           <p:cNvSpPr/>
           <p:nvPr>
-            <p:ph type="sldImg" idx="2"/>
+            <p:ph idx="2" type="sldImg"/>
           </p:nvPr>
         </p:nvSpPr>
-        <p:spPr bwMode="auto">
+        <p:spPr>
           <a:xfrm>
             <a:off x="381300" y="685800"/>
             <a:ext cx="6096000" cy="3429000"/>
           </a:xfrm>
           <a:custGeom>
-            <a:avLst/>
-            <a:gdLst/>
-            <a:ahLst/>
-            <a:cxnLst/>
-            <a:rect l="l" t="t" r="r" b="b"/>
+            <a:rect b="b" l="l" r="r" t="t"/>
             <a:pathLst>
-              <a:path w="120000" h="120000" fill="norm" stroke="1" extrusionOk="0">
+              <a:path extrusionOk="0" h="120000" w="120000">
                 <a:moveTo>
                   <a:pt x="0" y="0"/>
                 </a:moveTo>
@@ -967,26 +1015,26 @@
             </a:pathLst>
           </a:custGeom>
           <a:noFill/>
-          <a:ln w="9525" cap="flat" cmpd="sng">
+          <a:ln cap="flat" cmpd="sng" w="9525">
             <a:solidFill>
               <a:srgbClr val="000000"/>
             </a:solidFill>
             <a:prstDash val="solid"/>
             <a:round/>
-            <a:headEnd type="none" w="sm" len="sm"/>
-            <a:tailEnd type="none" w="sm" len="sm"/>
+            <a:headEnd len="sm" w="sm" type="none"/>
+            <a:tailEnd len="sm" w="sm" type="none"/>
           </a:ln>
         </p:spPr>
       </p:sp>
       <p:sp>
         <p:nvSpPr>
-          <p:cNvPr id="1471227713" name="Google Shape;66;p2:notes"/>
+          <p:cNvPr id="66" name="Google Shape;66;p2:notes"/>
           <p:cNvSpPr txBox="1"/>
           <p:nvPr>
-            <p:ph type="body" idx="1"/>
+            <p:ph idx="1" type="body"/>
           </p:nvPr>
         </p:nvSpPr>
-        <p:spPr bwMode="auto">
+        <p:spPr>
           <a:xfrm>
             <a:off x="685800" y="4343400"/>
             <a:ext cx="5486400" cy="4114800"/>
@@ -1000,12 +1048,12 @@
           </a:ln>
         </p:spPr>
         <p:txBody>
-          <a:bodyPr spcFirstLastPara="1" wrap="square" lIns="91425" tIns="91425" rIns="91425" bIns="91425" anchor="t" anchorCtr="0">
+          <a:bodyPr anchorCtr="0" anchor="t" bIns="91425" lIns="91425" spcFirstLastPara="1" rIns="91425" wrap="square" tIns="91425">
             <a:noAutofit/>
           </a:bodyPr>
           <a:lstStyle/>
           <a:p>
-            <a:pPr marL="0" lvl="0" indent="0" algn="l" rtl="0">
+            <a:pPr indent="0" lvl="0" marL="0" rtl="0" algn="l">
               <a:lnSpc>
                 <a:spcPct val="100000"/>
               </a:lnSpc>
@@ -1017,8 +1065,10 @@
               </a:spcAft>
               <a:buSzPts val="1100"/>
               <a:buNone/>
-              <a:defRPr/>
             </a:pPr>
+            <a:r>
+              <a:t/>
+            </a:r>
             <a:endParaRPr/>
           </a:p>
         </p:txBody>
@@ -1032,15 +1082,15 @@
 </file>
 
 <file path=ppt/notesSlides/notesSlide3.xml><?xml version="1.0" encoding="utf-8"?>
-<p:notes xmlns:a="http://schemas.openxmlformats.org/drawingml/2006/main" xmlns:r="http://schemas.openxmlformats.org/officeDocument/2006/relationships" xmlns:p="http://schemas.openxmlformats.org/presentationml/2006/main" xmlns:m="http://schemas.openxmlformats.org/officeDocument/2006/math" xmlns:w="http://schemas.openxmlformats.org/wordprocessingml/2006/main" showMasterPhAnim="0" showMasterSp="0">
-  <p:cSld name="">
+<p:notes xmlns:a="http://schemas.openxmlformats.org/drawingml/2006/main" xmlns:r="http://schemas.openxmlformats.org/officeDocument/2006/relationships" xmlns:mc="http://schemas.openxmlformats.org/markup-compatibility/2006" xmlns:mv="urn:schemas-microsoft-com:mac:vml" xmlns:p="http://schemas.openxmlformats.org/presentationml/2006/main" xmlns:c="http://schemas.openxmlformats.org/drawingml/2006/chart" xmlns:dgm="http://schemas.openxmlformats.org/drawingml/2006/diagram" xmlns:o="urn:schemas-microsoft-com:office:office" xmlns:v="urn:schemas-microsoft-com:vml" xmlns:pvml="urn:schemas-microsoft-com:office:powerpoint" xmlns:com="http://schemas.openxmlformats.org/drawingml/2006/compatibility" xmlns:p14="http://schemas.microsoft.com/office/powerpoint/2010/main" xmlns:p15="http://schemas.microsoft.com/office/powerpoint/2012/main" xmlns:ahyp="http://schemas.microsoft.com/office/drawing/2018/hyperlinkcolor" showMasterPhAnim="0" showMasterSp="0">
+  <p:cSld>
     <p:spTree>
       <p:nvGrpSpPr>
-        <p:cNvPr id="1" name=""/>
+        <p:cNvPr id="73" name="Shape 73"/>
         <p:cNvGrpSpPr/>
         <p:nvPr/>
       </p:nvGrpSpPr>
-      <p:grpSpPr bwMode="auto">
+      <p:grpSpPr>
         <a:xfrm>
           <a:off x="0" y="0"/>
           <a:ext cx="0" cy="0"/>
@@ -1050,25 +1100,21 @@
       </p:grpSpPr>
       <p:sp>
         <p:nvSpPr>
-          <p:cNvPr id="373406637" name="Google Shape;72;p3:notes"/>
+          <p:cNvPr id="74" name="Google Shape;74;p3:notes"/>
           <p:cNvSpPr/>
           <p:nvPr>
-            <p:ph type="sldImg" idx="2"/>
+            <p:ph idx="2" type="sldImg"/>
           </p:nvPr>
         </p:nvSpPr>
-        <p:spPr bwMode="auto">
+        <p:spPr>
           <a:xfrm>
             <a:off x="381300" y="685800"/>
             <a:ext cx="6096000" cy="3429000"/>
           </a:xfrm>
           <a:custGeom>
-            <a:avLst/>
-            <a:gdLst/>
-            <a:ahLst/>
-            <a:cxnLst/>
-            <a:rect l="l" t="t" r="r" b="b"/>
+            <a:rect b="b" l="l" r="r" t="t"/>
             <a:pathLst>
-              <a:path w="120000" h="120000" fill="norm" stroke="1" extrusionOk="0">
+              <a:path extrusionOk="0" h="120000" w="120000">
                 <a:moveTo>
                   <a:pt x="0" y="0"/>
                 </a:moveTo>
@@ -1086,26 +1132,26 @@
             </a:pathLst>
           </a:custGeom>
           <a:noFill/>
-          <a:ln w="9525" cap="flat" cmpd="sng">
+          <a:ln cap="flat" cmpd="sng" w="9525">
             <a:solidFill>
               <a:srgbClr val="000000"/>
             </a:solidFill>
             <a:prstDash val="solid"/>
             <a:round/>
-            <a:headEnd type="none" w="sm" len="sm"/>
-            <a:tailEnd type="none" w="sm" len="sm"/>
+            <a:headEnd len="sm" w="sm" type="none"/>
+            <a:tailEnd len="sm" w="sm" type="none"/>
           </a:ln>
         </p:spPr>
       </p:sp>
       <p:sp>
         <p:nvSpPr>
-          <p:cNvPr id="1958141013" name="Google Shape;73;p3:notes"/>
+          <p:cNvPr id="75" name="Google Shape;75;p3:notes"/>
           <p:cNvSpPr txBox="1"/>
           <p:nvPr>
-            <p:ph type="body" idx="1"/>
+            <p:ph idx="1" type="body"/>
           </p:nvPr>
         </p:nvSpPr>
-        <p:spPr bwMode="auto">
+        <p:spPr>
           <a:xfrm>
             <a:off x="685800" y="4343400"/>
             <a:ext cx="5486400" cy="4114800"/>
@@ -1119,12 +1165,12 @@
           </a:ln>
         </p:spPr>
         <p:txBody>
-          <a:bodyPr spcFirstLastPara="1" wrap="square" lIns="91425" tIns="91425" rIns="91425" bIns="91425" anchor="t" anchorCtr="0">
+          <a:bodyPr anchorCtr="0" anchor="t" bIns="91425" lIns="91425" spcFirstLastPara="1" rIns="91425" wrap="square" tIns="91425">
             <a:noAutofit/>
           </a:bodyPr>
           <a:lstStyle/>
           <a:p>
-            <a:pPr marL="0" lvl="0" indent="0" algn="l" rtl="0">
+            <a:pPr indent="0" lvl="0" marL="0" rtl="0" algn="l">
               <a:lnSpc>
                 <a:spcPct val="100000"/>
               </a:lnSpc>
@@ -1136,8 +1182,10 @@
               </a:spcAft>
               <a:buSzPts val="1100"/>
               <a:buNone/>
-              <a:defRPr/>
             </a:pPr>
+            <a:r>
+              <a:t/>
+            </a:r>
             <a:endParaRPr/>
           </a:p>
         </p:txBody>
@@ -1151,15 +1199,15 @@
 </file>
 
 <file path=ppt/notesSlides/notesSlide4.xml><?xml version="1.0" encoding="utf-8"?>
-<p:notes xmlns:a="http://schemas.openxmlformats.org/drawingml/2006/main" xmlns:r="http://schemas.openxmlformats.org/officeDocument/2006/relationships" xmlns:p="http://schemas.openxmlformats.org/presentationml/2006/main" xmlns:m="http://schemas.openxmlformats.org/officeDocument/2006/math" xmlns:w="http://schemas.openxmlformats.org/wordprocessingml/2006/main" showMasterPhAnim="0" showMasterSp="0">
-  <p:cSld name="">
+<p:notes xmlns:a="http://schemas.openxmlformats.org/drawingml/2006/main" xmlns:r="http://schemas.openxmlformats.org/officeDocument/2006/relationships" xmlns:mc="http://schemas.openxmlformats.org/markup-compatibility/2006" xmlns:mv="urn:schemas-microsoft-com:mac:vml" xmlns:p="http://schemas.openxmlformats.org/presentationml/2006/main" xmlns:c="http://schemas.openxmlformats.org/drawingml/2006/chart" xmlns:dgm="http://schemas.openxmlformats.org/drawingml/2006/diagram" xmlns:o="urn:schemas-microsoft-com:office:office" xmlns:v="urn:schemas-microsoft-com:vml" xmlns:pvml="urn:schemas-microsoft-com:office:powerpoint" xmlns:com="http://schemas.openxmlformats.org/drawingml/2006/compatibility" xmlns:p14="http://schemas.microsoft.com/office/powerpoint/2010/main" xmlns:p15="http://schemas.microsoft.com/office/powerpoint/2012/main" xmlns:ahyp="http://schemas.microsoft.com/office/drawing/2018/hyperlinkcolor" showMasterPhAnim="0" showMasterSp="0">
+  <p:cSld>
     <p:spTree>
       <p:nvGrpSpPr>
-        <p:cNvPr id="1" name=""/>
+        <p:cNvPr id="81" name="Shape 81"/>
         <p:cNvGrpSpPr/>
         <p:nvPr/>
       </p:nvGrpSpPr>
-      <p:grpSpPr bwMode="auto">
+      <p:grpSpPr>
         <a:xfrm>
           <a:off x="0" y="0"/>
           <a:ext cx="0" cy="0"/>
@@ -1169,25 +1217,21 @@
       </p:grpSpPr>
       <p:sp>
         <p:nvSpPr>
-          <p:cNvPr id="1614406841" name="Google Shape;79;p4:notes"/>
+          <p:cNvPr id="82" name="Google Shape;82;p4:notes"/>
           <p:cNvSpPr/>
           <p:nvPr>
-            <p:ph type="sldImg" idx="2"/>
+            <p:ph idx="2" type="sldImg"/>
           </p:nvPr>
         </p:nvSpPr>
-        <p:spPr bwMode="auto">
+        <p:spPr>
           <a:xfrm>
             <a:off x="381300" y="685800"/>
             <a:ext cx="6096000" cy="3429000"/>
           </a:xfrm>
           <a:custGeom>
-            <a:avLst/>
-            <a:gdLst/>
-            <a:ahLst/>
-            <a:cxnLst/>
-            <a:rect l="l" t="t" r="r" b="b"/>
+            <a:rect b="b" l="l" r="r" t="t"/>
             <a:pathLst>
-              <a:path w="120000" h="120000" fill="norm" stroke="1" extrusionOk="0">
+              <a:path extrusionOk="0" h="120000" w="120000">
                 <a:moveTo>
                   <a:pt x="0" y="0"/>
                 </a:moveTo>
@@ -1205,26 +1249,26 @@
             </a:pathLst>
           </a:custGeom>
           <a:noFill/>
-          <a:ln w="9525" cap="flat" cmpd="sng">
+          <a:ln cap="flat" cmpd="sng" w="9525">
             <a:solidFill>
               <a:srgbClr val="000000"/>
             </a:solidFill>
             <a:prstDash val="solid"/>
             <a:round/>
-            <a:headEnd type="none" w="sm" len="sm"/>
-            <a:tailEnd type="none" w="sm" len="sm"/>
+            <a:headEnd len="sm" w="sm" type="none"/>
+            <a:tailEnd len="sm" w="sm" type="none"/>
           </a:ln>
         </p:spPr>
       </p:sp>
       <p:sp>
         <p:nvSpPr>
-          <p:cNvPr id="1187128325" name="Google Shape;80;p4:notes"/>
+          <p:cNvPr id="83" name="Google Shape;83;p4:notes"/>
           <p:cNvSpPr txBox="1"/>
           <p:nvPr>
-            <p:ph type="body" idx="1"/>
+            <p:ph idx="1" type="body"/>
           </p:nvPr>
         </p:nvSpPr>
-        <p:spPr bwMode="auto">
+        <p:spPr>
           <a:xfrm>
             <a:off x="685800" y="4343400"/>
             <a:ext cx="5486400" cy="4114800"/>
@@ -1238,12 +1282,12 @@
           </a:ln>
         </p:spPr>
         <p:txBody>
-          <a:bodyPr spcFirstLastPara="1" wrap="square" lIns="91425" tIns="91425" rIns="91425" bIns="91425" anchor="t" anchorCtr="0">
+          <a:bodyPr anchorCtr="0" anchor="t" bIns="91425" lIns="91425" spcFirstLastPara="1" rIns="91425" wrap="square" tIns="91425">
             <a:noAutofit/>
           </a:bodyPr>
           <a:lstStyle/>
           <a:p>
-            <a:pPr marL="0" lvl="0" indent="0" algn="l" rtl="0">
+            <a:pPr indent="0" lvl="0" marL="0" rtl="0" algn="l">
               <a:lnSpc>
                 <a:spcPct val="100000"/>
               </a:lnSpc>
@@ -1255,8 +1299,10 @@
               </a:spcAft>
               <a:buSzPts val="1100"/>
               <a:buNone/>
-              <a:defRPr/>
             </a:pPr>
+            <a:r>
+              <a:t/>
+            </a:r>
             <a:endParaRPr/>
           </a:p>
         </p:txBody>
@@ -1270,15 +1316,15 @@
 </file>
 
 <file path=ppt/notesSlides/notesSlide5.xml><?xml version="1.0" encoding="utf-8"?>
-<p:notes xmlns:a="http://schemas.openxmlformats.org/drawingml/2006/main" xmlns:r="http://schemas.openxmlformats.org/officeDocument/2006/relationships" xmlns:p="http://schemas.openxmlformats.org/presentationml/2006/main" xmlns:m="http://schemas.openxmlformats.org/officeDocument/2006/math" xmlns:w="http://schemas.openxmlformats.org/wordprocessingml/2006/main" showMasterPhAnim="0" showMasterSp="0">
-  <p:cSld name="">
+<p:notes xmlns:a="http://schemas.openxmlformats.org/drawingml/2006/main" xmlns:r="http://schemas.openxmlformats.org/officeDocument/2006/relationships" xmlns:mc="http://schemas.openxmlformats.org/markup-compatibility/2006" xmlns:mv="urn:schemas-microsoft-com:mac:vml" xmlns:p="http://schemas.openxmlformats.org/presentationml/2006/main" xmlns:c="http://schemas.openxmlformats.org/drawingml/2006/chart" xmlns:dgm="http://schemas.openxmlformats.org/drawingml/2006/diagram" xmlns:o="urn:schemas-microsoft-com:office:office" xmlns:v="urn:schemas-microsoft-com:vml" xmlns:pvml="urn:schemas-microsoft-com:office:powerpoint" xmlns:com="http://schemas.openxmlformats.org/drawingml/2006/compatibility" xmlns:p14="http://schemas.microsoft.com/office/powerpoint/2010/main" xmlns:p15="http://schemas.microsoft.com/office/powerpoint/2012/main" xmlns:ahyp="http://schemas.microsoft.com/office/drawing/2018/hyperlinkcolor" showMasterPhAnim="0" showMasterSp="0">
+  <p:cSld>
     <p:spTree>
       <p:nvGrpSpPr>
-        <p:cNvPr id="1" name=""/>
+        <p:cNvPr id="89" name="Shape 89"/>
         <p:cNvGrpSpPr/>
         <p:nvPr/>
       </p:nvGrpSpPr>
-      <p:grpSpPr bwMode="auto">
+      <p:grpSpPr>
         <a:xfrm>
           <a:off x="0" y="0"/>
           <a:ext cx="0" cy="0"/>
@@ -1288,25 +1334,21 @@
       </p:grpSpPr>
       <p:sp>
         <p:nvSpPr>
-          <p:cNvPr id="2100132275" name="Google Shape;86;p5:notes"/>
+          <p:cNvPr id="90" name="Google Shape;90;p5:notes"/>
           <p:cNvSpPr/>
           <p:nvPr>
-            <p:ph type="sldImg" idx="2"/>
+            <p:ph idx="2" type="sldImg"/>
           </p:nvPr>
         </p:nvSpPr>
-        <p:spPr bwMode="auto">
+        <p:spPr>
           <a:xfrm>
             <a:off x="381300" y="685800"/>
             <a:ext cx="6096075" cy="3429000"/>
           </a:xfrm>
           <a:custGeom>
-            <a:avLst/>
-            <a:gdLst/>
-            <a:ahLst/>
-            <a:cxnLst/>
-            <a:rect l="l" t="t" r="r" b="b"/>
+            <a:rect b="b" l="l" r="r" t="t"/>
             <a:pathLst>
-              <a:path w="120000" h="120000" fill="norm" stroke="1" extrusionOk="0">
+              <a:path extrusionOk="0" h="120000" w="120000">
                 <a:moveTo>
                   <a:pt x="0" y="0"/>
                 </a:moveTo>
@@ -1324,26 +1366,26 @@
             </a:pathLst>
           </a:custGeom>
           <a:noFill/>
-          <a:ln w="9525" cap="flat" cmpd="sng">
+          <a:ln cap="flat" cmpd="sng" w="9525">
             <a:solidFill>
               <a:srgbClr val="000000"/>
             </a:solidFill>
             <a:prstDash val="solid"/>
             <a:round/>
-            <a:headEnd type="none" w="sm" len="sm"/>
-            <a:tailEnd type="none" w="sm" len="sm"/>
+            <a:headEnd len="sm" w="sm" type="none"/>
+            <a:tailEnd len="sm" w="sm" type="none"/>
           </a:ln>
         </p:spPr>
       </p:sp>
       <p:sp>
         <p:nvSpPr>
-          <p:cNvPr id="1168040065" name="Google Shape;87;p5:notes"/>
+          <p:cNvPr id="91" name="Google Shape;91;p5:notes"/>
           <p:cNvSpPr txBox="1"/>
           <p:nvPr>
-            <p:ph type="body" idx="1"/>
+            <p:ph idx="1" type="body"/>
           </p:nvPr>
         </p:nvSpPr>
-        <p:spPr bwMode="auto">
+        <p:spPr>
           <a:xfrm>
             <a:off x="685800" y="4343400"/>
             <a:ext cx="5486400" cy="4114800"/>
@@ -1357,12 +1399,12 @@
           </a:ln>
         </p:spPr>
         <p:txBody>
-          <a:bodyPr spcFirstLastPara="1" wrap="square" lIns="91425" tIns="91425" rIns="91425" bIns="91425" anchor="t" anchorCtr="0">
+          <a:bodyPr anchorCtr="0" anchor="t" bIns="91425" lIns="91425" spcFirstLastPara="1" rIns="91425" wrap="square" tIns="91425">
             <a:noAutofit/>
           </a:bodyPr>
           <a:lstStyle/>
           <a:p>
-            <a:pPr marL="457200" lvl="0" indent="-228600" algn="l" rtl="0">
+            <a:pPr indent="-228600" lvl="0" marL="457200" rtl="0" algn="l">
               <a:lnSpc>
                 <a:spcPct val="100000"/>
               </a:lnSpc>
@@ -1374,21 +1416,23 @@
               </a:spcAft>
               <a:buSzPts val="1100"/>
               <a:buNone/>
-              <a:defRPr/>
             </a:pPr>
+            <a:r>
+              <a:t/>
+            </a:r>
             <a:endParaRPr/>
           </a:p>
         </p:txBody>
       </p:sp>
       <p:sp>
         <p:nvSpPr>
-          <p:cNvPr id="1583356688" name="Google Shape;88;p5:notes"/>
+          <p:cNvPr id="92" name="Google Shape;92;p5:notes"/>
           <p:cNvSpPr txBox="1"/>
           <p:nvPr>
-            <p:ph type="sldNum" idx="12"/>
+            <p:ph idx="12" type="sldNum"/>
           </p:nvPr>
         </p:nvSpPr>
-        <p:spPr bwMode="auto">
+        <p:spPr>
           <a:xfrm>
             <a:off x="0" y="0"/>
             <a:ext cx="3000000" cy="3000000"/>
@@ -1402,42 +1446,48 @@
           </a:ln>
         </p:spPr>
         <p:txBody>
-          <a:bodyPr spcFirstLastPara="1" wrap="square" lIns="91425" tIns="45700" rIns="91425" bIns="45700" anchor="t" anchorCtr="0">
+          <a:bodyPr anchorCtr="0" anchor="t" bIns="45700" lIns="91425" spcFirstLastPara="1" rIns="91425" wrap="square" tIns="45700">
             <a:noAutofit/>
           </a:bodyPr>
           <a:lstStyle/>
           <a:p>
-            <a:pPr marL="0" marR="0" lvl="0" indent="0" algn="l" rtl="0">
-              <a:lnSpc>
-                <a:spcPct val="100000"/>
-              </a:lnSpc>
-              <a:spcBef>
-                <a:spcPts val="0"/>
-              </a:spcBef>
-              <a:spcAft>
-                <a:spcPts val="0"/>
-              </a:spcAft>
-              <a:buNone/>
-              <a:defRPr/>
+            <a:pPr indent="0" lvl="0" marL="0" marR="0" rtl="0" algn="l">
+              <a:lnSpc>
+                <a:spcPct val="100000"/>
+              </a:lnSpc>
+              <a:spcBef>
+                <a:spcPts val="0"/>
+              </a:spcBef>
+              <a:spcAft>
+                <a:spcPts val="0"/>
+              </a:spcAft>
+              <a:buClr>
+                <a:srgbClr val="000000"/>
+              </a:buClr>
+              <a:buSzPts val="1400"/>
+              <a:buFont typeface="Arial"/>
+              <a:buNone/>
             </a:pPr>
             <a:fld id="{00000000-1234-1234-1234-123412341234}" type="slidenum">
-              <a:rPr lang="az-Latn-AZ" sz="1400" b="0" i="0" u="none" strike="noStrike" cap="none">
+              <a:rPr b="0" i="0" lang="az-Latn-AZ" sz="1400" u="none" cap="none" strike="noStrike">
                 <a:solidFill>
                   <a:srgbClr val="000000"/>
                 </a:solidFill>
                 <a:latin typeface="Arial"/>
                 <a:ea typeface="Arial"/>
                 <a:cs typeface="Arial"/>
+                <a:sym typeface="Arial"/>
               </a:rPr>
               <a:t>‹#›</a:t>
             </a:fld>
-            <a:endParaRPr sz="1400" b="0" i="0" u="none" strike="noStrike" cap="none">
+            <a:endParaRPr b="0" i="0" sz="1400" u="none" cap="none" strike="noStrike">
               <a:solidFill>
                 <a:srgbClr val="000000"/>
               </a:solidFill>
               <a:latin typeface="Arial"/>
               <a:ea typeface="Arial"/>
               <a:cs typeface="Arial"/>
+              <a:sym typeface="Arial"/>
             </a:endParaRPr>
           </a:p>
         </p:txBody>
@@ -1451,15 +1501,15 @@
 </file>
 
 <file path=ppt/notesSlides/notesSlide6.xml><?xml version="1.0" encoding="utf-8"?>
-<p:notes xmlns:a="http://schemas.openxmlformats.org/drawingml/2006/main" xmlns:r="http://schemas.openxmlformats.org/officeDocument/2006/relationships" xmlns:p="http://schemas.openxmlformats.org/presentationml/2006/main" xmlns:m="http://schemas.openxmlformats.org/officeDocument/2006/math" xmlns:w="http://schemas.openxmlformats.org/wordprocessingml/2006/main" showMasterPhAnim="0" showMasterSp="0">
-  <p:cSld name="">
+<p:notes xmlns:a="http://schemas.openxmlformats.org/drawingml/2006/main" xmlns:r="http://schemas.openxmlformats.org/officeDocument/2006/relationships" xmlns:mc="http://schemas.openxmlformats.org/markup-compatibility/2006" xmlns:mv="urn:schemas-microsoft-com:mac:vml" xmlns:p="http://schemas.openxmlformats.org/presentationml/2006/main" xmlns:c="http://schemas.openxmlformats.org/drawingml/2006/chart" xmlns:dgm="http://schemas.openxmlformats.org/drawingml/2006/diagram" xmlns:o="urn:schemas-microsoft-com:office:office" xmlns:v="urn:schemas-microsoft-com:vml" xmlns:pvml="urn:schemas-microsoft-com:office:powerpoint" xmlns:com="http://schemas.openxmlformats.org/drawingml/2006/compatibility" xmlns:p14="http://schemas.microsoft.com/office/powerpoint/2010/main" xmlns:p15="http://schemas.microsoft.com/office/powerpoint/2012/main" xmlns:ahyp="http://schemas.microsoft.com/office/drawing/2018/hyperlinkcolor" showMasterPhAnim="0" showMasterSp="0">
+  <p:cSld>
     <p:spTree>
       <p:nvGrpSpPr>
-        <p:cNvPr id="1" name=""/>
+        <p:cNvPr id="100" name="Shape 100"/>
         <p:cNvGrpSpPr/>
         <p:nvPr/>
       </p:nvGrpSpPr>
-      <p:grpSpPr bwMode="auto">
+      <p:grpSpPr>
         <a:xfrm>
           <a:off x="0" y="0"/>
           <a:ext cx="0" cy="0"/>
@@ -1469,25 +1519,21 @@
       </p:grpSpPr>
       <p:sp>
         <p:nvSpPr>
-          <p:cNvPr id="1421829047" name="Google Shape;97;p6:notes"/>
+          <p:cNvPr id="101" name="Google Shape;101;p6:notes"/>
           <p:cNvSpPr/>
           <p:nvPr>
-            <p:ph type="sldImg" idx="2"/>
+            <p:ph idx="2" type="sldImg"/>
           </p:nvPr>
         </p:nvSpPr>
-        <p:spPr bwMode="auto">
+        <p:spPr>
           <a:xfrm>
             <a:off x="381300" y="685800"/>
-            <a:ext cx="6096075" cy="3429000"/>
+            <a:ext cx="6096000" cy="3429000"/>
           </a:xfrm>
           <a:custGeom>
-            <a:avLst/>
-            <a:gdLst/>
-            <a:ahLst/>
-            <a:cxnLst/>
-            <a:rect l="l" t="t" r="r" b="b"/>
+            <a:rect b="b" l="l" r="r" t="t"/>
             <a:pathLst>
-              <a:path w="120000" h="120000" fill="norm" stroke="1" extrusionOk="0">
+              <a:path extrusionOk="0" h="120000" w="120000">
                 <a:moveTo>
                   <a:pt x="0" y="0"/>
                 </a:moveTo>
@@ -1505,26 +1551,26 @@
             </a:pathLst>
           </a:custGeom>
           <a:noFill/>
-          <a:ln w="9525" cap="flat" cmpd="sng">
+          <a:ln cap="flat" cmpd="sng" w="9525">
             <a:solidFill>
               <a:srgbClr val="000000"/>
             </a:solidFill>
             <a:prstDash val="solid"/>
             <a:round/>
-            <a:headEnd type="none" w="sm" len="sm"/>
-            <a:tailEnd type="none" w="sm" len="sm"/>
+            <a:headEnd len="sm" w="sm" type="none"/>
+            <a:tailEnd len="sm" w="sm" type="none"/>
           </a:ln>
         </p:spPr>
       </p:sp>
       <p:sp>
         <p:nvSpPr>
-          <p:cNvPr id="648378268" name="Google Shape;98;p6:notes"/>
+          <p:cNvPr id="102" name="Google Shape;102;p6:notes"/>
           <p:cNvSpPr txBox="1"/>
           <p:nvPr>
-            <p:ph type="body" idx="1"/>
+            <p:ph idx="1" type="body"/>
           </p:nvPr>
         </p:nvSpPr>
-        <p:spPr bwMode="auto">
+        <p:spPr>
           <a:xfrm>
             <a:off x="685800" y="4343400"/>
             <a:ext cx="5486400" cy="4114800"/>
@@ -1538,12 +1584,12 @@
           </a:ln>
         </p:spPr>
         <p:txBody>
-          <a:bodyPr spcFirstLastPara="1" wrap="square" lIns="91425" tIns="91425" rIns="91425" bIns="91425" anchor="t" anchorCtr="0">
+          <a:bodyPr anchorCtr="0" anchor="t" bIns="91425" lIns="91425" spcFirstLastPara="1" rIns="91425" wrap="square" tIns="91425">
             <a:noAutofit/>
           </a:bodyPr>
           <a:lstStyle/>
           <a:p>
-            <a:pPr marL="457200" lvl="0" indent="-228600" algn="l" rtl="0">
+            <a:pPr indent="-228600" lvl="0" marL="457200" rtl="0" algn="l">
               <a:lnSpc>
                 <a:spcPct val="100000"/>
               </a:lnSpc>
@@ -1555,21 +1601,23 @@
               </a:spcAft>
               <a:buSzPts val="1100"/>
               <a:buNone/>
-              <a:defRPr/>
             </a:pPr>
+            <a:r>
+              <a:t/>
+            </a:r>
             <a:endParaRPr/>
           </a:p>
         </p:txBody>
       </p:sp>
       <p:sp>
         <p:nvSpPr>
-          <p:cNvPr id="229196284" name="Google Shape;99;p6:notes"/>
+          <p:cNvPr id="103" name="Google Shape;103;p6:notes"/>
           <p:cNvSpPr txBox="1"/>
           <p:nvPr>
-            <p:ph type="sldNum" idx="12"/>
+            <p:ph idx="12" type="sldNum"/>
           </p:nvPr>
         </p:nvSpPr>
-        <p:spPr bwMode="auto">
+        <p:spPr>
           <a:xfrm>
             <a:off x="0" y="0"/>
             <a:ext cx="3000000" cy="3000000"/>
@@ -1583,42 +1631,48 @@
           </a:ln>
         </p:spPr>
         <p:txBody>
-          <a:bodyPr spcFirstLastPara="1" wrap="square" lIns="91425" tIns="45700" rIns="91425" bIns="45700" anchor="t" anchorCtr="0">
+          <a:bodyPr anchorCtr="0" anchor="t" bIns="45700" lIns="91425" spcFirstLastPara="1" rIns="91425" wrap="square" tIns="45700">
             <a:noAutofit/>
           </a:bodyPr>
           <a:lstStyle/>
           <a:p>
-            <a:pPr marL="0" marR="0" lvl="0" indent="0" algn="l" rtl="0">
-              <a:lnSpc>
-                <a:spcPct val="100000"/>
-              </a:lnSpc>
-              <a:spcBef>
-                <a:spcPts val="0"/>
-              </a:spcBef>
-              <a:spcAft>
-                <a:spcPts val="0"/>
-              </a:spcAft>
-              <a:buNone/>
-              <a:defRPr/>
+            <a:pPr indent="0" lvl="0" marL="0" marR="0" rtl="0" algn="l">
+              <a:lnSpc>
+                <a:spcPct val="100000"/>
+              </a:lnSpc>
+              <a:spcBef>
+                <a:spcPts val="0"/>
+              </a:spcBef>
+              <a:spcAft>
+                <a:spcPts val="0"/>
+              </a:spcAft>
+              <a:buClr>
+                <a:srgbClr val="000000"/>
+              </a:buClr>
+              <a:buSzPts val="1400"/>
+              <a:buFont typeface="Arial"/>
+              <a:buNone/>
             </a:pPr>
             <a:fld id="{00000000-1234-1234-1234-123412341234}" type="slidenum">
-              <a:rPr lang="az-Latn-AZ" sz="1400" b="0" i="0" u="none" strike="noStrike" cap="none">
+              <a:rPr b="0" i="0" lang="az-Latn-AZ" sz="1400" u="none" cap="none" strike="noStrike">
                 <a:solidFill>
                   <a:srgbClr val="000000"/>
                 </a:solidFill>
                 <a:latin typeface="Arial"/>
                 <a:ea typeface="Arial"/>
                 <a:cs typeface="Arial"/>
+                <a:sym typeface="Arial"/>
               </a:rPr>
               <a:t>‹#›</a:t>
             </a:fld>
-            <a:endParaRPr sz="1400" b="0" i="0" u="none" strike="noStrike" cap="none">
+            <a:endParaRPr b="0" i="0" sz="1400" u="none" cap="none" strike="noStrike">
               <a:solidFill>
                 <a:srgbClr val="000000"/>
               </a:solidFill>
               <a:latin typeface="Arial"/>
               <a:ea typeface="Arial"/>
               <a:cs typeface="Arial"/>
+              <a:sym typeface="Arial"/>
             </a:endParaRPr>
           </a:p>
         </p:txBody>
@@ -1632,15 +1686,15 @@
 </file>
 
 <file path=ppt/notesSlides/notesSlide7.xml><?xml version="1.0" encoding="utf-8"?>
-<p:notes xmlns:a="http://schemas.openxmlformats.org/drawingml/2006/main" xmlns:r="http://schemas.openxmlformats.org/officeDocument/2006/relationships" xmlns:p="http://schemas.openxmlformats.org/presentationml/2006/main" xmlns:m="http://schemas.openxmlformats.org/officeDocument/2006/math" xmlns:w="http://schemas.openxmlformats.org/wordprocessingml/2006/main" showMasterPhAnim="0" showMasterSp="0">
-  <p:cSld name="">
+<p:notes xmlns:a="http://schemas.openxmlformats.org/drawingml/2006/main" xmlns:r="http://schemas.openxmlformats.org/officeDocument/2006/relationships" xmlns:mc="http://schemas.openxmlformats.org/markup-compatibility/2006" xmlns:mv="urn:schemas-microsoft-com:mac:vml" xmlns:p="http://schemas.openxmlformats.org/presentationml/2006/main" xmlns:c="http://schemas.openxmlformats.org/drawingml/2006/chart" xmlns:dgm="http://schemas.openxmlformats.org/drawingml/2006/diagram" xmlns:o="urn:schemas-microsoft-com:office:office" xmlns:v="urn:schemas-microsoft-com:vml" xmlns:pvml="urn:schemas-microsoft-com:office:powerpoint" xmlns:com="http://schemas.openxmlformats.org/drawingml/2006/compatibility" xmlns:p14="http://schemas.microsoft.com/office/powerpoint/2010/main" xmlns:p15="http://schemas.microsoft.com/office/powerpoint/2012/main" xmlns:ahyp="http://schemas.microsoft.com/office/drawing/2018/hyperlinkcolor" showMasterPhAnim="0" showMasterSp="0">
+  <p:cSld>
     <p:spTree>
       <p:nvGrpSpPr>
-        <p:cNvPr id="1" name=""/>
+        <p:cNvPr id="108" name="Shape 108"/>
         <p:cNvGrpSpPr/>
         <p:nvPr/>
       </p:nvGrpSpPr>
-      <p:grpSpPr bwMode="auto">
+      <p:grpSpPr>
         <a:xfrm>
           <a:off x="0" y="0"/>
           <a:ext cx="0" cy="0"/>
@@ -1650,25 +1704,21 @@
       </p:grpSpPr>
       <p:sp>
         <p:nvSpPr>
-          <p:cNvPr id="1895129550" name="Google Shape;60;p1:notes"/>
+          <p:cNvPr id="109" name="Google Shape;109;p7:notes"/>
           <p:cNvSpPr/>
           <p:nvPr>
-            <p:ph type="sldImg" idx="2"/>
+            <p:ph idx="2" type="sldImg"/>
           </p:nvPr>
         </p:nvSpPr>
-        <p:spPr bwMode="auto">
+        <p:spPr>
           <a:xfrm>
             <a:off x="381299" y="685800"/>
-            <a:ext cx="6096074" cy="3429000"/>
+            <a:ext cx="6096000" cy="3429000"/>
           </a:xfrm>
           <a:custGeom>
-            <a:avLst/>
-            <a:gdLst/>
-            <a:ahLst/>
-            <a:cxnLst/>
-            <a:rect l="l" t="t" r="r" b="b"/>
+            <a:rect b="b" l="l" r="r" t="t"/>
             <a:pathLst>
-              <a:path w="120000" h="120000" fill="norm" stroke="1" extrusionOk="0">
+              <a:path extrusionOk="0" h="120000" w="120000">
                 <a:moveTo>
                   <a:pt x="0" y="0"/>
                 </a:moveTo>
@@ -1686,26 +1736,26 @@
             </a:pathLst>
           </a:custGeom>
           <a:noFill/>
-          <a:ln w="9525" cap="flat" cmpd="sng">
+          <a:ln cap="flat" cmpd="sng" w="9525">
             <a:solidFill>
               <a:srgbClr val="000000"/>
             </a:solidFill>
             <a:prstDash val="solid"/>
             <a:round/>
-            <a:headEnd type="none" w="sm" len="sm"/>
-            <a:tailEnd type="none" w="sm" len="sm"/>
+            <a:headEnd len="sm" w="sm" type="none"/>
+            <a:tailEnd len="sm" w="sm" type="none"/>
           </a:ln>
         </p:spPr>
       </p:sp>
       <p:sp>
         <p:nvSpPr>
-          <p:cNvPr id="254344381" name="Google Shape;61;p1:notes"/>
+          <p:cNvPr id="110" name="Google Shape;110;p7:notes"/>
           <p:cNvSpPr txBox="1"/>
           <p:nvPr>
-            <p:ph type="body" idx="1"/>
+            <p:ph idx="1" type="body"/>
           </p:nvPr>
         </p:nvSpPr>
-        <p:spPr bwMode="auto">
+        <p:spPr>
           <a:xfrm>
             <a:off x="685800" y="4343400"/>
             <a:ext cx="5486400" cy="4114800"/>
@@ -1719,12 +1769,12 @@
           </a:ln>
         </p:spPr>
         <p:txBody>
-          <a:bodyPr spcFirstLastPara="1" wrap="square" lIns="91424" tIns="91424" rIns="91424" bIns="91424" anchor="t" anchorCtr="0">
+          <a:bodyPr anchorCtr="0" anchor="t" bIns="91400" lIns="91400" spcFirstLastPara="1" rIns="91400" wrap="square" tIns="91400">
             <a:noAutofit/>
           </a:bodyPr>
           <a:lstStyle/>
           <a:p>
-            <a:pPr marL="0" lvl="0" indent="0" algn="l" rtl="0">
+            <a:pPr indent="0" lvl="0" marL="0" rtl="0" algn="l">
               <a:lnSpc>
                 <a:spcPct val="100000"/>
               </a:lnSpc>
@@ -1736,8 +1786,10 @@
               </a:spcAft>
               <a:buSzPts val="1100"/>
               <a:buNone/>
-              <a:defRPr/>
             </a:pPr>
+            <a:r>
+              <a:t/>
+            </a:r>
             <a:endParaRPr/>
           </a:p>
         </p:txBody>
@@ -1751,15 +1803,15 @@
 </file>
 
 <file path=ppt/slideLayouts/slideLayout1.xml><?xml version="1.0" encoding="utf-8"?>
-<p:sldLayout xmlns:a="http://schemas.openxmlformats.org/drawingml/2006/main" xmlns:r="http://schemas.openxmlformats.org/officeDocument/2006/relationships" xmlns:p="http://schemas.openxmlformats.org/presentationml/2006/main" xmlns:m="http://schemas.openxmlformats.org/officeDocument/2006/math" xmlns:w="http://schemas.openxmlformats.org/wordprocessingml/2006/main" matchingName="Title slide" preserve="0" showMasterPhAnim="0" showMasterSp="1" type="title" userDrawn="1">
+<p:sldLayout xmlns:a="http://schemas.openxmlformats.org/drawingml/2006/main" xmlns:r="http://schemas.openxmlformats.org/officeDocument/2006/relationships" xmlns:mc="http://schemas.openxmlformats.org/markup-compatibility/2006" xmlns:mv="urn:schemas-microsoft-com:mac:vml" xmlns:p="http://schemas.openxmlformats.org/presentationml/2006/main" xmlns:c="http://schemas.openxmlformats.org/drawingml/2006/chart" xmlns:dgm="http://schemas.openxmlformats.org/drawingml/2006/diagram" xmlns:o="urn:schemas-microsoft-com:office:office" xmlns:v="urn:schemas-microsoft-com:vml" xmlns:pvml="urn:schemas-microsoft-com:office:powerpoint" xmlns:com="http://schemas.openxmlformats.org/drawingml/2006/compatibility" xmlns:p14="http://schemas.microsoft.com/office/powerpoint/2010/main" xmlns:p15="http://schemas.microsoft.com/office/powerpoint/2012/main" xmlns:ahyp="http://schemas.microsoft.com/office/drawing/2018/hyperlinkcolor" matchingName="Title slide" type="title">
   <p:cSld name="TITLE">
     <p:spTree>
       <p:nvGrpSpPr>
-        <p:cNvPr id="1" name=""/>
+        <p:cNvPr id="8" name="Shape 8"/>
         <p:cNvGrpSpPr/>
         <p:nvPr/>
       </p:nvGrpSpPr>
-      <p:grpSpPr bwMode="auto">
+      <p:grpSpPr>
         <a:xfrm>
           <a:off x="0" y="0"/>
           <a:ext cx="0" cy="0"/>
@@ -1769,13 +1821,13 @@
       </p:grpSpPr>
       <p:sp>
         <p:nvSpPr>
-          <p:cNvPr id="1609726273" name="Google Shape;9;p2"/>
+          <p:cNvPr id="9" name="Google Shape;9;p2"/>
           <p:cNvSpPr txBox="1"/>
           <p:nvPr>
             <p:ph type="ctrTitle"/>
           </p:nvPr>
         </p:nvSpPr>
-        <p:spPr bwMode="auto">
+        <p:spPr>
           <a:xfrm>
             <a:off x="1039975" y="1324500"/>
             <a:ext cx="7064100" cy="2052600"/>
@@ -1789,7 +1841,7 @@
           </a:ln>
         </p:spPr>
         <p:txBody>
-          <a:bodyPr spcFirstLastPara="1" wrap="square" lIns="91425" tIns="91425" rIns="91425" bIns="91425" anchor="b" anchorCtr="0">
+          <a:bodyPr anchorCtr="0" anchor="b" bIns="91425" lIns="91425" spcFirstLastPara="1" rIns="91425" wrap="square" tIns="91425">
             <a:noAutofit/>
           </a:bodyPr>
           <a:lstStyle>
@@ -1920,23 +1972,18 @@
               <a:defRPr sz="5200"/>
             </a:lvl9pPr>
           </a:lstStyle>
-          <a:p>
-            <a:pPr>
-              <a:defRPr/>
-            </a:pPr>
-            <a:endParaRPr/>
-          </a:p>
+          <a:p/>
         </p:txBody>
       </p:sp>
       <p:sp>
         <p:nvSpPr>
-          <p:cNvPr id="1054679975" name="Google Shape;10;p2"/>
+          <p:cNvPr id="10" name="Google Shape;10;p2"/>
           <p:cNvSpPr txBox="1"/>
           <p:nvPr>
-            <p:ph type="subTitle" idx="1"/>
+            <p:ph idx="1" type="subTitle"/>
           </p:nvPr>
         </p:nvSpPr>
-        <p:spPr bwMode="auto">
+        <p:spPr>
           <a:xfrm>
             <a:off x="1040000" y="3377100"/>
             <a:ext cx="7064100" cy="441900"/>
@@ -1950,7 +1997,7 @@
           </a:ln>
         </p:spPr>
         <p:txBody>
-          <a:bodyPr spcFirstLastPara="1" wrap="square" lIns="91425" tIns="91425" rIns="91425" bIns="91425" anchor="b" anchorCtr="0">
+          <a:bodyPr anchorCtr="0" anchor="b" bIns="91425" lIns="91425" spcFirstLastPara="1" rIns="91425" wrap="square" tIns="91425">
             <a:noAutofit/>
           </a:bodyPr>
           <a:lstStyle>
@@ -2081,21 +2128,16 @@
               <a:defRPr sz="2800"/>
             </a:lvl9pPr>
           </a:lstStyle>
-          <a:p>
-            <a:pPr>
-              <a:defRPr/>
-            </a:pPr>
-            <a:endParaRPr/>
-          </a:p>
+          <a:p/>
         </p:txBody>
       </p:sp>
       <p:cxnSp>
         <p:nvCxnSpPr>
-          <p:cNvPr id="1276928792" name="Google Shape;11;p2"/>
+          <p:cNvPr id="11" name="Google Shape;11;p2"/>
           <p:cNvCxnSpPr/>
           <p:nvPr/>
         </p:nvCxnSpPr>
-        <p:spPr bwMode="auto">
+        <p:spPr>
           <a:xfrm>
             <a:off x="-72550" y="274100"/>
             <a:ext cx="9287400" cy="0"/>
@@ -2104,52 +2146,52 @@
             <a:avLst/>
           </a:prstGeom>
           <a:noFill/>
-          <a:ln w="28575" cap="flat" cmpd="sng">
+          <a:ln cap="flat" cmpd="sng" w="28575">
             <a:solidFill>
               <a:schemeClr val="accent1"/>
             </a:solidFill>
             <a:prstDash val="solid"/>
             <a:round/>
-            <a:headEnd type="none" w="sm" len="sm"/>
-            <a:tailEnd type="none" w="sm" len="sm"/>
+            <a:headEnd len="sm" w="sm" type="none"/>
+            <a:tailEnd len="sm" w="sm" type="none"/>
           </a:ln>
         </p:spPr>
       </p:cxnSp>
       <p:cxnSp>
         <p:nvCxnSpPr>
-          <p:cNvPr id="916732641" name="Google Shape;12;p2"/>
+          <p:cNvPr id="12" name="Google Shape;12;p2"/>
           <p:cNvCxnSpPr/>
           <p:nvPr/>
         </p:nvCxnSpPr>
-        <p:spPr bwMode="auto">
+        <p:spPr>
           <a:xfrm flipH="1">
             <a:off x="-257975" y="-72550"/>
             <a:ext cx="3047400" cy="1346400"/>
           </a:xfrm>
           <a:prstGeom prst="curvedConnector3">
             <a:avLst>
-              <a:gd name="adj1" fmla="val 50000"/>
+              <a:gd fmla="val 50000" name="adj1"/>
             </a:avLst>
           </a:prstGeom>
           <a:noFill/>
-          <a:ln w="28575" cap="flat" cmpd="sng">
+          <a:ln cap="flat" cmpd="sng" w="28575">
             <a:solidFill>
               <a:schemeClr val="accent2"/>
             </a:solidFill>
             <a:prstDash val="solid"/>
             <a:round/>
-            <a:headEnd type="none" w="sm" len="sm"/>
-            <a:tailEnd type="none" w="sm" len="sm"/>
+            <a:headEnd len="sm" w="sm" type="none"/>
+            <a:tailEnd len="sm" w="sm" type="none"/>
           </a:ln>
         </p:spPr>
       </p:cxnSp>
       <p:cxnSp>
         <p:nvCxnSpPr>
-          <p:cNvPr id="1301379590" name="Google Shape;13;p2"/>
+          <p:cNvPr id="13" name="Google Shape;13;p2"/>
           <p:cNvCxnSpPr/>
           <p:nvPr/>
         </p:nvCxnSpPr>
-        <p:spPr bwMode="auto">
+        <p:spPr>
           <a:xfrm>
             <a:off x="-72550" y="4877450"/>
             <a:ext cx="9287400" cy="0"/>
@@ -2158,42 +2200,42 @@
             <a:avLst/>
           </a:prstGeom>
           <a:noFill/>
-          <a:ln w="28575" cap="flat" cmpd="sng">
+          <a:ln cap="flat" cmpd="sng" w="28575">
             <a:solidFill>
               <a:schemeClr val="accent1"/>
             </a:solidFill>
             <a:prstDash val="solid"/>
             <a:round/>
-            <a:headEnd type="none" w="sm" len="sm"/>
-            <a:tailEnd type="none" w="sm" len="sm"/>
+            <a:headEnd len="sm" w="sm" type="none"/>
+            <a:tailEnd len="sm" w="sm" type="none"/>
           </a:ln>
         </p:spPr>
       </p:cxnSp>
       <p:cxnSp>
         <p:nvCxnSpPr>
-          <p:cNvPr id="360335023" name="Google Shape;14;p2"/>
+          <p:cNvPr id="14" name="Google Shape;14;p2"/>
           <p:cNvCxnSpPr/>
           <p:nvPr/>
         </p:nvCxnSpPr>
-        <p:spPr bwMode="auto">
+        <p:spPr>
           <a:xfrm flipH="1">
             <a:off x="6467450" y="3935375"/>
             <a:ext cx="3047400" cy="1346400"/>
           </a:xfrm>
           <a:prstGeom prst="curvedConnector3">
             <a:avLst>
-              <a:gd name="adj1" fmla="val 50000"/>
+              <a:gd fmla="val 50000" name="adj1"/>
             </a:avLst>
           </a:prstGeom>
           <a:noFill/>
-          <a:ln w="28575" cap="flat" cmpd="sng">
+          <a:ln cap="flat" cmpd="sng" w="28575">
             <a:solidFill>
               <a:schemeClr val="accent2"/>
             </a:solidFill>
             <a:prstDash val="solid"/>
             <a:round/>
-            <a:headEnd type="none" w="sm" len="sm"/>
-            <a:tailEnd type="none" w="sm" len="sm"/>
+            <a:headEnd len="sm" w="sm" type="none"/>
+            <a:tailEnd len="sm" w="sm" type="none"/>
           </a:ln>
         </p:spPr>
       </p:cxnSp>
@@ -2206,15 +2248,15 @@
 </file>
 
 <file path=ppt/slideLayouts/slideLayout10.xml><?xml version="1.0" encoding="utf-8"?>
-<p:sldLayout xmlns:a="http://schemas.openxmlformats.org/drawingml/2006/main" xmlns:r="http://schemas.openxmlformats.org/officeDocument/2006/relationships" xmlns:p="http://schemas.openxmlformats.org/presentationml/2006/main" xmlns:m="http://schemas.openxmlformats.org/officeDocument/2006/math" xmlns:w="http://schemas.openxmlformats.org/wordprocessingml/2006/main" matchingName="Background 3" preserve="0" showMasterPhAnim="0" showMasterSp="1" userDrawn="1">
+<p:sldLayout xmlns:a="http://schemas.openxmlformats.org/drawingml/2006/main" xmlns:r="http://schemas.openxmlformats.org/officeDocument/2006/relationships" xmlns:mc="http://schemas.openxmlformats.org/markup-compatibility/2006" xmlns:mv="urn:schemas-microsoft-com:mac:vml" xmlns:p="http://schemas.openxmlformats.org/presentationml/2006/main" xmlns:c="http://schemas.openxmlformats.org/drawingml/2006/chart" xmlns:dgm="http://schemas.openxmlformats.org/drawingml/2006/diagram" xmlns:o="urn:schemas-microsoft-com:office:office" xmlns:v="urn:schemas-microsoft-com:vml" xmlns:pvml="urn:schemas-microsoft-com:office:powerpoint" xmlns:com="http://schemas.openxmlformats.org/drawingml/2006/compatibility" xmlns:p14="http://schemas.microsoft.com/office/powerpoint/2010/main" xmlns:p15="http://schemas.microsoft.com/office/powerpoint/2012/main" xmlns:ahyp="http://schemas.microsoft.com/office/drawing/2018/hyperlinkcolor" matchingName="Background 3">
   <p:cSld name="CUSTOM_30">
     <p:spTree>
       <p:nvGrpSpPr>
-        <p:cNvPr id="1" name=""/>
+        <p:cNvPr id="52" name="Shape 52"/>
         <p:cNvGrpSpPr/>
         <p:nvPr/>
       </p:nvGrpSpPr>
-      <p:grpSpPr bwMode="auto">
+      <p:grpSpPr>
         <a:xfrm>
           <a:off x="0" y="0"/>
           <a:ext cx="0" cy="0"/>
@@ -2224,11 +2266,11 @@
       </p:grpSpPr>
       <p:cxnSp>
         <p:nvCxnSpPr>
-          <p:cNvPr id="1184266943" name="Google Shape;53;p11"/>
+          <p:cNvPr id="53" name="Google Shape;53;p11"/>
           <p:cNvCxnSpPr/>
           <p:nvPr/>
         </p:nvCxnSpPr>
-        <p:spPr bwMode="auto">
+        <p:spPr>
           <a:xfrm>
             <a:off x="-72550" y="274100"/>
             <a:ext cx="9287400" cy="0"/>
@@ -2237,24 +2279,24 @@
             <a:avLst/>
           </a:prstGeom>
           <a:noFill/>
-          <a:ln w="28575" cap="flat" cmpd="sng">
+          <a:ln cap="flat" cmpd="sng" w="28575">
             <a:solidFill>
               <a:schemeClr val="accent1"/>
             </a:solidFill>
             <a:prstDash val="solid"/>
             <a:round/>
-            <a:headEnd type="none" w="sm" len="sm"/>
-            <a:tailEnd type="none" w="sm" len="sm"/>
+            <a:headEnd len="sm" w="sm" type="none"/>
+            <a:tailEnd len="sm" w="sm" type="none"/>
           </a:ln>
         </p:spPr>
       </p:cxnSp>
       <p:cxnSp>
         <p:nvCxnSpPr>
-          <p:cNvPr id="1715784478" name="Google Shape;54;p11"/>
+          <p:cNvPr id="54" name="Google Shape;54;p11"/>
           <p:cNvCxnSpPr/>
           <p:nvPr/>
         </p:nvCxnSpPr>
-        <p:spPr bwMode="auto">
+        <p:spPr>
           <a:xfrm>
             <a:off x="-72550" y="4877450"/>
             <a:ext cx="9287400" cy="0"/>
@@ -2263,126 +2305,126 @@
             <a:avLst/>
           </a:prstGeom>
           <a:noFill/>
-          <a:ln w="28575" cap="flat" cmpd="sng">
+          <a:ln cap="flat" cmpd="sng" w="28575">
             <a:solidFill>
               <a:schemeClr val="accent1"/>
             </a:solidFill>
             <a:prstDash val="solid"/>
             <a:round/>
-            <a:headEnd type="none" w="sm" len="sm"/>
-            <a:tailEnd type="none" w="sm" len="sm"/>
+            <a:headEnd len="sm" w="sm" type="none"/>
+            <a:tailEnd len="sm" w="sm" type="none"/>
           </a:ln>
         </p:spPr>
       </p:cxnSp>
       <p:cxnSp>
         <p:nvCxnSpPr>
-          <p:cNvPr id="1855200036" name="Google Shape;55;p11"/>
+          <p:cNvPr id="55" name="Google Shape;55;p11"/>
           <p:cNvCxnSpPr/>
           <p:nvPr/>
         </p:nvCxnSpPr>
-        <p:spPr bwMode="auto">
+        <p:spPr>
           <a:xfrm>
             <a:off x="-250225" y="4076450"/>
             <a:ext cx="1926900" cy="1161000"/>
           </a:xfrm>
           <a:prstGeom prst="curvedConnector3">
             <a:avLst>
-              <a:gd name="adj1" fmla="val 50000"/>
+              <a:gd fmla="val 50000" name="adj1"/>
             </a:avLst>
           </a:prstGeom>
           <a:noFill/>
-          <a:ln w="28575" cap="flat" cmpd="sng">
+          <a:ln cap="flat" cmpd="sng" w="28575">
             <a:solidFill>
               <a:schemeClr val="accent2"/>
             </a:solidFill>
             <a:prstDash val="solid"/>
             <a:round/>
-            <a:headEnd type="none" w="sm" len="sm"/>
-            <a:tailEnd type="none" w="sm" len="sm"/>
+            <a:headEnd len="sm" w="sm" type="none"/>
+            <a:tailEnd len="sm" w="sm" type="none"/>
           </a:ln>
         </p:spPr>
       </p:cxnSp>
       <p:cxnSp>
         <p:nvCxnSpPr>
-          <p:cNvPr id="1282685239" name="Google Shape;56;p11"/>
+          <p:cNvPr id="56" name="Google Shape;56;p11"/>
           <p:cNvCxnSpPr/>
           <p:nvPr/>
         </p:nvCxnSpPr>
-        <p:spPr bwMode="auto">
+        <p:spPr>
           <a:xfrm>
             <a:off x="7441150" y="-48375"/>
             <a:ext cx="1926900" cy="1161000"/>
           </a:xfrm>
           <a:prstGeom prst="curvedConnector3">
             <a:avLst>
-              <a:gd name="adj1" fmla="val 50000"/>
+              <a:gd fmla="val 50000" name="adj1"/>
             </a:avLst>
           </a:prstGeom>
           <a:noFill/>
-          <a:ln w="28575" cap="flat" cmpd="sng">
+          <a:ln cap="flat" cmpd="sng" w="28575">
             <a:solidFill>
               <a:schemeClr val="accent2"/>
             </a:solidFill>
             <a:prstDash val="solid"/>
             <a:round/>
-            <a:headEnd type="none" w="sm" len="sm"/>
-            <a:tailEnd type="none" w="sm" len="sm"/>
+            <a:headEnd len="sm" w="sm" type="none"/>
+            <a:tailEnd len="sm" w="sm" type="none"/>
           </a:ln>
         </p:spPr>
       </p:cxnSp>
       <p:cxnSp>
         <p:nvCxnSpPr>
-          <p:cNvPr id="1067859747" name="Google Shape;57;p11"/>
+          <p:cNvPr id="57" name="Google Shape;57;p11"/>
           <p:cNvCxnSpPr/>
           <p:nvPr/>
         </p:nvCxnSpPr>
-        <p:spPr bwMode="auto">
+        <p:spPr>
           <a:xfrm flipH="1">
             <a:off x="7454238" y="4053663"/>
             <a:ext cx="1926900" cy="1161000"/>
           </a:xfrm>
           <a:prstGeom prst="curvedConnector3">
             <a:avLst>
-              <a:gd name="adj1" fmla="val 50000"/>
+              <a:gd fmla="val 50000" name="adj1"/>
             </a:avLst>
           </a:prstGeom>
           <a:noFill/>
-          <a:ln w="28575" cap="flat" cmpd="sng">
+          <a:ln cap="flat" cmpd="sng" w="28575">
             <a:solidFill>
               <a:schemeClr val="accent2"/>
             </a:solidFill>
             <a:prstDash val="solid"/>
             <a:round/>
-            <a:headEnd type="none" w="sm" len="sm"/>
-            <a:tailEnd type="none" w="sm" len="sm"/>
+            <a:headEnd len="sm" w="sm" type="none"/>
+            <a:tailEnd len="sm" w="sm" type="none"/>
           </a:ln>
         </p:spPr>
       </p:cxnSp>
       <p:cxnSp>
         <p:nvCxnSpPr>
-          <p:cNvPr id="79397460" name="Google Shape;58;p11"/>
+          <p:cNvPr id="58" name="Google Shape;58;p11"/>
           <p:cNvCxnSpPr/>
           <p:nvPr/>
         </p:nvCxnSpPr>
-        <p:spPr bwMode="auto">
+        <p:spPr>
           <a:xfrm flipH="1">
             <a:off x="-237137" y="-71162"/>
             <a:ext cx="1926900" cy="1161000"/>
           </a:xfrm>
           <a:prstGeom prst="curvedConnector3">
             <a:avLst>
-              <a:gd name="adj1" fmla="val 50000"/>
+              <a:gd fmla="val 50000" name="adj1"/>
             </a:avLst>
           </a:prstGeom>
           <a:noFill/>
-          <a:ln w="28575" cap="flat" cmpd="sng">
+          <a:ln cap="flat" cmpd="sng" w="28575">
             <a:solidFill>
               <a:schemeClr val="accent2"/>
             </a:solidFill>
             <a:prstDash val="solid"/>
             <a:round/>
-            <a:headEnd type="none" w="sm" len="sm"/>
-            <a:tailEnd type="none" w="sm" len="sm"/>
+            <a:headEnd len="sm" w="sm" type="none"/>
+            <a:tailEnd len="sm" w="sm" type="none"/>
           </a:ln>
         </p:spPr>
       </p:cxnSp>
@@ -2395,15 +2437,15 @@
 </file>
 
 <file path=ppt/slideLayouts/slideLayout2.xml><?xml version="1.0" encoding="utf-8"?>
-<p:sldLayout xmlns:a="http://schemas.openxmlformats.org/drawingml/2006/main" xmlns:r="http://schemas.openxmlformats.org/officeDocument/2006/relationships" xmlns:p="http://schemas.openxmlformats.org/presentationml/2006/main" xmlns:m="http://schemas.openxmlformats.org/officeDocument/2006/math" xmlns:w="http://schemas.openxmlformats.org/wordprocessingml/2006/main" matchingName="Title and text 1" preserve="0" showMasterPhAnim="0" showMasterSp="1" userDrawn="1">
+<p:sldLayout xmlns:a="http://schemas.openxmlformats.org/drawingml/2006/main" xmlns:r="http://schemas.openxmlformats.org/officeDocument/2006/relationships" xmlns:mc="http://schemas.openxmlformats.org/markup-compatibility/2006" xmlns:mv="urn:schemas-microsoft-com:mac:vml" xmlns:p="http://schemas.openxmlformats.org/presentationml/2006/main" xmlns:c="http://schemas.openxmlformats.org/drawingml/2006/chart" xmlns:dgm="http://schemas.openxmlformats.org/drawingml/2006/diagram" xmlns:o="urn:schemas-microsoft-com:office:office" xmlns:v="urn:schemas-microsoft-com:vml" xmlns:pvml="urn:schemas-microsoft-com:office:powerpoint" xmlns:com="http://schemas.openxmlformats.org/drawingml/2006/compatibility" xmlns:p14="http://schemas.microsoft.com/office/powerpoint/2010/main" xmlns:p15="http://schemas.microsoft.com/office/powerpoint/2012/main" xmlns:ahyp="http://schemas.microsoft.com/office/drawing/2018/hyperlinkcolor" matchingName="Title and text 1">
   <p:cSld name="SECTION_TITLE_AND_DESCRIPTION_1">
     <p:spTree>
       <p:nvGrpSpPr>
-        <p:cNvPr id="1" name=""/>
+        <p:cNvPr id="15" name="Shape 15"/>
         <p:cNvGrpSpPr/>
         <p:nvPr/>
       </p:nvGrpSpPr>
-      <p:grpSpPr bwMode="auto">
+      <p:grpSpPr>
         <a:xfrm>
           <a:off x="0" y="0"/>
           <a:ext cx="0" cy="0"/>
@@ -2413,13 +2455,13 @@
       </p:grpSpPr>
       <p:sp>
         <p:nvSpPr>
-          <p:cNvPr id="867531714" name="Google Shape;16;p3"/>
+          <p:cNvPr id="16" name="Google Shape;16;p3"/>
           <p:cNvSpPr txBox="1"/>
           <p:nvPr>
-            <p:ph type="subTitle" idx="1"/>
+            <p:ph idx="1" type="subTitle"/>
           </p:nvPr>
         </p:nvSpPr>
-        <p:spPr bwMode="auto">
+        <p:spPr>
           <a:xfrm>
             <a:off x="895950" y="1682000"/>
             <a:ext cx="3847199" cy="2379900"/>
@@ -2433,7 +2475,7 @@
           </a:ln>
         </p:spPr>
         <p:txBody>
-          <a:bodyPr spcFirstLastPara="1" wrap="square" lIns="91425" tIns="91425" rIns="91425" bIns="91425" anchor="t" anchorCtr="0">
+          <a:bodyPr anchorCtr="0" anchor="t" bIns="91425" lIns="91425" spcFirstLastPara="1" rIns="91425" wrap="square" tIns="91425">
             <a:noAutofit/>
           </a:bodyPr>
           <a:lstStyle>
@@ -2567,23 +2609,18 @@
               <a:defRPr/>
             </a:lvl9pPr>
           </a:lstStyle>
-          <a:p>
-            <a:pPr>
-              <a:defRPr/>
-            </a:pPr>
-            <a:endParaRPr/>
-          </a:p>
+          <a:p/>
         </p:txBody>
       </p:sp>
       <p:sp>
         <p:nvSpPr>
-          <p:cNvPr id="13728323" name="Google Shape;17;p3"/>
+          <p:cNvPr id="17" name="Google Shape;17;p3"/>
           <p:cNvSpPr txBox="1"/>
           <p:nvPr>
             <p:ph type="title"/>
           </p:nvPr>
         </p:nvSpPr>
-        <p:spPr bwMode="auto">
+        <p:spPr>
           <a:xfrm>
             <a:off x="713225" y="445025"/>
             <a:ext cx="5679900" cy="572700"/>
@@ -2597,7 +2634,7 @@
           </a:ln>
         </p:spPr>
         <p:txBody>
-          <a:bodyPr spcFirstLastPara="1" wrap="square" lIns="91425" tIns="91425" rIns="91425" bIns="91425" anchor="t" anchorCtr="0">
+          <a:bodyPr anchorCtr="0" anchor="t" bIns="91425" lIns="91425" spcFirstLastPara="1" rIns="91425" wrap="square" tIns="91425">
             <a:noAutofit/>
           </a:bodyPr>
           <a:lstStyle>
@@ -2728,21 +2765,16 @@
               <a:defRPr/>
             </a:lvl9pPr>
           </a:lstStyle>
-          <a:p>
-            <a:pPr>
-              <a:defRPr/>
-            </a:pPr>
-            <a:endParaRPr/>
-          </a:p>
+          <a:p/>
         </p:txBody>
       </p:sp>
       <p:cxnSp>
         <p:nvCxnSpPr>
-          <p:cNvPr id="264327882" name="Google Shape;18;p3"/>
+          <p:cNvPr id="18" name="Google Shape;18;p3"/>
           <p:cNvCxnSpPr/>
           <p:nvPr/>
         </p:nvCxnSpPr>
-        <p:spPr bwMode="auto">
+        <p:spPr>
           <a:xfrm>
             <a:off x="-72550" y="274100"/>
             <a:ext cx="9287400" cy="0"/>
@@ -2751,24 +2783,24 @@
             <a:avLst/>
           </a:prstGeom>
           <a:noFill/>
-          <a:ln w="28575" cap="flat" cmpd="sng">
+          <a:ln cap="flat" cmpd="sng" w="28575">
             <a:solidFill>
               <a:schemeClr val="accent1"/>
             </a:solidFill>
             <a:prstDash val="solid"/>
             <a:round/>
-            <a:headEnd type="none" w="sm" len="sm"/>
-            <a:tailEnd type="none" w="sm" len="sm"/>
+            <a:headEnd len="sm" w="sm" type="none"/>
+            <a:tailEnd len="sm" w="sm" type="none"/>
           </a:ln>
         </p:spPr>
       </p:cxnSp>
       <p:cxnSp>
         <p:nvCxnSpPr>
-          <p:cNvPr id="1249777892" name="Google Shape;19;p3"/>
+          <p:cNvPr id="19" name="Google Shape;19;p3"/>
           <p:cNvCxnSpPr/>
           <p:nvPr/>
         </p:nvCxnSpPr>
-        <p:spPr bwMode="auto">
+        <p:spPr>
           <a:xfrm>
             <a:off x="-72550" y="4877450"/>
             <a:ext cx="9287400" cy="0"/>
@@ -2777,42 +2809,42 @@
             <a:avLst/>
           </a:prstGeom>
           <a:noFill/>
-          <a:ln w="28575" cap="flat" cmpd="sng">
+          <a:ln cap="flat" cmpd="sng" w="28575">
             <a:solidFill>
               <a:schemeClr val="accent1"/>
             </a:solidFill>
             <a:prstDash val="solid"/>
             <a:round/>
-            <a:headEnd type="none" w="sm" len="sm"/>
-            <a:tailEnd type="none" w="sm" len="sm"/>
+            <a:headEnd len="sm" w="sm" type="none"/>
+            <a:tailEnd len="sm" w="sm" type="none"/>
           </a:ln>
         </p:spPr>
       </p:cxnSp>
       <p:cxnSp>
         <p:nvCxnSpPr>
-          <p:cNvPr id="1952518534" name="Google Shape;20;p3"/>
+          <p:cNvPr id="20" name="Google Shape;20;p3"/>
           <p:cNvCxnSpPr/>
           <p:nvPr/>
         </p:nvCxnSpPr>
-        <p:spPr bwMode="auto">
+        <p:spPr>
           <a:xfrm flipH="1">
             <a:off x="5925450" y="2797500"/>
             <a:ext cx="3378000" cy="2466900"/>
           </a:xfrm>
           <a:prstGeom prst="curvedConnector3">
             <a:avLst>
-              <a:gd name="adj1" fmla="val 50000"/>
+              <a:gd fmla="val 50000" name="adj1"/>
             </a:avLst>
           </a:prstGeom>
           <a:noFill/>
-          <a:ln w="28575" cap="flat" cmpd="sng">
+          <a:ln cap="flat" cmpd="sng" w="28575">
             <a:solidFill>
               <a:schemeClr val="accent2"/>
             </a:solidFill>
             <a:prstDash val="solid"/>
             <a:round/>
-            <a:headEnd type="none" w="sm" len="sm"/>
-            <a:tailEnd type="none" w="sm" len="sm"/>
+            <a:headEnd len="sm" w="sm" type="none"/>
+            <a:tailEnd len="sm" w="sm" type="none"/>
           </a:ln>
         </p:spPr>
       </p:cxnSp>
@@ -2825,15 +2857,15 @@
 </file>
 
 <file path=ppt/slideLayouts/slideLayout3.xml><?xml version="1.0" encoding="utf-8"?>
-<p:sldLayout xmlns:a="http://schemas.openxmlformats.org/drawingml/2006/main" xmlns:r="http://schemas.openxmlformats.org/officeDocument/2006/relationships" xmlns:p="http://schemas.openxmlformats.org/presentationml/2006/main" xmlns:m="http://schemas.openxmlformats.org/officeDocument/2006/math" xmlns:w="http://schemas.openxmlformats.org/wordprocessingml/2006/main" matchingName="Title and text" preserve="0" showMasterPhAnim="0" showMasterSp="1" userDrawn="1">
+<p:sldLayout xmlns:a="http://schemas.openxmlformats.org/drawingml/2006/main" xmlns:r="http://schemas.openxmlformats.org/officeDocument/2006/relationships" xmlns:mc="http://schemas.openxmlformats.org/markup-compatibility/2006" xmlns:mv="urn:schemas-microsoft-com:mac:vml" xmlns:p="http://schemas.openxmlformats.org/presentationml/2006/main" xmlns:c="http://schemas.openxmlformats.org/drawingml/2006/chart" xmlns:dgm="http://schemas.openxmlformats.org/drawingml/2006/diagram" xmlns:o="urn:schemas-microsoft-com:office:office" xmlns:v="urn:schemas-microsoft-com:vml" xmlns:pvml="urn:schemas-microsoft-com:office:powerpoint" xmlns:com="http://schemas.openxmlformats.org/drawingml/2006/compatibility" xmlns:p14="http://schemas.microsoft.com/office/powerpoint/2010/main" xmlns:p15="http://schemas.microsoft.com/office/powerpoint/2012/main" xmlns:ahyp="http://schemas.microsoft.com/office/drawing/2018/hyperlinkcolor" matchingName="Title and text">
   <p:cSld name="CUSTOM_13">
     <p:spTree>
       <p:nvGrpSpPr>
-        <p:cNvPr id="1" name=""/>
+        <p:cNvPr id="21" name="Shape 21"/>
         <p:cNvGrpSpPr/>
         <p:nvPr/>
       </p:nvGrpSpPr>
-      <p:grpSpPr bwMode="auto">
+      <p:grpSpPr>
         <a:xfrm>
           <a:off x="0" y="0"/>
           <a:ext cx="0" cy="0"/>
@@ -2843,13 +2875,13 @@
       </p:grpSpPr>
       <p:sp>
         <p:nvSpPr>
-          <p:cNvPr id="301537513" name="Google Shape;22;p4"/>
+          <p:cNvPr id="22" name="Google Shape;22;p4"/>
           <p:cNvSpPr txBox="1"/>
           <p:nvPr>
-            <p:ph type="subTitle" idx="1"/>
+            <p:ph idx="1" type="subTitle"/>
           </p:nvPr>
         </p:nvSpPr>
-        <p:spPr bwMode="auto">
+        <p:spPr>
           <a:xfrm>
             <a:off x="2648400" y="1682000"/>
             <a:ext cx="3847199" cy="2379900"/>
@@ -2863,7 +2895,7 @@
           </a:ln>
         </p:spPr>
         <p:txBody>
-          <a:bodyPr spcFirstLastPara="1" wrap="square" lIns="91425" tIns="91425" rIns="91425" bIns="91425" anchor="t" anchorCtr="0">
+          <a:bodyPr anchorCtr="0" anchor="t" bIns="91425" lIns="91425" spcFirstLastPara="1" rIns="91425" wrap="square" tIns="91425">
             <a:noAutofit/>
           </a:bodyPr>
           <a:lstStyle>
@@ -3021,23 +3053,18 @@
               <a:defRPr/>
             </a:lvl9pPr>
           </a:lstStyle>
-          <a:p>
-            <a:pPr>
-              <a:defRPr/>
-            </a:pPr>
-            <a:endParaRPr/>
-          </a:p>
+          <a:p/>
         </p:txBody>
       </p:sp>
       <p:sp>
         <p:nvSpPr>
-          <p:cNvPr id="950479336" name="Google Shape;23;p4"/>
+          <p:cNvPr id="23" name="Google Shape;23;p4"/>
           <p:cNvSpPr txBox="1"/>
           <p:nvPr>
             <p:ph type="title"/>
           </p:nvPr>
         </p:nvSpPr>
-        <p:spPr bwMode="auto">
+        <p:spPr>
           <a:xfrm>
             <a:off x="1732050" y="445025"/>
             <a:ext cx="5679900" cy="572700"/>
@@ -3051,7 +3078,7 @@
           </a:ln>
         </p:spPr>
         <p:txBody>
-          <a:bodyPr spcFirstLastPara="1" wrap="square" lIns="91425" tIns="91425" rIns="91425" bIns="91425" anchor="t" anchorCtr="0">
+          <a:bodyPr anchorCtr="0" anchor="t" bIns="91425" lIns="91425" spcFirstLastPara="1" rIns="91425" wrap="square" tIns="91425">
             <a:noAutofit/>
           </a:bodyPr>
           <a:lstStyle>
@@ -3182,21 +3209,16 @@
               <a:defRPr/>
             </a:lvl9pPr>
           </a:lstStyle>
-          <a:p>
-            <a:pPr>
-              <a:defRPr/>
-            </a:pPr>
-            <a:endParaRPr/>
-          </a:p>
+          <a:p/>
         </p:txBody>
       </p:sp>
       <p:cxnSp>
         <p:nvCxnSpPr>
-          <p:cNvPr id="1979171402" name="Google Shape;24;p4"/>
+          <p:cNvPr id="24" name="Google Shape;24;p4"/>
           <p:cNvCxnSpPr/>
           <p:nvPr/>
         </p:nvCxnSpPr>
-        <p:spPr bwMode="auto">
+        <p:spPr>
           <a:xfrm>
             <a:off x="-72550" y="274100"/>
             <a:ext cx="9287400" cy="0"/>
@@ -3205,24 +3227,24 @@
             <a:avLst/>
           </a:prstGeom>
           <a:noFill/>
-          <a:ln w="28575" cap="flat" cmpd="sng">
+          <a:ln cap="flat" cmpd="sng" w="28575">
             <a:solidFill>
               <a:schemeClr val="accent1"/>
             </a:solidFill>
             <a:prstDash val="solid"/>
             <a:round/>
-            <a:headEnd type="none" w="sm" len="sm"/>
-            <a:tailEnd type="none" w="sm" len="sm"/>
+            <a:headEnd len="sm" w="sm" type="none"/>
+            <a:tailEnd len="sm" w="sm" type="none"/>
           </a:ln>
         </p:spPr>
       </p:cxnSp>
       <p:cxnSp>
         <p:nvCxnSpPr>
-          <p:cNvPr id="784510822" name="Google Shape;25;p4"/>
+          <p:cNvPr id="25" name="Google Shape;25;p4"/>
           <p:cNvCxnSpPr/>
           <p:nvPr/>
         </p:nvCxnSpPr>
-        <p:spPr bwMode="auto">
+        <p:spPr>
           <a:xfrm>
             <a:off x="-72550" y="4877450"/>
             <a:ext cx="9287400" cy="0"/>
@@ -3231,70 +3253,70 @@
             <a:avLst/>
           </a:prstGeom>
           <a:noFill/>
-          <a:ln w="28575" cap="flat" cmpd="sng">
+          <a:ln cap="flat" cmpd="sng" w="28575">
             <a:solidFill>
               <a:schemeClr val="accent1"/>
             </a:solidFill>
             <a:prstDash val="solid"/>
             <a:round/>
-            <a:headEnd type="none" w="sm" len="sm"/>
-            <a:tailEnd type="none" w="sm" len="sm"/>
+            <a:headEnd len="sm" w="sm" type="none"/>
+            <a:tailEnd len="sm" w="sm" type="none"/>
           </a:ln>
         </p:spPr>
       </p:cxnSp>
       <p:cxnSp>
         <p:nvCxnSpPr>
-          <p:cNvPr id="2100194970" name="Google Shape;26;p4"/>
+          <p:cNvPr id="26" name="Google Shape;26;p4"/>
           <p:cNvCxnSpPr/>
           <p:nvPr/>
         </p:nvCxnSpPr>
-        <p:spPr bwMode="auto">
+        <p:spPr>
           <a:xfrm>
             <a:off x="-250225" y="4076450"/>
             <a:ext cx="1926900" cy="1161000"/>
           </a:xfrm>
           <a:prstGeom prst="curvedConnector3">
             <a:avLst>
-              <a:gd name="adj1" fmla="val 50000"/>
+              <a:gd fmla="val 50000" name="adj1"/>
             </a:avLst>
           </a:prstGeom>
           <a:noFill/>
-          <a:ln w="28575" cap="flat" cmpd="sng">
+          <a:ln cap="flat" cmpd="sng" w="28575">
             <a:solidFill>
               <a:schemeClr val="accent2"/>
             </a:solidFill>
             <a:prstDash val="solid"/>
             <a:round/>
-            <a:headEnd type="none" w="sm" len="sm"/>
-            <a:tailEnd type="none" w="sm" len="sm"/>
+            <a:headEnd len="sm" w="sm" type="none"/>
+            <a:tailEnd len="sm" w="sm" type="none"/>
           </a:ln>
         </p:spPr>
       </p:cxnSp>
       <p:cxnSp>
         <p:nvCxnSpPr>
-          <p:cNvPr id="264444521" name="Google Shape;27;p4"/>
+          <p:cNvPr id="27" name="Google Shape;27;p4"/>
           <p:cNvCxnSpPr/>
           <p:nvPr/>
         </p:nvCxnSpPr>
-        <p:spPr bwMode="auto">
+        <p:spPr>
           <a:xfrm>
             <a:off x="7441150" y="-48375"/>
             <a:ext cx="1926900" cy="1161000"/>
           </a:xfrm>
           <a:prstGeom prst="curvedConnector3">
             <a:avLst>
-              <a:gd name="adj1" fmla="val 50000"/>
+              <a:gd fmla="val 50000" name="adj1"/>
             </a:avLst>
           </a:prstGeom>
           <a:noFill/>
-          <a:ln w="28575" cap="flat" cmpd="sng">
+          <a:ln cap="flat" cmpd="sng" w="28575">
             <a:solidFill>
               <a:schemeClr val="accent2"/>
             </a:solidFill>
             <a:prstDash val="solid"/>
             <a:round/>
-            <a:headEnd type="none" w="sm" len="sm"/>
-            <a:tailEnd type="none" w="sm" len="sm"/>
+            <a:headEnd len="sm" w="sm" type="none"/>
+            <a:tailEnd len="sm" w="sm" type="none"/>
           </a:ln>
         </p:spPr>
       </p:cxnSp>
@@ -3307,15 +3329,15 @@
 </file>
 
 <file path=ppt/slideLayouts/slideLayout4.xml><?xml version="1.0" encoding="utf-8"?>
-<p:sldLayout xmlns:a="http://schemas.openxmlformats.org/drawingml/2006/main" xmlns:r="http://schemas.openxmlformats.org/officeDocument/2006/relationships" xmlns:p="http://schemas.openxmlformats.org/presentationml/2006/main" xmlns:m="http://schemas.openxmlformats.org/officeDocument/2006/math" xmlns:w="http://schemas.openxmlformats.org/wordprocessingml/2006/main" matchingName="Title and text 1" preserve="0" showMasterPhAnim="0" showMasterSp="1" userDrawn="1">
+<p:sldLayout xmlns:a="http://schemas.openxmlformats.org/drawingml/2006/main" xmlns:r="http://schemas.openxmlformats.org/officeDocument/2006/relationships" xmlns:mc="http://schemas.openxmlformats.org/markup-compatibility/2006" xmlns:mv="urn:schemas-microsoft-com:mac:vml" xmlns:p="http://schemas.openxmlformats.org/presentationml/2006/main" xmlns:c="http://schemas.openxmlformats.org/drawingml/2006/chart" xmlns:dgm="http://schemas.openxmlformats.org/drawingml/2006/diagram" xmlns:o="urn:schemas-microsoft-com:office:office" xmlns:v="urn:schemas-microsoft-com:vml" xmlns:pvml="urn:schemas-microsoft-com:office:powerpoint" xmlns:com="http://schemas.openxmlformats.org/drawingml/2006/compatibility" xmlns:p14="http://schemas.microsoft.com/office/powerpoint/2010/main" xmlns:p15="http://schemas.microsoft.com/office/powerpoint/2012/main" xmlns:ahyp="http://schemas.microsoft.com/office/drawing/2018/hyperlinkcolor" matchingName="Title and text 1">
   <p:cSld name="CUSTOM_3">
     <p:spTree>
       <p:nvGrpSpPr>
-        <p:cNvPr id="1" name=""/>
+        <p:cNvPr id="28" name="Shape 28"/>
         <p:cNvGrpSpPr/>
         <p:nvPr/>
       </p:nvGrpSpPr>
-      <p:grpSpPr bwMode="auto">
+      <p:grpSpPr>
         <a:xfrm>
           <a:off x="0" y="0"/>
           <a:ext cx="0" cy="0"/>
@@ -3325,13 +3347,13 @@
       </p:grpSpPr>
       <p:sp>
         <p:nvSpPr>
-          <p:cNvPr id="1609019624" name="Google Shape;29;p5"/>
+          <p:cNvPr id="29" name="Google Shape;29;p5"/>
           <p:cNvSpPr txBox="1"/>
           <p:nvPr>
             <p:ph type="title"/>
           </p:nvPr>
         </p:nvSpPr>
-        <p:spPr bwMode="auto">
+        <p:spPr>
           <a:xfrm>
             <a:off x="845550" y="1482825"/>
             <a:ext cx="7452900" cy="1291200"/>
@@ -3345,7 +3367,7 @@
           </a:ln>
         </p:spPr>
         <p:txBody>
-          <a:bodyPr spcFirstLastPara="1" wrap="square" lIns="91425" tIns="91425" rIns="91425" bIns="91425" anchor="t" anchorCtr="0">
+          <a:bodyPr anchorCtr="0" anchor="t" bIns="91425" lIns="91425" spcFirstLastPara="1" rIns="91425" wrap="square" tIns="91425">
             <a:noAutofit/>
           </a:bodyPr>
           <a:lstStyle>
@@ -3476,23 +3498,18 @@
               <a:defRPr sz="9000"/>
             </a:lvl9pPr>
           </a:lstStyle>
-          <a:p>
-            <a:pPr>
-              <a:defRPr/>
-            </a:pPr>
-            <a:endParaRPr/>
-          </a:p>
+          <a:p/>
         </p:txBody>
       </p:sp>
       <p:sp>
         <p:nvSpPr>
-          <p:cNvPr id="1096113444" name="Google Shape;30;p5"/>
+          <p:cNvPr id="30" name="Google Shape;30;p5"/>
           <p:cNvSpPr txBox="1"/>
           <p:nvPr>
-            <p:ph type="subTitle" idx="1"/>
+            <p:ph idx="1" type="subTitle"/>
           </p:nvPr>
         </p:nvSpPr>
-        <p:spPr bwMode="auto">
+        <p:spPr>
           <a:xfrm>
             <a:off x="2299500" y="2972150"/>
             <a:ext cx="4545000" cy="554400"/>
@@ -3506,7 +3523,7 @@
           </a:ln>
         </p:spPr>
         <p:txBody>
-          <a:bodyPr spcFirstLastPara="1" wrap="square" lIns="91425" tIns="91425" rIns="91425" bIns="91425" anchor="t" anchorCtr="0">
+          <a:bodyPr anchorCtr="0" anchor="t" bIns="91425" lIns="91425" spcFirstLastPara="1" rIns="91425" wrap="square" tIns="91425">
             <a:noAutofit/>
           </a:bodyPr>
           <a:lstStyle>
@@ -3637,21 +3654,16 @@
               <a:defRPr sz="2100"/>
             </a:lvl9pPr>
           </a:lstStyle>
-          <a:p>
-            <a:pPr>
-              <a:defRPr/>
-            </a:pPr>
-            <a:endParaRPr/>
-          </a:p>
+          <a:p/>
         </p:txBody>
       </p:sp>
       <p:cxnSp>
         <p:nvCxnSpPr>
-          <p:cNvPr id="1219470749" name="Google Shape;31;p5"/>
+          <p:cNvPr id="31" name="Google Shape;31;p5"/>
           <p:cNvCxnSpPr/>
           <p:nvPr/>
         </p:nvCxnSpPr>
-        <p:spPr bwMode="auto">
+        <p:spPr>
           <a:xfrm>
             <a:off x="-72550" y="274100"/>
             <a:ext cx="9287400" cy="0"/>
@@ -3660,24 +3672,24 @@
             <a:avLst/>
           </a:prstGeom>
           <a:noFill/>
-          <a:ln w="28575" cap="flat" cmpd="sng">
+          <a:ln cap="flat" cmpd="sng" w="28575">
             <a:solidFill>
               <a:schemeClr val="accent1"/>
             </a:solidFill>
             <a:prstDash val="solid"/>
             <a:round/>
-            <a:headEnd type="none" w="sm" len="sm"/>
-            <a:tailEnd type="none" w="sm" len="sm"/>
+            <a:headEnd len="sm" w="sm" type="none"/>
+            <a:tailEnd len="sm" w="sm" type="none"/>
           </a:ln>
         </p:spPr>
       </p:cxnSp>
       <p:cxnSp>
         <p:nvCxnSpPr>
-          <p:cNvPr id="1502591993" name="Google Shape;32;p5"/>
+          <p:cNvPr id="32" name="Google Shape;32;p5"/>
           <p:cNvCxnSpPr/>
           <p:nvPr/>
         </p:nvCxnSpPr>
-        <p:spPr bwMode="auto">
+        <p:spPr>
           <a:xfrm>
             <a:off x="-72550" y="4877450"/>
             <a:ext cx="9287400" cy="0"/>
@@ -3686,14 +3698,14 @@
             <a:avLst/>
           </a:prstGeom>
           <a:noFill/>
-          <a:ln w="28575" cap="flat" cmpd="sng">
+          <a:ln cap="flat" cmpd="sng" w="28575">
             <a:solidFill>
               <a:schemeClr val="accent1"/>
             </a:solidFill>
             <a:prstDash val="solid"/>
             <a:round/>
-            <a:headEnd type="none" w="sm" len="sm"/>
-            <a:tailEnd type="none" w="sm" len="sm"/>
+            <a:headEnd len="sm" w="sm" type="none"/>
+            <a:tailEnd len="sm" w="sm" type="none"/>
           </a:ln>
         </p:spPr>
       </p:cxnSp>
@@ -3706,15 +3718,15 @@
 </file>
 
 <file path=ppt/slideLayouts/slideLayout5.xml><?xml version="1.0" encoding="utf-8"?>
-<p:sldLayout xmlns:a="http://schemas.openxmlformats.org/drawingml/2006/main" xmlns:r="http://schemas.openxmlformats.org/officeDocument/2006/relationships" xmlns:p="http://schemas.openxmlformats.org/presentationml/2006/main" xmlns:m="http://schemas.openxmlformats.org/officeDocument/2006/math" xmlns:w="http://schemas.openxmlformats.org/wordprocessingml/2006/main" matchingName="Section title and description" preserve="0" showMasterPhAnim="0" showMasterSp="1" userDrawn="1">
+<p:sldLayout xmlns:a="http://schemas.openxmlformats.org/drawingml/2006/main" xmlns:r="http://schemas.openxmlformats.org/officeDocument/2006/relationships" xmlns:mc="http://schemas.openxmlformats.org/markup-compatibility/2006" xmlns:mv="urn:schemas-microsoft-com:mac:vml" xmlns:p="http://schemas.openxmlformats.org/presentationml/2006/main" xmlns:c="http://schemas.openxmlformats.org/drawingml/2006/chart" xmlns:dgm="http://schemas.openxmlformats.org/drawingml/2006/diagram" xmlns:o="urn:schemas-microsoft-com:office:office" xmlns:v="urn:schemas-microsoft-com:vml" xmlns:pvml="urn:schemas-microsoft-com:office:powerpoint" xmlns:com="http://schemas.openxmlformats.org/drawingml/2006/compatibility" xmlns:p14="http://schemas.microsoft.com/office/powerpoint/2010/main" xmlns:p15="http://schemas.microsoft.com/office/powerpoint/2012/main" xmlns:ahyp="http://schemas.microsoft.com/office/drawing/2018/hyperlinkcolor" matchingName="Section title and description">
   <p:cSld name="SECTION_TITLE_AND_DESCRIPTION">
     <p:spTree>
       <p:nvGrpSpPr>
-        <p:cNvPr id="1" name=""/>
+        <p:cNvPr id="33" name="Shape 33"/>
         <p:cNvGrpSpPr/>
         <p:nvPr/>
       </p:nvGrpSpPr>
-      <p:grpSpPr bwMode="auto">
+      <p:grpSpPr>
         <a:xfrm>
           <a:off x="0" y="0"/>
           <a:ext cx="0" cy="0"/>
@@ -3724,13 +3736,13 @@
       </p:grpSpPr>
       <p:sp>
         <p:nvSpPr>
-          <p:cNvPr id="1583455089" name="Google Shape;34;p6"/>
+          <p:cNvPr id="34" name="Google Shape;34;p6"/>
           <p:cNvSpPr txBox="1"/>
           <p:nvPr>
-            <p:ph type="subTitle" idx="1"/>
+            <p:ph idx="1" type="subTitle"/>
           </p:nvPr>
         </p:nvSpPr>
-        <p:spPr bwMode="auto">
+        <p:spPr>
           <a:xfrm>
             <a:off x="895950" y="1682000"/>
             <a:ext cx="3847199" cy="2379900"/>
@@ -3744,7 +3756,7 @@
           </a:ln>
         </p:spPr>
         <p:txBody>
-          <a:bodyPr spcFirstLastPara="1" wrap="square" lIns="91425" tIns="91425" rIns="91425" bIns="91425" anchor="t" anchorCtr="0">
+          <a:bodyPr anchorCtr="0" anchor="t" bIns="91425" lIns="91425" spcFirstLastPara="1" rIns="91425" wrap="square" tIns="91425">
             <a:noAutofit/>
           </a:bodyPr>
           <a:lstStyle>
@@ -3878,23 +3890,18 @@
               <a:defRPr/>
             </a:lvl9pPr>
           </a:lstStyle>
-          <a:p>
-            <a:pPr>
-              <a:defRPr/>
-            </a:pPr>
-            <a:endParaRPr/>
-          </a:p>
+          <a:p/>
         </p:txBody>
       </p:sp>
       <p:sp>
         <p:nvSpPr>
-          <p:cNvPr id="1750138418" name="Google Shape;35;p6"/>
+          <p:cNvPr id="35" name="Google Shape;35;p6"/>
           <p:cNvSpPr txBox="1"/>
           <p:nvPr>
             <p:ph type="title"/>
           </p:nvPr>
         </p:nvSpPr>
-        <p:spPr bwMode="auto">
+        <p:spPr>
           <a:xfrm>
             <a:off x="713225" y="445025"/>
             <a:ext cx="5679900" cy="572700"/>
@@ -3908,7 +3915,7 @@
           </a:ln>
         </p:spPr>
         <p:txBody>
-          <a:bodyPr spcFirstLastPara="1" wrap="square" lIns="91425" tIns="91425" rIns="91425" bIns="91425" anchor="t" anchorCtr="0">
+          <a:bodyPr anchorCtr="0" anchor="t" bIns="91425" lIns="91425" spcFirstLastPara="1" rIns="91425" wrap="square" tIns="91425">
             <a:noAutofit/>
           </a:bodyPr>
           <a:lstStyle>
@@ -4039,21 +4046,16 @@
               <a:defRPr/>
             </a:lvl9pPr>
           </a:lstStyle>
-          <a:p>
-            <a:pPr>
-              <a:defRPr/>
-            </a:pPr>
-            <a:endParaRPr/>
-          </a:p>
+          <a:p/>
         </p:txBody>
       </p:sp>
       <p:cxnSp>
         <p:nvCxnSpPr>
-          <p:cNvPr id="141281966" name="Google Shape;36;p6"/>
+          <p:cNvPr id="36" name="Google Shape;36;p6"/>
           <p:cNvCxnSpPr/>
           <p:nvPr/>
         </p:nvCxnSpPr>
-        <p:spPr bwMode="auto">
+        <p:spPr>
           <a:xfrm>
             <a:off x="-72550" y="274100"/>
             <a:ext cx="9287400" cy="0"/>
@@ -4062,24 +4064,24 @@
             <a:avLst/>
           </a:prstGeom>
           <a:noFill/>
-          <a:ln w="28575" cap="flat" cmpd="sng">
+          <a:ln cap="flat" cmpd="sng" w="28575">
             <a:solidFill>
               <a:schemeClr val="accent1"/>
             </a:solidFill>
             <a:prstDash val="solid"/>
             <a:round/>
-            <a:headEnd type="none" w="sm" len="sm"/>
-            <a:tailEnd type="none" w="sm" len="sm"/>
+            <a:headEnd len="sm" w="sm" type="none"/>
+            <a:tailEnd len="sm" w="sm" type="none"/>
           </a:ln>
         </p:spPr>
       </p:cxnSp>
       <p:cxnSp>
         <p:nvCxnSpPr>
-          <p:cNvPr id="1084155872" name="Google Shape;37;p6"/>
+          <p:cNvPr id="37" name="Google Shape;37;p6"/>
           <p:cNvCxnSpPr/>
           <p:nvPr/>
         </p:nvCxnSpPr>
-        <p:spPr bwMode="auto">
+        <p:spPr>
           <a:xfrm>
             <a:off x="-72550" y="4877450"/>
             <a:ext cx="9287400" cy="0"/>
@@ -4088,42 +4090,42 @@
             <a:avLst/>
           </a:prstGeom>
           <a:noFill/>
-          <a:ln w="28575" cap="flat" cmpd="sng">
+          <a:ln cap="flat" cmpd="sng" w="28575">
             <a:solidFill>
               <a:schemeClr val="accent1"/>
             </a:solidFill>
             <a:prstDash val="solid"/>
             <a:round/>
-            <a:headEnd type="none" w="sm" len="sm"/>
-            <a:tailEnd type="none" w="sm" len="sm"/>
+            <a:headEnd len="sm" w="sm" type="none"/>
+            <a:tailEnd len="sm" w="sm" type="none"/>
           </a:ln>
         </p:spPr>
       </p:cxnSp>
       <p:cxnSp>
         <p:nvCxnSpPr>
-          <p:cNvPr id="1070522619" name="Google Shape;38;p6"/>
+          <p:cNvPr id="38" name="Google Shape;38;p6"/>
           <p:cNvCxnSpPr/>
           <p:nvPr/>
         </p:nvCxnSpPr>
-        <p:spPr bwMode="auto">
+        <p:spPr>
           <a:xfrm flipH="1">
             <a:off x="5925450" y="2797500"/>
             <a:ext cx="3378000" cy="2466900"/>
           </a:xfrm>
           <a:prstGeom prst="curvedConnector3">
             <a:avLst>
-              <a:gd name="adj1" fmla="val 50000"/>
+              <a:gd fmla="val 50000" name="adj1"/>
             </a:avLst>
           </a:prstGeom>
           <a:noFill/>
-          <a:ln w="28575" cap="flat" cmpd="sng">
+          <a:ln cap="flat" cmpd="sng" w="28575">
             <a:solidFill>
               <a:schemeClr val="accent2"/>
             </a:solidFill>
             <a:prstDash val="solid"/>
             <a:round/>
-            <a:headEnd type="none" w="sm" len="sm"/>
-            <a:tailEnd type="none" w="sm" len="sm"/>
+            <a:headEnd len="sm" w="sm" type="none"/>
+            <a:tailEnd len="sm" w="sm" type="none"/>
           </a:ln>
         </p:spPr>
       </p:cxnSp>
@@ -4136,20 +4138,20 @@
 </file>
 
 <file path=ppt/slideLayouts/slideLayout6.xml><?xml version="1.0" encoding="utf-8"?>
-<p:sldLayout xmlns:a="http://schemas.openxmlformats.org/drawingml/2006/main" xmlns:r="http://schemas.openxmlformats.org/officeDocument/2006/relationships" xmlns:p="http://schemas.openxmlformats.org/presentationml/2006/main" xmlns:m="http://schemas.openxmlformats.org/officeDocument/2006/math" xmlns:w="http://schemas.openxmlformats.org/wordprocessingml/2006/main" matchingName="Blank" preserve="0" showMasterPhAnim="0" showMasterSp="1" type="blank" userDrawn="1">
+<p:sldLayout xmlns:a="http://schemas.openxmlformats.org/drawingml/2006/main" xmlns:r="http://schemas.openxmlformats.org/officeDocument/2006/relationships" xmlns:mc="http://schemas.openxmlformats.org/markup-compatibility/2006" xmlns:mv="urn:schemas-microsoft-com:mac:vml" xmlns:p="http://schemas.openxmlformats.org/presentationml/2006/main" xmlns:c="http://schemas.openxmlformats.org/drawingml/2006/chart" xmlns:dgm="http://schemas.openxmlformats.org/drawingml/2006/diagram" xmlns:o="urn:schemas-microsoft-com:office:office" xmlns:v="urn:schemas-microsoft-com:vml" xmlns:pvml="urn:schemas-microsoft-com:office:powerpoint" xmlns:com="http://schemas.openxmlformats.org/drawingml/2006/compatibility" xmlns:p14="http://schemas.microsoft.com/office/powerpoint/2010/main" xmlns:p15="http://schemas.microsoft.com/office/powerpoint/2012/main" xmlns:ahyp="http://schemas.microsoft.com/office/drawing/2018/hyperlinkcolor" matchingName="Blank" type="blank">
   <p:cSld name="BLANK">
     <p:bg>
-      <p:bgPr shadeToTitle="0">
+      <p:bgPr>
         <a:noFill/>
       </p:bgPr>
     </p:bg>
     <p:spTree>
       <p:nvGrpSpPr>
-        <p:cNvPr id="1" name=""/>
+        <p:cNvPr id="39" name="Shape 39"/>
         <p:cNvGrpSpPr/>
         <p:nvPr/>
       </p:nvGrpSpPr>
-      <p:grpSpPr bwMode="auto">
+      <p:grpSpPr>
         <a:xfrm>
           <a:off x="0" y="0"/>
           <a:ext cx="0" cy="0"/>
@@ -4166,15 +4168,15 @@
 </file>
 
 <file path=ppt/slideLayouts/slideLayout7.xml><?xml version="1.0" encoding="utf-8"?>
-<p:sldLayout xmlns:a="http://schemas.openxmlformats.org/drawingml/2006/main" xmlns:r="http://schemas.openxmlformats.org/officeDocument/2006/relationships" xmlns:p="http://schemas.openxmlformats.org/presentationml/2006/main" xmlns:m="http://schemas.openxmlformats.org/officeDocument/2006/math" xmlns:w="http://schemas.openxmlformats.org/wordprocessingml/2006/main" matchingName="Background" preserve="0" showMasterPhAnim="0" showMasterSp="1" userDrawn="1">
+<p:sldLayout xmlns:a="http://schemas.openxmlformats.org/drawingml/2006/main" xmlns:r="http://schemas.openxmlformats.org/officeDocument/2006/relationships" xmlns:mc="http://schemas.openxmlformats.org/markup-compatibility/2006" xmlns:mv="urn:schemas-microsoft-com:mac:vml" xmlns:p="http://schemas.openxmlformats.org/presentationml/2006/main" xmlns:c="http://schemas.openxmlformats.org/drawingml/2006/chart" xmlns:dgm="http://schemas.openxmlformats.org/drawingml/2006/diagram" xmlns:o="urn:schemas-microsoft-com:office:office" xmlns:v="urn:schemas-microsoft-com:vml" xmlns:pvml="urn:schemas-microsoft-com:office:powerpoint" xmlns:com="http://schemas.openxmlformats.org/drawingml/2006/compatibility" xmlns:p14="http://schemas.microsoft.com/office/powerpoint/2010/main" xmlns:p15="http://schemas.microsoft.com/office/powerpoint/2012/main" xmlns:ahyp="http://schemas.microsoft.com/office/drawing/2018/hyperlinkcolor" matchingName="Background">
   <p:cSld name="CUSTOM_10">
     <p:spTree>
       <p:nvGrpSpPr>
-        <p:cNvPr id="1" name=""/>
+        <p:cNvPr id="40" name="Shape 40"/>
         <p:cNvGrpSpPr/>
         <p:nvPr/>
       </p:nvGrpSpPr>
-      <p:grpSpPr bwMode="auto">
+      <p:grpSpPr>
         <a:xfrm>
           <a:off x="0" y="0"/>
           <a:ext cx="0" cy="0"/>
@@ -4184,11 +4186,11 @@
       </p:grpSpPr>
       <p:cxnSp>
         <p:nvCxnSpPr>
-          <p:cNvPr id="1771959875" name="Google Shape;41;p8"/>
+          <p:cNvPr id="41" name="Google Shape;41;p8"/>
           <p:cNvCxnSpPr/>
           <p:nvPr/>
         </p:nvCxnSpPr>
-        <p:spPr bwMode="auto">
+        <p:spPr>
           <a:xfrm>
             <a:off x="-72550" y="4877450"/>
             <a:ext cx="9287400" cy="0"/>
@@ -4197,24 +4199,24 @@
             <a:avLst/>
           </a:prstGeom>
           <a:noFill/>
-          <a:ln w="28575" cap="flat" cmpd="sng">
+          <a:ln cap="flat" cmpd="sng" w="28575">
             <a:solidFill>
               <a:schemeClr val="accent1"/>
             </a:solidFill>
             <a:prstDash val="solid"/>
             <a:round/>
-            <a:headEnd type="none" w="sm" len="sm"/>
-            <a:tailEnd type="none" w="sm" len="sm"/>
+            <a:headEnd len="sm" w="sm" type="none"/>
+            <a:tailEnd len="sm" w="sm" type="none"/>
           </a:ln>
         </p:spPr>
       </p:cxnSp>
       <p:cxnSp>
         <p:nvCxnSpPr>
-          <p:cNvPr id="1647705439" name="Google Shape;42;p8"/>
+          <p:cNvPr id="42" name="Google Shape;42;p8"/>
           <p:cNvCxnSpPr/>
           <p:nvPr/>
         </p:nvCxnSpPr>
-        <p:spPr bwMode="auto">
+        <p:spPr>
           <a:xfrm>
             <a:off x="-72550" y="274100"/>
             <a:ext cx="9287400" cy="0"/>
@@ -4223,14 +4225,14 @@
             <a:avLst/>
           </a:prstGeom>
           <a:noFill/>
-          <a:ln w="28575" cap="flat" cmpd="sng">
+          <a:ln cap="flat" cmpd="sng" w="28575">
             <a:solidFill>
               <a:schemeClr val="accent1"/>
             </a:solidFill>
             <a:prstDash val="solid"/>
             <a:round/>
-            <a:headEnd type="none" w="sm" len="sm"/>
-            <a:tailEnd type="none" w="sm" len="sm"/>
+            <a:headEnd len="sm" w="sm" type="none"/>
+            <a:tailEnd len="sm" w="sm" type="none"/>
           </a:ln>
         </p:spPr>
       </p:cxnSp>
@@ -4243,15 +4245,15 @@
 </file>
 
 <file path=ppt/slideLayouts/slideLayout8.xml><?xml version="1.0" encoding="utf-8"?>
-<p:sldLayout xmlns:a="http://schemas.openxmlformats.org/drawingml/2006/main" xmlns:r="http://schemas.openxmlformats.org/officeDocument/2006/relationships" xmlns:p="http://schemas.openxmlformats.org/presentationml/2006/main" xmlns:m="http://schemas.openxmlformats.org/officeDocument/2006/math" xmlns:w="http://schemas.openxmlformats.org/wordprocessingml/2006/main" matchingName="Background 1" preserve="0" showMasterPhAnim="0" showMasterSp="1" userDrawn="1">
+<p:sldLayout xmlns:a="http://schemas.openxmlformats.org/drawingml/2006/main" xmlns:r="http://schemas.openxmlformats.org/officeDocument/2006/relationships" xmlns:mc="http://schemas.openxmlformats.org/markup-compatibility/2006" xmlns:mv="urn:schemas-microsoft-com:mac:vml" xmlns:p="http://schemas.openxmlformats.org/presentationml/2006/main" xmlns:c="http://schemas.openxmlformats.org/drawingml/2006/chart" xmlns:dgm="http://schemas.openxmlformats.org/drawingml/2006/diagram" xmlns:o="urn:schemas-microsoft-com:office:office" xmlns:v="urn:schemas-microsoft-com:vml" xmlns:pvml="urn:schemas-microsoft-com:office:powerpoint" xmlns:com="http://schemas.openxmlformats.org/drawingml/2006/compatibility" xmlns:p14="http://schemas.microsoft.com/office/powerpoint/2010/main" xmlns:p15="http://schemas.microsoft.com/office/powerpoint/2012/main" xmlns:ahyp="http://schemas.microsoft.com/office/drawing/2018/hyperlinkcolor" matchingName="Background 1">
   <p:cSld name="CUSTOM_10_1">
     <p:spTree>
       <p:nvGrpSpPr>
-        <p:cNvPr id="1" name=""/>
+        <p:cNvPr id="43" name="Shape 43"/>
         <p:cNvGrpSpPr/>
         <p:nvPr/>
       </p:nvGrpSpPr>
-      <p:grpSpPr bwMode="auto">
+      <p:grpSpPr>
         <a:xfrm>
           <a:off x="0" y="0"/>
           <a:ext cx="0" cy="0"/>
@@ -4261,11 +4263,11 @@
       </p:grpSpPr>
       <p:cxnSp>
         <p:nvCxnSpPr>
-          <p:cNvPr id="1815930289" name="Google Shape;44;p9"/>
+          <p:cNvPr id="44" name="Google Shape;44;p9"/>
           <p:cNvCxnSpPr/>
           <p:nvPr/>
         </p:nvCxnSpPr>
-        <p:spPr bwMode="auto">
+        <p:spPr>
           <a:xfrm>
             <a:off x="-72550" y="4877450"/>
             <a:ext cx="9287400" cy="0"/>
@@ -4274,24 +4276,24 @@
             <a:avLst/>
           </a:prstGeom>
           <a:noFill/>
-          <a:ln w="28575" cap="flat" cmpd="sng">
+          <a:ln cap="flat" cmpd="sng" w="28575">
             <a:solidFill>
               <a:schemeClr val="accent1"/>
             </a:solidFill>
             <a:prstDash val="solid"/>
             <a:round/>
-            <a:headEnd type="none" w="sm" len="sm"/>
-            <a:tailEnd type="none" w="sm" len="sm"/>
+            <a:headEnd len="sm" w="sm" type="none"/>
+            <a:tailEnd len="sm" w="sm" type="none"/>
           </a:ln>
         </p:spPr>
       </p:cxnSp>
       <p:cxnSp>
         <p:nvCxnSpPr>
-          <p:cNvPr id="1355532976" name="Google Shape;45;p9"/>
+          <p:cNvPr id="45" name="Google Shape;45;p9"/>
           <p:cNvCxnSpPr/>
           <p:nvPr/>
         </p:nvCxnSpPr>
-        <p:spPr bwMode="auto">
+        <p:spPr>
           <a:xfrm>
             <a:off x="-72550" y="274100"/>
             <a:ext cx="9287400" cy="0"/>
@@ -4300,70 +4302,70 @@
             <a:avLst/>
           </a:prstGeom>
           <a:noFill/>
-          <a:ln w="28575" cap="flat" cmpd="sng">
+          <a:ln cap="flat" cmpd="sng" w="28575">
             <a:solidFill>
               <a:schemeClr val="accent1"/>
             </a:solidFill>
             <a:prstDash val="solid"/>
             <a:round/>
-            <a:headEnd type="none" w="sm" len="sm"/>
-            <a:tailEnd type="none" w="sm" len="sm"/>
+            <a:headEnd len="sm" w="sm" type="none"/>
+            <a:tailEnd len="sm" w="sm" type="none"/>
           </a:ln>
         </p:spPr>
       </p:cxnSp>
       <p:cxnSp>
         <p:nvCxnSpPr>
-          <p:cNvPr id="2057378147" name="Google Shape;46;p9"/>
+          <p:cNvPr id="46" name="Google Shape;46;p9"/>
           <p:cNvCxnSpPr/>
           <p:nvPr/>
         </p:nvCxnSpPr>
-        <p:spPr bwMode="auto">
+        <p:spPr>
           <a:xfrm>
             <a:off x="7434174" y="-125600"/>
             <a:ext cx="1993200" cy="1330200"/>
           </a:xfrm>
           <a:prstGeom prst="curvedConnector3">
             <a:avLst>
-              <a:gd name="adj1" fmla="val 50000"/>
+              <a:gd fmla="val 50000" name="adj1"/>
             </a:avLst>
           </a:prstGeom>
           <a:noFill/>
-          <a:ln w="28575" cap="flat" cmpd="sng">
+          <a:ln cap="flat" cmpd="sng" w="28575">
             <a:solidFill>
               <a:schemeClr val="accent2"/>
             </a:solidFill>
             <a:prstDash val="solid"/>
             <a:round/>
-            <a:headEnd type="none" w="sm" len="sm"/>
-            <a:tailEnd type="none" w="sm" len="sm"/>
+            <a:headEnd len="sm" w="sm" type="none"/>
+            <a:tailEnd len="sm" w="sm" type="none"/>
           </a:ln>
         </p:spPr>
       </p:cxnSp>
       <p:cxnSp>
         <p:nvCxnSpPr>
-          <p:cNvPr id="1054202764" name="Google Shape;47;p9"/>
+          <p:cNvPr id="47" name="Google Shape;47;p9"/>
           <p:cNvCxnSpPr/>
           <p:nvPr/>
         </p:nvCxnSpPr>
-        <p:spPr bwMode="auto">
+        <p:spPr>
           <a:xfrm>
             <a:off x="-147274" y="3943475"/>
             <a:ext cx="1993200" cy="1330200"/>
           </a:xfrm>
           <a:prstGeom prst="curvedConnector3">
             <a:avLst>
-              <a:gd name="adj1" fmla="val 50000"/>
+              <a:gd fmla="val 50000" name="adj1"/>
             </a:avLst>
           </a:prstGeom>
           <a:noFill/>
-          <a:ln w="28575" cap="flat" cmpd="sng">
+          <a:ln cap="flat" cmpd="sng" w="28575">
             <a:solidFill>
               <a:schemeClr val="accent2"/>
             </a:solidFill>
             <a:prstDash val="solid"/>
             <a:round/>
-            <a:headEnd type="none" w="sm" len="sm"/>
-            <a:tailEnd type="none" w="sm" len="sm"/>
+            <a:headEnd len="sm" w="sm" type="none"/>
+            <a:tailEnd len="sm" w="sm" type="none"/>
           </a:ln>
         </p:spPr>
       </p:cxnSp>
@@ -4376,15 +4378,15 @@
 </file>
 
 <file path=ppt/slideLayouts/slideLayout9.xml><?xml version="1.0" encoding="utf-8"?>
-<p:sldLayout xmlns:a="http://schemas.openxmlformats.org/drawingml/2006/main" xmlns:r="http://schemas.openxmlformats.org/officeDocument/2006/relationships" xmlns:p="http://schemas.openxmlformats.org/presentationml/2006/main" xmlns:m="http://schemas.openxmlformats.org/officeDocument/2006/math" xmlns:w="http://schemas.openxmlformats.org/wordprocessingml/2006/main" matchingName="Background 2" preserve="0" showMasterPhAnim="0" showMasterSp="1" userDrawn="1">
+<p:sldLayout xmlns:a="http://schemas.openxmlformats.org/drawingml/2006/main" xmlns:r="http://schemas.openxmlformats.org/officeDocument/2006/relationships" xmlns:mc="http://schemas.openxmlformats.org/markup-compatibility/2006" xmlns:mv="urn:schemas-microsoft-com:mac:vml" xmlns:p="http://schemas.openxmlformats.org/presentationml/2006/main" xmlns:c="http://schemas.openxmlformats.org/drawingml/2006/chart" xmlns:dgm="http://schemas.openxmlformats.org/drawingml/2006/diagram" xmlns:o="urn:schemas-microsoft-com:office:office" xmlns:v="urn:schemas-microsoft-com:vml" xmlns:pvml="urn:schemas-microsoft-com:office:powerpoint" xmlns:com="http://schemas.openxmlformats.org/drawingml/2006/compatibility" xmlns:p14="http://schemas.microsoft.com/office/powerpoint/2010/main" xmlns:p15="http://schemas.microsoft.com/office/powerpoint/2012/main" xmlns:ahyp="http://schemas.microsoft.com/office/drawing/2018/hyperlinkcolor" matchingName="Background 2">
   <p:cSld name="CUSTOM_10_1_1">
     <p:spTree>
       <p:nvGrpSpPr>
-        <p:cNvPr id="1" name=""/>
+        <p:cNvPr id="48" name="Shape 48"/>
         <p:cNvGrpSpPr/>
         <p:nvPr/>
       </p:nvGrpSpPr>
-      <p:grpSpPr bwMode="auto">
+      <p:grpSpPr>
         <a:xfrm>
           <a:off x="0" y="0"/>
           <a:ext cx="0" cy="0"/>
@@ -4394,11 +4396,11 @@
       </p:grpSpPr>
       <p:cxnSp>
         <p:nvCxnSpPr>
-          <p:cNvPr id="1769059305" name="Google Shape;49;p10"/>
+          <p:cNvPr id="49" name="Google Shape;49;p10"/>
           <p:cNvCxnSpPr/>
           <p:nvPr/>
         </p:nvCxnSpPr>
-        <p:spPr bwMode="auto">
+        <p:spPr>
           <a:xfrm>
             <a:off x="-72550" y="4877450"/>
             <a:ext cx="9287400" cy="0"/>
@@ -4407,24 +4409,24 @@
             <a:avLst/>
           </a:prstGeom>
           <a:noFill/>
-          <a:ln w="28575" cap="flat" cmpd="sng">
+          <a:ln cap="flat" cmpd="sng" w="28575">
             <a:solidFill>
               <a:schemeClr val="accent1"/>
             </a:solidFill>
             <a:prstDash val="solid"/>
             <a:round/>
-            <a:headEnd type="none" w="sm" len="sm"/>
-            <a:tailEnd type="none" w="sm" len="sm"/>
+            <a:headEnd len="sm" w="sm" type="none"/>
+            <a:tailEnd len="sm" w="sm" type="none"/>
           </a:ln>
         </p:spPr>
       </p:cxnSp>
       <p:cxnSp>
         <p:nvCxnSpPr>
-          <p:cNvPr id="241261044" name="Google Shape;50;p10"/>
+          <p:cNvPr id="50" name="Google Shape;50;p10"/>
           <p:cNvCxnSpPr/>
           <p:nvPr/>
         </p:nvCxnSpPr>
-        <p:spPr bwMode="auto">
+        <p:spPr>
           <a:xfrm>
             <a:off x="-72550" y="274100"/>
             <a:ext cx="9287400" cy="0"/>
@@ -4433,42 +4435,42 @@
             <a:avLst/>
           </a:prstGeom>
           <a:noFill/>
-          <a:ln w="28575" cap="flat" cmpd="sng">
+          <a:ln cap="flat" cmpd="sng" w="28575">
             <a:solidFill>
               <a:schemeClr val="accent1"/>
             </a:solidFill>
             <a:prstDash val="solid"/>
             <a:round/>
-            <a:headEnd type="none" w="sm" len="sm"/>
-            <a:tailEnd type="none" w="sm" len="sm"/>
+            <a:headEnd len="sm" w="sm" type="none"/>
+            <a:tailEnd len="sm" w="sm" type="none"/>
           </a:ln>
         </p:spPr>
       </p:cxnSp>
       <p:cxnSp>
         <p:nvCxnSpPr>
-          <p:cNvPr id="584291096" name="Google Shape;51;p10"/>
+          <p:cNvPr id="51" name="Google Shape;51;p10"/>
           <p:cNvCxnSpPr/>
           <p:nvPr/>
         </p:nvCxnSpPr>
-        <p:spPr bwMode="auto">
+        <p:spPr>
           <a:xfrm flipH="1">
             <a:off x="6772150" y="3663450"/>
             <a:ext cx="2823300" cy="1633200"/>
           </a:xfrm>
           <a:prstGeom prst="curvedConnector3">
             <a:avLst>
-              <a:gd name="adj1" fmla="val 50000"/>
+              <a:gd fmla="val 50000" name="adj1"/>
             </a:avLst>
           </a:prstGeom>
           <a:noFill/>
-          <a:ln w="28575" cap="flat" cmpd="sng">
+          <a:ln cap="flat" cmpd="sng" w="28575">
             <a:solidFill>
               <a:schemeClr val="accent2"/>
             </a:solidFill>
             <a:prstDash val="solid"/>
             <a:round/>
-            <a:headEnd type="none" w="sm" len="sm"/>
-            <a:tailEnd type="none" w="sm" len="sm"/>
+            <a:headEnd len="sm" w="sm" type="none"/>
+            <a:tailEnd len="sm" w="sm" type="none"/>
           </a:ln>
         </p:spPr>
       </p:cxnSp>
@@ -4481,10 +4483,10 @@
 </file>
 
 <file path=ppt/slideMasters/slideMaster1.xml><?xml version="1.0" encoding="utf-8"?>
-<p:sldMaster xmlns:a="http://schemas.openxmlformats.org/drawingml/2006/main" xmlns:r="http://schemas.openxmlformats.org/officeDocument/2006/relationships" xmlns:p="http://schemas.openxmlformats.org/presentationml/2006/main" xmlns:m="http://schemas.openxmlformats.org/officeDocument/2006/math" xmlns:w="http://schemas.openxmlformats.org/wordprocessingml/2006/main" preserve="0">
+<p:sldMaster xmlns:a="http://schemas.openxmlformats.org/drawingml/2006/main" xmlns:r="http://schemas.openxmlformats.org/officeDocument/2006/relationships" xmlns:mc="http://schemas.openxmlformats.org/markup-compatibility/2006" xmlns:mv="urn:schemas-microsoft-com:mac:vml" xmlns:p="http://schemas.openxmlformats.org/presentationml/2006/main" xmlns:c="http://schemas.openxmlformats.org/drawingml/2006/chart" xmlns:dgm="http://schemas.openxmlformats.org/drawingml/2006/diagram" xmlns:o="urn:schemas-microsoft-com:office:office" xmlns:v="urn:schemas-microsoft-com:vml" xmlns:pvml="urn:schemas-microsoft-com:office:powerpoint" xmlns:com="http://schemas.openxmlformats.org/drawingml/2006/compatibility" xmlns:p14="http://schemas.microsoft.com/office/powerpoint/2010/main" xmlns:p15="http://schemas.microsoft.com/office/powerpoint/2012/main" xmlns:ahyp="http://schemas.microsoft.com/office/drawing/2018/hyperlinkcolor">
   <p:cSld name="simple-light-2">
     <p:bg>
-      <p:bgPr shadeToTitle="0">
+      <p:bgPr>
         <a:solidFill>
           <a:schemeClr val="lt1"/>
         </a:solidFill>
@@ -4492,11 +4494,11 @@
     </p:bg>
     <p:spTree>
       <p:nvGrpSpPr>
-        <p:cNvPr id="1" name=""/>
+        <p:cNvPr id="5" name="Shape 5"/>
         <p:cNvGrpSpPr/>
         <p:nvPr/>
       </p:nvGrpSpPr>
-      <p:grpSpPr bwMode="auto">
+      <p:grpSpPr>
         <a:xfrm>
           <a:off x="0" y="0"/>
           <a:ext cx="0" cy="0"/>
@@ -4506,13 +4508,13 @@
       </p:grpSpPr>
       <p:sp>
         <p:nvSpPr>
-          <p:cNvPr id="2042244978" name="Google Shape;6;p1"/>
+          <p:cNvPr id="6" name="Google Shape;6;p1"/>
           <p:cNvSpPr txBox="1"/>
           <p:nvPr>
             <p:ph type="title"/>
           </p:nvPr>
         </p:nvSpPr>
-        <p:spPr bwMode="auto">
+        <p:spPr>
           <a:xfrm>
             <a:off x="713225" y="445025"/>
             <a:ext cx="7717500" cy="572700"/>
@@ -4526,11 +4528,11 @@
           </a:ln>
         </p:spPr>
         <p:txBody>
-          <a:bodyPr spcFirstLastPara="1" wrap="square" lIns="91425" tIns="91425" rIns="91425" bIns="91425" anchor="t" anchorCtr="0">
+          <a:bodyPr anchorCtr="0" anchor="t" bIns="91425" lIns="91425" spcFirstLastPara="1" rIns="91425" wrap="square" tIns="91425">
             <a:noAutofit/>
           </a:bodyPr>
           <a:lstStyle>
-            <a:lvl1pPr marR="0" lvl="0" algn="l" rtl="0">
+            <a:lvl1pPr lvl="0" marR="0" rtl="0" algn="l">
               <a:lnSpc>
                 <a:spcPct val="100000"/>
               </a:lnSpc>
@@ -4546,16 +4548,17 @@
               <a:buSzPts val="3000"/>
               <a:buFont typeface="Vidaloka"/>
               <a:buNone/>
-              <a:defRPr sz="3000" b="0" i="0" u="none" strike="noStrike" cap="none">
+              <a:defRPr b="0" i="0" sz="3000" u="none" cap="none" strike="noStrike">
                 <a:solidFill>
                   <a:schemeClr val="dk1"/>
                 </a:solidFill>
                 <a:latin typeface="Vidaloka"/>
                 <a:ea typeface="Vidaloka"/>
                 <a:cs typeface="Vidaloka"/>
+                <a:sym typeface="Vidaloka"/>
               </a:defRPr>
             </a:lvl1pPr>
-            <a:lvl2pPr marR="0" lvl="1" algn="l" rtl="0">
+            <a:lvl2pPr lvl="1" marR="0" rtl="0" algn="l">
               <a:lnSpc>
                 <a:spcPct val="100000"/>
               </a:lnSpc>
@@ -4571,16 +4574,17 @@
               <a:buSzPts val="3000"/>
               <a:buFont typeface="Arial"/>
               <a:buNone/>
-              <a:defRPr sz="3000" b="0" i="1" u="none" strike="noStrike" cap="none">
+              <a:defRPr b="0" i="1" sz="3000" u="none" cap="none" strike="noStrike">
                 <a:solidFill>
                   <a:schemeClr val="dk1"/>
                 </a:solidFill>
                 <a:latin typeface="Arial"/>
                 <a:ea typeface="Arial"/>
                 <a:cs typeface="Arial"/>
+                <a:sym typeface="Arial"/>
               </a:defRPr>
             </a:lvl2pPr>
-            <a:lvl3pPr marR="0" lvl="2" algn="l" rtl="0">
+            <a:lvl3pPr lvl="2" marR="0" rtl="0" algn="l">
               <a:lnSpc>
                 <a:spcPct val="100000"/>
               </a:lnSpc>
@@ -4596,16 +4600,17 @@
               <a:buSzPts val="3000"/>
               <a:buFont typeface="Arial"/>
               <a:buNone/>
-              <a:defRPr sz="3000" b="0" i="1" u="none" strike="noStrike" cap="none">
+              <a:defRPr b="0" i="1" sz="3000" u="none" cap="none" strike="noStrike">
                 <a:solidFill>
                   <a:schemeClr val="dk1"/>
                 </a:solidFill>
                 <a:latin typeface="Arial"/>
                 <a:ea typeface="Arial"/>
                 <a:cs typeface="Arial"/>
+                <a:sym typeface="Arial"/>
               </a:defRPr>
             </a:lvl3pPr>
-            <a:lvl4pPr marR="0" lvl="3" algn="l" rtl="0">
+            <a:lvl4pPr lvl="3" marR="0" rtl="0" algn="l">
               <a:lnSpc>
                 <a:spcPct val="100000"/>
               </a:lnSpc>
@@ -4621,16 +4626,17 @@
               <a:buSzPts val="3000"/>
               <a:buFont typeface="Arial"/>
               <a:buNone/>
-              <a:defRPr sz="3000" b="0" i="1" u="none" strike="noStrike" cap="none">
+              <a:defRPr b="0" i="1" sz="3000" u="none" cap="none" strike="noStrike">
                 <a:solidFill>
                   <a:schemeClr val="dk1"/>
                 </a:solidFill>
                 <a:latin typeface="Arial"/>
                 <a:ea typeface="Arial"/>
                 <a:cs typeface="Arial"/>
+                <a:sym typeface="Arial"/>
               </a:defRPr>
             </a:lvl4pPr>
-            <a:lvl5pPr marR="0" lvl="4" algn="l" rtl="0">
+            <a:lvl5pPr lvl="4" marR="0" rtl="0" algn="l">
               <a:lnSpc>
                 <a:spcPct val="100000"/>
               </a:lnSpc>
@@ -4646,16 +4652,17 @@
               <a:buSzPts val="3000"/>
               <a:buFont typeface="Arial"/>
               <a:buNone/>
-              <a:defRPr sz="3000" b="0" i="1" u="none" strike="noStrike" cap="none">
+              <a:defRPr b="0" i="1" sz="3000" u="none" cap="none" strike="noStrike">
                 <a:solidFill>
                   <a:schemeClr val="dk1"/>
                 </a:solidFill>
                 <a:latin typeface="Arial"/>
                 <a:ea typeface="Arial"/>
                 <a:cs typeface="Arial"/>
+                <a:sym typeface="Arial"/>
               </a:defRPr>
             </a:lvl5pPr>
-            <a:lvl6pPr marR="0" lvl="5" algn="l" rtl="0">
+            <a:lvl6pPr lvl="5" marR="0" rtl="0" algn="l">
               <a:lnSpc>
                 <a:spcPct val="100000"/>
               </a:lnSpc>
@@ -4671,16 +4678,17 @@
               <a:buSzPts val="3000"/>
               <a:buFont typeface="Arial"/>
               <a:buNone/>
-              <a:defRPr sz="3000" b="0" i="1" u="none" strike="noStrike" cap="none">
+              <a:defRPr b="0" i="1" sz="3000" u="none" cap="none" strike="noStrike">
                 <a:solidFill>
                   <a:schemeClr val="dk1"/>
                 </a:solidFill>
                 <a:latin typeface="Arial"/>
                 <a:ea typeface="Arial"/>
                 <a:cs typeface="Arial"/>
+                <a:sym typeface="Arial"/>
               </a:defRPr>
             </a:lvl6pPr>
-            <a:lvl7pPr marR="0" lvl="6" algn="l" rtl="0">
+            <a:lvl7pPr lvl="6" marR="0" rtl="0" algn="l">
               <a:lnSpc>
                 <a:spcPct val="100000"/>
               </a:lnSpc>
@@ -4696,16 +4704,17 @@
               <a:buSzPts val="3000"/>
               <a:buFont typeface="Arial"/>
               <a:buNone/>
-              <a:defRPr sz="3000" b="0" i="1" u="none" strike="noStrike" cap="none">
+              <a:defRPr b="0" i="1" sz="3000" u="none" cap="none" strike="noStrike">
                 <a:solidFill>
                   <a:schemeClr val="dk1"/>
                 </a:solidFill>
                 <a:latin typeface="Arial"/>
                 <a:ea typeface="Arial"/>
                 <a:cs typeface="Arial"/>
+                <a:sym typeface="Arial"/>
               </a:defRPr>
             </a:lvl7pPr>
-            <a:lvl8pPr marR="0" lvl="7" algn="l" rtl="0">
+            <a:lvl8pPr lvl="7" marR="0" rtl="0" algn="l">
               <a:lnSpc>
                 <a:spcPct val="100000"/>
               </a:lnSpc>
@@ -4721,16 +4730,17 @@
               <a:buSzPts val="3000"/>
               <a:buFont typeface="Arial"/>
               <a:buNone/>
-              <a:defRPr sz="3000" b="0" i="1" u="none" strike="noStrike" cap="none">
+              <a:defRPr b="0" i="1" sz="3000" u="none" cap="none" strike="noStrike">
                 <a:solidFill>
                   <a:schemeClr val="dk1"/>
                 </a:solidFill>
                 <a:latin typeface="Arial"/>
                 <a:ea typeface="Arial"/>
                 <a:cs typeface="Arial"/>
+                <a:sym typeface="Arial"/>
               </a:defRPr>
             </a:lvl8pPr>
-            <a:lvl9pPr marR="0" lvl="8" algn="l" rtl="0">
+            <a:lvl9pPr lvl="8" marR="0" rtl="0" algn="l">
               <a:lnSpc>
                 <a:spcPct val="100000"/>
               </a:lnSpc>
@@ -4746,33 +4756,29 @@
               <a:buSzPts val="3000"/>
               <a:buFont typeface="Arial"/>
               <a:buNone/>
-              <a:defRPr sz="3000" b="0" i="1" u="none" strike="noStrike" cap="none">
+              <a:defRPr b="0" i="1" sz="3000" u="none" cap="none" strike="noStrike">
                 <a:solidFill>
                   <a:schemeClr val="dk1"/>
                 </a:solidFill>
                 <a:latin typeface="Arial"/>
                 <a:ea typeface="Arial"/>
                 <a:cs typeface="Arial"/>
+                <a:sym typeface="Arial"/>
               </a:defRPr>
             </a:lvl9pPr>
           </a:lstStyle>
-          <a:p>
-            <a:pPr>
-              <a:defRPr/>
-            </a:pPr>
-            <a:endParaRPr/>
-          </a:p>
+          <a:p/>
         </p:txBody>
       </p:sp>
       <p:sp>
         <p:nvSpPr>
-          <p:cNvPr id="589818708" name="Google Shape;7;p1"/>
+          <p:cNvPr id="7" name="Google Shape;7;p1"/>
           <p:cNvSpPr txBox="1"/>
           <p:nvPr>
-            <p:ph type="body" idx="1"/>
+            <p:ph idx="1" type="body"/>
           </p:nvPr>
         </p:nvSpPr>
-        <p:spPr bwMode="auto">
+        <p:spPr>
           <a:xfrm>
             <a:off x="713250" y="1152475"/>
             <a:ext cx="7717500" cy="3416400"/>
@@ -4786,11 +4792,11 @@
           </a:ln>
         </p:spPr>
         <p:txBody>
-          <a:bodyPr spcFirstLastPara="1" wrap="square" lIns="91425" tIns="91425" rIns="91425" bIns="91425" anchor="t" anchorCtr="0">
+          <a:bodyPr anchorCtr="0" anchor="t" bIns="91425" lIns="91425" spcFirstLastPara="1" rIns="91425" wrap="square" tIns="91425">
             <a:noAutofit/>
           </a:bodyPr>
           <a:lstStyle>
-            <a:lvl1pPr marL="457200" marR="0" lvl="0" indent="-342900" algn="l" rtl="0">
+            <a:lvl1pPr indent="-342900" lvl="0" marL="457200" marR="0" rtl="0" algn="l">
               <a:lnSpc>
                 <a:spcPct val="114999"/>
               </a:lnSpc>
@@ -4806,16 +4812,17 @@
               <a:buSzPts val="1800"/>
               <a:buFont typeface="Montserrat"/>
               <a:buChar char="●"/>
-              <a:defRPr sz="1800" b="0" i="0" u="none" strike="noStrike" cap="none">
+              <a:defRPr b="0" i="0" sz="1800" u="none" cap="none" strike="noStrike">
                 <a:solidFill>
                   <a:schemeClr val="dk2"/>
                 </a:solidFill>
                 <a:latin typeface="Montserrat"/>
                 <a:ea typeface="Montserrat"/>
                 <a:cs typeface="Montserrat"/>
+                <a:sym typeface="Montserrat"/>
               </a:defRPr>
             </a:lvl1pPr>
-            <a:lvl2pPr marL="914400" marR="0" lvl="1" indent="-317500" algn="l" rtl="0">
+            <a:lvl2pPr indent="-317500" lvl="1" marL="914400" marR="0" rtl="0" algn="l">
               <a:lnSpc>
                 <a:spcPct val="114999"/>
               </a:lnSpc>
@@ -4831,16 +4838,17 @@
               <a:buSzPts val="1400"/>
               <a:buFont typeface="Montserrat"/>
               <a:buChar char="○"/>
-              <a:defRPr sz="1400" b="0" i="0" u="none" strike="noStrike" cap="none">
+              <a:defRPr b="0" i="0" sz="1400" u="none" cap="none" strike="noStrike">
                 <a:solidFill>
                   <a:schemeClr val="dk2"/>
                 </a:solidFill>
                 <a:latin typeface="Montserrat"/>
                 <a:ea typeface="Montserrat"/>
                 <a:cs typeface="Montserrat"/>
+                <a:sym typeface="Montserrat"/>
               </a:defRPr>
             </a:lvl2pPr>
-            <a:lvl3pPr marL="1371600" marR="0" lvl="2" indent="-317500" algn="l" rtl="0">
+            <a:lvl3pPr indent="-317500" lvl="2" marL="1371600" marR="0" rtl="0" algn="l">
               <a:lnSpc>
                 <a:spcPct val="114999"/>
               </a:lnSpc>
@@ -4856,16 +4864,17 @@
               <a:buSzPts val="1400"/>
               <a:buFont typeface="Montserrat"/>
               <a:buChar char="■"/>
-              <a:defRPr sz="1400" b="0" i="0" u="none" strike="noStrike" cap="none">
+              <a:defRPr b="0" i="0" sz="1400" u="none" cap="none" strike="noStrike">
                 <a:solidFill>
                   <a:schemeClr val="dk2"/>
                 </a:solidFill>
                 <a:latin typeface="Montserrat"/>
                 <a:ea typeface="Montserrat"/>
                 <a:cs typeface="Montserrat"/>
+                <a:sym typeface="Montserrat"/>
               </a:defRPr>
             </a:lvl3pPr>
-            <a:lvl4pPr marL="1828800" marR="0" lvl="3" indent="-317500" algn="l" rtl="0">
+            <a:lvl4pPr indent="-317500" lvl="3" marL="1828800" marR="0" rtl="0" algn="l">
               <a:lnSpc>
                 <a:spcPct val="114999"/>
               </a:lnSpc>
@@ -4881,16 +4890,17 @@
               <a:buSzPts val="1400"/>
               <a:buFont typeface="Montserrat"/>
               <a:buChar char="●"/>
-              <a:defRPr sz="1400" b="0" i="0" u="none" strike="noStrike" cap="none">
+              <a:defRPr b="0" i="0" sz="1400" u="none" cap="none" strike="noStrike">
                 <a:solidFill>
                   <a:schemeClr val="dk2"/>
                 </a:solidFill>
                 <a:latin typeface="Montserrat"/>
                 <a:ea typeface="Montserrat"/>
                 <a:cs typeface="Montserrat"/>
+                <a:sym typeface="Montserrat"/>
               </a:defRPr>
             </a:lvl4pPr>
-            <a:lvl5pPr marL="2286000" marR="0" lvl="4" indent="-317500" algn="l" rtl="0">
+            <a:lvl5pPr indent="-317500" lvl="4" marL="2286000" marR="0" rtl="0" algn="l">
               <a:lnSpc>
                 <a:spcPct val="114999"/>
               </a:lnSpc>
@@ -4906,16 +4916,17 @@
               <a:buSzPts val="1400"/>
               <a:buFont typeface="Montserrat"/>
               <a:buChar char="○"/>
-              <a:defRPr sz="1400" b="0" i="0" u="none" strike="noStrike" cap="none">
+              <a:defRPr b="0" i="0" sz="1400" u="none" cap="none" strike="noStrike">
                 <a:solidFill>
                   <a:schemeClr val="dk2"/>
                 </a:solidFill>
                 <a:latin typeface="Montserrat"/>
                 <a:ea typeface="Montserrat"/>
                 <a:cs typeface="Montserrat"/>
+                <a:sym typeface="Montserrat"/>
               </a:defRPr>
             </a:lvl5pPr>
-            <a:lvl6pPr marL="2743200" marR="0" lvl="5" indent="-317500" algn="l" rtl="0">
+            <a:lvl6pPr indent="-317500" lvl="5" marL="2743200" marR="0" rtl="0" algn="l">
               <a:lnSpc>
                 <a:spcPct val="114999"/>
               </a:lnSpc>
@@ -4931,16 +4942,17 @@
               <a:buSzPts val="1400"/>
               <a:buFont typeface="Montserrat"/>
               <a:buChar char="■"/>
-              <a:defRPr sz="1400" b="0" i="0" u="none" strike="noStrike" cap="none">
+              <a:defRPr b="0" i="0" sz="1400" u="none" cap="none" strike="noStrike">
                 <a:solidFill>
                   <a:schemeClr val="dk2"/>
                 </a:solidFill>
                 <a:latin typeface="Montserrat"/>
                 <a:ea typeface="Montserrat"/>
                 <a:cs typeface="Montserrat"/>
+                <a:sym typeface="Montserrat"/>
               </a:defRPr>
             </a:lvl6pPr>
-            <a:lvl7pPr marL="3200400" marR="0" lvl="6" indent="-317500" algn="l" rtl="0">
+            <a:lvl7pPr indent="-317500" lvl="6" marL="3200400" marR="0" rtl="0" algn="l">
               <a:lnSpc>
                 <a:spcPct val="114999"/>
               </a:lnSpc>
@@ -4956,16 +4968,17 @@
               <a:buSzPts val="1400"/>
               <a:buFont typeface="Montserrat"/>
               <a:buChar char="●"/>
-              <a:defRPr sz="1400" b="0" i="0" u="none" strike="noStrike" cap="none">
+              <a:defRPr b="0" i="0" sz="1400" u="none" cap="none" strike="noStrike">
                 <a:solidFill>
                   <a:schemeClr val="dk2"/>
                 </a:solidFill>
                 <a:latin typeface="Montserrat"/>
                 <a:ea typeface="Montserrat"/>
                 <a:cs typeface="Montserrat"/>
+                <a:sym typeface="Montserrat"/>
               </a:defRPr>
             </a:lvl7pPr>
-            <a:lvl8pPr marL="3657600" marR="0" lvl="7" indent="-317500" algn="l" rtl="0">
+            <a:lvl8pPr indent="-317500" lvl="7" marL="3657600" marR="0" rtl="0" algn="l">
               <a:lnSpc>
                 <a:spcPct val="114999"/>
               </a:lnSpc>
@@ -4981,16 +4994,17 @@
               <a:buSzPts val="1400"/>
               <a:buFont typeface="Montserrat"/>
               <a:buChar char="○"/>
-              <a:defRPr sz="1400" b="0" i="0" u="none" strike="noStrike" cap="none">
+              <a:defRPr b="0" i="0" sz="1400" u="none" cap="none" strike="noStrike">
                 <a:solidFill>
                   <a:schemeClr val="dk2"/>
                 </a:solidFill>
                 <a:latin typeface="Montserrat"/>
                 <a:ea typeface="Montserrat"/>
                 <a:cs typeface="Montserrat"/>
+                <a:sym typeface="Montserrat"/>
               </a:defRPr>
             </a:lvl8pPr>
-            <a:lvl9pPr marL="4114800" marR="0" lvl="8" indent="-317500" algn="l" rtl="0">
+            <a:lvl9pPr indent="-317500" lvl="8" marL="4114800" marR="0" rtl="0" algn="l">
               <a:lnSpc>
                 <a:spcPct val="114999"/>
               </a:lnSpc>
@@ -5006,43 +5020,39 @@
               <a:buSzPts val="1400"/>
               <a:buFont typeface="Montserrat"/>
               <a:buChar char="■"/>
-              <a:defRPr sz="1400" b="0" i="0" u="none" strike="noStrike" cap="none">
+              <a:defRPr b="0" i="0" sz="1400" u="none" cap="none" strike="noStrike">
                 <a:solidFill>
                   <a:schemeClr val="dk2"/>
                 </a:solidFill>
                 <a:latin typeface="Montserrat"/>
                 <a:ea typeface="Montserrat"/>
                 <a:cs typeface="Montserrat"/>
+                <a:sym typeface="Montserrat"/>
               </a:defRPr>
             </a:lvl9pPr>
           </a:lstStyle>
-          <a:p>
-            <a:pPr>
-              <a:defRPr/>
-            </a:pPr>
-            <a:endParaRPr/>
-          </a:p>
+          <a:p/>
         </p:txBody>
       </p:sp>
     </p:spTree>
   </p:cSld>
-  <p:clrMap bg1="lt1" tx1="dk1" bg2="dk2" tx2="lt2" accent1="accent1" accent2="accent2" accent3="accent3" accent4="accent4" accent5="accent5" accent6="accent6" hlink="hlink" folHlink="folHlink"/>
+  <p:clrMap accent1="accent1" accent2="accent2" accent3="accent3" accent4="accent4" accent5="accent5" accent6="accent6" bg1="lt1" bg2="dk2" tx1="dk1" tx2="lt2" folHlink="folHlink" hlink="hlink"/>
   <p:sldLayoutIdLst>
-    <p:sldLayoutId id="2147483649" r:id="rId1"/>
-    <p:sldLayoutId id="2147483650" r:id="rId2"/>
-    <p:sldLayoutId id="2147483651" r:id="rId3"/>
-    <p:sldLayoutId id="2147483652" r:id="rId4"/>
-    <p:sldLayoutId id="2147483653" r:id="rId5"/>
-    <p:sldLayoutId id="2147483654" r:id="rId6"/>
-    <p:sldLayoutId id="2147483655" r:id="rId7"/>
-    <p:sldLayoutId id="2147483656" r:id="rId8"/>
-    <p:sldLayoutId id="2147483657" r:id="rId9"/>
-    <p:sldLayoutId id="2147483658" r:id="rId10"/>
+    <p:sldLayoutId id="2147483648" r:id="rId1"/>
+    <p:sldLayoutId id="2147483649" r:id="rId2"/>
+    <p:sldLayoutId id="2147483650" r:id="rId3"/>
+    <p:sldLayoutId id="2147483651" r:id="rId4"/>
+    <p:sldLayoutId id="2147483652" r:id="rId5"/>
+    <p:sldLayoutId id="2147483653" r:id="rId6"/>
+    <p:sldLayoutId id="2147483654" r:id="rId7"/>
+    <p:sldLayoutId id="2147483655" r:id="rId8"/>
+    <p:sldLayoutId id="2147483656" r:id="rId9"/>
+    <p:sldLayoutId id="2147483657" r:id="rId10"/>
   </p:sldLayoutIdLst>
   <p:hf dt="0" ftr="0" hdr="0" sldNum="0"/>
   <p:txStyles>
     <p:titleStyle>
-      <a:defPPr marR="0" lvl="0" algn="l" rtl="0">
+      <a:defPPr lvl="0" marR="0" rtl="0" algn="l">
         <a:lnSpc>
           <a:spcPct val="100000"/>
         </a:lnSpc>
@@ -5053,7 +5063,7 @@
           <a:spcPts val="0"/>
         </a:spcAft>
       </a:defPPr>
-      <a:lvl1pPr marR="0" lvl="0" algn="l" rtl="0">
+      <a:lvl1pPr lvl="0" marR="0" rtl="0" algn="l">
         <a:lnSpc>
           <a:spcPct val="100000"/>
         </a:lnSpc>
@@ -5067,16 +5077,17 @@
           <a:srgbClr val="000000"/>
         </a:buClr>
         <a:buFont typeface="Arial"/>
-        <a:defRPr sz="1400" b="0" i="0" u="none" strike="noStrike" cap="none">
+        <a:defRPr b="0" i="0" sz="1400" u="none" cap="none" strike="noStrike">
           <a:solidFill>
             <a:srgbClr val="000000"/>
           </a:solidFill>
           <a:latin typeface="Arial"/>
           <a:ea typeface="Arial"/>
           <a:cs typeface="Arial"/>
+          <a:sym typeface="Arial"/>
         </a:defRPr>
       </a:lvl1pPr>
-      <a:lvl2pPr marR="0" lvl="1" algn="l" rtl="0">
+      <a:lvl2pPr lvl="1" marR="0" rtl="0" algn="l">
         <a:lnSpc>
           <a:spcPct val="100000"/>
         </a:lnSpc>
@@ -5090,16 +5101,17 @@
           <a:srgbClr val="000000"/>
         </a:buClr>
         <a:buFont typeface="Arial"/>
-        <a:defRPr sz="1400" b="0" i="0" u="none" strike="noStrike" cap="none">
+        <a:defRPr b="0" i="0" sz="1400" u="none" cap="none" strike="noStrike">
           <a:solidFill>
             <a:srgbClr val="000000"/>
           </a:solidFill>
           <a:latin typeface="Arial"/>
           <a:ea typeface="Arial"/>
           <a:cs typeface="Arial"/>
+          <a:sym typeface="Arial"/>
         </a:defRPr>
       </a:lvl2pPr>
-      <a:lvl3pPr marR="0" lvl="2" algn="l" rtl="0">
+      <a:lvl3pPr lvl="2" marR="0" rtl="0" algn="l">
         <a:lnSpc>
           <a:spcPct val="100000"/>
         </a:lnSpc>
@@ -5113,16 +5125,17 @@
           <a:srgbClr val="000000"/>
         </a:buClr>
         <a:buFont typeface="Arial"/>
-        <a:defRPr sz="1400" b="0" i="0" u="none" strike="noStrike" cap="none">
+        <a:defRPr b="0" i="0" sz="1400" u="none" cap="none" strike="noStrike">
           <a:solidFill>
             <a:srgbClr val="000000"/>
           </a:solidFill>
           <a:latin typeface="Arial"/>
           <a:ea typeface="Arial"/>
           <a:cs typeface="Arial"/>
+          <a:sym typeface="Arial"/>
         </a:defRPr>
       </a:lvl3pPr>
-      <a:lvl4pPr marR="0" lvl="3" algn="l" rtl="0">
+      <a:lvl4pPr lvl="3" marR="0" rtl="0" algn="l">
         <a:lnSpc>
           <a:spcPct val="100000"/>
         </a:lnSpc>
@@ -5136,16 +5149,17 @@
           <a:srgbClr val="000000"/>
         </a:buClr>
         <a:buFont typeface="Arial"/>
-        <a:defRPr sz="1400" b="0" i="0" u="none" strike="noStrike" cap="none">
+        <a:defRPr b="0" i="0" sz="1400" u="none" cap="none" strike="noStrike">
           <a:solidFill>
             <a:srgbClr val="000000"/>
           </a:solidFill>
           <a:latin typeface="Arial"/>
           <a:ea typeface="Arial"/>
           <a:cs typeface="Arial"/>
+          <a:sym typeface="Arial"/>
         </a:defRPr>
       </a:lvl4pPr>
-      <a:lvl5pPr marR="0" lvl="4" algn="l" rtl="0">
+      <a:lvl5pPr lvl="4" marR="0" rtl="0" algn="l">
         <a:lnSpc>
           <a:spcPct val="100000"/>
         </a:lnSpc>
@@ -5159,16 +5173,17 @@
           <a:srgbClr val="000000"/>
         </a:buClr>
         <a:buFont typeface="Arial"/>
-        <a:defRPr sz="1400" b="0" i="0" u="none" strike="noStrike" cap="none">
+        <a:defRPr b="0" i="0" sz="1400" u="none" cap="none" strike="noStrike">
           <a:solidFill>
             <a:srgbClr val="000000"/>
           </a:solidFill>
           <a:latin typeface="Arial"/>
           <a:ea typeface="Arial"/>
           <a:cs typeface="Arial"/>
+          <a:sym typeface="Arial"/>
         </a:defRPr>
       </a:lvl5pPr>
-      <a:lvl6pPr marR="0" lvl="5" algn="l" rtl="0">
+      <a:lvl6pPr lvl="5" marR="0" rtl="0" algn="l">
         <a:lnSpc>
           <a:spcPct val="100000"/>
         </a:lnSpc>
@@ -5182,16 +5197,17 @@
           <a:srgbClr val="000000"/>
         </a:buClr>
         <a:buFont typeface="Arial"/>
-        <a:defRPr sz="1400" b="0" i="0" u="none" strike="noStrike" cap="none">
+        <a:defRPr b="0" i="0" sz="1400" u="none" cap="none" strike="noStrike">
           <a:solidFill>
             <a:srgbClr val="000000"/>
           </a:solidFill>
           <a:latin typeface="Arial"/>
           <a:ea typeface="Arial"/>
           <a:cs typeface="Arial"/>
+          <a:sym typeface="Arial"/>
         </a:defRPr>
       </a:lvl6pPr>
-      <a:lvl7pPr marR="0" lvl="6" algn="l" rtl="0">
+      <a:lvl7pPr lvl="6" marR="0" rtl="0" algn="l">
         <a:lnSpc>
           <a:spcPct val="100000"/>
         </a:lnSpc>
@@ -5205,16 +5221,17 @@
           <a:srgbClr val="000000"/>
         </a:buClr>
         <a:buFont typeface="Arial"/>
-        <a:defRPr sz="1400" b="0" i="0" u="none" strike="noStrike" cap="none">
+        <a:defRPr b="0" i="0" sz="1400" u="none" cap="none" strike="noStrike">
           <a:solidFill>
             <a:srgbClr val="000000"/>
           </a:solidFill>
           <a:latin typeface="Arial"/>
           <a:ea typeface="Arial"/>
           <a:cs typeface="Arial"/>
+          <a:sym typeface="Arial"/>
         </a:defRPr>
       </a:lvl7pPr>
-      <a:lvl8pPr marR="0" lvl="7" algn="l" rtl="0">
+      <a:lvl8pPr lvl="7" marR="0" rtl="0" algn="l">
         <a:lnSpc>
           <a:spcPct val="100000"/>
         </a:lnSpc>
@@ -5228,16 +5245,17 @@
           <a:srgbClr val="000000"/>
         </a:buClr>
         <a:buFont typeface="Arial"/>
-        <a:defRPr sz="1400" b="0" i="0" u="none" strike="noStrike" cap="none">
+        <a:defRPr b="0" i="0" sz="1400" u="none" cap="none" strike="noStrike">
           <a:solidFill>
             <a:srgbClr val="000000"/>
           </a:solidFill>
           <a:latin typeface="Arial"/>
           <a:ea typeface="Arial"/>
           <a:cs typeface="Arial"/>
+          <a:sym typeface="Arial"/>
         </a:defRPr>
       </a:lvl8pPr>
-      <a:lvl9pPr marR="0" lvl="8" algn="l" rtl="0">
+      <a:lvl9pPr lvl="8" marR="0" rtl="0" algn="l">
         <a:lnSpc>
           <a:spcPct val="100000"/>
         </a:lnSpc>
@@ -5251,18 +5269,19 @@
           <a:srgbClr val="000000"/>
         </a:buClr>
         <a:buFont typeface="Arial"/>
-        <a:defRPr sz="1400" b="0" i="0" u="none" strike="noStrike" cap="none">
+        <a:defRPr b="0" i="0" sz="1400" u="none" cap="none" strike="noStrike">
           <a:solidFill>
             <a:srgbClr val="000000"/>
           </a:solidFill>
           <a:latin typeface="Arial"/>
           <a:ea typeface="Arial"/>
           <a:cs typeface="Arial"/>
+          <a:sym typeface="Arial"/>
         </a:defRPr>
       </a:lvl9pPr>
     </p:titleStyle>
     <p:bodyStyle>
-      <a:defPPr marR="0" lvl="0" algn="l" rtl="0">
+      <a:defPPr lvl="0" marR="0" rtl="0" algn="l">
         <a:lnSpc>
           <a:spcPct val="100000"/>
         </a:lnSpc>
@@ -5273,7 +5292,7 @@
           <a:spcPts val="0"/>
         </a:spcAft>
       </a:defPPr>
-      <a:lvl1pPr marR="0" lvl="0" algn="l" rtl="0">
+      <a:lvl1pPr lvl="0" marR="0" rtl="0" algn="l">
         <a:lnSpc>
           <a:spcPct val="100000"/>
         </a:lnSpc>
@@ -5287,16 +5306,17 @@
           <a:srgbClr val="000000"/>
         </a:buClr>
         <a:buFont typeface="Arial"/>
-        <a:defRPr sz="1400" b="0" i="0" u="none" strike="noStrike" cap="none">
+        <a:defRPr b="0" i="0" sz="1400" u="none" cap="none" strike="noStrike">
           <a:solidFill>
             <a:srgbClr val="000000"/>
           </a:solidFill>
           <a:latin typeface="Arial"/>
           <a:ea typeface="Arial"/>
           <a:cs typeface="Arial"/>
+          <a:sym typeface="Arial"/>
         </a:defRPr>
       </a:lvl1pPr>
-      <a:lvl2pPr marR="0" lvl="1" algn="l" rtl="0">
+      <a:lvl2pPr lvl="1" marR="0" rtl="0" algn="l">
         <a:lnSpc>
           <a:spcPct val="100000"/>
         </a:lnSpc>
@@ -5310,16 +5330,17 @@
           <a:srgbClr val="000000"/>
         </a:buClr>
         <a:buFont typeface="Arial"/>
-        <a:defRPr sz="1400" b="0" i="0" u="none" strike="noStrike" cap="none">
+        <a:defRPr b="0" i="0" sz="1400" u="none" cap="none" strike="noStrike">
           <a:solidFill>
             <a:srgbClr val="000000"/>
           </a:solidFill>
           <a:latin typeface="Arial"/>
           <a:ea typeface="Arial"/>
           <a:cs typeface="Arial"/>
+          <a:sym typeface="Arial"/>
         </a:defRPr>
       </a:lvl2pPr>
-      <a:lvl3pPr marR="0" lvl="2" algn="l" rtl="0">
+      <a:lvl3pPr lvl="2" marR="0" rtl="0" algn="l">
         <a:lnSpc>
           <a:spcPct val="100000"/>
         </a:lnSpc>
@@ -5333,16 +5354,17 @@
           <a:srgbClr val="000000"/>
         </a:buClr>
         <a:buFont typeface="Arial"/>
-        <a:defRPr sz="1400" b="0" i="0" u="none" strike="noStrike" cap="none">
+        <a:defRPr b="0" i="0" sz="1400" u="none" cap="none" strike="noStrike">
           <a:solidFill>
             <a:srgbClr val="000000"/>
           </a:solidFill>
           <a:latin typeface="Arial"/>
           <a:ea typeface="Arial"/>
           <a:cs typeface="Arial"/>
+          <a:sym typeface="Arial"/>
         </a:defRPr>
       </a:lvl3pPr>
-      <a:lvl4pPr marR="0" lvl="3" algn="l" rtl="0">
+      <a:lvl4pPr lvl="3" marR="0" rtl="0" algn="l">
         <a:lnSpc>
           <a:spcPct val="100000"/>
         </a:lnSpc>
@@ -5356,16 +5378,17 @@
           <a:srgbClr val="000000"/>
         </a:buClr>
         <a:buFont typeface="Arial"/>
-        <a:defRPr sz="1400" b="0" i="0" u="none" strike="noStrike" cap="none">
+        <a:defRPr b="0" i="0" sz="1400" u="none" cap="none" strike="noStrike">
           <a:solidFill>
             <a:srgbClr val="000000"/>
           </a:solidFill>
           <a:latin typeface="Arial"/>
           <a:ea typeface="Arial"/>
           <a:cs typeface="Arial"/>
+          <a:sym typeface="Arial"/>
         </a:defRPr>
       </a:lvl4pPr>
-      <a:lvl5pPr marR="0" lvl="4" algn="l" rtl="0">
+      <a:lvl5pPr lvl="4" marR="0" rtl="0" algn="l">
         <a:lnSpc>
           <a:spcPct val="100000"/>
         </a:lnSpc>
@@ -5379,16 +5402,17 @@
           <a:srgbClr val="000000"/>
         </a:buClr>
         <a:buFont typeface="Arial"/>
-        <a:defRPr sz="1400" b="0" i="0" u="none" strike="noStrike" cap="none">
+        <a:defRPr b="0" i="0" sz="1400" u="none" cap="none" strike="noStrike">
           <a:solidFill>
             <a:srgbClr val="000000"/>
           </a:solidFill>
           <a:latin typeface="Arial"/>
           <a:ea typeface="Arial"/>
           <a:cs typeface="Arial"/>
+          <a:sym typeface="Arial"/>
         </a:defRPr>
       </a:lvl5pPr>
-      <a:lvl6pPr marR="0" lvl="5" algn="l" rtl="0">
+      <a:lvl6pPr lvl="5" marR="0" rtl="0" algn="l">
         <a:lnSpc>
           <a:spcPct val="100000"/>
         </a:lnSpc>
@@ -5402,16 +5426,17 @@
           <a:srgbClr val="000000"/>
         </a:buClr>
         <a:buFont typeface="Arial"/>
-        <a:defRPr sz="1400" b="0" i="0" u="none" strike="noStrike" cap="none">
+        <a:defRPr b="0" i="0" sz="1400" u="none" cap="none" strike="noStrike">
           <a:solidFill>
             <a:srgbClr val="000000"/>
           </a:solidFill>
           <a:latin typeface="Arial"/>
           <a:ea typeface="Arial"/>
           <a:cs typeface="Arial"/>
+          <a:sym typeface="Arial"/>
         </a:defRPr>
       </a:lvl6pPr>
-      <a:lvl7pPr marR="0" lvl="6" algn="l" rtl="0">
+      <a:lvl7pPr lvl="6" marR="0" rtl="0" algn="l">
         <a:lnSpc>
           <a:spcPct val="100000"/>
         </a:lnSpc>
@@ -5425,16 +5450,17 @@
           <a:srgbClr val="000000"/>
         </a:buClr>
         <a:buFont typeface="Arial"/>
-        <a:defRPr sz="1400" b="0" i="0" u="none" strike="noStrike" cap="none">
+        <a:defRPr b="0" i="0" sz="1400" u="none" cap="none" strike="noStrike">
           <a:solidFill>
             <a:srgbClr val="000000"/>
           </a:solidFill>
           <a:latin typeface="Arial"/>
           <a:ea typeface="Arial"/>
           <a:cs typeface="Arial"/>
+          <a:sym typeface="Arial"/>
         </a:defRPr>
       </a:lvl7pPr>
-      <a:lvl8pPr marR="0" lvl="7" algn="l" rtl="0">
+      <a:lvl8pPr lvl="7" marR="0" rtl="0" algn="l">
         <a:lnSpc>
           <a:spcPct val="100000"/>
         </a:lnSpc>
@@ -5448,16 +5474,17 @@
           <a:srgbClr val="000000"/>
         </a:buClr>
         <a:buFont typeface="Arial"/>
-        <a:defRPr sz="1400" b="0" i="0" u="none" strike="noStrike" cap="none">
+        <a:defRPr b="0" i="0" sz="1400" u="none" cap="none" strike="noStrike">
           <a:solidFill>
             <a:srgbClr val="000000"/>
           </a:solidFill>
           <a:latin typeface="Arial"/>
           <a:ea typeface="Arial"/>
           <a:cs typeface="Arial"/>
+          <a:sym typeface="Arial"/>
         </a:defRPr>
       </a:lvl8pPr>
-      <a:lvl9pPr marR="0" lvl="8" algn="l" rtl="0">
+      <a:lvl9pPr lvl="8" marR="0" rtl="0" algn="l">
         <a:lnSpc>
           <a:spcPct val="100000"/>
         </a:lnSpc>
@@ -5471,18 +5498,19 @@
           <a:srgbClr val="000000"/>
         </a:buClr>
         <a:buFont typeface="Arial"/>
-        <a:defRPr sz="1400" b="0" i="0" u="none" strike="noStrike" cap="none">
+        <a:defRPr b="0" i="0" sz="1400" u="none" cap="none" strike="noStrike">
           <a:solidFill>
             <a:srgbClr val="000000"/>
           </a:solidFill>
           <a:latin typeface="Arial"/>
           <a:ea typeface="Arial"/>
           <a:cs typeface="Arial"/>
+          <a:sym typeface="Arial"/>
         </a:defRPr>
       </a:lvl9pPr>
     </p:bodyStyle>
     <p:otherStyle>
-      <a:defPPr marR="0" lvl="0" algn="l" rtl="0">
+      <a:defPPr lvl="0" marR="0" rtl="0" algn="l">
         <a:lnSpc>
           <a:spcPct val="100000"/>
         </a:lnSpc>
@@ -5493,7 +5521,7 @@
           <a:spcPts val="0"/>
         </a:spcAft>
       </a:defPPr>
-      <a:lvl1pPr marR="0" lvl="0" algn="l" rtl="0">
+      <a:lvl1pPr lvl="0" marR="0" rtl="0" algn="l">
         <a:lnSpc>
           <a:spcPct val="100000"/>
         </a:lnSpc>
@@ -5507,16 +5535,17 @@
           <a:srgbClr val="000000"/>
         </a:buClr>
         <a:buFont typeface="Arial"/>
-        <a:defRPr sz="1400" b="0" i="0" u="none" strike="noStrike" cap="none">
+        <a:defRPr b="0" i="0" sz="1400" u="none" cap="none" strike="noStrike">
           <a:solidFill>
             <a:srgbClr val="000000"/>
           </a:solidFill>
           <a:latin typeface="Arial"/>
           <a:ea typeface="Arial"/>
           <a:cs typeface="Arial"/>
+          <a:sym typeface="Arial"/>
         </a:defRPr>
       </a:lvl1pPr>
-      <a:lvl2pPr marR="0" lvl="1" algn="l" rtl="0">
+      <a:lvl2pPr lvl="1" marR="0" rtl="0" algn="l">
         <a:lnSpc>
           <a:spcPct val="100000"/>
         </a:lnSpc>
@@ -5530,16 +5559,17 @@
           <a:srgbClr val="000000"/>
         </a:buClr>
         <a:buFont typeface="Arial"/>
-        <a:defRPr sz="1400" b="0" i="0" u="none" strike="noStrike" cap="none">
+        <a:defRPr b="0" i="0" sz="1400" u="none" cap="none" strike="noStrike">
           <a:solidFill>
             <a:srgbClr val="000000"/>
           </a:solidFill>
           <a:latin typeface="Arial"/>
           <a:ea typeface="Arial"/>
           <a:cs typeface="Arial"/>
+          <a:sym typeface="Arial"/>
         </a:defRPr>
       </a:lvl2pPr>
-      <a:lvl3pPr marR="0" lvl="2" algn="l" rtl="0">
+      <a:lvl3pPr lvl="2" marR="0" rtl="0" algn="l">
         <a:lnSpc>
           <a:spcPct val="100000"/>
         </a:lnSpc>
@@ -5553,16 +5583,17 @@
           <a:srgbClr val="000000"/>
         </a:buClr>
         <a:buFont typeface="Arial"/>
-        <a:defRPr sz="1400" b="0" i="0" u="none" strike="noStrike" cap="none">
+        <a:defRPr b="0" i="0" sz="1400" u="none" cap="none" strike="noStrike">
           <a:solidFill>
             <a:srgbClr val="000000"/>
           </a:solidFill>
           <a:latin typeface="Arial"/>
           <a:ea typeface="Arial"/>
           <a:cs typeface="Arial"/>
+          <a:sym typeface="Arial"/>
         </a:defRPr>
       </a:lvl3pPr>
-      <a:lvl4pPr marR="0" lvl="3" algn="l" rtl="0">
+      <a:lvl4pPr lvl="3" marR="0" rtl="0" algn="l">
         <a:lnSpc>
           <a:spcPct val="100000"/>
         </a:lnSpc>
@@ -5576,16 +5607,17 @@
           <a:srgbClr val="000000"/>
         </a:buClr>
         <a:buFont typeface="Arial"/>
-        <a:defRPr sz="1400" b="0" i="0" u="none" strike="noStrike" cap="none">
+        <a:defRPr b="0" i="0" sz="1400" u="none" cap="none" strike="noStrike">
           <a:solidFill>
             <a:srgbClr val="000000"/>
           </a:solidFill>
           <a:latin typeface="Arial"/>
           <a:ea typeface="Arial"/>
           <a:cs typeface="Arial"/>
+          <a:sym typeface="Arial"/>
         </a:defRPr>
       </a:lvl4pPr>
-      <a:lvl5pPr marR="0" lvl="4" algn="l" rtl="0">
+      <a:lvl5pPr lvl="4" marR="0" rtl="0" algn="l">
         <a:lnSpc>
           <a:spcPct val="100000"/>
         </a:lnSpc>
@@ -5599,16 +5631,17 @@
           <a:srgbClr val="000000"/>
         </a:buClr>
         <a:buFont typeface="Arial"/>
-        <a:defRPr sz="1400" b="0" i="0" u="none" strike="noStrike" cap="none">
+        <a:defRPr b="0" i="0" sz="1400" u="none" cap="none" strike="noStrike">
           <a:solidFill>
             <a:srgbClr val="000000"/>
           </a:solidFill>
           <a:latin typeface="Arial"/>
           <a:ea typeface="Arial"/>
           <a:cs typeface="Arial"/>
+          <a:sym typeface="Arial"/>
         </a:defRPr>
       </a:lvl5pPr>
-      <a:lvl6pPr marR="0" lvl="5" algn="l" rtl="0">
+      <a:lvl6pPr lvl="5" marR="0" rtl="0" algn="l">
         <a:lnSpc>
           <a:spcPct val="100000"/>
         </a:lnSpc>
@@ -5622,16 +5655,17 @@
           <a:srgbClr val="000000"/>
         </a:buClr>
         <a:buFont typeface="Arial"/>
-        <a:defRPr sz="1400" b="0" i="0" u="none" strike="noStrike" cap="none">
+        <a:defRPr b="0" i="0" sz="1400" u="none" cap="none" strike="noStrike">
           <a:solidFill>
             <a:srgbClr val="000000"/>
           </a:solidFill>
           <a:latin typeface="Arial"/>
           <a:ea typeface="Arial"/>
           <a:cs typeface="Arial"/>
+          <a:sym typeface="Arial"/>
         </a:defRPr>
       </a:lvl6pPr>
-      <a:lvl7pPr marR="0" lvl="6" algn="l" rtl="0">
+      <a:lvl7pPr lvl="6" marR="0" rtl="0" algn="l">
         <a:lnSpc>
           <a:spcPct val="100000"/>
         </a:lnSpc>
@@ -5645,16 +5679,17 @@
           <a:srgbClr val="000000"/>
         </a:buClr>
         <a:buFont typeface="Arial"/>
-        <a:defRPr sz="1400" b="0" i="0" u="none" strike="noStrike" cap="none">
+        <a:defRPr b="0" i="0" sz="1400" u="none" cap="none" strike="noStrike">
           <a:solidFill>
             <a:srgbClr val="000000"/>
           </a:solidFill>
           <a:latin typeface="Arial"/>
           <a:ea typeface="Arial"/>
           <a:cs typeface="Arial"/>
+          <a:sym typeface="Arial"/>
         </a:defRPr>
       </a:lvl7pPr>
-      <a:lvl8pPr marR="0" lvl="7" algn="l" rtl="0">
+      <a:lvl8pPr lvl="7" marR="0" rtl="0" algn="l">
         <a:lnSpc>
           <a:spcPct val="100000"/>
         </a:lnSpc>
@@ -5668,16 +5703,17 @@
           <a:srgbClr val="000000"/>
         </a:buClr>
         <a:buFont typeface="Arial"/>
-        <a:defRPr sz="1400" b="0" i="0" u="none" strike="noStrike" cap="none">
+        <a:defRPr b="0" i="0" sz="1400" u="none" cap="none" strike="noStrike">
           <a:solidFill>
             <a:srgbClr val="000000"/>
           </a:solidFill>
           <a:latin typeface="Arial"/>
           <a:ea typeface="Arial"/>
           <a:cs typeface="Arial"/>
+          <a:sym typeface="Arial"/>
         </a:defRPr>
       </a:lvl8pPr>
-      <a:lvl9pPr marR="0" lvl="8" algn="l" rtl="0">
+      <a:lvl9pPr lvl="8" marR="0" rtl="0" algn="l">
         <a:lnSpc>
           <a:spcPct val="100000"/>
         </a:lnSpc>
@@ -5691,13 +5727,14 @@
           <a:srgbClr val="000000"/>
         </a:buClr>
         <a:buFont typeface="Arial"/>
-        <a:defRPr sz="1400" b="0" i="0" u="none" strike="noStrike" cap="none">
+        <a:defRPr b="0" i="0" sz="1400" u="none" cap="none" strike="noStrike">
           <a:solidFill>
             <a:srgbClr val="000000"/>
           </a:solidFill>
           <a:latin typeface="Arial"/>
           <a:ea typeface="Arial"/>
           <a:cs typeface="Arial"/>
+          <a:sym typeface="Arial"/>
         </a:defRPr>
       </a:lvl9pPr>
     </p:otherStyle>
@@ -5706,15 +5743,15 @@
 </file>
 
 <file path=ppt/slides/slide1.xml><?xml version="1.0" encoding="utf-8"?>
-<p:sld xmlns:a="http://schemas.openxmlformats.org/drawingml/2006/main" xmlns:r="http://schemas.openxmlformats.org/officeDocument/2006/relationships" xmlns:p="http://schemas.openxmlformats.org/presentationml/2006/main" xmlns:m="http://schemas.openxmlformats.org/officeDocument/2006/math" xmlns:w="http://schemas.openxmlformats.org/wordprocessingml/2006/main" xmlns:mc="http://schemas.openxmlformats.org/markup-compatibility/2006" showMasterPhAnim="0" showMasterSp="1" show="1">
-  <p:cSld name="">
+<p:sld xmlns:a="http://schemas.openxmlformats.org/drawingml/2006/main" xmlns:r="http://schemas.openxmlformats.org/officeDocument/2006/relationships" xmlns:mc="http://schemas.openxmlformats.org/markup-compatibility/2006" xmlns:mv="urn:schemas-microsoft-com:mac:vml" xmlns:p="http://schemas.openxmlformats.org/presentationml/2006/main" xmlns:c="http://schemas.openxmlformats.org/drawingml/2006/chart" xmlns:dgm="http://schemas.openxmlformats.org/drawingml/2006/diagram" xmlns:o="urn:schemas-microsoft-com:office:office" xmlns:v="urn:schemas-microsoft-com:vml" xmlns:pvml="urn:schemas-microsoft-com:office:powerpoint" xmlns:com="http://schemas.openxmlformats.org/drawingml/2006/compatibility" xmlns:p14="http://schemas.microsoft.com/office/powerpoint/2010/main" xmlns:p15="http://schemas.microsoft.com/office/powerpoint/2012/main" xmlns:ahyp="http://schemas.microsoft.com/office/drawing/2018/hyperlinkcolor">
+  <p:cSld>
     <p:spTree>
       <p:nvGrpSpPr>
-        <p:cNvPr id="1" name=""/>
+        <p:cNvPr id="62" name="Shape 62"/>
         <p:cNvGrpSpPr/>
         <p:nvPr/>
       </p:nvGrpSpPr>
-      <p:grpSpPr bwMode="auto">
+      <p:grpSpPr>
         <a:xfrm>
           <a:off x="0" y="0"/>
           <a:ext cx="0" cy="0"/>
@@ -5724,13 +5761,13 @@
       </p:grpSpPr>
       <p:sp>
         <p:nvSpPr>
-          <p:cNvPr id="218874723" name="Google Shape;63;p12"/>
+          <p:cNvPr id="63" name="Google Shape;63;p12"/>
           <p:cNvSpPr txBox="1"/>
           <p:nvPr>
             <p:ph type="ctrTitle"/>
           </p:nvPr>
         </p:nvSpPr>
-        <p:spPr bwMode="auto">
+        <p:spPr>
           <a:xfrm>
             <a:off x="1039974" y="2350800"/>
             <a:ext cx="7064100" cy="2052600"/>
@@ -5744,12 +5781,12 @@
           </a:ln>
         </p:spPr>
         <p:txBody>
-          <a:bodyPr spcFirstLastPara="1" wrap="square" lIns="91425" tIns="91425" rIns="91425" bIns="91425" anchor="b" anchorCtr="0">
+          <a:bodyPr anchorCtr="0" anchor="b" bIns="91425" lIns="91425" spcFirstLastPara="1" rIns="91425" wrap="square" tIns="91425">
             <a:noAutofit/>
           </a:bodyPr>
           <a:lstStyle/>
           <a:p>
-            <a:pPr marL="0" marR="0" lvl="0" indent="0" algn="ctr" rtl="0">
+            <a:pPr indent="0" lvl="0" marL="0" marR="0" rtl="0" algn="ctr">
               <a:lnSpc>
                 <a:spcPct val="100000"/>
               </a:lnSpc>
@@ -5765,30 +5802,31 @@
               <a:buSzPts val="5200"/>
               <a:buFont typeface="Vidaloka"/>
               <a:buNone/>
-              <a:defRPr/>
             </a:pPr>
             <a:r>
-              <a:rPr lang="az-Latn-AZ" sz="6500" b="0" i="0" u="none" strike="noStrike" cap="none">
+              <a:rPr b="0" i="0" lang="az-Latn-AZ" sz="6500" u="none" cap="none" strike="noStrike">
                 <a:solidFill>
                   <a:schemeClr val="dk1"/>
                 </a:solidFill>
                 <a:latin typeface="Vidaloka"/>
                 <a:ea typeface="Vidaloka"/>
                 <a:cs typeface="Vidaloka"/>
+                <a:sym typeface="Vidaloka"/>
               </a:rPr>
               <a:t>Ağıllı davamiyyət sistemi</a:t>
             </a:r>
-            <a:endParaRPr sz="6500" b="0" i="0" u="none" strike="noStrike" cap="none">
+            <a:endParaRPr b="0" i="0" sz="6500" u="none" cap="none" strike="noStrike">
               <a:solidFill>
                 <a:schemeClr val="dk1"/>
               </a:solidFill>
               <a:latin typeface="Vidaloka"/>
               <a:ea typeface="Vidaloka"/>
               <a:cs typeface="Vidaloka"/>
+              <a:sym typeface="Vidaloka"/>
             </a:endParaRPr>
           </a:p>
           <a:p>
-            <a:pPr marL="0" lvl="0" indent="0" algn="ctr" rtl="0">
+            <a:pPr indent="0" lvl="0" marL="0" rtl="0" algn="ctr">
               <a:lnSpc>
                 <a:spcPct val="100000"/>
               </a:lnSpc>
@@ -5800,8 +5838,10 @@
               </a:spcAft>
               <a:buSzPts val="5200"/>
               <a:buNone/>
-              <a:defRPr/>
             </a:pPr>
+            <a:r>
+              <a:t/>
+            </a:r>
             <a:endParaRPr/>
           </a:p>
         </p:txBody>
@@ -5811,28 +5851,19 @@
   <p:clrMapOvr>
     <a:masterClrMapping/>
   </p:clrMapOvr>
-  <mc:AlternateContent xmlns:mc="http://schemas.openxmlformats.org/markup-compatibility/2006">
-    <mc:Choice xmlns:p159="http://schemas.microsoft.com/office/powerpoint/2015/09/main" xmlns:p14="http://schemas.microsoft.com/office/powerpoint/2010/main" Requires="p159">
-      <p:transition p14:dur="2000" advClick="1"/>
-    </mc:Choice>
-    <mc:Fallback>
-      <p:transition advClick="1"/>
-    </mc:Fallback>
-  </mc:AlternateContent>
-  <p:timing/>
 </p:sld>
 </file>
 
 <file path=ppt/slides/slide2.xml><?xml version="1.0" encoding="utf-8"?>
-<p:sld xmlns:a="http://schemas.openxmlformats.org/drawingml/2006/main" xmlns:r="http://schemas.openxmlformats.org/officeDocument/2006/relationships" xmlns:p="http://schemas.openxmlformats.org/presentationml/2006/main" xmlns:m="http://schemas.openxmlformats.org/officeDocument/2006/math" xmlns:w="http://schemas.openxmlformats.org/wordprocessingml/2006/main" xmlns:mc="http://schemas.openxmlformats.org/markup-compatibility/2006" showMasterPhAnim="0" showMasterSp="1" show="1">
-  <p:cSld name="">
+<p:sld xmlns:a="http://schemas.openxmlformats.org/drawingml/2006/main" xmlns:r="http://schemas.openxmlformats.org/officeDocument/2006/relationships" xmlns:mc="http://schemas.openxmlformats.org/markup-compatibility/2006" xmlns:mv="urn:schemas-microsoft-com:mac:vml" xmlns:p="http://schemas.openxmlformats.org/presentationml/2006/main" xmlns:c="http://schemas.openxmlformats.org/drawingml/2006/chart" xmlns:dgm="http://schemas.openxmlformats.org/drawingml/2006/diagram" xmlns:o="urn:schemas-microsoft-com:office:office" xmlns:v="urn:schemas-microsoft-com:vml" xmlns:pvml="urn:schemas-microsoft-com:office:powerpoint" xmlns:com="http://schemas.openxmlformats.org/drawingml/2006/compatibility" xmlns:p14="http://schemas.microsoft.com/office/powerpoint/2010/main" xmlns:p15="http://schemas.microsoft.com/office/powerpoint/2012/main" xmlns:ahyp="http://schemas.microsoft.com/office/drawing/2018/hyperlinkcolor">
+  <p:cSld>
     <p:spTree>
       <p:nvGrpSpPr>
-        <p:cNvPr id="1" name=""/>
+        <p:cNvPr id="67" name="Shape 67"/>
         <p:cNvGrpSpPr/>
         <p:nvPr/>
       </p:nvGrpSpPr>
-      <p:grpSpPr bwMode="auto">
+      <p:grpSpPr>
         <a:xfrm>
           <a:off x="0" y="0"/>
           <a:ext cx="0" cy="0"/>
@@ -5842,14 +5873,14 @@
       </p:grpSpPr>
       <p:sp>
         <p:nvSpPr>
-          <p:cNvPr id="1634884912" name="Google Shape;68;p13"/>
+          <p:cNvPr id="68" name="Google Shape;68;p13"/>
           <p:cNvSpPr txBox="1"/>
           <p:nvPr>
-            <p:ph type="subTitle" idx="1"/>
+            <p:ph idx="1" type="subTitle"/>
           </p:nvPr>
         </p:nvSpPr>
-        <p:spPr bwMode="auto">
-          <a:xfrm flipH="0" flipV="0">
+        <p:spPr>
+          <a:xfrm>
             <a:off x="0" y="959999"/>
             <a:ext cx="4465800" cy="3874841"/>
           </a:xfrm>
@@ -5862,12 +5893,12 @@
           </a:ln>
         </p:spPr>
         <p:txBody>
-          <a:bodyPr spcFirstLastPara="1" wrap="square" lIns="91399" tIns="91399" rIns="91399" bIns="91399" anchor="t" anchorCtr="0">
+          <a:bodyPr anchorCtr="0" anchor="t" bIns="91375" lIns="91375" spcFirstLastPara="1" rIns="91375" wrap="square" tIns="91375">
             <a:noAutofit/>
           </a:bodyPr>
           <a:lstStyle/>
           <a:p>
-            <a:pPr marL="457200" lvl="0" indent="-342900" algn="l" rtl="0">
+            <a:pPr indent="-342900" lvl="0" marL="457200" rtl="0" algn="l">
               <a:lnSpc>
                 <a:spcPct val="114999"/>
               </a:lnSpc>
@@ -5883,41 +5914,43 @@
               <a:buSzPts val="1400"/>
               <a:buFont typeface="Arial"/>
               <a:buChar char="•"/>
-              <a:defRPr/>
             </a:pPr>
             <a:r>
-              <a:rPr lang="az-Latn-AZ" sz="1800" b="0" i="0" u="none">
+              <a:rPr b="0" i="0" lang="az-Latn-AZ" sz="1800" u="none">
                 <a:solidFill>
                   <a:srgbClr val="000000"/>
                 </a:solidFill>
                 <a:latin typeface="Times New Roman"/>
                 <a:ea typeface="Times New Roman"/>
                 <a:cs typeface="Times New Roman"/>
+                <a:sym typeface="Times New Roman"/>
               </a:rPr>
               <a:t> </a:t>
             </a:r>
             <a:r>
-              <a:rPr lang="az-Latn-AZ" sz="2200" b="0" i="0" u="none" strike="noStrike" cap="none">
+              <a:rPr b="0" i="0" lang="az-Latn-AZ" sz="2200" u="none" cap="none" strike="noStrike">
                 <a:solidFill>
                   <a:schemeClr val="dk1"/>
                 </a:solidFill>
                 <a:latin typeface="Vidaloka"/>
                 <a:ea typeface="Vidaloka"/>
                 <a:cs typeface="Vidaloka"/>
+                <a:sym typeface="Vidaloka"/>
               </a:rPr>
               <a:t>Bu, müasir üz tanıma texnologiyasına əsaslanan proqram təminatıdır. Sistem, yüksək dəqiqlikli kameralar vasitəsilə insan simalarını skan edərək biometrik məlumatları emal edir və saniyələr ərzində şəxsin kimliyini müəyyənləşdirməyə imkan verir.</a:t>
             </a:r>
-            <a:endParaRPr sz="2200" b="0" i="0" u="none" strike="noStrike" cap="none">
+            <a:endParaRPr b="0" i="0" sz="2200" u="none" cap="none" strike="noStrike">
               <a:solidFill>
                 <a:schemeClr val="dk1"/>
               </a:solidFill>
               <a:latin typeface="Vidaloka"/>
               <a:ea typeface="Vidaloka"/>
               <a:cs typeface="Vidaloka"/>
+              <a:sym typeface="Vidaloka"/>
             </a:endParaRPr>
           </a:p>
           <a:p>
-            <a:pPr marL="457200" lvl="0" indent="-254000" algn="l" rtl="0">
+            <a:pPr indent="-254000" lvl="0" marL="457200" rtl="0" algn="l">
               <a:lnSpc>
                 <a:spcPct val="100000"/>
               </a:lnSpc>
@@ -5933,25 +5966,28 @@
               <a:buSzPts val="1400"/>
               <a:buFont typeface="Arial"/>
               <a:buNone/>
-              <a:defRPr/>
             </a:pPr>
+            <a:r>
+              <a:t/>
+            </a:r>
             <a:endParaRPr sz="1100">
               <a:latin typeface="Quattrocento Sans"/>
               <a:ea typeface="Quattrocento Sans"/>
               <a:cs typeface="Quattrocento Sans"/>
+              <a:sym typeface="Quattrocento Sans"/>
             </a:endParaRPr>
           </a:p>
         </p:txBody>
       </p:sp>
       <p:sp>
         <p:nvSpPr>
-          <p:cNvPr id="168437646" name="Google Shape;69;p13"/>
+          <p:cNvPr id="69" name="Google Shape;69;p13"/>
           <p:cNvSpPr txBox="1"/>
           <p:nvPr>
             <p:ph type="title"/>
           </p:nvPr>
         </p:nvSpPr>
-        <p:spPr bwMode="auto">
+        <p:spPr>
           <a:xfrm>
             <a:off x="0" y="273250"/>
             <a:ext cx="9144000" cy="1098300"/>
@@ -5965,12 +6001,12 @@
           </a:ln>
         </p:spPr>
         <p:txBody>
-          <a:bodyPr spcFirstLastPara="1" wrap="square" lIns="91400" tIns="91400" rIns="91400" bIns="91400" anchor="t" anchorCtr="0">
+          <a:bodyPr anchorCtr="0" anchor="t" bIns="91400" lIns="91400" spcFirstLastPara="1" rIns="91400" wrap="square" tIns="91400">
             <a:noAutofit/>
           </a:bodyPr>
           <a:lstStyle/>
           <a:p>
-            <a:pPr marL="0" lvl="0" indent="0" algn="ctr" rtl="0">
+            <a:pPr indent="0" lvl="0" marL="0" rtl="0" algn="ctr">
               <a:lnSpc>
                 <a:spcPct val="100000"/>
               </a:lnSpc>
@@ -5982,7 +6018,6 @@
               </a:spcAft>
               <a:buSzPts val="3000"/>
               <a:buNone/>
-              <a:defRPr/>
             </a:pPr>
             <a:r>
               <a:rPr lang="az-Latn-AZ"/>
@@ -5994,11 +6029,11 @@
       </p:sp>
       <p:sp>
         <p:nvSpPr>
-          <p:cNvPr id="1128867472" name="Google Shape;70;p13"/>
+          <p:cNvPr id="70" name="Google Shape;70;p13"/>
           <p:cNvSpPr txBox="1"/>
           <p:nvPr/>
         </p:nvSpPr>
-        <p:spPr bwMode="auto">
+        <p:spPr>
           <a:xfrm>
             <a:off x="4321116" y="1022052"/>
             <a:ext cx="3880500" cy="461700"/>
@@ -6012,40 +6047,51 @@
           </a:ln>
         </p:spPr>
         <p:txBody>
-          <a:bodyPr spcFirstLastPara="1" wrap="square" lIns="91425" tIns="91425" rIns="91425" bIns="91425" anchor="t" anchorCtr="0">
+          <a:bodyPr anchorCtr="0" anchor="t" bIns="91425" lIns="91425" spcFirstLastPara="1" rIns="91425" wrap="square" tIns="91425">
             <a:spAutoFit/>
           </a:bodyPr>
           <a:lstStyle/>
           <a:p>
-            <a:pPr marL="0" lvl="0" indent="0" algn="l" rtl="0">
-              <a:spcBef>
-                <a:spcPts val="0"/>
-              </a:spcBef>
-              <a:spcAft>
-                <a:spcPts val="0"/>
-              </a:spcAft>
-              <a:buNone/>
-              <a:defRPr/>
+            <a:pPr indent="0" lvl="0" marL="0" marR="0" rtl="0" algn="l">
+              <a:lnSpc>
+                <a:spcPct val="100000"/>
+              </a:lnSpc>
+              <a:spcBef>
+                <a:spcPts val="0"/>
+              </a:spcBef>
+              <a:spcAft>
+                <a:spcPts val="0"/>
+              </a:spcAft>
+              <a:buClr>
+                <a:srgbClr val="000000"/>
+              </a:buClr>
+              <a:buSzPts val="1800"/>
+              <a:buFont typeface="Arial"/>
+              <a:buNone/>
             </a:pPr>
-            <a:endParaRPr sz="1800">
+            <a:r>
+              <a:t/>
+            </a:r>
+            <a:endParaRPr b="0" i="0" sz="1800" u="none" cap="none" strike="noStrike">
               <a:solidFill>
                 <a:schemeClr val="dk2"/>
               </a:solidFill>
               <a:latin typeface="Montserrat"/>
               <a:ea typeface="Montserrat"/>
               <a:cs typeface="Montserrat"/>
+              <a:sym typeface="Montserrat"/>
             </a:endParaRPr>
           </a:p>
         </p:txBody>
       </p:sp>
       <p:sp>
         <p:nvSpPr>
-          <p:cNvPr id="980580819" name=""/>
+          <p:cNvPr id="71" name="Google Shape;71;p13"/>
           <p:cNvSpPr txBox="1"/>
           <p:nvPr/>
         </p:nvSpPr>
-        <p:spPr bwMode="auto">
-          <a:xfrm rot="0" flipH="0" flipV="0">
+        <p:spPr>
+          <a:xfrm>
             <a:off x="242961" y="3219208"/>
             <a:ext cx="3497250" cy="335639"/>
           </a:xfrm>
@@ -6053,48 +6099,68 @@
             <a:avLst/>
           </a:prstGeom>
           <a:noFill/>
+          <a:ln>
+            <a:noFill/>
+          </a:ln>
         </p:spPr>
         <p:txBody>
-          <a:bodyPr vertOverflow="overflow" horzOverflow="overflow" vert="horz" wrap="square" lIns="91440" tIns="45720" rIns="91440" bIns="45720" numCol="1" spcCol="0" rtlCol="0" fromWordArt="0" anchor="t" anchorCtr="0" forceAA="0" upright="0" compatLnSpc="0">
+          <a:bodyPr anchorCtr="0" anchor="t" bIns="45700" lIns="91425" spcFirstLastPara="1" rIns="91425" wrap="square" tIns="45700">
             <a:spAutoFit/>
           </a:bodyPr>
+          <a:lstStyle/>
           <a:p>
-            <a:pPr algn="l">
-              <a:lnSpc>
-                <a:spcPct val="100000"/>
-              </a:lnSpc>
-              <a:spcBef>
-                <a:spcPts val="0"/>
-              </a:spcBef>
-              <a:spcAft>
-                <a:spcPts val="0"/>
-              </a:spcAft>
-              <a:defRPr/>
+            <a:pPr indent="0" lvl="0" marL="0" marR="0" rtl="0" algn="l">
+              <a:lnSpc>
+                <a:spcPct val="100000"/>
+              </a:lnSpc>
+              <a:spcBef>
+                <a:spcPts val="0"/>
+              </a:spcBef>
+              <a:spcAft>
+                <a:spcPts val="0"/>
+              </a:spcAft>
+              <a:buNone/>
             </a:pPr>
-            <a:endParaRPr sz="1600"/>
+            <a:r>
+              <a:t/>
+            </a:r>
+            <a:endParaRPr b="0" i="0" sz="1600" u="none" cap="none" strike="noStrike">
+              <a:solidFill>
+                <a:srgbClr val="000000"/>
+              </a:solidFill>
+              <a:latin typeface="Arial"/>
+              <a:ea typeface="Arial"/>
+              <a:cs typeface="Arial"/>
+              <a:sym typeface="Arial"/>
+            </a:endParaRPr>
           </a:p>
         </p:txBody>
       </p:sp>
       <p:pic>
         <p:nvPicPr>
-          <p:cNvPr id="2145502794" name=""/>
-          <p:cNvPicPr>
-            <a:picLocks noChangeAspect="1"/>
-          </p:cNvPicPr>
+          <p:cNvPr id="72" name="Google Shape;72;p13"/>
+          <p:cNvPicPr preferRelativeResize="0"/>
           <p:nvPr/>
         </p:nvPicPr>
         <p:blipFill rotWithShape="1">
-          <a:blip r:embed="rId3"/>
+          <a:blip r:embed="rId3">
+            <a:alphaModFix/>
+          </a:blip>
+          <a:srcRect b="0" l="0" r="0" t="0"/>
           <a:stretch/>
         </p:blipFill>
-        <p:spPr bwMode="auto">
-          <a:xfrm flipH="0" flipV="0">
-            <a:off x="4572000" y="1084104"/>
+        <p:spPr>
+          <a:xfrm>
+            <a:off x="4572000" y="960004"/>
             <a:ext cx="3073348" cy="3073348"/>
           </a:xfrm>
           <a:prstGeom prst="rect">
             <a:avLst/>
           </a:prstGeom>
+          <a:noFill/>
+          <a:ln>
+            <a:noFill/>
+          </a:ln>
         </p:spPr>
       </p:pic>
     </p:spTree>
@@ -6102,27 +6168,19 @@
   <p:clrMapOvr>
     <a:masterClrMapping/>
   </p:clrMapOvr>
-  <mc:AlternateContent xmlns:mc="http://schemas.openxmlformats.org/markup-compatibility/2006">
-    <mc:Choice xmlns:p159="http://schemas.microsoft.com/office/powerpoint/2015/09/main" xmlns:p14="http://schemas.microsoft.com/office/powerpoint/2010/main" Requires="p159">
-      <p:transition p14:dur="2000" advClick="1"/>
-    </mc:Choice>
-    <mc:Fallback>
-      <p:transition advClick="1"/>
-    </mc:Fallback>
-  </mc:AlternateContent>
 </p:sld>
 </file>
 
 <file path=ppt/slides/slide3.xml><?xml version="1.0" encoding="utf-8"?>
-<p:sld xmlns:a="http://schemas.openxmlformats.org/drawingml/2006/main" xmlns:r="http://schemas.openxmlformats.org/officeDocument/2006/relationships" xmlns:p="http://schemas.openxmlformats.org/presentationml/2006/main" xmlns:m="http://schemas.openxmlformats.org/officeDocument/2006/math" xmlns:w="http://schemas.openxmlformats.org/wordprocessingml/2006/main" xmlns:mc="http://schemas.openxmlformats.org/markup-compatibility/2006" showMasterPhAnim="0" showMasterSp="1" show="1">
-  <p:cSld name="">
+<p:sld xmlns:a="http://schemas.openxmlformats.org/drawingml/2006/main" xmlns:r="http://schemas.openxmlformats.org/officeDocument/2006/relationships" xmlns:mc="http://schemas.openxmlformats.org/markup-compatibility/2006" xmlns:mv="urn:schemas-microsoft-com:mac:vml" xmlns:p="http://schemas.openxmlformats.org/presentationml/2006/main" xmlns:c="http://schemas.openxmlformats.org/drawingml/2006/chart" xmlns:dgm="http://schemas.openxmlformats.org/drawingml/2006/diagram" xmlns:o="urn:schemas-microsoft-com:office:office" xmlns:v="urn:schemas-microsoft-com:vml" xmlns:pvml="urn:schemas-microsoft-com:office:powerpoint" xmlns:com="http://schemas.openxmlformats.org/drawingml/2006/compatibility" xmlns:p14="http://schemas.microsoft.com/office/powerpoint/2010/main" xmlns:p15="http://schemas.microsoft.com/office/powerpoint/2012/main" xmlns:ahyp="http://schemas.microsoft.com/office/drawing/2018/hyperlinkcolor">
+  <p:cSld>
     <p:spTree>
       <p:nvGrpSpPr>
-        <p:cNvPr id="1" name=""/>
+        <p:cNvPr id="76" name="Shape 76"/>
         <p:cNvGrpSpPr/>
         <p:nvPr/>
       </p:nvGrpSpPr>
-      <p:grpSpPr bwMode="auto">
+      <p:grpSpPr>
         <a:xfrm>
           <a:off x="0" y="0"/>
           <a:ext cx="0" cy="0"/>
@@ -6132,13 +6190,13 @@
       </p:grpSpPr>
       <p:sp>
         <p:nvSpPr>
-          <p:cNvPr id="66396946" name="Google Shape;75;p14"/>
+          <p:cNvPr id="77" name="Google Shape;77;p14"/>
           <p:cNvSpPr txBox="1"/>
           <p:nvPr>
-            <p:ph type="subTitle" idx="1"/>
+            <p:ph idx="1" type="subTitle"/>
           </p:nvPr>
         </p:nvSpPr>
-        <p:spPr bwMode="auto">
+        <p:spPr>
           <a:xfrm>
             <a:off x="-12" y="845919"/>
             <a:ext cx="5033100" cy="2379900"/>
@@ -6152,12 +6210,12 @@
           </a:ln>
         </p:spPr>
         <p:txBody>
-          <a:bodyPr spcFirstLastPara="1" wrap="square" lIns="91400" tIns="91400" rIns="91400" bIns="91400" anchor="t" anchorCtr="0">
+          <a:bodyPr anchorCtr="0" anchor="t" bIns="91400" lIns="91400" spcFirstLastPara="1" rIns="91400" wrap="square" tIns="91400">
             <a:noAutofit/>
           </a:bodyPr>
           <a:lstStyle/>
           <a:p>
-            <a:pPr marL="457200" lvl="0" indent="-342900" algn="l" rtl="0">
+            <a:pPr indent="-342900" lvl="0" marL="457200" rtl="0" algn="l">
               <a:lnSpc>
                 <a:spcPct val="100000"/>
               </a:lnSpc>
@@ -6173,54 +6231,56 @@
               <a:buSzPts val="3000"/>
               <a:buFont typeface="Arial"/>
               <a:buChar char="•"/>
-              <a:defRPr/>
             </a:pPr>
             <a:r>
-              <a:rPr lang="az-Latn-AZ" sz="700" b="0" i="0" u="none">
+              <a:rPr b="1" i="0" lang="az-Latn-AZ" sz="700" u="none">
                 <a:solidFill>
                   <a:srgbClr val="000000"/>
                 </a:solidFill>
                 <a:latin typeface="Times New Roman"/>
                 <a:ea typeface="Times New Roman"/>
                 <a:cs typeface="Times New Roman"/>
+                <a:sym typeface="Times New Roman"/>
               </a:rPr>
               <a:t> </a:t>
             </a:r>
             <a:r>
-              <a:rPr lang="az-Latn-AZ" sz="2000" b="0" i="0" u="none" strike="noStrike" cap="none">
+              <a:rPr b="1" i="0" lang="az-Latn-AZ" sz="2000" u="none" cap="none" strike="noStrike">
                 <a:solidFill>
                   <a:schemeClr val="dk1"/>
                 </a:solidFill>
                 <a:latin typeface="Vidaloka"/>
                 <a:ea typeface="Vidaloka"/>
                 <a:cs typeface="Vidaloka"/>
+                <a:sym typeface="Vidaloka"/>
               </a:rPr>
               <a:t>Biz bu sistemi tətbiq etməkdə əsas məqsədimiz, şagirdlərin dərsə iştirakının qeydiyyat prosesini tamamilə avtomatlaşdırmaq və bununla da məktəb heyətinin inzibati yükünü əhəmiyyətli dərəcədə azaltmaqdır</a:t>
             </a:r>
             <a:r>
-              <a:rPr lang="az-Latn-AZ" sz="700" b="0" i="0" u="none">
+              <a:rPr b="1" i="0" lang="az-Latn-AZ" sz="700" u="none">
                 <a:solidFill>
                   <a:srgbClr val="000000"/>
                 </a:solidFill>
                 <a:latin typeface="Times New Roman"/>
                 <a:ea typeface="Times New Roman"/>
                 <a:cs typeface="Times New Roman"/>
+                <a:sym typeface="Times New Roman"/>
               </a:rPr>
               <a:t>.</a:t>
             </a:r>
-            <a:endParaRPr sz="800"/>
+            <a:endParaRPr b="1" sz="800"/>
           </a:p>
         </p:txBody>
       </p:sp>
       <p:sp>
         <p:nvSpPr>
-          <p:cNvPr id="1080835111" name="Google Shape;76;p14"/>
+          <p:cNvPr id="78" name="Google Shape;78;p14"/>
           <p:cNvSpPr txBox="1"/>
           <p:nvPr>
             <p:ph type="title"/>
           </p:nvPr>
         </p:nvSpPr>
-        <p:spPr bwMode="auto">
+        <p:spPr>
           <a:xfrm>
             <a:off x="0" y="273225"/>
             <a:ext cx="9144000" cy="572700"/>
@@ -6234,12 +6294,12 @@
           </a:ln>
         </p:spPr>
         <p:txBody>
-          <a:bodyPr spcFirstLastPara="1" wrap="square" lIns="91425" tIns="91425" rIns="91425" bIns="91425" anchor="t" anchorCtr="0">
+          <a:bodyPr anchorCtr="0" anchor="t" bIns="91425" lIns="91425" spcFirstLastPara="1" rIns="91425" wrap="square" tIns="91425">
             <a:noAutofit/>
           </a:bodyPr>
           <a:lstStyle/>
           <a:p>
-            <a:pPr marL="0" lvl="0" indent="0" algn="ctr" rtl="0">
+            <a:pPr indent="0" lvl="0" marL="0" rtl="0" algn="ctr">
               <a:lnSpc>
                 <a:spcPct val="100000"/>
               </a:lnSpc>
@@ -6251,7 +6311,6 @@
               </a:spcAft>
               <a:buSzPts val="3000"/>
               <a:buNone/>
-              <a:defRPr/>
             </a:pPr>
             <a:r>
               <a:rPr lang="az-Latn-AZ"/>
@@ -6263,11 +6322,11 @@
       </p:sp>
       <p:sp>
         <p:nvSpPr>
-          <p:cNvPr id="716474519" name="Google Shape;77;p14"/>
+          <p:cNvPr id="79" name="Google Shape;79;p14"/>
           <p:cNvSpPr txBox="1"/>
           <p:nvPr/>
         </p:nvSpPr>
-        <p:spPr bwMode="auto">
+        <p:spPr>
           <a:xfrm>
             <a:off x="5618450" y="1212625"/>
             <a:ext cx="3546900" cy="461700"/>
@@ -6281,54 +6340,69 @@
           </a:ln>
         </p:spPr>
         <p:txBody>
-          <a:bodyPr spcFirstLastPara="1" wrap="square" lIns="91425" tIns="91425" rIns="91425" bIns="91425" anchor="t" anchorCtr="0">
+          <a:bodyPr anchorCtr="0" anchor="t" bIns="91425" lIns="91425" spcFirstLastPara="1" rIns="91425" wrap="square" tIns="91425">
             <a:spAutoFit/>
           </a:bodyPr>
           <a:lstStyle/>
           <a:p>
-            <a:pPr marL="0" lvl="0" indent="0" algn="l" rtl="0">
-              <a:spcBef>
-                <a:spcPts val="0"/>
-              </a:spcBef>
-              <a:spcAft>
-                <a:spcPts val="0"/>
-              </a:spcAft>
-              <a:buNone/>
-              <a:defRPr/>
+            <a:pPr indent="0" lvl="0" marL="0" marR="0" rtl="0" algn="l">
+              <a:lnSpc>
+                <a:spcPct val="100000"/>
+              </a:lnSpc>
+              <a:spcBef>
+                <a:spcPts val="0"/>
+              </a:spcBef>
+              <a:spcAft>
+                <a:spcPts val="0"/>
+              </a:spcAft>
+              <a:buClr>
+                <a:srgbClr val="000000"/>
+              </a:buClr>
+              <a:buSzPts val="1800"/>
+              <a:buFont typeface="Arial"/>
+              <a:buNone/>
             </a:pPr>
-            <a:endParaRPr sz="1800">
+            <a:r>
+              <a:t/>
+            </a:r>
+            <a:endParaRPr b="0" i="0" sz="1800" u="none" cap="none" strike="noStrike">
               <a:solidFill>
                 <a:schemeClr val="dk2"/>
               </a:solidFill>
               <a:latin typeface="Montserrat"/>
               <a:ea typeface="Montserrat"/>
               <a:cs typeface="Montserrat"/>
+              <a:sym typeface="Montserrat"/>
             </a:endParaRPr>
           </a:p>
         </p:txBody>
       </p:sp>
       <p:sp>
         <p:nvSpPr>
-          <p:cNvPr id="1127523446" name=""/>
+          <p:cNvPr id="80" name="Google Shape;80;p14"/>
           <p:cNvSpPr txBox="1"/>
           <p:nvPr/>
         </p:nvSpPr>
-        <p:spPr bwMode="auto">
-          <a:xfrm rot="0" flipH="0" flipV="0">
-            <a:off x="4707549" y="939458"/>
-            <a:ext cx="3638514" cy="2286359"/>
+        <p:spPr>
+          <a:xfrm>
+            <a:off x="4664199" y="845921"/>
+            <a:ext cx="3638400" cy="2216400"/>
           </a:xfrm>
           <a:prstGeom prst="rect">
             <a:avLst/>
           </a:prstGeom>
           <a:noFill/>
+          <a:ln>
+            <a:noFill/>
+          </a:ln>
         </p:spPr>
         <p:txBody>
-          <a:bodyPr vertOverflow="overflow" horzOverflow="overflow" vert="horz" wrap="square" lIns="91440" tIns="45720" rIns="91440" bIns="45720" numCol="1" spcCol="0" rtlCol="0" fromWordArt="0" anchor="t" anchorCtr="0" forceAA="0" upright="0" compatLnSpc="0">
+          <a:bodyPr anchorCtr="0" anchor="t" bIns="45700" lIns="91425" spcFirstLastPara="1" rIns="91425" wrap="square" tIns="45700">
             <a:spAutoFit/>
           </a:bodyPr>
+          <a:lstStyle/>
           <a:p>
-            <a:pPr marL="457200" marR="0" indent="-342900" algn="l">
+            <a:pPr indent="-342900" lvl="0" marL="457200" marR="0" rtl="0" algn="l">
               <a:lnSpc>
                 <a:spcPct val="100000"/>
               </a:lnSpc>
@@ -6342,64 +6416,25 @@
                 <a:schemeClr val="dk1"/>
               </a:buClr>
               <a:buSzPts val="3000"/>
-              <a:buFont typeface="Arial"/>
               <a:buChar char="•"/>
-              <a:defRPr/>
             </a:pPr>
             <a:r>
-              <a:rPr lang="az-Latn-AZ" sz="1800" b="0" i="0" u="none" strike="noStrike" cap="none" spc="0">
-                <a:solidFill/>
-                <a:latin typeface="undefined"/>
-                <a:ea typeface="undefined"/>
-                <a:cs typeface="undefined"/>
-              </a:rPr>
+              <a:rPr b="1" i="0" lang="az-Latn-AZ" sz="1800" u="none" cap="none" strike="noStrike"/>
               <a:t>Bu ağıllı proqram təminatı ilə məktəbiniz daha təhlükəsiz, müəllimlər isə daha az yüklənmiş olacaq!</a:t>
             </a:r>
-            <a:br>
-              <a:rPr lang="az-Latn-AZ" sz="1800" b="0" i="0" u="none" strike="noStrike" cap="none" spc="0">
-                <a:solidFill/>
-                <a:latin typeface="undefined"/>
-                <a:ea typeface="undefined"/>
-                <a:cs typeface="undefined"/>
-              </a:rPr>
-            </a:br>
             <a:r>
-              <a:rPr lang="az-Latn-AZ" sz="1800" b="0" i="0" u="none" strike="noStrike" cap="none" spc="0">
-                <a:solidFill/>
-                <a:latin typeface="undefined"/>
-                <a:ea typeface="undefined"/>
-                <a:cs typeface="undefined"/>
-              </a:rPr>
-              <a:t> Artıq kənar şəxslərin girişi avtomatik məhdudlaşdırı</a:t>
+              <a:rPr b="1" lang="az-Latn-AZ" sz="1800"/>
+              <a:t> </a:t>
             </a:r>
             <a:r>
-              <a:rPr lang="az-Latn-AZ" sz="1800" b="0" i="0" u="none" strike="noStrike" cap="none" spc="0">
-                <a:solidFill/>
-                <a:latin typeface="undefined"/>
-                <a:ea typeface="undefined"/>
-                <a:cs typeface="undefined"/>
-              </a:rPr>
-              <a:t>l</a:t>
+              <a:rPr b="1" i="0" lang="az-Latn-AZ" sz="1800" u="none" cap="none" strike="noStrike"/>
+              <a:t>jurnal yazmaq üçün sərf olunan vaxt isə xeyli qısalır. </a:t>
             </a:r>
-            <a:r>
-              <a:rPr lang="az-Latn-AZ" sz="1800" b="0" i="0" u="none" strike="noStrike" cap="none" spc="0">
-                <a:solidFill/>
-                <a:latin typeface="undefined"/>
-                <a:ea typeface="undefined"/>
-                <a:cs typeface="undefined"/>
-              </a:rPr>
-              <a:t>ır, jurnal yazmaq üçün sərf olunan vaxt isə xeyli qısalır.</a:t>
-            </a:r>
-            <a:r>
-              <a:rPr lang="az-Latn-AZ" sz="1800" b="0" i="0" u="none" strike="noStrike" cap="none" spc="0">
-                <a:solidFill/>
-                <a:latin typeface="undefined"/>
-                <a:ea typeface="undefined"/>
-                <a:cs typeface="undefined"/>
-              </a:rPr>
-              <a:t> </a:t>
-            </a:r>
-            <a:endParaRPr sz="1800"/>
+            <a:endParaRPr b="1" i="0" sz="1800" u="none" cap="none" strike="noStrike">
+              <a:solidFill>
+                <a:srgbClr val="000000"/>
+              </a:solidFill>
+            </a:endParaRPr>
           </a:p>
         </p:txBody>
       </p:sp>
@@ -6408,28 +6443,19 @@
   <p:clrMapOvr>
     <a:masterClrMapping/>
   </p:clrMapOvr>
-  <mc:AlternateContent xmlns:mc="http://schemas.openxmlformats.org/markup-compatibility/2006">
-    <mc:Choice xmlns:p159="http://schemas.microsoft.com/office/powerpoint/2015/09/main" xmlns:p14="http://schemas.microsoft.com/office/powerpoint/2010/main" Requires="p159">
-      <p:transition p14:dur="2000" advClick="1"/>
-    </mc:Choice>
-    <mc:Fallback>
-      <p:transition advClick="1"/>
-    </mc:Fallback>
-  </mc:AlternateContent>
-  <p:timing/>
 </p:sld>
 </file>
 
 <file path=ppt/slides/slide4.xml><?xml version="1.0" encoding="utf-8"?>
-<p:sld xmlns:a="http://schemas.openxmlformats.org/drawingml/2006/main" xmlns:r="http://schemas.openxmlformats.org/officeDocument/2006/relationships" xmlns:p="http://schemas.openxmlformats.org/presentationml/2006/main" xmlns:m="http://schemas.openxmlformats.org/officeDocument/2006/math" xmlns:w="http://schemas.openxmlformats.org/wordprocessingml/2006/main" xmlns:mc="http://schemas.openxmlformats.org/markup-compatibility/2006" showMasterPhAnim="0" showMasterSp="1" show="1">
-  <p:cSld name="">
+<p:sld xmlns:a="http://schemas.openxmlformats.org/drawingml/2006/main" xmlns:r="http://schemas.openxmlformats.org/officeDocument/2006/relationships" xmlns:mc="http://schemas.openxmlformats.org/markup-compatibility/2006" xmlns:mv="urn:schemas-microsoft-com:mac:vml" xmlns:p="http://schemas.openxmlformats.org/presentationml/2006/main" xmlns:c="http://schemas.openxmlformats.org/drawingml/2006/chart" xmlns:dgm="http://schemas.openxmlformats.org/drawingml/2006/diagram" xmlns:o="urn:schemas-microsoft-com:office:office" xmlns:v="urn:schemas-microsoft-com:vml" xmlns:pvml="urn:schemas-microsoft-com:office:powerpoint" xmlns:com="http://schemas.openxmlformats.org/drawingml/2006/compatibility" xmlns:p14="http://schemas.microsoft.com/office/powerpoint/2010/main" xmlns:p15="http://schemas.microsoft.com/office/powerpoint/2012/main" xmlns:ahyp="http://schemas.microsoft.com/office/drawing/2018/hyperlinkcolor">
+  <p:cSld>
     <p:spTree>
       <p:nvGrpSpPr>
-        <p:cNvPr id="1" name=""/>
+        <p:cNvPr id="84" name="Shape 84"/>
         <p:cNvGrpSpPr/>
         <p:nvPr/>
       </p:nvGrpSpPr>
-      <p:grpSpPr bwMode="auto">
+      <p:grpSpPr>
         <a:xfrm>
           <a:off x="0" y="0"/>
           <a:ext cx="0" cy="0"/>
@@ -6439,15 +6465,15 @@
       </p:grpSpPr>
       <p:sp>
         <p:nvSpPr>
-          <p:cNvPr id="643662480" name="Google Shape;82;p15"/>
+          <p:cNvPr id="85" name="Google Shape;85;p15"/>
           <p:cNvSpPr txBox="1"/>
           <p:nvPr>
             <p:ph type="title"/>
           </p:nvPr>
         </p:nvSpPr>
-        <p:spPr bwMode="auto">
+        <p:spPr>
           <a:xfrm>
-            <a:off x="-241139" y="295849"/>
+            <a:off x="-8139" y="281399"/>
             <a:ext cx="4270500" cy="1291200"/>
           </a:xfrm>
           <a:prstGeom prst="rect">
@@ -6459,12 +6485,12 @@
           </a:ln>
         </p:spPr>
         <p:txBody>
-          <a:bodyPr spcFirstLastPara="1" wrap="square" lIns="91425" tIns="91425" rIns="91425" bIns="91425" anchor="t" anchorCtr="0">
+          <a:bodyPr anchorCtr="0" anchor="t" bIns="91425" lIns="91425" spcFirstLastPara="1" rIns="91425" wrap="square" tIns="91425">
             <a:noAutofit/>
           </a:bodyPr>
           <a:lstStyle/>
           <a:p>
-            <a:pPr marL="0" lvl="0" indent="0" algn="ctr" rtl="0">
+            <a:pPr indent="0" lvl="0" marL="0" rtl="0" algn="ctr">
               <a:lnSpc>
                 <a:spcPct val="100000"/>
               </a:lnSpc>
@@ -6476,7 +6502,6 @@
               </a:spcAft>
               <a:buSzPts val="9000"/>
               <a:buNone/>
-              <a:defRPr/>
             </a:pPr>
             <a:r>
               <a:rPr lang="az-Latn-AZ"/>
@@ -6488,13 +6513,13 @@
       </p:sp>
       <p:sp>
         <p:nvSpPr>
-          <p:cNvPr id="1938663351" name="Google Shape;83;p15"/>
+          <p:cNvPr id="86" name="Google Shape;86;p15"/>
           <p:cNvSpPr txBox="1"/>
           <p:nvPr>
-            <p:ph type="subTitle" idx="1"/>
+            <p:ph idx="1" type="subTitle"/>
           </p:nvPr>
         </p:nvSpPr>
-        <p:spPr bwMode="auto">
+        <p:spPr>
           <a:xfrm>
             <a:off x="-68447" y="1455149"/>
             <a:ext cx="4391100" cy="1965000"/>
@@ -6508,12 +6533,12 @@
           </a:ln>
         </p:spPr>
         <p:txBody>
-          <a:bodyPr spcFirstLastPara="1" wrap="square" lIns="91400" tIns="91400" rIns="91400" bIns="91400" anchor="t" anchorCtr="0">
+          <a:bodyPr anchorCtr="0" anchor="t" bIns="91400" lIns="91400" spcFirstLastPara="1" rIns="91400" wrap="square" tIns="91400">
             <a:noAutofit/>
           </a:bodyPr>
           <a:lstStyle/>
           <a:p>
-            <a:pPr marL="217793" marR="0" lvl="0" indent="-217793" algn="ctr" rtl="0">
+            <a:pPr indent="-217793" lvl="0" marL="217793" marR="0" rtl="0" algn="ctr">
               <a:lnSpc>
                 <a:spcPct val="100000"/>
               </a:lnSpc>
@@ -6529,43 +6554,43 @@
               <a:buSzPts val="1800"/>
               <a:buFont typeface="Arial"/>
               <a:buChar char="•"/>
-              <a:defRPr/>
             </a:pPr>
             <a:r>
-              <a:rPr lang="az-Latn-AZ" sz="1600"/>
+              <a:rPr b="1" lang="az-Latn-AZ" sz="1600"/>
               <a:t>Bu, intuitiv interfeysə malik olub, istifadəçi dostu şəkildə dizayn edilmiş Qrafik İstifadəçi İnterfeysidir (GUI). Bu sistemin istifadəsi minimum təlimlə, hətta texniki bilikləri olmayanlar üçün də son dərəcə asandır</a:t>
             </a:r>
             <a:r>
-              <a:rPr lang="az-Latn-AZ" sz="1400">
+              <a:rPr b="1" lang="az-Latn-AZ" sz="1400">
                 <a:solidFill>
                   <a:srgbClr val="000000"/>
                 </a:solidFill>
                 <a:latin typeface="Times New Roman"/>
                 <a:ea typeface="Times New Roman"/>
                 <a:cs typeface="Times New Roman"/>
+                <a:sym typeface="Times New Roman"/>
               </a:rPr>
               <a:t>.</a:t>
             </a:r>
-            <a:endParaRPr sz="1600"/>
+            <a:endParaRPr b="1" sz="1600"/>
           </a:p>
         </p:txBody>
       </p:sp>
       <p:pic>
         <p:nvPicPr>
-          <p:cNvPr id="966138434" name="Google Shape;84;p15"/>
-          <p:cNvPicPr/>
+          <p:cNvPr id="87" name="Google Shape;87;p15"/>
+          <p:cNvPicPr preferRelativeResize="0"/>
           <p:nvPr/>
         </p:nvPicPr>
         <p:blipFill rotWithShape="1">
           <a:blip r:embed="rId3">
             <a:alphaModFix/>
           </a:blip>
-          <a:srcRect l="3605" t="0" r="0" b="3605"/>
+          <a:srcRect b="3605" l="0" r="0" t="0"/>
           <a:stretch/>
         </p:blipFill>
-        <p:spPr bwMode="auto">
+        <p:spPr>
           <a:xfrm>
-            <a:off x="4322651" y="819607"/>
+            <a:off x="4322651" y="1009657"/>
             <a:ext cx="4752900" cy="3124200"/>
           </a:xfrm>
           <a:prstGeom prst="rect">
@@ -6579,26 +6604,30 @@
       </p:pic>
       <p:sp>
         <p:nvSpPr>
-          <p:cNvPr id="1359744987" name=""/>
+          <p:cNvPr id="88" name="Google Shape;88;p15"/>
           <p:cNvSpPr txBox="1"/>
           <p:nvPr/>
         </p:nvSpPr>
-        <p:spPr bwMode="auto">
-          <a:xfrm rot="0" flipH="0" flipV="0">
-            <a:off x="180" y="3166387"/>
-            <a:ext cx="4253843" cy="1554840"/>
+        <p:spPr>
+          <a:xfrm>
+            <a:off x="175" y="3294150"/>
+            <a:ext cx="4253700" cy="1600800"/>
           </a:xfrm>
           <a:prstGeom prst="rect">
             <a:avLst/>
           </a:prstGeom>
           <a:noFill/>
+          <a:ln>
+            <a:noFill/>
+          </a:ln>
         </p:spPr>
         <p:txBody>
-          <a:bodyPr vertOverflow="overflow" horzOverflow="overflow" vert="horz" wrap="square" lIns="91440" tIns="45720" rIns="91440" bIns="45720" numCol="1" spcCol="0" rtlCol="0" fromWordArt="0" anchor="t" anchorCtr="0" forceAA="0" upright="0" compatLnSpc="0">
+          <a:bodyPr anchorCtr="0" anchor="t" bIns="45700" lIns="91425" spcFirstLastPara="1" rIns="91425" wrap="square" tIns="45700">
             <a:spAutoFit/>
           </a:bodyPr>
+          <a:lstStyle/>
           <a:p>
-            <a:pPr marL="217792" marR="0" indent="-217792" algn="ctr">
+            <a:pPr indent="-217792" lvl="0" marL="217792" marR="0" rtl="0" algn="ctr">
               <a:lnSpc>
                 <a:spcPct val="100000"/>
               </a:lnSpc>
@@ -6612,89 +6641,38 @@
                 <a:schemeClr val="dk2"/>
               </a:buClr>
               <a:buSzPts val="1800"/>
-              <a:buFont typeface="Arial"/>
               <a:buChar char="•"/>
-              <a:defRPr/>
             </a:pPr>
             <a:r>
-              <a:rPr lang="az-Latn-AZ" sz="1600" b="0" i="0" u="none" strike="noStrike" cap="none" spc="0">
-                <a:solidFill/>
-                <a:latin typeface="undefined"/>
-                <a:ea typeface="undefined"/>
-                <a:cs typeface="undefined"/>
-              </a:rPr>
-              <a:t>İ</a:t>
+              <a:rPr b="1" i="0" lang="az-Latn-AZ" sz="1600" u="none" cap="none" strike="noStrike"/>
+              <a:t>İstifadə rahatlığı sayəsində sistem hər yaşda və hər texnoloji səviyyədə olan müəllimlər üçün əlçatan olur. Sadə interfeys dərs prosesini sürətləndirir və müəllimlərə daha çox vaxtı tədrisə ayırmaq imkanı yaradır.</a:t>
             </a:r>
-            <a:r>
-              <a:rPr lang="az-Latn-AZ" sz="1600" b="0" i="0" u="none" strike="noStrike" cap="none" spc="0">
-                <a:solidFill/>
-                <a:latin typeface="undefined"/>
-                <a:ea typeface="undefined"/>
-                <a:cs typeface="undefined"/>
-              </a:rPr>
-              <a:t>stifadə rahatlığı sayəsində sistem hər yaşda və hər texnoloji səviyyədə olan müəllimlər üçün əlçatan olur. Sadə interfeys dərs prosesini sürətləndirir və mü</a:t>
-            </a:r>
-            <a:r>
-              <a:rPr lang="az-Latn-AZ" sz="1600" b="0" i="0" u="none" strike="noStrike" cap="none" spc="0">
-                <a:solidFill/>
-                <a:latin typeface="undefined"/>
-                <a:ea typeface="undefined"/>
-                <a:cs typeface="undefined"/>
-              </a:rPr>
-              <a:t>əllimlərə daha çox vaxtı tədrisə ayırmaq imkanı yaradır.</a:t>
-            </a:r>
-            <a:endParaRPr sz="1600"/>
+            <a:endParaRPr b="1" i="0" sz="1600" u="none" cap="none" strike="noStrike">
+              <a:solidFill>
+                <a:srgbClr val="000000"/>
+              </a:solidFill>
+            </a:endParaRPr>
           </a:p>
         </p:txBody>
       </p:sp>
-      <p:pic>
-        <p:nvPicPr>
-          <p:cNvPr id="643904182" name=""/>
-          <p:cNvPicPr>
-            <a:picLocks noChangeAspect="1"/>
-          </p:cNvPicPr>
-          <p:nvPr/>
-        </p:nvPicPr>
-        <p:blipFill rotWithShape="1">
-          <a:blip r:embed="rId4"/>
-          <a:stretch/>
-        </p:blipFill>
-        <p:spPr bwMode="auto">
-          <a:xfrm flipH="0" flipV="0">
-            <a:off x="3455727" y="349651"/>
-            <a:ext cx="658031" cy="658031"/>
-          </a:xfrm>
-          <a:prstGeom prst="rect">
-            <a:avLst/>
-          </a:prstGeom>
-        </p:spPr>
-      </p:pic>
     </p:spTree>
   </p:cSld>
   <p:clrMapOvr>
     <a:masterClrMapping/>
   </p:clrMapOvr>
-  <mc:AlternateContent xmlns:mc="http://schemas.openxmlformats.org/markup-compatibility/2006">
-    <mc:Choice xmlns:p159="http://schemas.microsoft.com/office/powerpoint/2015/09/main" xmlns:p14="http://schemas.microsoft.com/office/powerpoint/2010/main" Requires="p159">
-      <p:transition p14:dur="2000" advClick="1"/>
-    </mc:Choice>
-    <mc:Fallback>
-      <p:transition advClick="1"/>
-    </mc:Fallback>
-  </mc:AlternateContent>
 </p:sld>
 </file>
 
 <file path=ppt/slides/slide5.xml><?xml version="1.0" encoding="utf-8"?>
-<p:sld xmlns:a="http://schemas.openxmlformats.org/drawingml/2006/main" xmlns:r="http://schemas.openxmlformats.org/officeDocument/2006/relationships" xmlns:p="http://schemas.openxmlformats.org/presentationml/2006/main" xmlns:m="http://schemas.openxmlformats.org/officeDocument/2006/math" xmlns:w="http://schemas.openxmlformats.org/wordprocessingml/2006/main" xmlns:mc="http://schemas.openxmlformats.org/markup-compatibility/2006" showMasterPhAnim="0" showMasterSp="1" show="1">
-  <p:cSld name="">
+<p:sld xmlns:a="http://schemas.openxmlformats.org/drawingml/2006/main" xmlns:r="http://schemas.openxmlformats.org/officeDocument/2006/relationships" xmlns:mc="http://schemas.openxmlformats.org/markup-compatibility/2006" xmlns:mv="urn:schemas-microsoft-com:mac:vml" xmlns:p="http://schemas.openxmlformats.org/presentationml/2006/main" xmlns:c="http://schemas.openxmlformats.org/drawingml/2006/chart" xmlns:dgm="http://schemas.openxmlformats.org/drawingml/2006/diagram" xmlns:o="urn:schemas-microsoft-com:office:office" xmlns:v="urn:schemas-microsoft-com:vml" xmlns:pvml="urn:schemas-microsoft-com:office:powerpoint" xmlns:com="http://schemas.openxmlformats.org/drawingml/2006/compatibility" xmlns:p14="http://schemas.microsoft.com/office/powerpoint/2010/main" xmlns:p15="http://schemas.microsoft.com/office/powerpoint/2012/main" xmlns:ahyp="http://schemas.microsoft.com/office/drawing/2018/hyperlinkcolor">
+  <p:cSld>
     <p:spTree>
       <p:nvGrpSpPr>
-        <p:cNvPr id="1" name=""/>
+        <p:cNvPr id="93" name="Shape 93"/>
         <p:cNvGrpSpPr/>
         <p:nvPr/>
       </p:nvGrpSpPr>
-      <p:grpSpPr bwMode="auto">
+      <p:grpSpPr>
         <a:xfrm>
           <a:off x="0" y="0"/>
           <a:ext cx="0" cy="0"/>
@@ -6704,13 +6682,13 @@
       </p:grpSpPr>
       <p:sp>
         <p:nvSpPr>
-          <p:cNvPr id="871699005" name="Google Shape;90;p16"/>
+          <p:cNvPr id="94" name="Google Shape;94;p16"/>
           <p:cNvSpPr txBox="1"/>
           <p:nvPr>
             <p:ph type="title"/>
           </p:nvPr>
         </p:nvSpPr>
-        <p:spPr bwMode="auto">
+        <p:spPr>
           <a:xfrm>
             <a:off x="4647000" y="271950"/>
             <a:ext cx="4512900" cy="1291200"/>
@@ -6724,12 +6702,12 @@
           </a:ln>
         </p:spPr>
         <p:txBody>
-          <a:bodyPr spcFirstLastPara="1" wrap="square" lIns="91400" tIns="91400" rIns="91400" bIns="91400" anchor="t" anchorCtr="0">
+          <a:bodyPr anchorCtr="0" anchor="t" bIns="91400" lIns="91400" spcFirstLastPara="1" rIns="91400" wrap="square" tIns="91400">
             <a:noAutofit/>
           </a:bodyPr>
           <a:lstStyle/>
           <a:p>
-            <a:pPr marL="0" lvl="0" indent="0" algn="ctr" rtl="0">
+            <a:pPr indent="0" lvl="0" marL="0" rtl="0" algn="ctr">
               <a:lnSpc>
                 <a:spcPct val="100000"/>
               </a:lnSpc>
@@ -6741,7 +6719,6 @@
               </a:spcAft>
               <a:buSzPts val="9000"/>
               <a:buNone/>
-              <a:defRPr/>
             </a:pPr>
             <a:r>
               <a:rPr lang="az-Latn-AZ"/>
@@ -6753,13 +6730,13 @@
       </p:sp>
       <p:sp>
         <p:nvSpPr>
-          <p:cNvPr id="1234394305" name="Google Shape;91;p16"/>
+          <p:cNvPr id="95" name="Google Shape;95;p16"/>
           <p:cNvSpPr txBox="1"/>
           <p:nvPr>
-            <p:ph type="subTitle" idx="1"/>
+            <p:ph idx="1" type="subTitle"/>
           </p:nvPr>
         </p:nvSpPr>
-        <p:spPr bwMode="auto">
+        <p:spPr>
           <a:xfrm>
             <a:off x="4630962" y="1430413"/>
             <a:ext cx="4545000" cy="927600"/>
@@ -6773,12 +6750,12 @@
           </a:ln>
         </p:spPr>
         <p:txBody>
-          <a:bodyPr spcFirstLastPara="1" wrap="square" lIns="91400" tIns="91400" rIns="91400" bIns="91400" anchor="t" anchorCtr="0">
+          <a:bodyPr anchorCtr="0" anchor="t" bIns="91400" lIns="91400" spcFirstLastPara="1" rIns="91400" wrap="square" tIns="91400">
             <a:noAutofit/>
           </a:bodyPr>
           <a:lstStyle/>
           <a:p>
-            <a:pPr marL="457200" marR="0" lvl="0" indent="-342900" algn="ctr" rtl="0">
+            <a:pPr indent="-342900" lvl="0" marL="457200" marR="0" rtl="0" algn="ctr">
               <a:lnSpc>
                 <a:spcPct val="100000"/>
               </a:lnSpc>
@@ -6794,16 +6771,16 @@
               <a:buSzPts val="1800"/>
               <a:buFont typeface="Montserrat"/>
               <a:buNone/>
-              <a:defRPr/>
             </a:pPr>
             <a:r>
-              <a:rPr lang="az-Latn-AZ" sz="1200" b="0" i="0" u="none" strike="noStrike" cap="none">
+              <a:rPr b="0" i="0" lang="az-Latn-AZ" sz="1200" u="none" cap="none" strike="noStrike">
                 <a:solidFill>
                   <a:schemeClr val="dk2"/>
                 </a:solidFill>
                 <a:latin typeface="Montserrat"/>
                 <a:ea typeface="Montserrat"/>
                 <a:cs typeface="Montserrat"/>
+                <a:sym typeface="Montserrat"/>
               </a:rPr>
               <a:t>Artıq jurnal yerinə elektron sistemdən istifadə olunur, ona görə də bütün məlumatlar birbaşa m</a:t>
             </a:r>
@@ -6812,13 +6789,14 @@
               <a:t>əktəb </a:t>
             </a:r>
             <a:r>
-              <a:rPr lang="az-Latn-AZ" sz="1200" b="0" i="0" u="none" strike="noStrike" cap="none">
+              <a:rPr b="0" i="0" lang="az-Latn-AZ" sz="1200" u="none" cap="none" strike="noStrike">
                 <a:solidFill>
                   <a:schemeClr val="dk2"/>
                 </a:solidFill>
                 <a:latin typeface="Montserrat"/>
                 <a:ea typeface="Montserrat"/>
                 <a:cs typeface="Montserrat"/>
+                <a:sym typeface="Montserrat"/>
               </a:rPr>
               <a:t>direktorun kompüterinə gedəcək.</a:t>
             </a:r>
@@ -6828,19 +6806,19 @@
       </p:sp>
       <p:pic>
         <p:nvPicPr>
-          <p:cNvPr id="1166180612" name="Google Shape;92;p16"/>
-          <p:cNvPicPr/>
+          <p:cNvPr id="96" name="Google Shape;96;p16"/>
+          <p:cNvPicPr preferRelativeResize="0"/>
           <p:nvPr/>
         </p:nvPicPr>
         <p:blipFill rotWithShape="1">
           <a:blip r:embed="rId3">
             <a:alphaModFix/>
           </a:blip>
-          <a:srcRect l="0" t="0" r="0" b="0"/>
+          <a:srcRect b="0" l="0" r="0" t="0"/>
           <a:stretch/>
         </p:blipFill>
-        <p:spPr bwMode="auto">
-          <a:xfrm flipH="0" flipV="0">
+        <p:spPr>
+          <a:xfrm>
             <a:off x="157974" y="431331"/>
             <a:ext cx="4233170" cy="4280835"/>
           </a:xfrm>
@@ -6855,11 +6833,11 @@
       </p:pic>
       <p:sp>
         <p:nvSpPr>
-          <p:cNvPr id="1347526471" name="Google Shape;93;p16"/>
+          <p:cNvPr id="97" name="Google Shape;97;p16"/>
           <p:cNvSpPr txBox="1"/>
           <p:nvPr/>
         </p:nvSpPr>
-        <p:spPr bwMode="auto">
+        <p:spPr>
           <a:xfrm>
             <a:off x="5226000" y="2028475"/>
             <a:ext cx="3354900" cy="954300"/>
@@ -6873,50 +6851,59 @@
           </a:ln>
         </p:spPr>
         <p:txBody>
-          <a:bodyPr spcFirstLastPara="1" wrap="square" lIns="91425" tIns="91425" rIns="91425" bIns="91425" anchor="t" anchorCtr="0">
+          <a:bodyPr anchorCtr="0" anchor="t" bIns="91425" lIns="91425" spcFirstLastPara="1" rIns="91425" wrap="square" tIns="91425">
             <a:spAutoFit/>
           </a:bodyPr>
           <a:lstStyle/>
           <a:p>
-            <a:pPr marL="0" lvl="0" indent="0" algn="ctr" rtl="0">
-              <a:spcBef>
-                <a:spcPts val="0"/>
-              </a:spcBef>
-              <a:spcAft>
-                <a:spcPts val="0"/>
-              </a:spcAft>
-              <a:buNone/>
-              <a:defRPr/>
+            <a:pPr indent="0" lvl="0" marL="0" marR="0" rtl="0" algn="ctr">
+              <a:lnSpc>
+                <a:spcPct val="100000"/>
+              </a:lnSpc>
+              <a:spcBef>
+                <a:spcPts val="0"/>
+              </a:spcBef>
+              <a:spcAft>
+                <a:spcPts val="0"/>
+              </a:spcAft>
+              <a:buClr>
+                <a:srgbClr val="000000"/>
+              </a:buClr>
+              <a:buSzPts val="5000"/>
+              <a:buFont typeface="Arial"/>
+              <a:buNone/>
             </a:pPr>
             <a:r>
-              <a:rPr lang="az-Latn-AZ" sz="5000">
+              <a:rPr b="0" i="0" lang="az-Latn-AZ" sz="5000" u="none" cap="none" strike="noStrike">
                 <a:solidFill>
                   <a:schemeClr val="dk1"/>
                 </a:solidFill>
                 <a:latin typeface="Vidaloka"/>
                 <a:ea typeface="Vidaloka"/>
                 <a:cs typeface="Vidaloka"/>
+                <a:sym typeface="Vidaloka"/>
               </a:rPr>
               <a:t>TechStack</a:t>
             </a:r>
-            <a:endParaRPr sz="5000">
+            <a:endParaRPr b="0" i="0" sz="5000" u="none" cap="none" strike="noStrike">
               <a:solidFill>
                 <a:schemeClr val="dk2"/>
               </a:solidFill>
               <a:latin typeface="Montserrat"/>
               <a:ea typeface="Montserrat"/>
               <a:cs typeface="Montserrat"/>
+              <a:sym typeface="Montserrat"/>
             </a:endParaRPr>
           </a:p>
         </p:txBody>
       </p:sp>
       <p:sp>
         <p:nvSpPr>
-          <p:cNvPr id="1092724974" name="Google Shape;94;p16"/>
+          <p:cNvPr id="98" name="Google Shape;98;p16"/>
           <p:cNvSpPr txBox="1"/>
           <p:nvPr/>
         </p:nvSpPr>
-        <p:spPr bwMode="auto">
+        <p:spPr>
           <a:xfrm>
             <a:off x="4647000" y="2982775"/>
             <a:ext cx="4314900" cy="338700"/>
@@ -6930,50 +6917,59 @@
           </a:ln>
         </p:spPr>
         <p:txBody>
-          <a:bodyPr spcFirstLastPara="1" wrap="square" lIns="91425" tIns="91425" rIns="91425" bIns="91425" anchor="t" anchorCtr="0">
+          <a:bodyPr anchorCtr="0" anchor="t" bIns="91425" lIns="91425" spcFirstLastPara="1" rIns="91425" wrap="square" tIns="91425">
             <a:spAutoFit/>
           </a:bodyPr>
           <a:lstStyle/>
           <a:p>
-            <a:pPr marL="0" lvl="0" indent="0" algn="l" rtl="0">
-              <a:spcBef>
-                <a:spcPts val="0"/>
-              </a:spcBef>
-              <a:spcAft>
-                <a:spcPts val="0"/>
-              </a:spcAft>
-              <a:buNone/>
-              <a:defRPr/>
+            <a:pPr indent="0" lvl="0" marL="0" marR="0" rtl="0" algn="l">
+              <a:lnSpc>
+                <a:spcPct val="100000"/>
+              </a:lnSpc>
+              <a:spcBef>
+                <a:spcPts val="0"/>
+              </a:spcBef>
+              <a:spcAft>
+                <a:spcPts val="0"/>
+              </a:spcAft>
+              <a:buClr>
+                <a:srgbClr val="000000"/>
+              </a:buClr>
+              <a:buSzPts val="1000"/>
+              <a:buFont typeface="Arial"/>
+              <a:buNone/>
             </a:pPr>
             <a:r>
-              <a:rPr lang="az-Latn-AZ" sz="1000" b="1">
+              <a:rPr b="1" i="0" lang="az-Latn-AZ" sz="1000" u="none" cap="none" strike="noStrike">
                 <a:solidFill>
                   <a:schemeClr val="dk2"/>
                 </a:solidFill>
                 <a:latin typeface="Montserrat"/>
                 <a:ea typeface="Montserrat"/>
                 <a:cs typeface="Montserrat"/>
+                <a:sym typeface="Montserrat"/>
               </a:rPr>
               <a:t>Proqram üçün əsasən Python dilindən istifadə olunub.</a:t>
             </a:r>
-            <a:endParaRPr sz="1000" b="1">
+            <a:endParaRPr b="1" i="0" sz="1000" u="none" cap="none" strike="noStrike">
               <a:solidFill>
                 <a:schemeClr val="dk2"/>
               </a:solidFill>
               <a:latin typeface="Montserrat"/>
               <a:ea typeface="Montserrat"/>
               <a:cs typeface="Montserrat"/>
+              <a:sym typeface="Montserrat"/>
             </a:endParaRPr>
           </a:p>
         </p:txBody>
       </p:sp>
       <p:sp>
         <p:nvSpPr>
-          <p:cNvPr id="859818316" name="Google Shape;95;p16"/>
+          <p:cNvPr id="99" name="Google Shape;99;p16"/>
           <p:cNvSpPr txBox="1"/>
           <p:nvPr/>
         </p:nvSpPr>
-        <p:spPr bwMode="auto">
+        <p:spPr>
           <a:xfrm>
             <a:off x="4647000" y="3169925"/>
             <a:ext cx="4215000" cy="1539000"/>
@@ -6987,12 +6983,15 @@
           </a:ln>
         </p:spPr>
         <p:txBody>
-          <a:bodyPr spcFirstLastPara="1" wrap="square" lIns="91425" tIns="91425" rIns="91425" bIns="91425" anchor="t" anchorCtr="0">
+          <a:bodyPr anchorCtr="0" anchor="t" bIns="91425" lIns="91425" spcFirstLastPara="1" rIns="91425" wrap="square" tIns="91425">
             <a:noAutofit/>
           </a:bodyPr>
           <a:lstStyle/>
           <a:p>
-            <a:pPr marL="457200" lvl="0" indent="-292100" algn="l" rtl="0">
+            <a:pPr indent="-292100" lvl="0" marL="457200" marR="0" rtl="0" algn="l">
+              <a:lnSpc>
+                <a:spcPct val="100000"/>
+              </a:lnSpc>
               <a:spcBef>
                 <a:spcPts val="0"/>
               </a:spcBef>
@@ -7005,41 +7004,74 @@
               <a:buSzPts val="1000"/>
               <a:buFont typeface="Montserrat"/>
               <a:buChar char="●"/>
-              <a:defRPr/>
             </a:pPr>
             <a:r>
-              <a:rPr lang="az-Latn-AZ" sz="1000" b="1">
+              <a:rPr b="1" i="0" lang="az-Latn-AZ" sz="1000" u="none" cap="none" strike="noStrike">
                 <a:solidFill>
                   <a:schemeClr val="dk2"/>
                 </a:solidFill>
                 <a:latin typeface="Montserrat"/>
                 <a:ea typeface="Montserrat"/>
                 <a:cs typeface="Montserrat"/>
+                <a:sym typeface="Montserrat"/>
               </a:rPr>
-              <a:t>OpenCV-Python: Kamera və görüntü emalı üçün</a:t>
+              <a:t>OpenCV-Python: Kamera və görüntü emalı üçün.</a:t>
             </a:r>
+            <a:endParaRPr b="1" i="0" sz="1000" u="none" cap="none" strike="noStrike">
+              <a:solidFill>
+                <a:schemeClr val="dk2"/>
+              </a:solidFill>
+              <a:latin typeface="Montserrat"/>
+              <a:ea typeface="Montserrat"/>
+              <a:cs typeface="Montserrat"/>
+              <a:sym typeface="Montserrat"/>
+            </a:endParaRPr>
+          </a:p>
+          <a:p>
+            <a:pPr indent="-292100" lvl="0" marL="457200" marR="0" rtl="0" algn="l">
+              <a:lnSpc>
+                <a:spcPct val="100000"/>
+              </a:lnSpc>
+              <a:spcBef>
+                <a:spcPts val="0"/>
+              </a:spcBef>
+              <a:spcAft>
+                <a:spcPts val="0"/>
+              </a:spcAft>
+              <a:buClr>
+                <a:schemeClr val="dk2"/>
+              </a:buClr>
+              <a:buSzPts val="1000"/>
+              <a:buFont typeface="Montserrat"/>
+              <a:buChar char="●"/>
+            </a:pPr>
             <a:r>
-              <a:rPr lang="az-Latn-AZ" sz="1000" b="1">
+              <a:rPr b="1" i="0" lang="az-Latn-AZ" sz="1000" u="none" cap="none" strike="noStrike">
                 <a:solidFill>
                   <a:schemeClr val="dk2"/>
                 </a:solidFill>
                 <a:latin typeface="Montserrat"/>
                 <a:ea typeface="Montserrat"/>
                 <a:cs typeface="Montserrat"/>
+                <a:sym typeface="Montserrat"/>
               </a:rPr>
-              <a:t>.</a:t>
+              <a:t>NumPy: Tanıma prosesi və hesablama əməliyyatları üçün.</a:t>
             </a:r>
-            <a:endParaRPr sz="1000" b="1">
+            <a:endParaRPr b="1" i="0" sz="1000" u="none" cap="none" strike="noStrike">
               <a:solidFill>
                 <a:schemeClr val="dk2"/>
               </a:solidFill>
               <a:latin typeface="Montserrat"/>
               <a:ea typeface="Montserrat"/>
               <a:cs typeface="Montserrat"/>
+              <a:sym typeface="Montserrat"/>
             </a:endParaRPr>
           </a:p>
           <a:p>
-            <a:pPr marL="457200" lvl="0" indent="-292100" algn="l" rtl="0">
+            <a:pPr indent="-292100" lvl="0" marL="457200" marR="0" rtl="0" algn="l">
+              <a:lnSpc>
+                <a:spcPct val="100000"/>
+              </a:lnSpc>
               <a:spcBef>
                 <a:spcPts val="0"/>
               </a:spcBef>
@@ -7052,30 +7084,34 @@
               <a:buSzPts val="1000"/>
               <a:buFont typeface="Montserrat"/>
               <a:buChar char="●"/>
-              <a:defRPr/>
             </a:pPr>
             <a:r>
-              <a:rPr lang="az-Latn-AZ" sz="1000" b="1">
+              <a:rPr b="1" i="0" lang="az-Latn-AZ" sz="1000" u="none" cap="none" strike="noStrike">
                 <a:solidFill>
                   <a:schemeClr val="dk2"/>
                 </a:solidFill>
                 <a:latin typeface="Montserrat"/>
                 <a:ea typeface="Montserrat"/>
                 <a:cs typeface="Montserrat"/>
+                <a:sym typeface="Montserrat"/>
               </a:rPr>
-              <a:t>NumPy: Tanıma prosesi və hesablama əməliyyatları üçün.</a:t>
+              <a:t>DeepFace: Süni intellekt əsaslı üz tanıma və analiz üçün.</a:t>
             </a:r>
-            <a:endParaRPr sz="1000" b="1">
+            <a:endParaRPr b="1" i="0" sz="1000" u="none" cap="none" strike="noStrike">
               <a:solidFill>
                 <a:schemeClr val="dk2"/>
               </a:solidFill>
               <a:latin typeface="Montserrat"/>
               <a:ea typeface="Montserrat"/>
               <a:cs typeface="Montserrat"/>
+              <a:sym typeface="Montserrat"/>
             </a:endParaRPr>
           </a:p>
           <a:p>
-            <a:pPr marL="457200" lvl="0" indent="-292100" algn="l" rtl="0">
+            <a:pPr indent="-292100" lvl="0" marL="457200" marR="0" rtl="0" algn="l">
+              <a:lnSpc>
+                <a:spcPct val="100000"/>
+              </a:lnSpc>
               <a:spcBef>
                 <a:spcPts val="0"/>
               </a:spcBef>
@@ -7088,30 +7124,34 @@
               <a:buSzPts val="1000"/>
               <a:buFont typeface="Montserrat"/>
               <a:buChar char="●"/>
-              <a:defRPr/>
             </a:pPr>
             <a:r>
-              <a:rPr lang="az-Latn-AZ" sz="1000" b="1">
+              <a:rPr b="1" i="0" lang="az-Latn-AZ" sz="1000" u="none" cap="none" strike="noStrike">
                 <a:solidFill>
                   <a:schemeClr val="dk2"/>
                 </a:solidFill>
                 <a:latin typeface="Montserrat"/>
                 <a:ea typeface="Montserrat"/>
                 <a:cs typeface="Montserrat"/>
+                <a:sym typeface="Montserrat"/>
               </a:rPr>
-              <a:t>DeepFace: Süni intellekt əsaslı üz tanıma və analiz üçün.</a:t>
+              <a:t>TensorFlow &amp; Keras: GPU istifadə edərək sürətli dərin öyrənmə əməliyyatları üçün.</a:t>
             </a:r>
-            <a:endParaRPr sz="1000" b="1">
+            <a:endParaRPr b="1" i="0" sz="1000" u="none" cap="none" strike="noStrike">
               <a:solidFill>
                 <a:schemeClr val="dk2"/>
               </a:solidFill>
               <a:latin typeface="Montserrat"/>
               <a:ea typeface="Montserrat"/>
               <a:cs typeface="Montserrat"/>
+              <a:sym typeface="Montserrat"/>
             </a:endParaRPr>
           </a:p>
           <a:p>
-            <a:pPr marL="457200" lvl="0" indent="-292100" algn="l" rtl="0">
+            <a:pPr indent="-292100" lvl="0" marL="457200" marR="0" rtl="0" algn="l">
+              <a:lnSpc>
+                <a:spcPct val="100000"/>
+              </a:lnSpc>
               <a:spcBef>
                 <a:spcPts val="0"/>
               </a:spcBef>
@@ -7124,30 +7164,34 @@
               <a:buSzPts val="1000"/>
               <a:buFont typeface="Montserrat"/>
               <a:buChar char="●"/>
-              <a:defRPr/>
             </a:pPr>
             <a:r>
-              <a:rPr lang="az-Latn-AZ" sz="1000" b="1">
+              <a:rPr b="1" i="0" lang="az-Latn-AZ" sz="1000" u="none" cap="none" strike="noStrike">
                 <a:solidFill>
                   <a:schemeClr val="dk2"/>
                 </a:solidFill>
                 <a:latin typeface="Montserrat"/>
                 <a:ea typeface="Montserrat"/>
                 <a:cs typeface="Montserrat"/>
+                <a:sym typeface="Montserrat"/>
               </a:rPr>
-              <a:t>TensorFlow &amp; Keras: GPU istifadə edərək sürətli dərin öyrənmə əməliyyatları üçün.</a:t>
+              <a:t>Playsound: Səs fayllarını oxutmaq üçün.</a:t>
             </a:r>
-            <a:endParaRPr sz="1000" b="1">
+            <a:endParaRPr b="1" i="0" sz="1000" u="none" cap="none" strike="noStrike">
               <a:solidFill>
                 <a:schemeClr val="dk2"/>
               </a:solidFill>
               <a:latin typeface="Montserrat"/>
               <a:ea typeface="Montserrat"/>
               <a:cs typeface="Montserrat"/>
+              <a:sym typeface="Montserrat"/>
             </a:endParaRPr>
           </a:p>
           <a:p>
-            <a:pPr marL="457200" lvl="0" indent="-292100" algn="l" rtl="0">
+            <a:pPr indent="-292100" lvl="0" marL="457200" marR="0" rtl="0" algn="l">
+              <a:lnSpc>
+                <a:spcPct val="100000"/>
+              </a:lnSpc>
               <a:spcBef>
                 <a:spcPts val="0"/>
               </a:spcBef>
@@ -7160,114 +7204,49 @@
               <a:buSzPts val="1000"/>
               <a:buFont typeface="Montserrat"/>
               <a:buChar char="●"/>
-              <a:defRPr/>
             </a:pPr>
             <a:r>
-              <a:rPr lang="az-Latn-AZ" sz="1000" b="1">
+              <a:rPr b="1" i="0" lang="az-Latn-AZ" sz="1000" u="none" cap="none" strike="noStrike">
                 <a:solidFill>
                   <a:schemeClr val="dk2"/>
                 </a:solidFill>
                 <a:latin typeface="Montserrat"/>
                 <a:ea typeface="Montserrat"/>
                 <a:cs typeface="Montserrat"/>
+                <a:sym typeface="Montserrat"/>
               </a:rPr>
-              <a:t>Playsound: Səs fayllarını oxutmaq üçün.</a:t>
+              <a:t>CustomTkinter: Modern və istifadəsi rahat istifadəçi interfeysi üçün.</a:t>
             </a:r>
-            <a:endParaRPr sz="1000" b="1">
+            <a:endParaRPr b="1" i="0" sz="1000" u="none" cap="none" strike="noStrike">
               <a:solidFill>
                 <a:schemeClr val="dk2"/>
               </a:solidFill>
               <a:latin typeface="Montserrat"/>
               <a:ea typeface="Montserrat"/>
               <a:cs typeface="Montserrat"/>
-            </a:endParaRPr>
-          </a:p>
-          <a:p>
-            <a:pPr marL="457200" lvl="0" indent="-292100" algn="l" rtl="0">
-              <a:spcBef>
-                <a:spcPts val="0"/>
-              </a:spcBef>
-              <a:spcAft>
-                <a:spcPts val="0"/>
-              </a:spcAft>
-              <a:buClr>
-                <a:schemeClr val="dk2"/>
-              </a:buClr>
-              <a:buSzPts val="1000"/>
-              <a:buFont typeface="Montserrat"/>
-              <a:buChar char="●"/>
-              <a:defRPr/>
-            </a:pPr>
-            <a:r>
-              <a:rPr lang="az-Latn-AZ" sz="1000" b="1">
-                <a:solidFill>
-                  <a:schemeClr val="dk2"/>
-                </a:solidFill>
-                <a:latin typeface="Montserrat"/>
-                <a:ea typeface="Montserrat"/>
-                <a:cs typeface="Montserrat"/>
-              </a:rPr>
-              <a:t>CustomTkinter: Modern və istifadəsi rahat istifadəçi interfeysi üçün.</a:t>
-            </a:r>
-            <a:endParaRPr sz="1000" b="1">
-              <a:solidFill>
-                <a:schemeClr val="dk2"/>
-              </a:solidFill>
-              <a:latin typeface="Montserrat"/>
-              <a:ea typeface="Montserrat"/>
-              <a:cs typeface="Montserrat"/>
+              <a:sym typeface="Montserrat"/>
             </a:endParaRPr>
           </a:p>
         </p:txBody>
       </p:sp>
-      <p:pic>
-        <p:nvPicPr>
-          <p:cNvPr id="2109673187" name=""/>
-          <p:cNvPicPr>
-            <a:picLocks noChangeAspect="1"/>
-          </p:cNvPicPr>
-          <p:nvPr/>
-        </p:nvPicPr>
-        <p:blipFill rotWithShape="1">
-          <a:blip r:embed="rId4"/>
-          <a:stretch/>
-        </p:blipFill>
-        <p:spPr bwMode="auto">
-          <a:xfrm flipH="0" flipV="0">
-            <a:off x="8102986" y="390188"/>
-            <a:ext cx="477912" cy="477912"/>
-          </a:xfrm>
-          <a:prstGeom prst="rect">
-            <a:avLst/>
-          </a:prstGeom>
-        </p:spPr>
-      </p:pic>
     </p:spTree>
   </p:cSld>
   <p:clrMapOvr>
     <a:masterClrMapping/>
   </p:clrMapOvr>
-  <mc:AlternateContent xmlns:mc="http://schemas.openxmlformats.org/markup-compatibility/2006">
-    <mc:Choice xmlns:p159="http://schemas.microsoft.com/office/powerpoint/2015/09/main" xmlns:p14="http://schemas.microsoft.com/office/powerpoint/2010/main" Requires="p159">
-      <p:transition p14:dur="2000" advClick="1"/>
-    </mc:Choice>
-    <mc:Fallback>
-      <p:transition advClick="1"/>
-    </mc:Fallback>
-  </mc:AlternateContent>
 </p:sld>
 </file>
 
 <file path=ppt/slides/slide6.xml><?xml version="1.0" encoding="utf-8"?>
-<p:sld xmlns:a="http://schemas.openxmlformats.org/drawingml/2006/main" xmlns:r="http://schemas.openxmlformats.org/officeDocument/2006/relationships" xmlns:p="http://schemas.openxmlformats.org/presentationml/2006/main" xmlns:m="http://schemas.openxmlformats.org/officeDocument/2006/math" xmlns:w="http://schemas.openxmlformats.org/wordprocessingml/2006/main" xmlns:mc="http://schemas.openxmlformats.org/markup-compatibility/2006" showMasterPhAnim="0" showMasterSp="1" show="1">
-  <p:cSld name="">
+<p:sld xmlns:a="http://schemas.openxmlformats.org/drawingml/2006/main" xmlns:r="http://schemas.openxmlformats.org/officeDocument/2006/relationships" xmlns:mc="http://schemas.openxmlformats.org/markup-compatibility/2006" xmlns:mv="urn:schemas-microsoft-com:mac:vml" xmlns:p="http://schemas.openxmlformats.org/presentationml/2006/main" xmlns:c="http://schemas.openxmlformats.org/drawingml/2006/chart" xmlns:dgm="http://schemas.openxmlformats.org/drawingml/2006/diagram" xmlns:o="urn:schemas-microsoft-com:office:office" xmlns:v="urn:schemas-microsoft-com:vml" xmlns:pvml="urn:schemas-microsoft-com:office:powerpoint" xmlns:com="http://schemas.openxmlformats.org/drawingml/2006/compatibility" xmlns:p14="http://schemas.microsoft.com/office/powerpoint/2010/main" xmlns:p15="http://schemas.microsoft.com/office/powerpoint/2012/main" xmlns:ahyp="http://schemas.microsoft.com/office/drawing/2018/hyperlinkcolor">
+  <p:cSld>
     <p:spTree>
       <p:nvGrpSpPr>
-        <p:cNvPr id="1" name=""/>
+        <p:cNvPr id="104" name="Shape 104"/>
         <p:cNvGrpSpPr/>
         <p:nvPr/>
       </p:nvGrpSpPr>
-      <p:grpSpPr bwMode="auto">
+      <p:grpSpPr>
         <a:xfrm>
           <a:off x="0" y="0"/>
           <a:ext cx="0" cy="0"/>
@@ -7277,16 +7256,16 @@
       </p:grpSpPr>
       <p:sp>
         <p:nvSpPr>
-          <p:cNvPr id="454506279" name="Google Shape;101;p17"/>
+          <p:cNvPr id="105" name="Google Shape;105;p17"/>
           <p:cNvSpPr txBox="1"/>
           <p:nvPr>
             <p:ph type="title"/>
           </p:nvPr>
         </p:nvSpPr>
-        <p:spPr bwMode="auto">
+        <p:spPr>
           <a:xfrm>
             <a:off x="-180854" y="295928"/>
-            <a:ext cx="5835899" cy="1291200"/>
+            <a:ext cx="5835900" cy="1291200"/>
           </a:xfrm>
           <a:prstGeom prst="rect">
             <a:avLst/>
@@ -7297,12 +7276,12 @@
           </a:ln>
         </p:spPr>
         <p:txBody>
-          <a:bodyPr spcFirstLastPara="1" wrap="square" lIns="91425" tIns="91425" rIns="91425" bIns="91425" anchor="t" anchorCtr="0">
+          <a:bodyPr anchorCtr="0" anchor="t" bIns="91425" lIns="91425" spcFirstLastPara="1" rIns="91425" wrap="square" tIns="91425">
             <a:noAutofit/>
           </a:bodyPr>
           <a:lstStyle/>
           <a:p>
-            <a:pPr marL="0" marR="0" lvl="0" indent="0" algn="ctr" rtl="0">
+            <a:pPr indent="0" lvl="0" marL="0" marR="0" rtl="0" algn="ctr">
               <a:lnSpc>
                 <a:spcPct val="100000"/>
               </a:lnSpc>
@@ -7318,42 +7297,48 @@
               <a:buSzPts val="9000"/>
               <a:buFont typeface="Vidaloka"/>
               <a:buNone/>
-              <a:defRPr/>
             </a:pPr>
             <a:r>
-              <a:rPr lang="az-Latn-AZ" sz="7000" b="0" i="0" u="none" strike="noStrike" cap="none">
+              <a:rPr b="0" i="0" lang="az-Latn-AZ" sz="7000" u="none" cap="none" strike="noStrike">
                 <a:solidFill>
                   <a:schemeClr val="dk1"/>
                 </a:solidFill>
                 <a:latin typeface="Vidaloka"/>
                 <a:ea typeface="Vidaloka"/>
                 <a:cs typeface="Vidaloka"/>
+                <a:sym typeface="Vidaloka"/>
               </a:rPr>
               <a:t>Təhlükəsizlik!</a:t>
             </a:r>
-            <a:endParaRPr sz="7000" b="0" i="0" u="none" strike="noStrike" cap="none">
+            <a:endParaRPr b="0" i="0" sz="7000" u="none" cap="none" strike="noStrike">
               <a:solidFill>
                 <a:schemeClr val="dk1"/>
               </a:solidFill>
               <a:latin typeface="Vidaloka"/>
               <a:ea typeface="Vidaloka"/>
               <a:cs typeface="Vidaloka"/>
+              <a:sym typeface="Vidaloka"/>
             </a:endParaRPr>
           </a:p>
         </p:txBody>
       </p:sp>
-      <p:sp>
-        <p:nvSpPr>
-          <p:cNvPr id="1063723458" name="Google Shape;102;p17"/>
-          <p:cNvSpPr txBox="1"/>
-          <p:nvPr>
-            <p:ph type="subTitle" idx="1"/>
-          </p:nvPr>
-        </p:nvSpPr>
-        <p:spPr bwMode="auto">
+      <p:pic>
+        <p:nvPicPr>
+          <p:cNvPr id="106" name="Google Shape;106;p17"/>
+          <p:cNvPicPr preferRelativeResize="0"/>
+          <p:nvPr/>
+        </p:nvPicPr>
+        <p:blipFill rotWithShape="1">
+          <a:blip r:embed="rId3">
+            <a:alphaModFix/>
+          </a:blip>
+          <a:srcRect b="0" l="0" r="0" t="0"/>
+          <a:stretch/>
+        </p:blipFill>
+        <p:spPr>
           <a:xfrm>
-            <a:off x="-1" y="1742193"/>
-            <a:ext cx="5911200" cy="949500"/>
+            <a:off x="5728290" y="805068"/>
+            <a:ext cx="3400062" cy="2353853"/>
           </a:xfrm>
           <a:prstGeom prst="rect">
             <a:avLst/>
@@ -7363,13 +7348,33 @@
             <a:noFill/>
           </a:ln>
         </p:spPr>
+      </p:pic>
+      <p:sp>
+        <p:nvSpPr>
+          <p:cNvPr id="107" name="Google Shape;107;p17"/>
+          <p:cNvSpPr txBox="1"/>
+          <p:nvPr/>
+        </p:nvSpPr>
+        <p:spPr>
+          <a:xfrm>
+            <a:off x="0" y="1356900"/>
+            <a:ext cx="5728200" cy="3109200"/>
+          </a:xfrm>
+          <a:prstGeom prst="rect">
+            <a:avLst/>
+          </a:prstGeom>
+          <a:noFill/>
+          <a:ln>
+            <a:noFill/>
+          </a:ln>
+        </p:spPr>
         <p:txBody>
-          <a:bodyPr spcFirstLastPara="1" wrap="square" lIns="91425" tIns="91425" rIns="91425" bIns="91425" anchor="t" anchorCtr="0">
-            <a:noAutofit/>
+          <a:bodyPr anchorCtr="0" anchor="t" bIns="45700" lIns="91425" spcFirstLastPara="1" rIns="91425" wrap="square" tIns="45700">
+            <a:spAutoFit/>
           </a:bodyPr>
           <a:lstStyle/>
           <a:p>
-            <a:pPr marL="354121" marR="0" lvl="0" indent="-239821" algn="l" rtl="0">
+            <a:pPr indent="-214420" lvl="0" marL="354120" marR="0" rtl="0" algn="l">
               <a:lnSpc>
                 <a:spcPct val="100000"/>
               </a:lnSpc>
@@ -7382,188 +7387,47 @@
               <a:buClr>
                 <a:schemeClr val="dk2"/>
               </a:buClr>
-              <a:buSzPts val="1800"/>
-              <a:buFont typeface="Arial"/>
+              <a:buSzPts val="1400"/>
               <a:buChar char="•"/>
-              <a:defRPr/>
             </a:pPr>
             <a:r>
-              <a:rPr lang="az-Latn-AZ" sz="1800" b="0" i="0" u="none" strike="noStrike" cap="none">
+              <a:rPr b="1" lang="az-Latn-AZ">
                 <a:solidFill>
                   <a:schemeClr val="dk2"/>
                 </a:solidFill>
                 <a:latin typeface="Montserrat"/>
                 <a:ea typeface="Montserrat"/>
                 <a:cs typeface="Montserrat"/>
+                <a:sym typeface="Montserrat"/>
               </a:rPr>
-              <a:t>Sistem yalnız qeydiyyatda olanları içəri buraxacaq, qeydiyyatda olmayan və məktəblə əlaqəsi olmayan şəxslə</a:t>
+              <a:t>Sistem məktəbin təhlükəsizlik kameralarına inteqrasiya olunduqda, kameralar vasitəsilə məktəbə daxil olan və məktəbə gəlməyən bütün şagirdləri avtomatik şəkildə tanıyır. Tanıma prosesi süni intellekt əsaslı üz tanıma texnologiyası ilə həyata keçirilir və bu sistem insan səhvinə yol vermədən 100% dəqiqliklə işləyir. Hər günün sonunda sistem bu məlumatları analiz edərək, kimlərin məktəbə gəldiyini, kimlərin gəlmədiyini və gəliş saatlarını qeyd edir. Toplanmış bütün məlumatlar avtomatik şəkildə Excel faylı formatında hazırlanır və məktəb direktorunun kompüterinə ötürülür. Direktor bu faylı açaraq, hər bir şagirdin davamiyyətini rahatlıqla izləyə, gün, həftə və ya ay üzrə hesabatlar əldə edə bilər.</a:t>
             </a:r>
-            <a:r>
-              <a:rPr lang="az-Latn-AZ" sz="1800"/>
-              <a:t>rin kim olduğunu bilməyi asanlaşdıracaq</a:t>
-            </a:r>
-            <a:endParaRPr sz="1800" b="0" i="0" u="none" strike="noStrike" cap="none">
+            <a:endParaRPr b="1" i="0" u="none" cap="none" strike="noStrike">
               <a:solidFill>
-                <a:schemeClr val="dk2"/>
+                <a:srgbClr val="000000"/>
               </a:solidFill>
-              <a:latin typeface="Montserrat"/>
-              <a:ea typeface="Montserrat"/>
-              <a:cs typeface="Montserrat"/>
             </a:endParaRPr>
           </a:p>
         </p:txBody>
       </p:sp>
-      <p:pic>
-        <p:nvPicPr>
-          <p:cNvPr id="867872662" name="Google Shape;103;p17"/>
-          <p:cNvPicPr/>
-          <p:nvPr/>
-        </p:nvPicPr>
-        <p:blipFill rotWithShape="1">
-          <a:blip r:embed="rId3">
-            <a:alphaModFix/>
-          </a:blip>
-          <a:srcRect l="0" t="0" r="0" b="0"/>
-          <a:stretch/>
-        </p:blipFill>
-        <p:spPr bwMode="auto">
-          <a:xfrm flipH="0" flipV="0">
-            <a:off x="5728290" y="805068"/>
-            <a:ext cx="3400063" cy="2353854"/>
-          </a:xfrm>
-          <a:prstGeom prst="rect">
-            <a:avLst/>
-          </a:prstGeom>
-          <a:noFill/>
-          <a:ln>
-            <a:noFill/>
-          </a:ln>
-        </p:spPr>
-      </p:pic>
-      <p:sp>
-        <p:nvSpPr>
-          <p:cNvPr id="797903995" name=""/>
-          <p:cNvSpPr txBox="1"/>
-          <p:nvPr/>
-        </p:nvSpPr>
-        <p:spPr bwMode="auto">
-          <a:xfrm rot="0" flipH="0" flipV="0">
-            <a:off x="-1" y="3158924"/>
-            <a:ext cx="6652404" cy="1463400"/>
-          </a:xfrm>
-          <a:prstGeom prst="rect">
-            <a:avLst/>
-          </a:prstGeom>
-          <a:noFill/>
-        </p:spPr>
-        <p:txBody>
-          <a:bodyPr vertOverflow="overflow" horzOverflow="overflow" vert="horz" wrap="square" lIns="91440" tIns="45720" rIns="91440" bIns="45720" numCol="1" spcCol="0" rtlCol="0" fromWordArt="0" anchor="t" anchorCtr="0" forceAA="0" upright="0" compatLnSpc="0">
-            <a:spAutoFit/>
-          </a:bodyPr>
-          <a:p>
-            <a:pPr marL="354121" marR="0" indent="-239821" algn="l">
-              <a:lnSpc>
-                <a:spcPct val="100000"/>
-              </a:lnSpc>
-              <a:spcBef>
-                <a:spcPts val="0"/>
-              </a:spcBef>
-              <a:spcAft>
-                <a:spcPts val="0"/>
-              </a:spcAft>
-              <a:buClr>
-                <a:schemeClr val="dk2"/>
-              </a:buClr>
-              <a:buSzPts val="1800"/>
-              <a:buFont typeface="Arial"/>
-              <a:buChar char="•"/>
-              <a:defRPr/>
-            </a:pPr>
-            <a:r>
-              <a:rPr lang="az-Latn-AZ" sz="1800" b="0" i="0" u="none" strike="noStrike" cap="none" spc="0">
-                <a:solidFill>
-                  <a:schemeClr val="dk2"/>
-                </a:solidFill>
-                <a:latin typeface="Montserrat"/>
-                <a:ea typeface="Montserrat"/>
-                <a:cs typeface="Montserrat"/>
-              </a:rPr>
-              <a:t>Sistem məktəbin təhlükəsizlik kameralarına inteqrasiya olunduqda, hər hansı hadisə baş verən anda orada iştirak edən bütün </a:t>
-            </a:r>
-            <a:r>
-              <a:rPr lang="az-Latn-AZ" sz="1800" b="0" i="0" u="none" strike="noStrike" cap="none" spc="0">
-                <a:solidFill>
-                  <a:schemeClr val="dk2"/>
-                </a:solidFill>
-                <a:latin typeface="Montserrat"/>
-                <a:ea typeface="Montserrat"/>
-                <a:cs typeface="Montserrat"/>
-              </a:rPr>
-              <a:t>şəxslərin </a:t>
-            </a:r>
-            <a:r>
-              <a:rPr lang="az-Latn-AZ" sz="1800" b="0" i="0" u="none" strike="noStrike" cap="none" spc="0">
-                <a:solidFill>
-                  <a:schemeClr val="dk2"/>
-                </a:solidFill>
-                <a:latin typeface="Montserrat"/>
-                <a:ea typeface="Montserrat"/>
-                <a:cs typeface="Montserrat"/>
-              </a:rPr>
-              <a:t>adları ekranda görünür. Bu isə hadisənin gedişatını anlamağı və araşdırmanı xeyli sadələşdirir</a:t>
-            </a:r>
-            <a:endParaRPr/>
-          </a:p>
-        </p:txBody>
-      </p:sp>
-      <p:pic>
-        <p:nvPicPr>
-          <p:cNvPr id="709488074" name=""/>
-          <p:cNvPicPr>
-            <a:picLocks noChangeAspect="1"/>
-          </p:cNvPicPr>
-          <p:nvPr/>
-        </p:nvPicPr>
-        <p:blipFill rotWithShape="1">
-          <a:blip r:embed="rId4"/>
-          <a:stretch/>
-        </p:blipFill>
-        <p:spPr bwMode="auto">
-          <a:xfrm flipH="0" flipV="0">
-            <a:off x="5350110" y="352399"/>
-            <a:ext cx="452669" cy="452669"/>
-          </a:xfrm>
-          <a:prstGeom prst="rect">
-            <a:avLst/>
-          </a:prstGeom>
-        </p:spPr>
-      </p:pic>
     </p:spTree>
   </p:cSld>
   <p:clrMapOvr>
     <a:masterClrMapping/>
   </p:clrMapOvr>
-  <mc:AlternateContent xmlns:mc="http://schemas.openxmlformats.org/markup-compatibility/2006">
-    <mc:Choice xmlns:p159="http://schemas.microsoft.com/office/powerpoint/2015/09/main" xmlns:p14="http://schemas.microsoft.com/office/powerpoint/2010/main" Requires="p159">
-      <p:transition p14:dur="2000" advClick="1"/>
-    </mc:Choice>
-    <mc:Fallback>
-      <p:transition advClick="1"/>
-    </mc:Fallback>
-  </mc:AlternateContent>
 </p:sld>
 </file>
 
 <file path=ppt/slides/slide7.xml><?xml version="1.0" encoding="utf-8"?>
-<p:sld xmlns:a="http://schemas.openxmlformats.org/drawingml/2006/main" xmlns:r="http://schemas.openxmlformats.org/officeDocument/2006/relationships" xmlns:p="http://schemas.openxmlformats.org/presentationml/2006/main" xmlns:m="http://schemas.openxmlformats.org/officeDocument/2006/math" xmlns:w="http://schemas.openxmlformats.org/wordprocessingml/2006/main" xmlns:mc="http://schemas.openxmlformats.org/markup-compatibility/2006" showMasterPhAnim="0" showMasterSp="1" show="1">
-  <p:cSld name="">
+<p:sld xmlns:a="http://schemas.openxmlformats.org/drawingml/2006/main" xmlns:r="http://schemas.openxmlformats.org/officeDocument/2006/relationships" xmlns:mc="http://schemas.openxmlformats.org/markup-compatibility/2006" xmlns:mv="urn:schemas-microsoft-com:mac:vml" xmlns:p="http://schemas.openxmlformats.org/presentationml/2006/main" xmlns:c="http://schemas.openxmlformats.org/drawingml/2006/chart" xmlns:dgm="http://schemas.openxmlformats.org/drawingml/2006/diagram" xmlns:o="urn:schemas-microsoft-com:office:office" xmlns:v="urn:schemas-microsoft-com:vml" xmlns:pvml="urn:schemas-microsoft-com:office:powerpoint" xmlns:com="http://schemas.openxmlformats.org/drawingml/2006/compatibility" xmlns:p14="http://schemas.microsoft.com/office/powerpoint/2010/main" xmlns:p15="http://schemas.microsoft.com/office/powerpoint/2012/main" xmlns:ahyp="http://schemas.microsoft.com/office/drawing/2018/hyperlinkcolor">
+  <p:cSld>
     <p:spTree>
       <p:nvGrpSpPr>
-        <p:cNvPr id="1" name=""/>
+        <p:cNvPr id="111" name="Shape 111"/>
         <p:cNvGrpSpPr/>
         <p:nvPr/>
       </p:nvGrpSpPr>
-      <p:grpSpPr bwMode="auto">
+      <p:grpSpPr>
         <a:xfrm>
           <a:off x="0" y="0"/>
           <a:ext cx="0" cy="0"/>
@@ -7573,16 +7437,16 @@
       </p:grpSpPr>
       <p:sp>
         <p:nvSpPr>
-          <p:cNvPr id="1986004514" name="Google Shape;63;p12"/>
+          <p:cNvPr id="112" name="Google Shape;112;p18"/>
           <p:cNvSpPr txBox="1"/>
           <p:nvPr>
             <p:ph type="ctrTitle"/>
           </p:nvPr>
         </p:nvSpPr>
-        <p:spPr bwMode="auto">
+        <p:spPr>
           <a:xfrm>
             <a:off x="1039973" y="1818835"/>
-            <a:ext cx="7064100" cy="2052599"/>
+            <a:ext cx="7064100" cy="2052600"/>
           </a:xfrm>
           <a:prstGeom prst="rect">
             <a:avLst/>
@@ -7593,12 +7457,12 @@
           </a:ln>
         </p:spPr>
         <p:txBody>
-          <a:bodyPr spcFirstLastPara="1" wrap="square" lIns="91424" tIns="91424" rIns="91424" bIns="91424" anchor="b" anchorCtr="0">
+          <a:bodyPr anchorCtr="0" anchor="b" bIns="91400" lIns="91400" spcFirstLastPara="1" rIns="91400" wrap="square" tIns="91400">
             <a:noAutofit/>
           </a:bodyPr>
           <a:lstStyle/>
           <a:p>
-            <a:pPr marL="0" marR="0" lvl="0" indent="0" algn="ctr" rtl="0">
+            <a:pPr indent="0" lvl="0" marL="0" marR="0" rtl="0" algn="ctr">
               <a:lnSpc>
                 <a:spcPct val="100000"/>
               </a:lnSpc>
@@ -7614,30 +7478,31 @@
               <a:buSzPts val="5200"/>
               <a:buFont typeface="Vidaloka"/>
               <a:buNone/>
-              <a:defRPr/>
             </a:pPr>
             <a:r>
-              <a:rPr lang="az-Latn-AZ" sz="6500" b="0" i="0" u="none" strike="noStrike" cap="none">
+              <a:rPr b="0" i="0" lang="az-Latn-AZ" sz="6500" u="none" cap="none" strike="noStrike">
                 <a:solidFill>
                   <a:schemeClr val="dk1"/>
                 </a:solidFill>
                 <a:latin typeface="Vidaloka"/>
                 <a:ea typeface="Vidaloka"/>
                 <a:cs typeface="Vidaloka"/>
+                <a:sym typeface="Vidaloka"/>
               </a:rPr>
               <a:t>Slaydın sonu</a:t>
             </a:r>
-            <a:endParaRPr sz="6500" b="0" i="0" u="none" strike="noStrike" cap="none">
+            <a:endParaRPr b="0" i="0" sz="6500" u="none" cap="none" strike="noStrike">
               <a:solidFill>
                 <a:schemeClr val="dk1"/>
               </a:solidFill>
               <a:latin typeface="Vidaloka"/>
               <a:ea typeface="Vidaloka"/>
               <a:cs typeface="Vidaloka"/>
+              <a:sym typeface="Vidaloka"/>
             </a:endParaRPr>
           </a:p>
           <a:p>
-            <a:pPr marL="0" lvl="0" indent="0" algn="ctr" rtl="0">
+            <a:pPr indent="0" lvl="0" marL="0" rtl="0" algn="ctr">
               <a:lnSpc>
                 <a:spcPct val="100000"/>
               </a:lnSpc>
@@ -7649,8 +7514,10 @@
               </a:spcAft>
               <a:buSzPts val="5200"/>
               <a:buNone/>
-              <a:defRPr/>
             </a:pPr>
+            <a:r>
+              <a:t/>
+            </a:r>
             <a:endParaRPr/>
           </a:p>
         </p:txBody>
@@ -7660,20 +7527,11 @@
   <p:clrMapOvr>
     <a:masterClrMapping/>
   </p:clrMapOvr>
-  <mc:AlternateContent xmlns:mc="http://schemas.openxmlformats.org/markup-compatibility/2006">
-    <mc:Choice xmlns:p159="http://schemas.microsoft.com/office/powerpoint/2015/09/main" xmlns:p14="http://schemas.microsoft.com/office/powerpoint/2010/main" Requires="p159">
-      <p:transition p14:dur="2000" advClick="1"/>
-    </mc:Choice>
-    <mc:Fallback>
-      <p:transition advClick="1"/>
-    </mc:Fallback>
-  </mc:AlternateContent>
-  <p:timing/>
 </p:sld>
 </file>
 
 <file path=ppt/theme/theme1.xml><?xml version="1.0" encoding="utf-8"?>
-<a:theme xmlns:a="http://schemas.openxmlformats.org/drawingml/2006/main" xmlns:r="http://schemas.openxmlformats.org/officeDocument/2006/relationships" xmlns:p="http://schemas.openxmlformats.org/presentationml/2006/main" name="Minimalist Business Slides XL by Slidesgo">
+<a:theme xmlns:a="http://schemas.openxmlformats.org/drawingml/2006/main" xmlns:r="http://schemas.openxmlformats.org/officeDocument/2006/relationships" name="Minimalist Business Slides XL by Slidesgo">
   <a:themeElements>
     <a:clrScheme name="Simple Light">
       <a:dk1>
@@ -7716,13 +7574,73 @@
     <a:fontScheme name="Office">
       <a:majorFont>
         <a:latin typeface="Arial"/>
-        <a:ea typeface="Arial"/>
-        <a:cs typeface="Arial"/>
+        <a:ea typeface=""/>
+        <a:cs typeface=""/>
+        <a:font script="Jpan" typeface="ＭＳ Ｐゴシック"/>
+        <a:font script="Hang" typeface="맑은 고딕"/>
+        <a:font script="Hans" typeface="宋体"/>
+        <a:font script="Hant" typeface="新細明體"/>
+        <a:font script="Arab" typeface="Times New Roman"/>
+        <a:font script="Hebr" typeface="Times New Roman"/>
+        <a:font script="Thai" typeface="Angsana New"/>
+        <a:font script="Ethi" typeface="Nyala"/>
+        <a:font script="Beng" typeface="Vrinda"/>
+        <a:font script="Gujr" typeface="Shruti"/>
+        <a:font script="Khmr" typeface="MoolBoran"/>
+        <a:font script="Knda" typeface="Tunga"/>
+        <a:font script="Guru" typeface="Raavi"/>
+        <a:font script="Cans" typeface="Euphemia"/>
+        <a:font script="Cher" typeface="Plantagenet Cherokee"/>
+        <a:font script="Yiii" typeface="Microsoft Yi Baiti"/>
+        <a:font script="Tibt" typeface="Microsoft Himalaya"/>
+        <a:font script="Thaa" typeface="MV Boli"/>
+        <a:font script="Deva" typeface="Mangal"/>
+        <a:font script="Telu" typeface="Gautami"/>
+        <a:font script="Taml" typeface="Latha"/>
+        <a:font script="Syrc" typeface="Estrangelo Edessa"/>
+        <a:font script="Orya" typeface="Kalinga"/>
+        <a:font script="Mlym" typeface="Kartika"/>
+        <a:font script="Laoo" typeface="DokChampa"/>
+        <a:font script="Sinh" typeface="Iskoola Pota"/>
+        <a:font script="Mong" typeface="Mongolian Baiti"/>
+        <a:font script="Viet" typeface="Times New Roman"/>
+        <a:font script="Uigh" typeface="Microsoft Uighur"/>
+        <a:font script="Geor" typeface="Sylfaen"/>
       </a:majorFont>
       <a:minorFont>
         <a:latin typeface="Arial"/>
-        <a:ea typeface="Arial"/>
-        <a:cs typeface="Arial"/>
+        <a:ea typeface=""/>
+        <a:cs typeface=""/>
+        <a:font script="Jpan" typeface="ＭＳ Ｐゴシック"/>
+        <a:font script="Hang" typeface="맑은 고딕"/>
+        <a:font script="Hans" typeface="宋体"/>
+        <a:font script="Hant" typeface="新細明體"/>
+        <a:font script="Arab" typeface="Arial"/>
+        <a:font script="Hebr" typeface="Arial"/>
+        <a:font script="Thai" typeface="Cordia New"/>
+        <a:font script="Ethi" typeface="Nyala"/>
+        <a:font script="Beng" typeface="Vrinda"/>
+        <a:font script="Gujr" typeface="Shruti"/>
+        <a:font script="Khmr" typeface="DaunPenh"/>
+        <a:font script="Knda" typeface="Tunga"/>
+        <a:font script="Guru" typeface="Raavi"/>
+        <a:font script="Cans" typeface="Euphemia"/>
+        <a:font script="Cher" typeface="Plantagenet Cherokee"/>
+        <a:font script="Yiii" typeface="Microsoft Yi Baiti"/>
+        <a:font script="Tibt" typeface="Microsoft Himalaya"/>
+        <a:font script="Thaa" typeface="MV Boli"/>
+        <a:font script="Deva" typeface="Mangal"/>
+        <a:font script="Telu" typeface="Gautami"/>
+        <a:font script="Taml" typeface="Latha"/>
+        <a:font script="Syrc" typeface="Estrangelo Edessa"/>
+        <a:font script="Orya" typeface="Kalinga"/>
+        <a:font script="Mlym" typeface="Kartika"/>
+        <a:font script="Laoo" typeface="DokChampa"/>
+        <a:font script="Sinh" typeface="Iskoola Pota"/>
+        <a:font script="Mong" typeface="Mongolian Baiti"/>
+        <a:font script="Viet" typeface="Arial"/>
+        <a:font script="Uigh" typeface="Microsoft Uighur"/>
+        <a:font script="Geor" typeface="Sylfaen"/>
       </a:minorFont>
     </a:fontScheme>
     <a:fmtScheme name="Office">
@@ -7730,7 +7648,7 @@
         <a:solidFill>
           <a:schemeClr val="phClr"/>
         </a:solidFill>
-        <a:gradFill>
+        <a:gradFill rotWithShape="1">
           <a:gsLst>
             <a:gs pos="0">
               <a:schemeClr val="phClr">
@@ -7753,7 +7671,7 @@
           </a:gsLst>
           <a:lin ang="16200000" scaled="1"/>
         </a:gradFill>
-        <a:gradFill>
+        <a:gradFill rotWithShape="1">
           <a:gsLst>
             <a:gs pos="0">
               <a:schemeClr val="phClr">
@@ -7840,7 +7758,7 @@
         <a:solidFill>
           <a:schemeClr val="phClr"/>
         </a:solidFill>
-        <a:gradFill>
+        <a:gradFill rotWithShape="1">
           <a:gsLst>
             <a:gs pos="0">
               <a:schemeClr val="phClr">
@@ -7862,9 +7780,11 @@
               </a:schemeClr>
             </a:gs>
           </a:gsLst>
-          <a:path path="circle"/>
+          <a:path path="circle">
+            <a:fillToRect l="50000" t="-80000" r="50000" b="180000"/>
+          </a:path>
         </a:gradFill>
-        <a:gradFill>
+        <a:gradFill rotWithShape="1">
           <a:gsLst>
             <a:gs pos="0">
               <a:schemeClr val="phClr">
@@ -7879,17 +7799,18 @@
               </a:schemeClr>
             </a:gs>
           </a:gsLst>
-          <a:path path="circle"/>
+          <a:path path="circle">
+            <a:fillToRect l="50000" t="50000" r="50000" b="50000"/>
+          </a:path>
         </a:gradFill>
       </a:bgFillStyleLst>
     </a:fmtScheme>
   </a:themeElements>
-  <a:objectDefaults/>
 </a:theme>
 </file>
 
 <file path=ppt/theme/theme2.xml><?xml version="1.0" encoding="utf-8"?>
-<a:theme xmlns:a="http://schemas.openxmlformats.org/drawingml/2006/main" xmlns:r="http://schemas.openxmlformats.org/officeDocument/2006/relationships" xmlns:p="http://schemas.openxmlformats.org/presentationml/2006/main" name="">
+<a:theme xmlns:a="http://schemas.openxmlformats.org/drawingml/2006/main" xmlns:r="http://schemas.openxmlformats.org/officeDocument/2006/relationships">
   <a:themeElements>
     <a:clrScheme name="Default">
       <a:dk1>
@@ -7932,13 +7853,73 @@
     <a:fontScheme name="Office">
       <a:majorFont>
         <a:latin typeface="Arial"/>
-        <a:ea typeface="Arial"/>
-        <a:cs typeface="Arial"/>
+        <a:ea typeface=""/>
+        <a:cs typeface=""/>
+        <a:font script="Jpan" typeface="ＭＳ Ｐゴシック"/>
+        <a:font script="Hang" typeface="맑은 고딕"/>
+        <a:font script="Hans" typeface="宋体"/>
+        <a:font script="Hant" typeface="新細明體"/>
+        <a:font script="Arab" typeface="Times New Roman"/>
+        <a:font script="Hebr" typeface="Times New Roman"/>
+        <a:font script="Thai" typeface="Angsana New"/>
+        <a:font script="Ethi" typeface="Nyala"/>
+        <a:font script="Beng" typeface="Vrinda"/>
+        <a:font script="Gujr" typeface="Shruti"/>
+        <a:font script="Khmr" typeface="MoolBoran"/>
+        <a:font script="Knda" typeface="Tunga"/>
+        <a:font script="Guru" typeface="Raavi"/>
+        <a:font script="Cans" typeface="Euphemia"/>
+        <a:font script="Cher" typeface="Plantagenet Cherokee"/>
+        <a:font script="Yiii" typeface="Microsoft Yi Baiti"/>
+        <a:font script="Tibt" typeface="Microsoft Himalaya"/>
+        <a:font script="Thaa" typeface="MV Boli"/>
+        <a:font script="Deva" typeface="Mangal"/>
+        <a:font script="Telu" typeface="Gautami"/>
+        <a:font script="Taml" typeface="Latha"/>
+        <a:font script="Syrc" typeface="Estrangelo Edessa"/>
+        <a:font script="Orya" typeface="Kalinga"/>
+        <a:font script="Mlym" typeface="Kartika"/>
+        <a:font script="Laoo" typeface="DokChampa"/>
+        <a:font script="Sinh" typeface="Iskoola Pota"/>
+        <a:font script="Mong" typeface="Mongolian Baiti"/>
+        <a:font script="Viet" typeface="Times New Roman"/>
+        <a:font script="Uigh" typeface="Microsoft Uighur"/>
+        <a:font script="Geor" typeface="Sylfaen"/>
       </a:majorFont>
       <a:minorFont>
         <a:latin typeface="Arial"/>
-        <a:ea typeface="Arial"/>
-        <a:cs typeface="Arial"/>
+        <a:ea typeface=""/>
+        <a:cs typeface=""/>
+        <a:font script="Jpan" typeface="ＭＳ Ｐゴシック"/>
+        <a:font script="Hang" typeface="맑은 고딕"/>
+        <a:font script="Hans" typeface="宋体"/>
+        <a:font script="Hant" typeface="新細明體"/>
+        <a:font script="Arab" typeface="Arial"/>
+        <a:font script="Hebr" typeface="Arial"/>
+        <a:font script="Thai" typeface="Cordia New"/>
+        <a:font script="Ethi" typeface="Nyala"/>
+        <a:font script="Beng" typeface="Vrinda"/>
+        <a:font script="Gujr" typeface="Shruti"/>
+        <a:font script="Khmr" typeface="DaunPenh"/>
+        <a:font script="Knda" typeface="Tunga"/>
+        <a:font script="Guru" typeface="Raavi"/>
+        <a:font script="Cans" typeface="Euphemia"/>
+        <a:font script="Cher" typeface="Plantagenet Cherokee"/>
+        <a:font script="Yiii" typeface="Microsoft Yi Baiti"/>
+        <a:font script="Tibt" typeface="Microsoft Himalaya"/>
+        <a:font script="Thaa" typeface="MV Boli"/>
+        <a:font script="Deva" typeface="Mangal"/>
+        <a:font script="Telu" typeface="Gautami"/>
+        <a:font script="Taml" typeface="Latha"/>
+        <a:font script="Syrc" typeface="Estrangelo Edessa"/>
+        <a:font script="Orya" typeface="Kalinga"/>
+        <a:font script="Mlym" typeface="Kartika"/>
+        <a:font script="Laoo" typeface="DokChampa"/>
+        <a:font script="Sinh" typeface="Iskoola Pota"/>
+        <a:font script="Mong" typeface="Mongolian Baiti"/>
+        <a:font script="Viet" typeface="Arial"/>
+        <a:font script="Uigh" typeface="Microsoft Uighur"/>
+        <a:font script="Geor" typeface="Sylfaen"/>
       </a:minorFont>
     </a:fontScheme>
     <a:fmtScheme name="Office">
@@ -7946,7 +7927,7 @@
         <a:solidFill>
           <a:schemeClr val="phClr"/>
         </a:solidFill>
-        <a:gradFill>
+        <a:gradFill rotWithShape="1">
           <a:gsLst>
             <a:gs pos="0">
               <a:schemeClr val="phClr">
@@ -7969,7 +7950,7 @@
           </a:gsLst>
           <a:lin ang="16200000" scaled="1"/>
         </a:gradFill>
-        <a:gradFill>
+        <a:gradFill rotWithShape="1">
           <a:gsLst>
             <a:gs pos="0">
               <a:schemeClr val="phClr">
@@ -8056,7 +8037,7 @@
         <a:solidFill>
           <a:schemeClr val="phClr"/>
         </a:solidFill>
-        <a:gradFill>
+        <a:gradFill rotWithShape="1">
           <a:gsLst>
             <a:gs pos="0">
               <a:schemeClr val="phClr">
@@ -8078,9 +8059,11 @@
               </a:schemeClr>
             </a:gs>
           </a:gsLst>
-          <a:path path="circle"/>
+          <a:path path="circle">
+            <a:fillToRect l="50000" t="-80000" r="50000" b="180000"/>
+          </a:path>
         </a:gradFill>
-        <a:gradFill>
+        <a:gradFill rotWithShape="1">
           <a:gsLst>
             <a:gs pos="0">
               <a:schemeClr val="phClr">
@@ -8095,11 +8078,12 @@
               </a:schemeClr>
             </a:gs>
           </a:gsLst>
-          <a:path path="circle"/>
+          <a:path path="circle">
+            <a:fillToRect l="50000" t="50000" r="50000" b="50000"/>
+          </a:path>
         </a:gradFill>
       </a:bgFillStyleLst>
     </a:fmtScheme>
   </a:themeElements>
-  <a:objectDefaults/>
 </a:theme>
 </file>
--- a/docs/SmartAttendance.pptx
+++ b/docs/SmartAttendance.pptx
@@ -20,22 +20,29 @@
   <p:notesSz cx="6858000" cy="9144000"/>
   <p:embeddedFontLst>
     <p:embeddedFont>
-      <p:font typeface="Montserrat"/>
+      <p:font typeface="Montserrat SemiBold"/>
       <p:regular r:id="rId13"/>
       <p:bold r:id="rId14"/>
       <p:italic r:id="rId15"/>
       <p:boldItalic r:id="rId16"/>
     </p:embeddedFont>
     <p:embeddedFont>
-      <p:font typeface="Vidaloka"/>
+      <p:font typeface="Montserrat"/>
       <p:regular r:id="rId17"/>
+      <p:bold r:id="rId18"/>
+      <p:italic r:id="rId19"/>
+      <p:boldItalic r:id="rId20"/>
     </p:embeddedFont>
     <p:embeddedFont>
-      <p:font typeface="Quattrocento Sans"/>
-      <p:regular r:id="rId18"/>
-      <p:bold r:id="rId19"/>
-      <p:italic r:id="rId20"/>
-      <p:boldItalic r:id="rId21"/>
+      <p:font typeface="Montserrat Medium"/>
+      <p:regular r:id="rId21"/>
+      <p:bold r:id="rId22"/>
+      <p:italic r:id="rId23"/>
+      <p:boldItalic r:id="rId24"/>
+    </p:embeddedFont>
+    <p:embeddedFont>
+      <p:font typeface="Vidaloka"/>
+      <p:regular r:id="rId25"/>
     </p:embeddedFont>
   </p:embeddedFontLst>
   <p:defaultTextStyle>
@@ -1086,7 +1093,7 @@
   <p:cSld>
     <p:spTree>
       <p:nvGrpSpPr>
-        <p:cNvPr id="73" name="Shape 73"/>
+        <p:cNvPr id="72" name="Shape 72"/>
         <p:cNvGrpSpPr/>
         <p:nvPr/>
       </p:nvGrpSpPr>
@@ -1100,7 +1107,7 @@
       </p:grpSpPr>
       <p:sp>
         <p:nvSpPr>
-          <p:cNvPr id="74" name="Google Shape;74;p3:notes"/>
+          <p:cNvPr id="73" name="Google Shape;73;p3:notes"/>
           <p:cNvSpPr/>
           <p:nvPr>
             <p:ph idx="2" type="sldImg"/>
@@ -1145,7 +1152,7 @@
       </p:sp>
       <p:sp>
         <p:nvSpPr>
-          <p:cNvPr id="75" name="Google Shape;75;p3:notes"/>
+          <p:cNvPr id="74" name="Google Shape;74;p3:notes"/>
           <p:cNvSpPr txBox="1"/>
           <p:nvPr>
             <p:ph idx="1" type="body"/>
@@ -1203,7 +1210,7 @@
   <p:cSld>
     <p:spTree>
       <p:nvGrpSpPr>
-        <p:cNvPr id="81" name="Shape 81"/>
+        <p:cNvPr id="80" name="Shape 80"/>
         <p:cNvGrpSpPr/>
         <p:nvPr/>
       </p:nvGrpSpPr>
@@ -1217,7 +1224,7 @@
       </p:grpSpPr>
       <p:sp>
         <p:nvSpPr>
-          <p:cNvPr id="82" name="Google Shape;82;p4:notes"/>
+          <p:cNvPr id="81" name="Google Shape;81;p4:notes"/>
           <p:cNvSpPr/>
           <p:nvPr>
             <p:ph idx="2" type="sldImg"/>
@@ -1262,7 +1269,7 @@
       </p:sp>
       <p:sp>
         <p:nvSpPr>
-          <p:cNvPr id="83" name="Google Shape;83;p4:notes"/>
+          <p:cNvPr id="82" name="Google Shape;82;p4:notes"/>
           <p:cNvSpPr txBox="1"/>
           <p:nvPr>
             <p:ph idx="1" type="body"/>
@@ -1320,7 +1327,7 @@
   <p:cSld>
     <p:spTree>
       <p:nvGrpSpPr>
-        <p:cNvPr id="89" name="Shape 89"/>
+        <p:cNvPr id="88" name="Shape 88"/>
         <p:cNvGrpSpPr/>
         <p:nvPr/>
       </p:nvGrpSpPr>
@@ -1334,7 +1341,7 @@
       </p:grpSpPr>
       <p:sp>
         <p:nvSpPr>
-          <p:cNvPr id="90" name="Google Shape;90;p5:notes"/>
+          <p:cNvPr id="89" name="Google Shape;89;p5:notes"/>
           <p:cNvSpPr/>
           <p:nvPr>
             <p:ph idx="2" type="sldImg"/>
@@ -1379,7 +1386,7 @@
       </p:sp>
       <p:sp>
         <p:nvSpPr>
-          <p:cNvPr id="91" name="Google Shape;91;p5:notes"/>
+          <p:cNvPr id="90" name="Google Shape;90;p5:notes"/>
           <p:cNvSpPr txBox="1"/>
           <p:nvPr>
             <p:ph idx="1" type="body"/>
@@ -1426,7 +1433,7 @@
       </p:sp>
       <p:sp>
         <p:nvSpPr>
-          <p:cNvPr id="92" name="Google Shape;92;p5:notes"/>
+          <p:cNvPr id="91" name="Google Shape;91;p5:notes"/>
           <p:cNvSpPr txBox="1"/>
           <p:nvPr>
             <p:ph idx="12" type="sldNum"/>
@@ -1505,7 +1512,7 @@
   <p:cSld>
     <p:spTree>
       <p:nvGrpSpPr>
-        <p:cNvPr id="100" name="Shape 100"/>
+        <p:cNvPr id="99" name="Shape 99"/>
         <p:cNvGrpSpPr/>
         <p:nvPr/>
       </p:nvGrpSpPr>
@@ -1519,7 +1526,7 @@
       </p:grpSpPr>
       <p:sp>
         <p:nvSpPr>
-          <p:cNvPr id="101" name="Google Shape;101;p6:notes"/>
+          <p:cNvPr id="100" name="Google Shape;100;p6:notes"/>
           <p:cNvSpPr/>
           <p:nvPr>
             <p:ph idx="2" type="sldImg"/>
@@ -1564,7 +1571,7 @@
       </p:sp>
       <p:sp>
         <p:nvSpPr>
-          <p:cNvPr id="102" name="Google Shape;102;p6:notes"/>
+          <p:cNvPr id="101" name="Google Shape;101;p6:notes"/>
           <p:cNvSpPr txBox="1"/>
           <p:nvPr>
             <p:ph idx="1" type="body"/>
@@ -1611,7 +1618,7 @@
       </p:sp>
       <p:sp>
         <p:nvSpPr>
-          <p:cNvPr id="103" name="Google Shape;103;p6:notes"/>
+          <p:cNvPr id="102" name="Google Shape;102;p6:notes"/>
           <p:cNvSpPr txBox="1"/>
           <p:nvPr>
             <p:ph idx="12" type="sldNum"/>
@@ -1690,7 +1697,7 @@
   <p:cSld>
     <p:spTree>
       <p:nvGrpSpPr>
-        <p:cNvPr id="108" name="Shape 108"/>
+        <p:cNvPr id="107" name="Shape 107"/>
         <p:cNvGrpSpPr/>
         <p:nvPr/>
       </p:nvGrpSpPr>
@@ -1704,7 +1711,7 @@
       </p:grpSpPr>
       <p:sp>
         <p:nvSpPr>
-          <p:cNvPr id="109" name="Google Shape;109;p7:notes"/>
+          <p:cNvPr id="108" name="Google Shape;108;p7:notes"/>
           <p:cNvSpPr/>
           <p:nvPr>
             <p:ph idx="2" type="sldImg"/>
@@ -1749,7 +1756,7 @@
       </p:sp>
       <p:sp>
         <p:nvSpPr>
-          <p:cNvPr id="110" name="Google Shape;110;p7:notes"/>
+          <p:cNvPr id="109" name="Google Shape;109;p7:notes"/>
           <p:cNvSpPr txBox="1"/>
           <p:nvPr>
             <p:ph idx="1" type="body"/>
@@ -5763,14 +5770,12 @@
         <p:nvSpPr>
           <p:cNvPr id="63" name="Google Shape;63;p12"/>
           <p:cNvSpPr txBox="1"/>
-          <p:nvPr>
-            <p:ph type="ctrTitle"/>
-          </p:nvPr>
+          <p:nvPr/>
         </p:nvSpPr>
         <p:spPr>
           <a:xfrm>
-            <a:off x="1039974" y="2350800"/>
-            <a:ext cx="7064100" cy="2052600"/>
+            <a:off x="1939650" y="840150"/>
+            <a:ext cx="5264700" cy="3463200"/>
           </a:xfrm>
           <a:prstGeom prst="rect">
             <a:avLst/>
@@ -5781,15 +5786,12 @@
           </a:ln>
         </p:spPr>
         <p:txBody>
-          <a:bodyPr anchorCtr="0" anchor="b" bIns="91425" lIns="91425" spcFirstLastPara="1" rIns="91425" wrap="square" tIns="91425">
-            <a:noAutofit/>
+          <a:bodyPr anchorCtr="0" anchor="t" bIns="91425" lIns="91425" spcFirstLastPara="1" rIns="91425" wrap="square" tIns="91425">
+            <a:spAutoFit/>
           </a:bodyPr>
           <a:lstStyle/>
           <a:p>
-            <a:pPr indent="0" lvl="0" marL="0" marR="0" rtl="0" algn="ctr">
-              <a:lnSpc>
-                <a:spcPct val="100000"/>
-              </a:lnSpc>
+            <a:pPr indent="0" lvl="0" marL="0" rtl="0" algn="ctr">
               <a:spcBef>
                 <a:spcPts val="0"/>
               </a:spcBef>
@@ -5804,45 +5806,49 @@
               <a:buNone/>
             </a:pPr>
             <a:r>
-              <a:rPr b="0" i="0" lang="az-Latn-AZ" sz="6500" u="none" cap="none" strike="noStrike">
+              <a:rPr b="1" lang="az-Latn-AZ" sz="6500">
                 <a:solidFill>
                   <a:schemeClr val="dk1"/>
                 </a:solidFill>
-                <a:latin typeface="Vidaloka"/>
-                <a:ea typeface="Vidaloka"/>
-                <a:cs typeface="Vidaloka"/>
-                <a:sym typeface="Vidaloka"/>
+                <a:latin typeface="Montserrat"/>
+                <a:ea typeface="Montserrat"/>
+                <a:cs typeface="Montserrat"/>
+                <a:sym typeface="Montserrat"/>
               </a:rPr>
               <a:t>Ağıllı davamiyyət sistemi</a:t>
             </a:r>
-            <a:endParaRPr b="0" i="0" sz="6500" u="none" cap="none" strike="noStrike">
+            <a:endParaRPr b="1" sz="6500">
               <a:solidFill>
                 <a:schemeClr val="dk1"/>
               </a:solidFill>
-              <a:latin typeface="Vidaloka"/>
-              <a:ea typeface="Vidaloka"/>
-              <a:cs typeface="Vidaloka"/>
-              <a:sym typeface="Vidaloka"/>
+              <a:latin typeface="Montserrat"/>
+              <a:ea typeface="Montserrat"/>
+              <a:cs typeface="Montserrat"/>
+              <a:sym typeface="Montserrat"/>
             </a:endParaRPr>
           </a:p>
           <a:p>
-            <a:pPr indent="0" lvl="0" marL="0" rtl="0" algn="ctr">
-              <a:lnSpc>
-                <a:spcPct val="100000"/>
-              </a:lnSpc>
-              <a:spcBef>
-                <a:spcPts val="0"/>
-              </a:spcBef>
-              <a:spcAft>
-                <a:spcPts val="0"/>
-              </a:spcAft>
-              <a:buSzPts val="5200"/>
+            <a:pPr indent="0" lvl="0" marL="0" rtl="0" algn="l">
+              <a:spcBef>
+                <a:spcPts val="0"/>
+              </a:spcBef>
+              <a:spcAft>
+                <a:spcPts val="0"/>
+              </a:spcAft>
               <a:buNone/>
             </a:pPr>
             <a:r>
               <a:t/>
             </a:r>
-            <a:endParaRPr/>
+            <a:endParaRPr sz="1800">
+              <a:solidFill>
+                <a:schemeClr val="dk2"/>
+              </a:solidFill>
+              <a:latin typeface="Montserrat"/>
+              <a:ea typeface="Montserrat"/>
+              <a:cs typeface="Montserrat"/>
+              <a:sym typeface="Montserrat"/>
+            </a:endParaRPr>
           </a:p>
         </p:txBody>
       </p:sp>
@@ -5881,8 +5887,8 @@
         </p:nvSpPr>
         <p:spPr>
           <a:xfrm>
-            <a:off x="0" y="959999"/>
-            <a:ext cx="4465800" cy="3874841"/>
+            <a:off x="0" y="1219975"/>
+            <a:ext cx="4465800" cy="3499200"/>
           </a:xfrm>
           <a:prstGeom prst="rect">
             <a:avLst/>
@@ -5916,37 +5922,25 @@
               <a:buChar char="•"/>
             </a:pPr>
             <a:r>
-              <a:rPr b="0" i="0" lang="az-Latn-AZ" sz="1800" u="none">
-                <a:solidFill>
-                  <a:srgbClr val="000000"/>
-                </a:solidFill>
-                <a:latin typeface="Times New Roman"/>
-                <a:ea typeface="Times New Roman"/>
-                <a:cs typeface="Times New Roman"/>
-                <a:sym typeface="Times New Roman"/>
-              </a:rPr>
-              <a:t> </a:t>
-            </a:r>
-            <a:r>
-              <a:rPr b="0" i="0" lang="az-Latn-AZ" sz="2200" u="none" cap="none" strike="noStrike">
+              <a:rPr i="0" lang="az-Latn-AZ" sz="2000" u="none" cap="none" strike="noStrike">
                 <a:solidFill>
                   <a:schemeClr val="dk1"/>
                 </a:solidFill>
-                <a:latin typeface="Vidaloka"/>
-                <a:ea typeface="Vidaloka"/>
-                <a:cs typeface="Vidaloka"/>
-                <a:sym typeface="Vidaloka"/>
+                <a:latin typeface="Montserrat Medium"/>
+                <a:ea typeface="Montserrat Medium"/>
+                <a:cs typeface="Montserrat Medium"/>
+                <a:sym typeface="Montserrat Medium"/>
               </a:rPr>
               <a:t>Bu, müasir üz tanıma texnologiyasına əsaslanan proqram təminatıdır. Sistem, yüksək dəqiqlikli kameralar vasitəsilə insan simalarını skan edərək biometrik məlumatları emal edir və saniyələr ərzində şəxsin kimliyini müəyyənləşdirməyə imkan verir.</a:t>
             </a:r>
-            <a:endParaRPr b="0" i="0" sz="2200" u="none" cap="none" strike="noStrike">
+            <a:endParaRPr i="0" sz="2000" u="none" cap="none" strike="noStrike">
               <a:solidFill>
                 <a:schemeClr val="dk1"/>
               </a:solidFill>
-              <a:latin typeface="Vidaloka"/>
-              <a:ea typeface="Vidaloka"/>
-              <a:cs typeface="Vidaloka"/>
-              <a:sym typeface="Vidaloka"/>
+              <a:latin typeface="Montserrat Medium"/>
+              <a:ea typeface="Montserrat Medium"/>
+              <a:cs typeface="Montserrat Medium"/>
+              <a:sym typeface="Montserrat Medium"/>
             </a:endParaRPr>
           </a:p>
           <a:p>
@@ -5970,11 +5964,11 @@
             <a:r>
               <a:t/>
             </a:r>
-            <a:endParaRPr sz="1100">
-              <a:latin typeface="Quattrocento Sans"/>
-              <a:ea typeface="Quattrocento Sans"/>
-              <a:cs typeface="Quattrocento Sans"/>
-              <a:sym typeface="Quattrocento Sans"/>
+            <a:endParaRPr sz="900">
+              <a:latin typeface="Montserrat Medium"/>
+              <a:ea typeface="Montserrat Medium"/>
+              <a:cs typeface="Montserrat Medium"/>
+              <a:sym typeface="Montserrat Medium"/>
             </a:endParaRPr>
           </a:p>
         </p:txBody>
@@ -6020,10 +6014,20 @@
               <a:buNone/>
             </a:pPr>
             <a:r>
-              <a:rPr lang="az-Latn-AZ"/>
+              <a:rPr b="1" lang="az-Latn-AZ">
+                <a:latin typeface="Montserrat"/>
+                <a:ea typeface="Montserrat"/>
+                <a:cs typeface="Montserrat"/>
+                <a:sym typeface="Montserrat"/>
+              </a:rPr>
               <a:t>Ağıllı davamiyyət sistemi tam olaraq nədir?</a:t>
             </a:r>
-            <a:endParaRPr/>
+            <a:endParaRPr b="1">
+              <a:latin typeface="Montserrat"/>
+              <a:ea typeface="Montserrat"/>
+              <a:cs typeface="Montserrat"/>
+              <a:sym typeface="Montserrat"/>
+            </a:endParaRPr>
           </a:p>
         </p:txBody>
       </p:sp>
@@ -6035,8 +6039,298 @@
         </p:nvSpPr>
         <p:spPr>
           <a:xfrm>
-            <a:off x="4321116" y="1022052"/>
-            <a:ext cx="3880500" cy="461700"/>
+            <a:off x="4465800" y="1219974"/>
+            <a:ext cx="3742800" cy="2031900"/>
+          </a:xfrm>
+          <a:prstGeom prst="rect">
+            <a:avLst/>
+          </a:prstGeom>
+          <a:noFill/>
+          <a:ln>
+            <a:noFill/>
+          </a:ln>
+        </p:spPr>
+        <p:txBody>
+          <a:bodyPr anchorCtr="0" anchor="t" bIns="91425" lIns="91425" spcFirstLastPara="1" rIns="91425" wrap="square" tIns="91425">
+            <a:spAutoFit/>
+          </a:bodyPr>
+          <a:lstStyle/>
+          <a:p>
+            <a:pPr indent="0" lvl="0" marL="0" marR="0" rtl="0" algn="l">
+              <a:lnSpc>
+                <a:spcPct val="100000"/>
+              </a:lnSpc>
+              <a:spcBef>
+                <a:spcPts val="0"/>
+              </a:spcBef>
+              <a:spcAft>
+                <a:spcPts val="0"/>
+              </a:spcAft>
+              <a:buNone/>
+            </a:pPr>
+            <a:r>
+              <a:rPr lang="az-Latn-AZ" sz="2000">
+                <a:solidFill>
+                  <a:schemeClr val="dk2"/>
+                </a:solidFill>
+                <a:latin typeface="Montserrat Medium"/>
+                <a:ea typeface="Montserrat Medium"/>
+                <a:cs typeface="Montserrat Medium"/>
+                <a:sym typeface="Montserrat Medium"/>
+              </a:rPr>
+              <a:t>Bu vasitə ilə istifadəçilərin giriş-çıxış məlumatları avtomoatik olaraq qeydə alınır və idarəetmə panelində anlıq olaraq izlənilə bilir.</a:t>
+            </a:r>
+            <a:endParaRPr i="0" sz="2000" u="none" cap="none" strike="noStrike">
+              <a:solidFill>
+                <a:schemeClr val="dk2"/>
+              </a:solidFill>
+              <a:latin typeface="Montserrat Medium"/>
+              <a:ea typeface="Montserrat Medium"/>
+              <a:cs typeface="Montserrat Medium"/>
+              <a:sym typeface="Montserrat Medium"/>
+            </a:endParaRPr>
+          </a:p>
+        </p:txBody>
+      </p:sp>
+      <p:sp>
+        <p:nvSpPr>
+          <p:cNvPr id="71" name="Google Shape;71;p13"/>
+          <p:cNvSpPr txBox="1"/>
+          <p:nvPr/>
+        </p:nvSpPr>
+        <p:spPr>
+          <a:xfrm>
+            <a:off x="242961" y="3219208"/>
+            <a:ext cx="3497250" cy="335639"/>
+          </a:xfrm>
+          <a:prstGeom prst="rect">
+            <a:avLst/>
+          </a:prstGeom>
+          <a:noFill/>
+          <a:ln>
+            <a:noFill/>
+          </a:ln>
+        </p:spPr>
+        <p:txBody>
+          <a:bodyPr anchorCtr="0" anchor="t" bIns="45700" lIns="91425" spcFirstLastPara="1" rIns="91425" wrap="square" tIns="45700">
+            <a:spAutoFit/>
+          </a:bodyPr>
+          <a:lstStyle/>
+          <a:p>
+            <a:pPr indent="0" lvl="0" marL="0" marR="0" rtl="0" algn="l">
+              <a:lnSpc>
+                <a:spcPct val="100000"/>
+              </a:lnSpc>
+              <a:spcBef>
+                <a:spcPts val="0"/>
+              </a:spcBef>
+              <a:spcAft>
+                <a:spcPts val="0"/>
+              </a:spcAft>
+              <a:buClr>
+                <a:srgbClr val="000000"/>
+              </a:buClr>
+              <a:buSzPts val="1600"/>
+              <a:buFont typeface="Arial"/>
+              <a:buNone/>
+            </a:pPr>
+            <a:r>
+              <a:t/>
+            </a:r>
+            <a:endParaRPr b="0" i="0" sz="1600" u="none" cap="none" strike="noStrike">
+              <a:solidFill>
+                <a:srgbClr val="000000"/>
+              </a:solidFill>
+              <a:latin typeface="Arial"/>
+              <a:ea typeface="Arial"/>
+              <a:cs typeface="Arial"/>
+              <a:sym typeface="Arial"/>
+            </a:endParaRPr>
+          </a:p>
+        </p:txBody>
+      </p:sp>
+    </p:spTree>
+  </p:cSld>
+  <p:clrMapOvr>
+    <a:masterClrMapping/>
+  </p:clrMapOvr>
+</p:sld>
+</file>
+
+<file path=ppt/slides/slide3.xml><?xml version="1.0" encoding="utf-8"?>
+<p:sld xmlns:a="http://schemas.openxmlformats.org/drawingml/2006/main" xmlns:r="http://schemas.openxmlformats.org/officeDocument/2006/relationships" xmlns:mc="http://schemas.openxmlformats.org/markup-compatibility/2006" xmlns:mv="urn:schemas-microsoft-com:mac:vml" xmlns:p="http://schemas.openxmlformats.org/presentationml/2006/main" xmlns:c="http://schemas.openxmlformats.org/drawingml/2006/chart" xmlns:dgm="http://schemas.openxmlformats.org/drawingml/2006/diagram" xmlns:o="urn:schemas-microsoft-com:office:office" xmlns:v="urn:schemas-microsoft-com:vml" xmlns:pvml="urn:schemas-microsoft-com:office:powerpoint" xmlns:com="http://schemas.openxmlformats.org/drawingml/2006/compatibility" xmlns:p14="http://schemas.microsoft.com/office/powerpoint/2010/main" xmlns:p15="http://schemas.microsoft.com/office/powerpoint/2012/main" xmlns:ahyp="http://schemas.microsoft.com/office/drawing/2018/hyperlinkcolor">
+  <p:cSld>
+    <p:spTree>
+      <p:nvGrpSpPr>
+        <p:cNvPr id="75" name="Shape 75"/>
+        <p:cNvGrpSpPr/>
+        <p:nvPr/>
+      </p:nvGrpSpPr>
+      <p:grpSpPr>
+        <a:xfrm>
+          <a:off x="0" y="0"/>
+          <a:ext cx="0" cy="0"/>
+          <a:chOff x="0" y="0"/>
+          <a:chExt cx="0" cy="0"/>
+        </a:xfrm>
+      </p:grpSpPr>
+      <p:sp>
+        <p:nvSpPr>
+          <p:cNvPr id="76" name="Google Shape;76;p14"/>
+          <p:cNvSpPr txBox="1"/>
+          <p:nvPr>
+            <p:ph idx="1" type="subTitle"/>
+          </p:nvPr>
+        </p:nvSpPr>
+        <p:spPr>
+          <a:xfrm>
+            <a:off x="-1" y="845926"/>
+            <a:ext cx="4572000" cy="2640300"/>
+          </a:xfrm>
+          <a:prstGeom prst="rect">
+            <a:avLst/>
+          </a:prstGeom>
+          <a:noFill/>
+          <a:ln>
+            <a:noFill/>
+          </a:ln>
+        </p:spPr>
+        <p:txBody>
+          <a:bodyPr anchorCtr="0" anchor="t" bIns="91400" lIns="91400" spcFirstLastPara="1" rIns="91400" wrap="square" tIns="91400">
+            <a:noAutofit/>
+          </a:bodyPr>
+          <a:lstStyle/>
+          <a:p>
+            <a:pPr indent="-292100" lvl="0" marL="457200" rtl="0" algn="l">
+              <a:lnSpc>
+                <a:spcPct val="100000"/>
+              </a:lnSpc>
+              <a:spcBef>
+                <a:spcPts val="0"/>
+              </a:spcBef>
+              <a:spcAft>
+                <a:spcPts val="0"/>
+              </a:spcAft>
+              <a:buClr>
+                <a:schemeClr val="dk1"/>
+              </a:buClr>
+              <a:buSzPts val="2200"/>
+              <a:buFont typeface="Arial"/>
+              <a:buChar char="•"/>
+            </a:pPr>
+            <a:r>
+              <a:rPr i="0" lang="az-Latn-AZ" sz="2200" u="none">
+                <a:solidFill>
+                  <a:srgbClr val="000000"/>
+                </a:solidFill>
+                <a:latin typeface="Montserrat Medium"/>
+                <a:ea typeface="Montserrat Medium"/>
+                <a:cs typeface="Montserrat Medium"/>
+                <a:sym typeface="Montserrat Medium"/>
+              </a:rPr>
+              <a:t> </a:t>
+            </a:r>
+            <a:r>
+              <a:rPr i="0" lang="az-Latn-AZ" sz="2200" u="none" cap="none" strike="noStrike">
+                <a:solidFill>
+                  <a:schemeClr val="dk1"/>
+                </a:solidFill>
+                <a:latin typeface="Montserrat Medium"/>
+                <a:ea typeface="Montserrat Medium"/>
+                <a:cs typeface="Montserrat Medium"/>
+                <a:sym typeface="Montserrat Medium"/>
+              </a:rPr>
+              <a:t>Biz bu sistemi tətbiq etməkdə əsas məqsədimiz, şagirdlərin dərsə iştirakının qeydiyyat prosesini tamamilə avtomatlaşdırmaq və bununla da məktəb heyətinin inzibati yükünü əhəmiyyətli dərəcədə azaltmaqdır</a:t>
+            </a:r>
+            <a:r>
+              <a:rPr i="0" lang="az-Latn-AZ" sz="2200" u="none">
+                <a:solidFill>
+                  <a:srgbClr val="000000"/>
+                </a:solidFill>
+                <a:latin typeface="Montserrat Medium"/>
+                <a:ea typeface="Montserrat Medium"/>
+                <a:cs typeface="Montserrat Medium"/>
+                <a:sym typeface="Montserrat Medium"/>
+              </a:rPr>
+              <a:t>.</a:t>
+            </a:r>
+            <a:endParaRPr sz="2200">
+              <a:latin typeface="Montserrat Medium"/>
+              <a:ea typeface="Montserrat Medium"/>
+              <a:cs typeface="Montserrat Medium"/>
+              <a:sym typeface="Montserrat Medium"/>
+            </a:endParaRPr>
+          </a:p>
+        </p:txBody>
+      </p:sp>
+      <p:sp>
+        <p:nvSpPr>
+          <p:cNvPr id="77" name="Google Shape;77;p14"/>
+          <p:cNvSpPr txBox="1"/>
+          <p:nvPr>
+            <p:ph type="title"/>
+          </p:nvPr>
+        </p:nvSpPr>
+        <p:spPr>
+          <a:xfrm>
+            <a:off x="0" y="273225"/>
+            <a:ext cx="9144000" cy="572700"/>
+          </a:xfrm>
+          <a:prstGeom prst="rect">
+            <a:avLst/>
+          </a:prstGeom>
+          <a:noFill/>
+          <a:ln>
+            <a:noFill/>
+          </a:ln>
+        </p:spPr>
+        <p:txBody>
+          <a:bodyPr anchorCtr="0" anchor="t" bIns="91425" lIns="91425" spcFirstLastPara="1" rIns="91425" wrap="square" tIns="91425">
+            <a:noAutofit/>
+          </a:bodyPr>
+          <a:lstStyle/>
+          <a:p>
+            <a:pPr indent="0" lvl="0" marL="0" rtl="0" algn="ctr">
+              <a:lnSpc>
+                <a:spcPct val="100000"/>
+              </a:lnSpc>
+              <a:spcBef>
+                <a:spcPts val="0"/>
+              </a:spcBef>
+              <a:spcAft>
+                <a:spcPts val="0"/>
+              </a:spcAft>
+              <a:buSzPts val="3000"/>
+              <a:buNone/>
+            </a:pPr>
+            <a:r>
+              <a:rPr b="1" lang="az-Latn-AZ">
+                <a:latin typeface="Montserrat"/>
+                <a:ea typeface="Montserrat"/>
+                <a:cs typeface="Montserrat"/>
+                <a:sym typeface="Montserrat"/>
+              </a:rPr>
+              <a:t>Biz bunu niyə edirik?</a:t>
+            </a:r>
+            <a:endParaRPr b="1">
+              <a:latin typeface="Montserrat"/>
+              <a:ea typeface="Montserrat"/>
+              <a:cs typeface="Montserrat"/>
+              <a:sym typeface="Montserrat"/>
+            </a:endParaRPr>
+          </a:p>
+        </p:txBody>
+      </p:sp>
+      <p:sp>
+        <p:nvSpPr>
+          <p:cNvPr id="78" name="Google Shape;78;p14"/>
+          <p:cNvSpPr txBox="1"/>
+          <p:nvPr/>
+        </p:nvSpPr>
+        <p:spPr>
+          <a:xfrm>
+            <a:off x="5618450" y="1212625"/>
+            <a:ext cx="3546900" cy="461700"/>
           </a:xfrm>
           <a:prstGeom prst="rect">
             <a:avLst/>
@@ -6086,14 +6380,14 @@
       </p:sp>
       <p:sp>
         <p:nvSpPr>
-          <p:cNvPr id="71" name="Google Shape;71;p13"/>
+          <p:cNvPr id="79" name="Google Shape;79;p14"/>
           <p:cNvSpPr txBox="1"/>
           <p:nvPr/>
         </p:nvSpPr>
         <p:spPr>
           <a:xfrm>
-            <a:off x="242961" y="3219208"/>
-            <a:ext cx="3497250" cy="335639"/>
+            <a:off x="4572000" y="845925"/>
+            <a:ext cx="3983100" cy="2986200"/>
           </a:xfrm>
           <a:prstGeom prst="rect">
             <a:avLst/>
@@ -6109,331 +6403,43 @@
           </a:bodyPr>
           <a:lstStyle/>
           <a:p>
-            <a:pPr indent="0" lvl="0" marL="0" marR="0" rtl="0" algn="l">
-              <a:lnSpc>
-                <a:spcPct val="100000"/>
-              </a:lnSpc>
-              <a:spcBef>
-                <a:spcPts val="0"/>
-              </a:spcBef>
-              <a:spcAft>
-                <a:spcPts val="0"/>
-              </a:spcAft>
-              <a:buNone/>
+            <a:pPr indent="-368300" lvl="0" marL="457200" marR="0" rtl="0" algn="l">
+              <a:lnSpc>
+                <a:spcPct val="100000"/>
+              </a:lnSpc>
+              <a:spcBef>
+                <a:spcPts val="0"/>
+              </a:spcBef>
+              <a:spcAft>
+                <a:spcPts val="0"/>
+              </a:spcAft>
+              <a:buClr>
+                <a:schemeClr val="dk1"/>
+              </a:buClr>
+              <a:buSzPts val="3400"/>
+              <a:buFont typeface="Montserrat Medium"/>
+              <a:buChar char="•"/>
             </a:pPr>
             <a:r>
-              <a:t/>
+              <a:rPr i="0" lang="az-Latn-AZ" sz="2200" u="none" cap="none" strike="noStrike">
+                <a:solidFill>
+                  <a:srgbClr val="000000"/>
+                </a:solidFill>
+                <a:latin typeface="Montserrat Medium"/>
+                <a:ea typeface="Montserrat Medium"/>
+                <a:cs typeface="Montserrat Medium"/>
+                <a:sym typeface="Montserrat Medium"/>
+              </a:rPr>
+              <a:t>Bu ağıllı proqram təminatı ilə məktəbiniz daha təhlükəsiz, müəllimlər isə daha az yüklənmiş olacaq! jurnal yazmaq üçün sərf olunan vaxt isə xeyli qısalır. </a:t>
             </a:r>
-            <a:endParaRPr b="0" i="0" sz="1600" u="none" cap="none" strike="noStrike">
+            <a:endParaRPr i="0" sz="2200" u="none" cap="none" strike="noStrike">
               <a:solidFill>
                 <a:srgbClr val="000000"/>
               </a:solidFill>
-              <a:latin typeface="Arial"/>
-              <a:ea typeface="Arial"/>
-              <a:cs typeface="Arial"/>
-              <a:sym typeface="Arial"/>
-            </a:endParaRPr>
-          </a:p>
-        </p:txBody>
-      </p:sp>
-      <p:pic>
-        <p:nvPicPr>
-          <p:cNvPr id="72" name="Google Shape;72;p13"/>
-          <p:cNvPicPr preferRelativeResize="0"/>
-          <p:nvPr/>
-        </p:nvPicPr>
-        <p:blipFill rotWithShape="1">
-          <a:blip r:embed="rId3">
-            <a:alphaModFix/>
-          </a:blip>
-          <a:srcRect b="0" l="0" r="0" t="0"/>
-          <a:stretch/>
-        </p:blipFill>
-        <p:spPr>
-          <a:xfrm>
-            <a:off x="4572000" y="960004"/>
-            <a:ext cx="3073348" cy="3073348"/>
-          </a:xfrm>
-          <a:prstGeom prst="rect">
-            <a:avLst/>
-          </a:prstGeom>
-          <a:noFill/>
-          <a:ln>
-            <a:noFill/>
-          </a:ln>
-        </p:spPr>
-      </p:pic>
-    </p:spTree>
-  </p:cSld>
-  <p:clrMapOvr>
-    <a:masterClrMapping/>
-  </p:clrMapOvr>
-</p:sld>
-</file>
-
-<file path=ppt/slides/slide3.xml><?xml version="1.0" encoding="utf-8"?>
-<p:sld xmlns:a="http://schemas.openxmlformats.org/drawingml/2006/main" xmlns:r="http://schemas.openxmlformats.org/officeDocument/2006/relationships" xmlns:mc="http://schemas.openxmlformats.org/markup-compatibility/2006" xmlns:mv="urn:schemas-microsoft-com:mac:vml" xmlns:p="http://schemas.openxmlformats.org/presentationml/2006/main" xmlns:c="http://schemas.openxmlformats.org/drawingml/2006/chart" xmlns:dgm="http://schemas.openxmlformats.org/drawingml/2006/diagram" xmlns:o="urn:schemas-microsoft-com:office:office" xmlns:v="urn:schemas-microsoft-com:vml" xmlns:pvml="urn:schemas-microsoft-com:office:powerpoint" xmlns:com="http://schemas.openxmlformats.org/drawingml/2006/compatibility" xmlns:p14="http://schemas.microsoft.com/office/powerpoint/2010/main" xmlns:p15="http://schemas.microsoft.com/office/powerpoint/2012/main" xmlns:ahyp="http://schemas.microsoft.com/office/drawing/2018/hyperlinkcolor">
-  <p:cSld>
-    <p:spTree>
-      <p:nvGrpSpPr>
-        <p:cNvPr id="76" name="Shape 76"/>
-        <p:cNvGrpSpPr/>
-        <p:nvPr/>
-      </p:nvGrpSpPr>
-      <p:grpSpPr>
-        <a:xfrm>
-          <a:off x="0" y="0"/>
-          <a:ext cx="0" cy="0"/>
-          <a:chOff x="0" y="0"/>
-          <a:chExt cx="0" cy="0"/>
-        </a:xfrm>
-      </p:grpSpPr>
-      <p:sp>
-        <p:nvSpPr>
-          <p:cNvPr id="77" name="Google Shape;77;p14"/>
-          <p:cNvSpPr txBox="1"/>
-          <p:nvPr>
-            <p:ph idx="1" type="subTitle"/>
-          </p:nvPr>
-        </p:nvSpPr>
-        <p:spPr>
-          <a:xfrm>
-            <a:off x="-12" y="845919"/>
-            <a:ext cx="5033100" cy="2379900"/>
-          </a:xfrm>
-          <a:prstGeom prst="rect">
-            <a:avLst/>
-          </a:prstGeom>
-          <a:noFill/>
-          <a:ln>
-            <a:noFill/>
-          </a:ln>
-        </p:spPr>
-        <p:txBody>
-          <a:bodyPr anchorCtr="0" anchor="t" bIns="91400" lIns="91400" spcFirstLastPara="1" rIns="91400" wrap="square" tIns="91400">
-            <a:noAutofit/>
-          </a:bodyPr>
-          <a:lstStyle/>
-          <a:p>
-            <a:pPr indent="-342900" lvl="0" marL="457200" rtl="0" algn="l">
-              <a:lnSpc>
-                <a:spcPct val="100000"/>
-              </a:lnSpc>
-              <a:spcBef>
-                <a:spcPts val="0"/>
-              </a:spcBef>
-              <a:spcAft>
-                <a:spcPts val="0"/>
-              </a:spcAft>
-              <a:buClr>
-                <a:schemeClr val="dk1"/>
-              </a:buClr>
-              <a:buSzPts val="3000"/>
-              <a:buFont typeface="Arial"/>
-              <a:buChar char="•"/>
-            </a:pPr>
-            <a:r>
-              <a:rPr b="1" i="0" lang="az-Latn-AZ" sz="700" u="none">
-                <a:solidFill>
-                  <a:srgbClr val="000000"/>
-                </a:solidFill>
-                <a:latin typeface="Times New Roman"/>
-                <a:ea typeface="Times New Roman"/>
-                <a:cs typeface="Times New Roman"/>
-                <a:sym typeface="Times New Roman"/>
-              </a:rPr>
-              <a:t> </a:t>
-            </a:r>
-            <a:r>
-              <a:rPr b="1" i="0" lang="az-Latn-AZ" sz="2000" u="none" cap="none" strike="noStrike">
-                <a:solidFill>
-                  <a:schemeClr val="dk1"/>
-                </a:solidFill>
-                <a:latin typeface="Vidaloka"/>
-                <a:ea typeface="Vidaloka"/>
-                <a:cs typeface="Vidaloka"/>
-                <a:sym typeface="Vidaloka"/>
-              </a:rPr>
-              <a:t>Biz bu sistemi tətbiq etməkdə əsas məqsədimiz, şagirdlərin dərsə iştirakının qeydiyyat prosesini tamamilə avtomatlaşdırmaq və bununla da məktəb heyətinin inzibati yükünü əhəmiyyətli dərəcədə azaltmaqdır</a:t>
-            </a:r>
-            <a:r>
-              <a:rPr b="1" i="0" lang="az-Latn-AZ" sz="700" u="none">
-                <a:solidFill>
-                  <a:srgbClr val="000000"/>
-                </a:solidFill>
-                <a:latin typeface="Times New Roman"/>
-                <a:ea typeface="Times New Roman"/>
-                <a:cs typeface="Times New Roman"/>
-                <a:sym typeface="Times New Roman"/>
-              </a:rPr>
-              <a:t>.</a:t>
-            </a:r>
-            <a:endParaRPr b="1" sz="800"/>
-          </a:p>
-        </p:txBody>
-      </p:sp>
-      <p:sp>
-        <p:nvSpPr>
-          <p:cNvPr id="78" name="Google Shape;78;p14"/>
-          <p:cNvSpPr txBox="1"/>
-          <p:nvPr>
-            <p:ph type="title"/>
-          </p:nvPr>
-        </p:nvSpPr>
-        <p:spPr>
-          <a:xfrm>
-            <a:off x="0" y="273225"/>
-            <a:ext cx="9144000" cy="572700"/>
-          </a:xfrm>
-          <a:prstGeom prst="rect">
-            <a:avLst/>
-          </a:prstGeom>
-          <a:noFill/>
-          <a:ln>
-            <a:noFill/>
-          </a:ln>
-        </p:spPr>
-        <p:txBody>
-          <a:bodyPr anchorCtr="0" anchor="t" bIns="91425" lIns="91425" spcFirstLastPara="1" rIns="91425" wrap="square" tIns="91425">
-            <a:noAutofit/>
-          </a:bodyPr>
-          <a:lstStyle/>
-          <a:p>
-            <a:pPr indent="0" lvl="0" marL="0" rtl="0" algn="ctr">
-              <a:lnSpc>
-                <a:spcPct val="100000"/>
-              </a:lnSpc>
-              <a:spcBef>
-                <a:spcPts val="0"/>
-              </a:spcBef>
-              <a:spcAft>
-                <a:spcPts val="0"/>
-              </a:spcAft>
-              <a:buSzPts val="3000"/>
-              <a:buNone/>
-            </a:pPr>
-            <a:r>
-              <a:rPr lang="az-Latn-AZ"/>
-              <a:t>Biz bunu niyə edirik?</a:t>
-            </a:r>
-            <a:endParaRPr/>
-          </a:p>
-        </p:txBody>
-      </p:sp>
-      <p:sp>
-        <p:nvSpPr>
-          <p:cNvPr id="79" name="Google Shape;79;p14"/>
-          <p:cNvSpPr txBox="1"/>
-          <p:nvPr/>
-        </p:nvSpPr>
-        <p:spPr>
-          <a:xfrm>
-            <a:off x="5618450" y="1212625"/>
-            <a:ext cx="3546900" cy="461700"/>
-          </a:xfrm>
-          <a:prstGeom prst="rect">
-            <a:avLst/>
-          </a:prstGeom>
-          <a:noFill/>
-          <a:ln>
-            <a:noFill/>
-          </a:ln>
-        </p:spPr>
-        <p:txBody>
-          <a:bodyPr anchorCtr="0" anchor="t" bIns="91425" lIns="91425" spcFirstLastPara="1" rIns="91425" wrap="square" tIns="91425">
-            <a:spAutoFit/>
-          </a:bodyPr>
-          <a:lstStyle/>
-          <a:p>
-            <a:pPr indent="0" lvl="0" marL="0" marR="0" rtl="0" algn="l">
-              <a:lnSpc>
-                <a:spcPct val="100000"/>
-              </a:lnSpc>
-              <a:spcBef>
-                <a:spcPts val="0"/>
-              </a:spcBef>
-              <a:spcAft>
-                <a:spcPts val="0"/>
-              </a:spcAft>
-              <a:buClr>
-                <a:srgbClr val="000000"/>
-              </a:buClr>
-              <a:buSzPts val="1800"/>
-              <a:buFont typeface="Arial"/>
-              <a:buNone/>
-            </a:pPr>
-            <a:r>
-              <a:t/>
-            </a:r>
-            <a:endParaRPr b="0" i="0" sz="1800" u="none" cap="none" strike="noStrike">
-              <a:solidFill>
-                <a:schemeClr val="dk2"/>
-              </a:solidFill>
-              <a:latin typeface="Montserrat"/>
-              <a:ea typeface="Montserrat"/>
-              <a:cs typeface="Montserrat"/>
-              <a:sym typeface="Montserrat"/>
-            </a:endParaRPr>
-          </a:p>
-        </p:txBody>
-      </p:sp>
-      <p:sp>
-        <p:nvSpPr>
-          <p:cNvPr id="80" name="Google Shape;80;p14"/>
-          <p:cNvSpPr txBox="1"/>
-          <p:nvPr/>
-        </p:nvSpPr>
-        <p:spPr>
-          <a:xfrm>
-            <a:off x="4664199" y="845921"/>
-            <a:ext cx="3638400" cy="2216400"/>
-          </a:xfrm>
-          <a:prstGeom prst="rect">
-            <a:avLst/>
-          </a:prstGeom>
-          <a:noFill/>
-          <a:ln>
-            <a:noFill/>
-          </a:ln>
-        </p:spPr>
-        <p:txBody>
-          <a:bodyPr anchorCtr="0" anchor="t" bIns="45700" lIns="91425" spcFirstLastPara="1" rIns="91425" wrap="square" tIns="45700">
-            <a:spAutoFit/>
-          </a:bodyPr>
-          <a:lstStyle/>
-          <a:p>
-            <a:pPr indent="-342900" lvl="0" marL="457200" marR="0" rtl="0" algn="l">
-              <a:lnSpc>
-                <a:spcPct val="100000"/>
-              </a:lnSpc>
-              <a:spcBef>
-                <a:spcPts val="0"/>
-              </a:spcBef>
-              <a:spcAft>
-                <a:spcPts val="0"/>
-              </a:spcAft>
-              <a:buClr>
-                <a:schemeClr val="dk1"/>
-              </a:buClr>
-              <a:buSzPts val="3000"/>
-              <a:buChar char="•"/>
-            </a:pPr>
-            <a:r>
-              <a:rPr b="1" i="0" lang="az-Latn-AZ" sz="1800" u="none" cap="none" strike="noStrike"/>
-              <a:t>Bu ağıllı proqram təminatı ilə məktəbiniz daha təhlükəsiz, müəllimlər isə daha az yüklənmiş olacaq!</a:t>
-            </a:r>
-            <a:r>
-              <a:rPr b="1" lang="az-Latn-AZ" sz="1800"/>
-              <a:t> </a:t>
-            </a:r>
-            <a:r>
-              <a:rPr b="1" i="0" lang="az-Latn-AZ" sz="1800" u="none" cap="none" strike="noStrike"/>
-              <a:t>jurnal yazmaq üçün sərf olunan vaxt isə xeyli qısalır. </a:t>
-            </a:r>
-            <a:endParaRPr b="1" i="0" sz="1800" u="none" cap="none" strike="noStrike">
-              <a:solidFill>
-                <a:srgbClr val="000000"/>
-              </a:solidFill>
+              <a:latin typeface="Montserrat Medium"/>
+              <a:ea typeface="Montserrat Medium"/>
+              <a:cs typeface="Montserrat Medium"/>
+              <a:sym typeface="Montserrat Medium"/>
             </a:endParaRPr>
           </a:p>
         </p:txBody>
@@ -6451,7 +6457,7 @@
   <p:cSld>
     <p:spTree>
       <p:nvGrpSpPr>
-        <p:cNvPr id="84" name="Shape 84"/>
+        <p:cNvPr id="83" name="Shape 83"/>
         <p:cNvGrpSpPr/>
         <p:nvPr/>
       </p:nvGrpSpPr>
@@ -6465,7 +6471,7 @@
       </p:grpSpPr>
       <p:sp>
         <p:nvSpPr>
-          <p:cNvPr id="85" name="Google Shape;85;p15"/>
+          <p:cNvPr id="84" name="Google Shape;84;p15"/>
           <p:cNvSpPr txBox="1"/>
           <p:nvPr>
             <p:ph type="title"/>
@@ -6504,16 +6510,26 @@
               <a:buNone/>
             </a:pPr>
             <a:r>
-              <a:rPr lang="az-Latn-AZ"/>
+              <a:rPr b="1" lang="az-Latn-AZ">
+                <a:latin typeface="Montserrat"/>
+                <a:ea typeface="Montserrat"/>
+                <a:cs typeface="Montserrat"/>
+                <a:sym typeface="Montserrat"/>
+              </a:rPr>
               <a:t>Asanlıq!</a:t>
             </a:r>
-            <a:endParaRPr/>
+            <a:endParaRPr b="1">
+              <a:latin typeface="Montserrat"/>
+              <a:ea typeface="Montserrat"/>
+              <a:cs typeface="Montserrat"/>
+              <a:sym typeface="Montserrat"/>
+            </a:endParaRPr>
           </a:p>
         </p:txBody>
       </p:sp>
       <p:sp>
         <p:nvSpPr>
-          <p:cNvPr id="86" name="Google Shape;86;p15"/>
+          <p:cNvPr id="85" name="Google Shape;85;p15"/>
           <p:cNvSpPr txBox="1"/>
           <p:nvPr>
             <p:ph idx="1" type="subTitle"/>
@@ -6521,8 +6537,8 @@
         </p:nvSpPr>
         <p:spPr>
           <a:xfrm>
-            <a:off x="-68447" y="1455149"/>
-            <a:ext cx="4391100" cy="1965000"/>
+            <a:off x="-68450" y="1455150"/>
+            <a:ext cx="4391100" cy="1839000"/>
           </a:xfrm>
           <a:prstGeom prst="rect">
             <a:avLst/>
@@ -6538,7 +6554,7 @@
           </a:bodyPr>
           <a:lstStyle/>
           <a:p>
-            <a:pPr indent="-217793" lvl="0" marL="217793" marR="0" rtl="0" algn="ctr">
+            <a:pPr indent="-205093" lvl="0" marL="217793" marR="0" rtl="0" algn="ctr">
               <a:lnSpc>
                 <a:spcPct val="100000"/>
               </a:lnSpc>
@@ -6551,33 +6567,43 @@
               <a:buClr>
                 <a:schemeClr val="dk2"/>
               </a:buClr>
-              <a:buSzPts val="1800"/>
+              <a:buSzPts val="1600"/>
               <a:buFont typeface="Arial"/>
               <a:buChar char="•"/>
             </a:pPr>
             <a:r>
-              <a:rPr b="1" lang="az-Latn-AZ" sz="1600"/>
+              <a:rPr lang="az-Latn-AZ" sz="1600">
+                <a:latin typeface="Montserrat Medium"/>
+                <a:ea typeface="Montserrat Medium"/>
+                <a:cs typeface="Montserrat Medium"/>
+                <a:sym typeface="Montserrat Medium"/>
+              </a:rPr>
               <a:t>Bu, intuitiv interfeysə malik olub, istifadəçi dostu şəkildə dizayn edilmiş Qrafik İstifadəçi İnterfeysidir (GUI). Bu sistemin istifadəsi minimum təlimlə, hətta texniki bilikləri olmayanlar üçün də son dərəcə asandır</a:t>
             </a:r>
             <a:r>
-              <a:rPr b="1" lang="az-Latn-AZ" sz="1400">
+              <a:rPr lang="az-Latn-AZ" sz="1600">
                 <a:solidFill>
                   <a:srgbClr val="000000"/>
                 </a:solidFill>
-                <a:latin typeface="Times New Roman"/>
-                <a:ea typeface="Times New Roman"/>
-                <a:cs typeface="Times New Roman"/>
-                <a:sym typeface="Times New Roman"/>
+                <a:latin typeface="Montserrat Medium"/>
+                <a:ea typeface="Montserrat Medium"/>
+                <a:cs typeface="Montserrat Medium"/>
+                <a:sym typeface="Montserrat Medium"/>
               </a:rPr>
               <a:t>.</a:t>
             </a:r>
-            <a:endParaRPr b="1" sz="1600"/>
+            <a:endParaRPr sz="1600">
+              <a:latin typeface="Montserrat Medium"/>
+              <a:ea typeface="Montserrat Medium"/>
+              <a:cs typeface="Montserrat Medium"/>
+              <a:sym typeface="Montserrat Medium"/>
+            </a:endParaRPr>
           </a:p>
         </p:txBody>
       </p:sp>
       <p:pic>
         <p:nvPicPr>
-          <p:cNvPr id="87" name="Google Shape;87;p15"/>
+          <p:cNvPr id="86" name="Google Shape;86;p15"/>
           <p:cNvPicPr preferRelativeResize="0"/>
           <p:nvPr/>
         </p:nvPicPr>
@@ -6604,7 +6630,7 @@
       </p:pic>
       <p:sp>
         <p:nvSpPr>
-          <p:cNvPr id="88" name="Google Shape;88;p15"/>
+          <p:cNvPr id="87" name="Google Shape;87;p15"/>
           <p:cNvSpPr txBox="1"/>
           <p:nvPr/>
         </p:nvSpPr>
@@ -6641,16 +6667,29 @@
                 <a:schemeClr val="dk2"/>
               </a:buClr>
               <a:buSzPts val="1800"/>
+              <a:buFont typeface="Montserrat Medium"/>
               <a:buChar char="•"/>
             </a:pPr>
             <a:r>
-              <a:rPr b="1" i="0" lang="az-Latn-AZ" sz="1600" u="none" cap="none" strike="noStrike"/>
+              <a:rPr i="0" lang="az-Latn-AZ" sz="1600" u="none" cap="none" strike="noStrike">
+                <a:solidFill>
+                  <a:srgbClr val="000000"/>
+                </a:solidFill>
+                <a:latin typeface="Montserrat Medium"/>
+                <a:ea typeface="Montserrat Medium"/>
+                <a:cs typeface="Montserrat Medium"/>
+                <a:sym typeface="Montserrat Medium"/>
+              </a:rPr>
               <a:t>İstifadə rahatlığı sayəsində sistem hər yaşda və hər texnoloji səviyyədə olan müəllimlər üçün əlçatan olur. Sadə interfeys dərs prosesini sürətləndirir və müəllimlərə daha çox vaxtı tədrisə ayırmaq imkanı yaradır.</a:t>
             </a:r>
-            <a:endParaRPr b="1" i="0" sz="1600" u="none" cap="none" strike="noStrike">
+            <a:endParaRPr i="0" sz="1600" u="none" cap="none" strike="noStrike">
               <a:solidFill>
                 <a:srgbClr val="000000"/>
               </a:solidFill>
+              <a:latin typeface="Montserrat Medium"/>
+              <a:ea typeface="Montserrat Medium"/>
+              <a:cs typeface="Montserrat Medium"/>
+              <a:sym typeface="Montserrat Medium"/>
             </a:endParaRPr>
           </a:p>
         </p:txBody>
@@ -6668,7 +6707,7 @@
   <p:cSld>
     <p:spTree>
       <p:nvGrpSpPr>
-        <p:cNvPr id="93" name="Shape 93"/>
+        <p:cNvPr id="92" name="Shape 92"/>
         <p:cNvGrpSpPr/>
         <p:nvPr/>
       </p:nvGrpSpPr>
@@ -6682,7 +6721,7 @@
       </p:grpSpPr>
       <p:sp>
         <p:nvSpPr>
-          <p:cNvPr id="94" name="Google Shape;94;p16"/>
+          <p:cNvPr id="93" name="Google Shape;93;p16"/>
           <p:cNvSpPr txBox="1"/>
           <p:nvPr>
             <p:ph type="title"/>
@@ -6690,7 +6729,7 @@
         </p:nvSpPr>
         <p:spPr>
           <a:xfrm>
-            <a:off x="4647000" y="271950"/>
+            <a:off x="4548000" y="292175"/>
             <a:ext cx="4512900" cy="1291200"/>
           </a:xfrm>
           <a:prstGeom prst="rect">
@@ -6721,16 +6760,26 @@
               <a:buNone/>
             </a:pPr>
             <a:r>
-              <a:rPr lang="az-Latn-AZ"/>
+              <a:rPr b="1" lang="az-Latn-AZ">
+                <a:latin typeface="Montserrat"/>
+                <a:ea typeface="Montserrat"/>
+                <a:cs typeface="Montserrat"/>
+                <a:sym typeface="Montserrat"/>
+              </a:rPr>
               <a:t>Sürət!</a:t>
             </a:r>
-            <a:endParaRPr/>
+            <a:endParaRPr b="1">
+              <a:latin typeface="Montserrat"/>
+              <a:ea typeface="Montserrat"/>
+              <a:cs typeface="Montserrat"/>
+              <a:sym typeface="Montserrat"/>
+            </a:endParaRPr>
           </a:p>
         </p:txBody>
       </p:sp>
       <p:sp>
         <p:nvSpPr>
-          <p:cNvPr id="95" name="Google Shape;95;p16"/>
+          <p:cNvPr id="94" name="Google Shape;94;p16"/>
           <p:cNvSpPr txBox="1"/>
           <p:nvPr>
             <p:ph idx="1" type="subTitle"/>
@@ -6738,8 +6787,8 @@
         </p:nvSpPr>
         <p:spPr>
           <a:xfrm>
-            <a:off x="4630962" y="1430413"/>
-            <a:ext cx="4545000" cy="927600"/>
+            <a:off x="4372974" y="1430425"/>
+            <a:ext cx="4803000" cy="927600"/>
           </a:xfrm>
           <a:prstGeom prst="rect">
             <a:avLst/>
@@ -6773,40 +6822,26 @@
               <a:buNone/>
             </a:pPr>
             <a:r>
-              <a:rPr b="0" i="0" lang="az-Latn-AZ" sz="1200" u="none" cap="none" strike="noStrike">
-                <a:solidFill>
-                  <a:schemeClr val="dk2"/>
-                </a:solidFill>
-                <a:latin typeface="Montserrat"/>
-                <a:ea typeface="Montserrat"/>
-                <a:cs typeface="Montserrat"/>
-                <a:sym typeface="Montserrat"/>
+              <a:rPr lang="az-Latn-AZ" sz="1600">
+                <a:latin typeface="Montserrat Medium"/>
+                <a:ea typeface="Montserrat Medium"/>
+                <a:cs typeface="Montserrat Medium"/>
+                <a:sym typeface="Montserrat Medium"/>
               </a:rPr>
-              <a:t>Artıq jurnal yerinə elektron sistemdən istifadə olunur, ona görə də bütün məlumatlar birbaşa m</a:t>
+              <a:t>Ağıllı davamiyyət sistemi hər halda ənənəvi jurnaldan daha sürətli və daha dəqiqdir</a:t>
             </a:r>
-            <a:r>
-              <a:rPr lang="az-Latn-AZ" sz="1200"/>
-              <a:t>əktəb </a:t>
-            </a:r>
-            <a:r>
-              <a:rPr b="0" i="0" lang="az-Latn-AZ" sz="1200" u="none" cap="none" strike="noStrike">
-                <a:solidFill>
-                  <a:schemeClr val="dk2"/>
-                </a:solidFill>
-                <a:latin typeface="Montserrat"/>
-                <a:ea typeface="Montserrat"/>
-                <a:cs typeface="Montserrat"/>
-                <a:sym typeface="Montserrat"/>
-              </a:rPr>
-              <a:t>direktorun kompüterinə gedəcək.</a:t>
-            </a:r>
-            <a:endParaRPr sz="1200"/>
+            <a:endParaRPr sz="1600">
+              <a:latin typeface="Montserrat Medium"/>
+              <a:ea typeface="Montserrat Medium"/>
+              <a:cs typeface="Montserrat Medium"/>
+              <a:sym typeface="Montserrat Medium"/>
+            </a:endParaRPr>
           </a:p>
         </p:txBody>
       </p:sp>
       <p:pic>
         <p:nvPicPr>
-          <p:cNvPr id="96" name="Google Shape;96;p16"/>
+          <p:cNvPr id="95" name="Google Shape;95;p16"/>
           <p:cNvPicPr preferRelativeResize="0"/>
           <p:nvPr/>
         </p:nvPicPr>
@@ -6819,8 +6854,8 @@
         </p:blipFill>
         <p:spPr>
           <a:xfrm>
-            <a:off x="157974" y="431331"/>
-            <a:ext cx="4233170" cy="4280835"/>
+            <a:off x="157975" y="449705"/>
+            <a:ext cx="4214999" cy="4262471"/>
           </a:xfrm>
           <a:prstGeom prst="rect">
             <a:avLst/>
@@ -6833,14 +6868,14 @@
       </p:pic>
       <p:sp>
         <p:nvSpPr>
-          <p:cNvPr id="97" name="Google Shape;97;p16"/>
+          <p:cNvPr id="96" name="Google Shape;96;p16"/>
           <p:cNvSpPr txBox="1"/>
           <p:nvPr/>
         </p:nvSpPr>
         <p:spPr>
           <a:xfrm>
-            <a:off x="5226000" y="2028475"/>
-            <a:ext cx="3354900" cy="954300"/>
+            <a:off x="5127000" y="2140800"/>
+            <a:ext cx="3354900" cy="861900"/>
           </a:xfrm>
           <a:prstGeom prst="rect">
             <a:avLst/>
@@ -6874,18 +6909,18 @@
               <a:buNone/>
             </a:pPr>
             <a:r>
-              <a:rPr b="0" i="0" lang="az-Latn-AZ" sz="5000" u="none" cap="none" strike="noStrike">
+              <a:rPr b="1" i="0" lang="az-Latn-AZ" sz="4400" u="none" cap="none" strike="noStrike">
                 <a:solidFill>
                   <a:schemeClr val="dk1"/>
                 </a:solidFill>
-                <a:latin typeface="Vidaloka"/>
-                <a:ea typeface="Vidaloka"/>
-                <a:cs typeface="Vidaloka"/>
-                <a:sym typeface="Vidaloka"/>
+                <a:latin typeface="Montserrat"/>
+                <a:ea typeface="Montserrat"/>
+                <a:cs typeface="Montserrat"/>
+                <a:sym typeface="Montserrat"/>
               </a:rPr>
               <a:t>TechStack</a:t>
             </a:r>
-            <a:endParaRPr b="0" i="0" sz="5000" u="none" cap="none" strike="noStrike">
+            <a:endParaRPr b="1" i="0" sz="4400" u="none" cap="none" strike="noStrike">
               <a:solidFill>
                 <a:schemeClr val="dk2"/>
               </a:solidFill>
@@ -6899,14 +6934,14 @@
       </p:sp>
       <p:sp>
         <p:nvSpPr>
-          <p:cNvPr id="98" name="Google Shape;98;p16"/>
+          <p:cNvPr id="97" name="Google Shape;97;p16"/>
           <p:cNvSpPr txBox="1"/>
           <p:nvPr/>
         </p:nvSpPr>
         <p:spPr>
           <a:xfrm>
             <a:off x="4647000" y="2982775"/>
-            <a:ext cx="4314900" cy="338700"/>
+            <a:ext cx="4314900" cy="354000"/>
           </a:xfrm>
           <a:prstGeom prst="rect">
             <a:avLst/>
@@ -6940,32 +6975,32 @@
               <a:buNone/>
             </a:pPr>
             <a:r>
-              <a:rPr b="1" i="0" lang="az-Latn-AZ" sz="1000" u="none" cap="none" strike="noStrike">
+              <a:rPr i="0" lang="az-Latn-AZ" sz="1100" u="none" cap="none" strike="noStrike">
                 <a:solidFill>
                   <a:schemeClr val="dk2"/>
                 </a:solidFill>
-                <a:latin typeface="Montserrat"/>
-                <a:ea typeface="Montserrat"/>
-                <a:cs typeface="Montserrat"/>
-                <a:sym typeface="Montserrat"/>
+                <a:latin typeface="Montserrat SemiBold"/>
+                <a:ea typeface="Montserrat SemiBold"/>
+                <a:cs typeface="Montserrat SemiBold"/>
+                <a:sym typeface="Montserrat SemiBold"/>
               </a:rPr>
               <a:t>Proqram üçün əsasən Python dilindən istifadə olunub.</a:t>
             </a:r>
-            <a:endParaRPr b="1" i="0" sz="1000" u="none" cap="none" strike="noStrike">
+            <a:endParaRPr i="0" sz="1100" u="none" cap="none" strike="noStrike">
               <a:solidFill>
                 <a:schemeClr val="dk2"/>
               </a:solidFill>
-              <a:latin typeface="Montserrat"/>
-              <a:ea typeface="Montserrat"/>
-              <a:cs typeface="Montserrat"/>
-              <a:sym typeface="Montserrat"/>
+              <a:latin typeface="Montserrat SemiBold"/>
+              <a:ea typeface="Montserrat SemiBold"/>
+              <a:cs typeface="Montserrat SemiBold"/>
+              <a:sym typeface="Montserrat SemiBold"/>
             </a:endParaRPr>
           </a:p>
         </p:txBody>
       </p:sp>
       <p:sp>
         <p:nvSpPr>
-          <p:cNvPr id="99" name="Google Shape;99;p16"/>
+          <p:cNvPr id="98" name="Google Shape;98;p16"/>
           <p:cNvSpPr txBox="1"/>
           <p:nvPr/>
         </p:nvSpPr>
@@ -7002,29 +7037,29 @@
                 <a:schemeClr val="dk2"/>
               </a:buClr>
               <a:buSzPts val="1000"/>
-              <a:buFont typeface="Montserrat"/>
+              <a:buFont typeface="Montserrat Medium"/>
               <a:buChar char="●"/>
             </a:pPr>
             <a:r>
-              <a:rPr b="1" i="0" lang="az-Latn-AZ" sz="1000" u="none" cap="none" strike="noStrike">
+              <a:rPr i="0" lang="az-Latn-AZ" sz="1000" u="none" cap="none" strike="noStrike">
                 <a:solidFill>
                   <a:schemeClr val="dk2"/>
                 </a:solidFill>
-                <a:latin typeface="Montserrat"/>
-                <a:ea typeface="Montserrat"/>
-                <a:cs typeface="Montserrat"/>
-                <a:sym typeface="Montserrat"/>
+                <a:latin typeface="Montserrat Medium"/>
+                <a:ea typeface="Montserrat Medium"/>
+                <a:cs typeface="Montserrat Medium"/>
+                <a:sym typeface="Montserrat Medium"/>
               </a:rPr>
               <a:t>OpenCV-Python: Kamera və görüntü emalı üçün.</a:t>
             </a:r>
-            <a:endParaRPr b="1" i="0" sz="1000" u="none" cap="none" strike="noStrike">
+            <a:endParaRPr i="0" sz="1000" u="none" cap="none" strike="noStrike">
               <a:solidFill>
                 <a:schemeClr val="dk2"/>
               </a:solidFill>
-              <a:latin typeface="Montserrat"/>
-              <a:ea typeface="Montserrat"/>
-              <a:cs typeface="Montserrat"/>
-              <a:sym typeface="Montserrat"/>
+              <a:latin typeface="Montserrat Medium"/>
+              <a:ea typeface="Montserrat Medium"/>
+              <a:cs typeface="Montserrat Medium"/>
+              <a:sym typeface="Montserrat Medium"/>
             </a:endParaRPr>
           </a:p>
           <a:p>
@@ -7042,29 +7077,29 @@
                 <a:schemeClr val="dk2"/>
               </a:buClr>
               <a:buSzPts val="1000"/>
-              <a:buFont typeface="Montserrat"/>
+              <a:buFont typeface="Montserrat Medium"/>
               <a:buChar char="●"/>
             </a:pPr>
             <a:r>
-              <a:rPr b="1" i="0" lang="az-Latn-AZ" sz="1000" u="none" cap="none" strike="noStrike">
+              <a:rPr i="0" lang="az-Latn-AZ" sz="1000" u="none" cap="none" strike="noStrike">
                 <a:solidFill>
                   <a:schemeClr val="dk2"/>
                 </a:solidFill>
-                <a:latin typeface="Montserrat"/>
-                <a:ea typeface="Montserrat"/>
-                <a:cs typeface="Montserrat"/>
-                <a:sym typeface="Montserrat"/>
+                <a:latin typeface="Montserrat Medium"/>
+                <a:ea typeface="Montserrat Medium"/>
+                <a:cs typeface="Montserrat Medium"/>
+                <a:sym typeface="Montserrat Medium"/>
               </a:rPr>
               <a:t>NumPy: Tanıma prosesi və hesablama əməliyyatları üçün.</a:t>
             </a:r>
-            <a:endParaRPr b="1" i="0" sz="1000" u="none" cap="none" strike="noStrike">
+            <a:endParaRPr i="0" sz="1000" u="none" cap="none" strike="noStrike">
               <a:solidFill>
                 <a:schemeClr val="dk2"/>
               </a:solidFill>
-              <a:latin typeface="Montserrat"/>
-              <a:ea typeface="Montserrat"/>
-              <a:cs typeface="Montserrat"/>
-              <a:sym typeface="Montserrat"/>
+              <a:latin typeface="Montserrat Medium"/>
+              <a:ea typeface="Montserrat Medium"/>
+              <a:cs typeface="Montserrat Medium"/>
+              <a:sym typeface="Montserrat Medium"/>
             </a:endParaRPr>
           </a:p>
           <a:p>
@@ -7082,29 +7117,29 @@
                 <a:schemeClr val="dk2"/>
               </a:buClr>
               <a:buSzPts val="1000"/>
-              <a:buFont typeface="Montserrat"/>
+              <a:buFont typeface="Montserrat Medium"/>
               <a:buChar char="●"/>
             </a:pPr>
             <a:r>
-              <a:rPr b="1" i="0" lang="az-Latn-AZ" sz="1000" u="none" cap="none" strike="noStrike">
+              <a:rPr i="0" lang="az-Latn-AZ" sz="1000" u="none" cap="none" strike="noStrike">
                 <a:solidFill>
                   <a:schemeClr val="dk2"/>
                 </a:solidFill>
-                <a:latin typeface="Montserrat"/>
-                <a:ea typeface="Montserrat"/>
-                <a:cs typeface="Montserrat"/>
-                <a:sym typeface="Montserrat"/>
+                <a:latin typeface="Montserrat Medium"/>
+                <a:ea typeface="Montserrat Medium"/>
+                <a:cs typeface="Montserrat Medium"/>
+                <a:sym typeface="Montserrat Medium"/>
               </a:rPr>
               <a:t>DeepFace: Süni intellekt əsaslı üz tanıma və analiz üçün.</a:t>
             </a:r>
-            <a:endParaRPr b="1" i="0" sz="1000" u="none" cap="none" strike="noStrike">
+            <a:endParaRPr i="0" sz="1000" u="none" cap="none" strike="noStrike">
               <a:solidFill>
                 <a:schemeClr val="dk2"/>
               </a:solidFill>
-              <a:latin typeface="Montserrat"/>
-              <a:ea typeface="Montserrat"/>
-              <a:cs typeface="Montserrat"/>
-              <a:sym typeface="Montserrat"/>
+              <a:latin typeface="Montserrat Medium"/>
+              <a:ea typeface="Montserrat Medium"/>
+              <a:cs typeface="Montserrat Medium"/>
+              <a:sym typeface="Montserrat Medium"/>
             </a:endParaRPr>
           </a:p>
           <a:p>
@@ -7122,29 +7157,29 @@
                 <a:schemeClr val="dk2"/>
               </a:buClr>
               <a:buSzPts val="1000"/>
-              <a:buFont typeface="Montserrat"/>
+              <a:buFont typeface="Montserrat Medium"/>
               <a:buChar char="●"/>
             </a:pPr>
             <a:r>
-              <a:rPr b="1" i="0" lang="az-Latn-AZ" sz="1000" u="none" cap="none" strike="noStrike">
+              <a:rPr i="0" lang="az-Latn-AZ" sz="1000" u="none" cap="none" strike="noStrike">
                 <a:solidFill>
                   <a:schemeClr val="dk2"/>
                 </a:solidFill>
-                <a:latin typeface="Montserrat"/>
-                <a:ea typeface="Montserrat"/>
-                <a:cs typeface="Montserrat"/>
-                <a:sym typeface="Montserrat"/>
+                <a:latin typeface="Montserrat Medium"/>
+                <a:ea typeface="Montserrat Medium"/>
+                <a:cs typeface="Montserrat Medium"/>
+                <a:sym typeface="Montserrat Medium"/>
               </a:rPr>
               <a:t>TensorFlow &amp; Keras: GPU istifadə edərək sürətli dərin öyrənmə əməliyyatları üçün.</a:t>
             </a:r>
-            <a:endParaRPr b="1" i="0" sz="1000" u="none" cap="none" strike="noStrike">
+            <a:endParaRPr i="0" sz="1000" u="none" cap="none" strike="noStrike">
               <a:solidFill>
                 <a:schemeClr val="dk2"/>
               </a:solidFill>
-              <a:latin typeface="Montserrat"/>
-              <a:ea typeface="Montserrat"/>
-              <a:cs typeface="Montserrat"/>
-              <a:sym typeface="Montserrat"/>
+              <a:latin typeface="Montserrat Medium"/>
+              <a:ea typeface="Montserrat Medium"/>
+              <a:cs typeface="Montserrat Medium"/>
+              <a:sym typeface="Montserrat Medium"/>
             </a:endParaRPr>
           </a:p>
           <a:p>
@@ -7162,29 +7197,29 @@
                 <a:schemeClr val="dk2"/>
               </a:buClr>
               <a:buSzPts val="1000"/>
-              <a:buFont typeface="Montserrat"/>
+              <a:buFont typeface="Montserrat Medium"/>
               <a:buChar char="●"/>
             </a:pPr>
             <a:r>
-              <a:rPr b="1" i="0" lang="az-Latn-AZ" sz="1000" u="none" cap="none" strike="noStrike">
+              <a:rPr i="0" lang="az-Latn-AZ" sz="1000" u="none" cap="none" strike="noStrike">
                 <a:solidFill>
                   <a:schemeClr val="dk2"/>
                 </a:solidFill>
-                <a:latin typeface="Montserrat"/>
-                <a:ea typeface="Montserrat"/>
-                <a:cs typeface="Montserrat"/>
-                <a:sym typeface="Montserrat"/>
+                <a:latin typeface="Montserrat Medium"/>
+                <a:ea typeface="Montserrat Medium"/>
+                <a:cs typeface="Montserrat Medium"/>
+                <a:sym typeface="Montserrat Medium"/>
               </a:rPr>
               <a:t>Playsound: Səs fayllarını oxutmaq üçün.</a:t>
             </a:r>
-            <a:endParaRPr b="1" i="0" sz="1000" u="none" cap="none" strike="noStrike">
+            <a:endParaRPr i="0" sz="1000" u="none" cap="none" strike="noStrike">
               <a:solidFill>
                 <a:schemeClr val="dk2"/>
               </a:solidFill>
-              <a:latin typeface="Montserrat"/>
-              <a:ea typeface="Montserrat"/>
-              <a:cs typeface="Montserrat"/>
-              <a:sym typeface="Montserrat"/>
+              <a:latin typeface="Montserrat Medium"/>
+              <a:ea typeface="Montserrat Medium"/>
+              <a:cs typeface="Montserrat Medium"/>
+              <a:sym typeface="Montserrat Medium"/>
             </a:endParaRPr>
           </a:p>
           <a:p>
@@ -7202,29 +7237,29 @@
                 <a:schemeClr val="dk2"/>
               </a:buClr>
               <a:buSzPts val="1000"/>
-              <a:buFont typeface="Montserrat"/>
+              <a:buFont typeface="Montserrat Medium"/>
               <a:buChar char="●"/>
             </a:pPr>
             <a:r>
-              <a:rPr b="1" i="0" lang="az-Latn-AZ" sz="1000" u="none" cap="none" strike="noStrike">
+              <a:rPr i="0" lang="az-Latn-AZ" sz="1000" u="none" cap="none" strike="noStrike">
                 <a:solidFill>
                   <a:schemeClr val="dk2"/>
                 </a:solidFill>
-                <a:latin typeface="Montserrat"/>
-                <a:ea typeface="Montserrat"/>
-                <a:cs typeface="Montserrat"/>
-                <a:sym typeface="Montserrat"/>
+                <a:latin typeface="Montserrat Medium"/>
+                <a:ea typeface="Montserrat Medium"/>
+                <a:cs typeface="Montserrat Medium"/>
+                <a:sym typeface="Montserrat Medium"/>
               </a:rPr>
               <a:t>CustomTkinter: Modern və istifadəsi rahat istifadəçi interfeysi üçün.</a:t>
             </a:r>
-            <a:endParaRPr b="1" i="0" sz="1000" u="none" cap="none" strike="noStrike">
+            <a:endParaRPr i="0" sz="1000" u="none" cap="none" strike="noStrike">
               <a:solidFill>
                 <a:schemeClr val="dk2"/>
               </a:solidFill>
-              <a:latin typeface="Montserrat"/>
-              <a:ea typeface="Montserrat"/>
-              <a:cs typeface="Montserrat"/>
-              <a:sym typeface="Montserrat"/>
+              <a:latin typeface="Montserrat Medium"/>
+              <a:ea typeface="Montserrat Medium"/>
+              <a:cs typeface="Montserrat Medium"/>
+              <a:sym typeface="Montserrat Medium"/>
             </a:endParaRPr>
           </a:p>
         </p:txBody>
@@ -7242,7 +7277,7 @@
   <p:cSld>
     <p:spTree>
       <p:nvGrpSpPr>
-        <p:cNvPr id="104" name="Shape 104"/>
+        <p:cNvPr id="103" name="Shape 103"/>
         <p:cNvGrpSpPr/>
         <p:nvPr/>
       </p:nvGrpSpPr>
@@ -7256,7 +7291,7 @@
       </p:grpSpPr>
       <p:sp>
         <p:nvSpPr>
-          <p:cNvPr id="105" name="Google Shape;105;p17"/>
+          <p:cNvPr id="104" name="Google Shape;104;p17"/>
           <p:cNvSpPr txBox="1"/>
           <p:nvPr>
             <p:ph type="title"/>
@@ -7264,7 +7299,7 @@
         </p:nvSpPr>
         <p:spPr>
           <a:xfrm>
-            <a:off x="-180854" y="295928"/>
+            <a:off x="-53854" y="295928"/>
             <a:ext cx="5835900" cy="1291200"/>
           </a:xfrm>
           <a:prstGeom prst="rect">
@@ -7299,32 +7334,32 @@
               <a:buNone/>
             </a:pPr>
             <a:r>
-              <a:rPr b="0" i="0" lang="az-Latn-AZ" sz="7000" u="none" cap="none" strike="noStrike">
+              <a:rPr b="1" i="0" lang="az-Latn-AZ" sz="6000" u="none" cap="none" strike="noStrike">
                 <a:solidFill>
                   <a:schemeClr val="dk1"/>
                 </a:solidFill>
-                <a:latin typeface="Vidaloka"/>
-                <a:ea typeface="Vidaloka"/>
-                <a:cs typeface="Vidaloka"/>
-                <a:sym typeface="Vidaloka"/>
+                <a:latin typeface="Montserrat"/>
+                <a:ea typeface="Montserrat"/>
+                <a:cs typeface="Montserrat"/>
+                <a:sym typeface="Montserrat"/>
               </a:rPr>
               <a:t>Təhlükəsizlik!</a:t>
             </a:r>
-            <a:endParaRPr b="0" i="0" sz="7000" u="none" cap="none" strike="noStrike">
+            <a:endParaRPr b="1" i="0" sz="6000" u="none" cap="none" strike="noStrike">
               <a:solidFill>
                 <a:schemeClr val="dk1"/>
               </a:solidFill>
-              <a:latin typeface="Vidaloka"/>
-              <a:ea typeface="Vidaloka"/>
-              <a:cs typeface="Vidaloka"/>
-              <a:sym typeface="Vidaloka"/>
+              <a:latin typeface="Montserrat"/>
+              <a:ea typeface="Montserrat"/>
+              <a:cs typeface="Montserrat"/>
+              <a:sym typeface="Montserrat"/>
             </a:endParaRPr>
           </a:p>
         </p:txBody>
       </p:sp>
       <p:pic>
         <p:nvPicPr>
-          <p:cNvPr id="106" name="Google Shape;106;p17"/>
+          <p:cNvPr id="105" name="Google Shape;105;p17"/>
           <p:cNvPicPr preferRelativeResize="0"/>
           <p:nvPr/>
         </p:nvPicPr>
@@ -7337,7 +7372,7 @@
         </p:blipFill>
         <p:spPr>
           <a:xfrm>
-            <a:off x="5728290" y="805068"/>
+            <a:off x="5728190" y="1587118"/>
             <a:ext cx="3400062" cy="2353853"/>
           </a:xfrm>
           <a:prstGeom prst="rect">
@@ -7351,14 +7386,14 @@
       </p:pic>
       <p:sp>
         <p:nvSpPr>
-          <p:cNvPr id="107" name="Google Shape;107;p17"/>
+          <p:cNvPr id="106" name="Google Shape;106;p17"/>
           <p:cNvSpPr txBox="1"/>
           <p:nvPr/>
         </p:nvSpPr>
         <p:spPr>
           <a:xfrm>
-            <a:off x="0" y="1356900"/>
-            <a:ext cx="5728200" cy="3109200"/>
+            <a:off x="0" y="1417525"/>
+            <a:ext cx="5728200" cy="2893800"/>
           </a:xfrm>
           <a:prstGeom prst="rect">
             <a:avLst/>
@@ -7388,24 +7423,29 @@
                 <a:schemeClr val="dk2"/>
               </a:buClr>
               <a:buSzPts val="1400"/>
+              <a:buFont typeface="Montserrat Medium"/>
               <a:buChar char="•"/>
             </a:pPr>
             <a:r>
-              <a:rPr b="1" lang="az-Latn-AZ">
+              <a:rPr i="0" lang="az-Latn-AZ" u="none" cap="none" strike="noStrike">
                 <a:solidFill>
                   <a:schemeClr val="dk2"/>
                 </a:solidFill>
-                <a:latin typeface="Montserrat"/>
-                <a:ea typeface="Montserrat"/>
-                <a:cs typeface="Montserrat"/>
-                <a:sym typeface="Montserrat"/>
+                <a:latin typeface="Montserrat Medium"/>
+                <a:ea typeface="Montserrat Medium"/>
+                <a:cs typeface="Montserrat Medium"/>
+                <a:sym typeface="Montserrat Medium"/>
               </a:rPr>
               <a:t>Sistem məktəbin təhlükəsizlik kameralarına inteqrasiya olunduqda, kameralar vasitəsilə məktəbə daxil olan və məktəbə gəlməyən bütün şagirdləri avtomatik şəkildə tanıyır. Tanıma prosesi süni intellekt əsaslı üz tanıma texnologiyası ilə həyata keçirilir və bu sistem insan səhvinə yol vermədən 100% dəqiqliklə işləyir. Hər günün sonunda sistem bu məlumatları analiz edərək, kimlərin məktəbə gəldiyini, kimlərin gəlmədiyini və gəliş saatlarını qeyd edir. Toplanmış bütün məlumatlar avtomatik şəkildə Excel faylı formatında hazırlanır və məktəb direktorunun kompüterinə ötürülür. Direktor bu faylı açaraq, hər bir şagirdin davamiyyətini rahatlıqla izləyə, gün, həftə və ya ay üzrə hesabatlar əldə edə bilər.</a:t>
             </a:r>
-            <a:endParaRPr b="1" i="0" u="none" cap="none" strike="noStrike">
+            <a:endParaRPr i="0" u="none" cap="none" strike="noStrike">
               <a:solidFill>
                 <a:srgbClr val="000000"/>
               </a:solidFill>
+              <a:latin typeface="Montserrat Medium"/>
+              <a:ea typeface="Montserrat Medium"/>
+              <a:cs typeface="Montserrat Medium"/>
+              <a:sym typeface="Montserrat Medium"/>
             </a:endParaRPr>
           </a:p>
         </p:txBody>
@@ -7423,7 +7463,7 @@
   <p:cSld>
     <p:spTree>
       <p:nvGrpSpPr>
-        <p:cNvPr id="111" name="Shape 111"/>
+        <p:cNvPr id="110" name="Shape 110"/>
         <p:cNvGrpSpPr/>
         <p:nvPr/>
       </p:nvGrpSpPr>
@@ -7437,7 +7477,7 @@
       </p:grpSpPr>
       <p:sp>
         <p:nvSpPr>
-          <p:cNvPr id="112" name="Google Shape;112;p18"/>
+          <p:cNvPr id="111" name="Google Shape;111;p18"/>
           <p:cNvSpPr txBox="1"/>
           <p:nvPr>
             <p:ph type="ctrTitle"/>
@@ -7480,25 +7520,25 @@
               <a:buNone/>
             </a:pPr>
             <a:r>
-              <a:rPr b="0" i="0" lang="az-Latn-AZ" sz="6500" u="none" cap="none" strike="noStrike">
+              <a:rPr b="1" i="0" lang="az-Latn-AZ" sz="6500" u="none" cap="none" strike="noStrike">
                 <a:solidFill>
                   <a:schemeClr val="dk1"/>
                 </a:solidFill>
-                <a:latin typeface="Vidaloka"/>
-                <a:ea typeface="Vidaloka"/>
-                <a:cs typeface="Vidaloka"/>
-                <a:sym typeface="Vidaloka"/>
+                <a:latin typeface="Montserrat"/>
+                <a:ea typeface="Montserrat"/>
+                <a:cs typeface="Montserrat"/>
+                <a:sym typeface="Montserrat"/>
               </a:rPr>
               <a:t>Slaydın sonu</a:t>
             </a:r>
-            <a:endParaRPr b="0" i="0" sz="6500" u="none" cap="none" strike="noStrike">
+            <a:endParaRPr b="1" i="0" sz="6500" u="none" cap="none" strike="noStrike">
               <a:solidFill>
                 <a:schemeClr val="dk1"/>
               </a:solidFill>
-              <a:latin typeface="Vidaloka"/>
-              <a:ea typeface="Vidaloka"/>
-              <a:cs typeface="Vidaloka"/>
-              <a:sym typeface="Vidaloka"/>
+              <a:latin typeface="Montserrat"/>
+              <a:ea typeface="Montserrat"/>
+              <a:cs typeface="Montserrat"/>
+              <a:sym typeface="Montserrat"/>
             </a:endParaRPr>
           </a:p>
           <a:p>
@@ -7518,7 +7558,12 @@
             <a:r>
               <a:t/>
             </a:r>
-            <a:endParaRPr/>
+            <a:endParaRPr b="1">
+              <a:latin typeface="Montserrat"/>
+              <a:ea typeface="Montserrat"/>
+              <a:cs typeface="Montserrat"/>
+              <a:sym typeface="Montserrat"/>
+            </a:endParaRPr>
           </a:p>
         </p:txBody>
       </p:sp>
